--- a/docs/bottleneck-survey-plan.pptx
+++ b/docs/bottleneck-survey-plan.pptx
@@ -2770,7 +2770,7 @@
                           <a:ea typeface="Meiryo UI" pitchFamily="34" charset="-122"/>
                           <a:cs typeface="Meiryo UI" pitchFamily="34" charset="-120"/>
                         </a:rPr>
-                        <a:t>検査規定変更(全数目視→AI全数+統計監査)・長毛処理の発生源対策と公差再設定・記録/点検のリスクベース化。品質実績(クレーム率・Cpk)で裏付け</a:t>
+                        <a:t>検査規定変更(全数目視→AI全数+統計監査)・長毛処理の発生源対策と公差再設定・記録/点検のリスクベース化。目視実力値の測定→並行運転で同等性以上を実証してから切替</a:t>
                       </a:r>
                       <a:endParaRPr lang="en-US" sz="690" dirty="0">
                         <a:latin typeface="Meiryo UI" charset="0"/>
@@ -4295,7 +4295,7 @@
                 <a:ea typeface="Meiryo UI" pitchFamily="34" charset="-122"/>
                 <a:cs typeface="Meiryo UI" pitchFamily="34" charset="-120"/>
               </a:rPr>
-              <a:t>経営論点: 基準への踏み込み度</a:t>
+              <a:t>経営論点とQA合意の4原則</a:t>
             </a:r>
             <a:endParaRPr lang="en-US" sz="1000" dirty="0"/>
           </a:p>
@@ -4337,7 +4337,7 @@
                 <a:ea typeface="Meiryo UI" pitchFamily="34" charset="-122"/>
                 <a:cs typeface="Meiryo UI" pitchFamily="34" charset="-120"/>
               </a:rPr>
-              <a:t>配慮スコープ(工程内基準のみ): 植毛70名台止まり=半減未達
+              <a:t>配慮スコープのみ=植毛70名台止まり/踏み込みスコープ=半減の必要条件 ⇒ 26/10役員協議へ上程
 </a:t>
             </a:r>
             <a:pPr indent="0" marL="0">
@@ -4355,8 +4355,7 @@
                 <a:ea typeface="Meiryo UI" pitchFamily="34" charset="-122"/>
                 <a:cs typeface="Meiryo UI" pitchFamily="34" charset="-120"/>
               </a:rPr>
-              <a:t>踏み込みスコープ(検査方式・規格公差=市場品質関与): 半減の必要条件
-</a:t>
+              <a:t>QA合意の4原則: </a:t>
             </a:r>
             <a:pPr indent="0" marL="0">
               <a:lnSpc>
@@ -4373,7 +4372,7 @@
                 <a:ea typeface="Meiryo UI" pitchFamily="34" charset="-122"/>
                 <a:cs typeface="Meiryo UI" pitchFamily="34" charset="-120"/>
               </a:rPr>
-              <a:t>⇒ 26/10役員協議へ上程(品質ポリシー)。「品質を下げる」でなく「保証方法の現代化」として設計</a:t>
+              <a:t>①目視の実力値を測定し並行運転で同等性以上を実証 ②FMEAでリスクベース評価 ③段階移行+QA単独のロールバック権 ④採否はQAの変更管理で決定(存続も正当な結論)</a:t>
             </a:r>
             <a:endParaRPr lang="en-US" sz="680" dirty="0"/>
           </a:p>
@@ -9970,7 +9969,7 @@
                           <a:ea typeface="Meiryo UI" pitchFamily="34" charset="-122"/>
                           <a:cs typeface="Meiryo UI" pitchFamily="34" charset="-120"/>
                         </a:rPr>
-                        <a:t>WS1 基準・規定の棚卸しと是正(リーダー: 品質保証部門) — ゼロベースの本丸</a:t>
+                        <a:t>WS1 基準・規定の棚卸しと是正(リーダー: 品質保証部門) — ゼロベースの本丸。採否の最終決定権はQA(変更管理プロセス)</a:t>
                       </a:r>
                       <a:endParaRPr lang="en-US" sz="650" dirty="0">
                         <a:latin typeface="Meiryo UI" charset="0"/>
@@ -12947,7 +12946,7 @@
                           <a:ea typeface="Meiryo UI" pitchFamily="34" charset="-122"/>
                           <a:cs typeface="Meiryo UI" pitchFamily="34" charset="-120"/>
                         </a:rPr>
-                        <a:t>品質実績との突合(市場クレーム率・工程内不良率・Cpkと基準の対応)</a:t>
+                        <a:t>品質実績との突合+現行目視検査の実力値測定(見逃し率ベースライン)</a:t>
                       </a:r>
                       <a:endParaRPr lang="en-US" sz="600" dirty="0">
                         <a:latin typeface="Meiryo UI" charset="0"/>
@@ -13012,7 +13011,7 @@
                           <a:ea typeface="Meiryo UI" pitchFamily="34" charset="-122"/>
                           <a:cs typeface="Meiryo UI" pitchFamily="34" charset="-120"/>
                         </a:rPr>
-                        <a:t>基準×実績マトリクス</a:t>
+                        <a:t>基準×実績・目視実力値レポート</a:t>
                       </a:r>
                       <a:endParaRPr lang="en-US" sz="600" dirty="0">
                         <a:latin typeface="Meiryo UI" charset="0"/>
@@ -15047,7 +15046,7 @@
                           <a:ea typeface="Meiryo UI" pitchFamily="34" charset="-122"/>
                           <a:cs typeface="Meiryo UI" pitchFamily="34" charset="-120"/>
                         </a:rPr>
-                        <a:t>改定ドラフト・関係者合意(顧客/監査説明の要否判定含む)(G2)</a:t>
+                        <a:t>改定ドラフト・QA変更管理(Change Control)手続き=採否はQAが決定(G2)</a:t>
                       </a:r>
                       <a:endParaRPr lang="en-US" sz="600" dirty="0">
                         <a:latin typeface="Meiryo UI" charset="0"/>
@@ -15112,7 +15111,7 @@
                           <a:ea typeface="Meiryo UI" pitchFamily="34" charset="-122"/>
                           <a:cs typeface="Meiryo UI" pitchFamily="34" charset="-120"/>
                         </a:rPr>
-                        <a:t>改定案・合意記録</a:t>
+                        <a:t>改定案・変更管理記録</a:t>
                       </a:r>
                       <a:endParaRPr lang="en-US" sz="600" dirty="0">
                         <a:latin typeface="Meiryo UI" charset="0"/>
@@ -15758,7 +15757,7 @@
                           <a:ea typeface="Meiryo UI" pitchFamily="34" charset="-122"/>
                           <a:cs typeface="Meiryo UI" pitchFamily="34" charset="-120"/>
                         </a:rPr>
-                        <a:t>改定第1弾施行+教育。基準の定期棚卸し制度(削除プロセス)恒久化</a:t>
+                        <a:t>改定第1弾施行(ロールバック条件付き)+市場品質モニタリング・定期棚卸し制度化</a:t>
                       </a:r>
                       <a:endParaRPr lang="en-US" sz="600" dirty="0">
                         <a:latin typeface="Meiryo UI" charset="0"/>
@@ -15823,7 +15822,7 @@
                           <a:ea typeface="Meiryo UI" pitchFamily="34" charset="-122"/>
                           <a:cs typeface="Meiryo UI" pitchFamily="34" charset="-120"/>
                         </a:rPr>
-                        <a:t>改定規定・棚卸し規程</a:t>
+                        <a:t>改定規定・ロールバック基準</a:t>
                       </a:r>
                       <a:endParaRPr lang="en-US" sz="600" dirty="0">
                         <a:latin typeface="Meiryo UI" charset="0"/>
@@ -22278,7 +22277,7 @@
                           <a:ea typeface="Meiryo UI" pitchFamily="34" charset="-122"/>
                           <a:cs typeface="Meiryo UI" pitchFamily="34" charset="-120"/>
                         </a:rPr>
-                        <a:t>自動検査装置の技術評価・効果試算(工場検討中を正式統合)</a:t>
+                        <a:t>自動検査装置の技術評価+目視との並行運転で検出力同等性を実証(MSA)</a:t>
                       </a:r>
                       <a:endParaRPr lang="en-US" sz="600" dirty="0">
                         <a:latin typeface="Meiryo UI" charset="0"/>
@@ -22343,7 +22342,7 @@
                           <a:ea typeface="Meiryo UI" pitchFamily="34" charset="-122"/>
                           <a:cs typeface="Meiryo UI" pitchFamily="34" charset="-120"/>
                         </a:rPr>
-                        <a:t>検査自動化評価書</a:t>
+                        <a:t>評価書・同等性実証レポート</a:t>
                       </a:r>
                       <a:endParaRPr lang="en-US" sz="600" dirty="0">
                         <a:latin typeface="Meiryo UI" charset="0"/>
@@ -22408,7 +22407,7 @@
                           <a:ea typeface="Meiryo UI" pitchFamily="34" charset="-122"/>
                           <a:cs typeface="Meiryo UI" pitchFamily="34" charset="-120"/>
                         </a:rPr>
-                        <a:t>工場+生技セ</a:t>
+                        <a:t>工場+生技セ+品質保証</a:t>
                       </a:r>
                       <a:endParaRPr lang="en-US" sz="600" dirty="0">
                         <a:latin typeface="Meiryo UI" charset="0"/>
@@ -22790,6 +22789,9 @@
                       <a:headEnd type="none" w="med" len="med"/>
                       <a:tailEnd type="none" w="med" len="med"/>
                     </a:lnB>
+                    <a:solidFill>
+                      <a:srgbClr val="2C5F2D"/>
+                    </a:solidFill>
                   </a:tcPr>
                 </a:tc>
                 <a:tc>

--- a/docs/bottleneck-survey-plan.pptx
+++ b/docs/bottleneck-survey-plan.pptx
@@ -972,8 +972,8 @@
         </p:nvSpPr>
         <p:spPr>
           <a:xfrm>
-            <a:off x="228600" y="54864"/>
-            <a:ext cx="8686800" cy="402336"/>
+            <a:off x="274320" y="91440"/>
+            <a:ext cx="7772400" cy="411480"/>
           </a:xfrm>
           <a:prstGeom prst="rect">
             <a:avLst/>
@@ -989,7 +989,7 @@
               <a:buNone/>
             </a:pPr>
             <a:r>
-              <a:rPr lang="en-US" sz="1550" b="1" dirty="0">
+              <a:rPr lang="en-US" sz="1900" b="1" dirty="0">
                 <a:solidFill>
                   <a:srgbClr val="1F3D20"/>
                 </a:solidFill>
@@ -997,9 +997,9 @@
                 <a:ea typeface="Meiryo UI" pitchFamily="34" charset="-122"/>
                 <a:cs typeface="Meiryo UI" pitchFamily="34" charset="-120"/>
               </a:rPr>
-              <a:t>生産性ボトルネック調査 推進方法 Ver2.0 — 基準・規定に遡る順序駆動アプローチ</a:t>
+              <a:t>生産性ボトルネック調査 推進方法(全体概要)</a:t>
             </a:r>
-            <a:endParaRPr lang="en-US" sz="1550" dirty="0"/>
+            <a:endParaRPr lang="en-US" sz="1900" dirty="0"/>
           </a:p>
         </p:txBody>
       </p:sp>
@@ -1011,8 +1011,8 @@
         </p:nvSpPr>
         <p:spPr>
           <a:xfrm>
-            <a:off x="9006840" y="54864"/>
-            <a:ext cx="2953512" cy="402336"/>
+            <a:off x="8138160" y="91440"/>
+            <a:ext cx="3776472" cy="411480"/>
           </a:xfrm>
           <a:prstGeom prst="rect">
             <a:avLst/>
@@ -1028,7 +1028,7 @@
               <a:buNone/>
             </a:pPr>
             <a:r>
-              <a:rPr lang="en-US" sz="650" dirty="0">
+              <a:rPr lang="en-US" sz="800" dirty="0">
                 <a:solidFill>
                   <a:srgbClr val="595959"/>
                 </a:solidFill>
@@ -1036,9 +1036,9 @@
                 <a:ea typeface="Meiryo UI" pitchFamily="34" charset="-122"/>
                 <a:cs typeface="Meiryo UI" pitchFamily="34" charset="-120"/>
               </a:rPr>
-              <a:t>対象: 明石工場 オーラルヘルスケア(植毛/ハブラシ包装/ハミガキ包装)｜2026年8月｜人事PJT(規定→業務→システム)の方法論を生産へ移植</a:t>
+              <a:t>対象: 明石工場 オーラルヘルスケア(ハブラシ植毛ライン)｜2026年8月</a:t>
             </a:r>
-            <a:endParaRPr lang="en-US" sz="650" dirty="0"/>
+            <a:endParaRPr lang="en-US" sz="800" dirty="0"/>
           </a:p>
         </p:txBody>
       </p:sp>
@@ -1050,20 +1050,20 @@
         </p:nvSpPr>
         <p:spPr>
           <a:xfrm>
-            <a:off x="228600" y="512064"/>
-            <a:ext cx="11731752" cy="694944"/>
+            <a:off x="274320" y="621792"/>
+            <a:ext cx="3657600" cy="914400"/>
           </a:xfrm>
           <a:prstGeom prst="roundRect">
             <a:avLst>
-              <a:gd name="adj" fmla="val 6579"/>
+              <a:gd name="adj" fmla="val 6000"/>
             </a:avLst>
           </a:prstGeom>
           <a:solidFill>
-            <a:srgbClr val="2C5F2D"/>
+            <a:srgbClr val="F7F7F7"/>
           </a:solidFill>
           <a:ln w="12700">
             <a:solidFill>
-              <a:srgbClr val="2C5F2D"/>
+              <a:srgbClr val="D9D9D9"/>
             </a:solidFill>
             <a:prstDash val="solid"/>
           </a:ln>
@@ -1077,481 +1077,8 @@
         </p:nvSpPr>
         <p:spPr>
           <a:xfrm>
-            <a:off x="347472" y="566928"/>
-            <a:ext cx="1371600" cy="384048"/>
-          </a:xfrm>
-          <a:prstGeom prst="rect">
-            <a:avLst/>
-          </a:prstGeom>
-          <a:noFill/>
-          <a:ln/>
-        </p:spPr>
-        <p:txBody>
-          <a:bodyPr wrap="square" lIns="0" tIns="0" rIns="0" bIns="0" rtlCol="0" anchor="ctr"/>
-          <a:lstStyle/>
-          <a:p>
-            <a:pPr indent="0" marL="0">
-              <a:lnSpc>
-                <a:spcPct val="95000"/>
-              </a:lnSpc>
-              <a:buNone/>
-            </a:pPr>
-            <a:r>
-              <a:rPr lang="en-US" sz="950" b="1" dirty="0">
-                <a:solidFill>
-                  <a:srgbClr val="FFFFFF"/>
-                </a:solidFill>
-                <a:latin typeface="Meiryo UI" pitchFamily="34" charset="0"/>
-                <a:ea typeface="Meiryo UI" pitchFamily="34" charset="-122"/>
-                <a:cs typeface="Meiryo UI" pitchFamily="34" charset="-120"/>
-              </a:rPr>
-              <a:t>統括する論理</a:t>
-            </a:r>
-            <a:endParaRPr lang="en-US" sz="950" dirty="0"/>
-          </a:p>
-          <a:p>
-            <a:pPr indent="0" marL="0">
-              <a:lnSpc>
-                <a:spcPct val="95000"/>
-              </a:lnSpc>
-              <a:buNone/>
-            </a:pPr>
-            <a:r>
-              <a:rPr lang="en-US" sz="950" b="1" dirty="0">
-                <a:solidFill>
-                  <a:srgbClr val="FFFFFF"/>
-                </a:solidFill>
-                <a:latin typeface="Meiryo UI" pitchFamily="34" charset="0"/>
-                <a:ea typeface="Meiryo UI" pitchFamily="34" charset="-122"/>
-                <a:cs typeface="Meiryo UI" pitchFamily="34" charset="-120"/>
-              </a:rPr>
-              <a:t>(順序が全て)</a:t>
-            </a:r>
-            <a:endParaRPr lang="en-US" sz="950" dirty="0"/>
-          </a:p>
-        </p:txBody>
-      </p:sp>
-      <p:sp>
-        <p:nvSpPr>
-          <p:cNvPr id="6" name="Shape 4"/>
-          <p:cNvSpPr/>
-          <p:nvPr/>
-        </p:nvSpPr>
-        <p:spPr>
-          <a:xfrm>
-            <a:off x="1828800" y="576072"/>
-            <a:ext cx="3108960" cy="365760"/>
-          </a:xfrm>
-          <a:prstGeom prst="roundRect">
-            <a:avLst>
-              <a:gd name="adj" fmla="val 12500"/>
-            </a:avLst>
-          </a:prstGeom>
-          <a:solidFill>
-            <a:srgbClr val="FFFFFF"/>
-          </a:solidFill>
-          <a:ln w="12700">
-            <a:solidFill>
-              <a:srgbClr val="FFFFFF"/>
-            </a:solidFill>
-            <a:prstDash val="solid"/>
-          </a:ln>
-        </p:spPr>
-      </p:sp>
-      <p:sp>
-        <p:nvSpPr>
-          <p:cNvPr id="7" name="Text 5"/>
-          <p:cNvSpPr/>
-          <p:nvPr/>
-        </p:nvSpPr>
-        <p:spPr>
-          <a:xfrm>
-            <a:off x="1883664" y="576072"/>
-            <a:ext cx="2999232" cy="365760"/>
-          </a:xfrm>
-          <a:prstGeom prst="rect">
-            <a:avLst/>
-          </a:prstGeom>
-          <a:noFill/>
-          <a:ln/>
-        </p:spPr>
-        <p:txBody>
-          <a:bodyPr wrap="square" lIns="0" tIns="0" rIns="0" bIns="0" rtlCol="0" anchor="ctr"/>
-          <a:lstStyle/>
-          <a:p>
-            <a:pPr algn="ctr" indent="0" marL="0">
-              <a:lnSpc>
-                <a:spcPct val="95000"/>
-              </a:lnSpc>
-              <a:buNone/>
-            </a:pPr>
-            <a:r>
-              <a:rPr lang="en-US" sz="780" b="1" dirty="0">
-                <a:solidFill>
-                  <a:srgbClr val="1F3D20"/>
-                </a:solidFill>
-                <a:latin typeface="Meiryo UI" pitchFamily="34" charset="0"/>
-                <a:ea typeface="Meiryo UI" pitchFamily="34" charset="-122"/>
-                <a:cs typeface="Meiryo UI" pitchFamily="34" charset="-120"/>
-              </a:rPr>
-              <a:t>① 基準・規定を是正する</a:t>
-            </a:r>
-            <a:endParaRPr lang="en-US" sz="780" dirty="0"/>
-          </a:p>
-          <a:p>
-            <a:pPr algn="ctr" indent="0" marL="0">
-              <a:lnSpc>
-                <a:spcPct val="95000"/>
-              </a:lnSpc>
-              <a:buNone/>
-            </a:pPr>
-            <a:r>
-              <a:rPr lang="en-US" sz="780" b="1" dirty="0">
-                <a:solidFill>
-                  <a:srgbClr val="1F3D20"/>
-                </a:solidFill>
-                <a:latin typeface="Meiryo UI" pitchFamily="34" charset="0"/>
-                <a:ea typeface="Meiryo UI" pitchFamily="34" charset="-122"/>
-                <a:cs typeface="Meiryo UI" pitchFamily="34" charset="-120"/>
-              </a:rPr>
-              <a:t>＝ 作業を「消す」</a:t>
-            </a:r>
-            <a:endParaRPr lang="en-US" sz="780" dirty="0"/>
-          </a:p>
-        </p:txBody>
-      </p:sp>
-      <p:sp>
-        <p:nvSpPr>
-          <p:cNvPr id="8" name="Text 6"/>
-          <p:cNvSpPr/>
-          <p:nvPr/>
-        </p:nvSpPr>
-        <p:spPr>
-          <a:xfrm>
-            <a:off x="4956048" y="576072"/>
-            <a:ext cx="201168" cy="365760"/>
-          </a:xfrm>
-          <a:prstGeom prst="rect">
-            <a:avLst/>
-          </a:prstGeom>
-          <a:noFill/>
-          <a:ln/>
-        </p:spPr>
-        <p:txBody>
-          <a:bodyPr wrap="square" lIns="0" tIns="0" rIns="0" bIns="0" rtlCol="0" anchor="ctr"/>
-          <a:lstStyle/>
-          <a:p>
-            <a:pPr algn="ctr" indent="0" marL="0">
-              <a:buNone/>
-            </a:pPr>
-            <a:r>
-              <a:rPr lang="en-US" sz="1000" b="1" dirty="0">
-                <a:solidFill>
-                  <a:srgbClr val="FFFFFF"/>
-                </a:solidFill>
-                <a:latin typeface="Meiryo UI" pitchFamily="34" charset="0"/>
-                <a:ea typeface="Meiryo UI" pitchFamily="34" charset="-122"/>
-                <a:cs typeface="Meiryo UI" pitchFamily="34" charset="-120"/>
-              </a:rPr>
-              <a:t>▶</a:t>
-            </a:r>
-            <a:endParaRPr lang="en-US" sz="1000" dirty="0"/>
-          </a:p>
-        </p:txBody>
-      </p:sp>
-      <p:sp>
-        <p:nvSpPr>
-          <p:cNvPr id="9" name="Shape 7"/>
-          <p:cNvSpPr/>
-          <p:nvPr/>
-        </p:nvSpPr>
-        <p:spPr>
-          <a:xfrm>
-            <a:off x="5166360" y="576072"/>
-            <a:ext cx="3108960" cy="365760"/>
-          </a:xfrm>
-          <a:prstGeom prst="roundRect">
-            <a:avLst>
-              <a:gd name="adj" fmla="val 12500"/>
-            </a:avLst>
-          </a:prstGeom>
-          <a:solidFill>
-            <a:srgbClr val="FFFFFF"/>
-          </a:solidFill>
-          <a:ln w="12700">
-            <a:solidFill>
-              <a:srgbClr val="FFFFFF"/>
-            </a:solidFill>
-            <a:prstDash val="solid"/>
-          </a:ln>
-        </p:spPr>
-      </p:sp>
-      <p:sp>
-        <p:nvSpPr>
-          <p:cNvPr id="10" name="Text 8"/>
-          <p:cNvSpPr/>
-          <p:nvPr/>
-        </p:nvSpPr>
-        <p:spPr>
-          <a:xfrm>
-            <a:off x="5221224" y="576072"/>
-            <a:ext cx="2999232" cy="365760"/>
-          </a:xfrm>
-          <a:prstGeom prst="rect">
-            <a:avLst/>
-          </a:prstGeom>
-          <a:noFill/>
-          <a:ln/>
-        </p:spPr>
-        <p:txBody>
-          <a:bodyPr wrap="square" lIns="0" tIns="0" rIns="0" bIns="0" rtlCol="0" anchor="ctr"/>
-          <a:lstStyle/>
-          <a:p>
-            <a:pPr algn="ctr" indent="0" marL="0">
-              <a:lnSpc>
-                <a:spcPct val="95000"/>
-              </a:lnSpc>
-              <a:buNone/>
-            </a:pPr>
-            <a:r>
-              <a:rPr lang="en-US" sz="780" b="1" dirty="0">
-                <a:solidFill>
-                  <a:srgbClr val="1F3D20"/>
-                </a:solidFill>
-                <a:latin typeface="Meiryo UI" pitchFamily="34" charset="0"/>
-                <a:ea typeface="Meiryo UI" pitchFamily="34" charset="-122"/>
-                <a:cs typeface="Meiryo UI" pitchFamily="34" charset="-120"/>
-              </a:rPr>
-              <a:t>② 業務プロセスを再設計する</a:t>
-            </a:r>
-            <a:endParaRPr lang="en-US" sz="780" dirty="0"/>
-          </a:p>
-          <a:p>
-            <a:pPr algn="ctr" indent="0" marL="0">
-              <a:lnSpc>
-                <a:spcPct val="95000"/>
-              </a:lnSpc>
-              <a:buNone/>
-            </a:pPr>
-            <a:r>
-              <a:rPr lang="en-US" sz="780" b="1" dirty="0">
-                <a:solidFill>
-                  <a:srgbClr val="1F3D20"/>
-                </a:solidFill>
-                <a:latin typeface="Meiryo UI" pitchFamily="34" charset="0"/>
-                <a:ea typeface="Meiryo UI" pitchFamily="34" charset="-122"/>
-                <a:cs typeface="Meiryo UI" pitchFamily="34" charset="-120"/>
-              </a:rPr>
-              <a:t>＝ 作業を「減らす」</a:t>
-            </a:r>
-            <a:endParaRPr lang="en-US" sz="780" dirty="0"/>
-          </a:p>
-        </p:txBody>
-      </p:sp>
-      <p:sp>
-        <p:nvSpPr>
-          <p:cNvPr id="11" name="Text 9"/>
-          <p:cNvSpPr/>
-          <p:nvPr/>
-        </p:nvSpPr>
-        <p:spPr>
-          <a:xfrm>
-            <a:off x="8293608" y="576072"/>
-            <a:ext cx="201168" cy="365760"/>
-          </a:xfrm>
-          <a:prstGeom prst="rect">
-            <a:avLst/>
-          </a:prstGeom>
-          <a:noFill/>
-          <a:ln/>
-        </p:spPr>
-        <p:txBody>
-          <a:bodyPr wrap="square" lIns="0" tIns="0" rIns="0" bIns="0" rtlCol="0" anchor="ctr"/>
-          <a:lstStyle/>
-          <a:p>
-            <a:pPr algn="ctr" indent="0" marL="0">
-              <a:buNone/>
-            </a:pPr>
-            <a:r>
-              <a:rPr lang="en-US" sz="1000" b="1" dirty="0">
-                <a:solidFill>
-                  <a:srgbClr val="FFFFFF"/>
-                </a:solidFill>
-                <a:latin typeface="Meiryo UI" pitchFamily="34" charset="0"/>
-                <a:ea typeface="Meiryo UI" pitchFamily="34" charset="-122"/>
-                <a:cs typeface="Meiryo UI" pitchFamily="34" charset="-120"/>
-              </a:rPr>
-              <a:t>▶</a:t>
-            </a:r>
-            <a:endParaRPr lang="en-US" sz="1000" dirty="0"/>
-          </a:p>
-        </p:txBody>
-      </p:sp>
-      <p:sp>
-        <p:nvSpPr>
-          <p:cNvPr id="12" name="Shape 10"/>
-          <p:cNvSpPr/>
-          <p:nvPr/>
-        </p:nvSpPr>
-        <p:spPr>
-          <a:xfrm>
-            <a:off x="8503920" y="576072"/>
-            <a:ext cx="3108960" cy="365760"/>
-          </a:xfrm>
-          <a:prstGeom prst="roundRect">
-            <a:avLst>
-              <a:gd name="adj" fmla="val 12500"/>
-            </a:avLst>
-          </a:prstGeom>
-          <a:solidFill>
-            <a:srgbClr val="FFFFFF"/>
-          </a:solidFill>
-          <a:ln w="12700">
-            <a:solidFill>
-              <a:srgbClr val="FFFFFF"/>
-            </a:solidFill>
-            <a:prstDash val="solid"/>
-          </a:ln>
-        </p:spPr>
-      </p:sp>
-      <p:sp>
-        <p:nvSpPr>
-          <p:cNvPr id="13" name="Text 11"/>
-          <p:cNvSpPr/>
-          <p:nvPr/>
-        </p:nvSpPr>
-        <p:spPr>
-          <a:xfrm>
-            <a:off x="8558784" y="576072"/>
-            <a:ext cx="2999232" cy="365760"/>
-          </a:xfrm>
-          <a:prstGeom prst="rect">
-            <a:avLst/>
-          </a:prstGeom>
-          <a:noFill/>
-          <a:ln/>
-        </p:spPr>
-        <p:txBody>
-          <a:bodyPr wrap="square" lIns="0" tIns="0" rIns="0" bIns="0" rtlCol="0" anchor="ctr"/>
-          <a:lstStyle/>
-          <a:p>
-            <a:pPr algn="ctr" indent="0" marL="0">
-              <a:lnSpc>
-                <a:spcPct val="95000"/>
-              </a:lnSpc>
-              <a:buNone/>
-            </a:pPr>
-            <a:r>
-              <a:rPr lang="en-US" sz="780" b="1" dirty="0">
-                <a:solidFill>
-                  <a:srgbClr val="1F3D20"/>
-                </a:solidFill>
-                <a:latin typeface="Meiryo UI" pitchFamily="34" charset="0"/>
-                <a:ea typeface="Meiryo UI" pitchFamily="34" charset="-122"/>
-                <a:cs typeface="Meiryo UI" pitchFamily="34" charset="-120"/>
-              </a:rPr>
-              <a:t>③ 残る作業のみ自動化する</a:t>
-            </a:r>
-            <a:endParaRPr lang="en-US" sz="780" dirty="0"/>
-          </a:p>
-          <a:p>
-            <a:pPr algn="ctr" indent="0" marL="0">
-              <a:lnSpc>
-                <a:spcPct val="95000"/>
-              </a:lnSpc>
-              <a:buNone/>
-            </a:pPr>
-            <a:r>
-              <a:rPr lang="en-US" sz="780" b="1" dirty="0">
-                <a:solidFill>
-                  <a:srgbClr val="1F3D20"/>
-                </a:solidFill>
-                <a:latin typeface="Meiryo UI" pitchFamily="34" charset="0"/>
-                <a:ea typeface="Meiryo UI" pitchFamily="34" charset="-122"/>
-                <a:cs typeface="Meiryo UI" pitchFamily="34" charset="-120"/>
-              </a:rPr>
-              <a:t>＝「置き換える」(HowとしてのフィジカルAI)</a:t>
-            </a:r>
-            <a:endParaRPr lang="en-US" sz="780" dirty="0"/>
-          </a:p>
-        </p:txBody>
-      </p:sp>
-      <p:sp>
-        <p:nvSpPr>
-          <p:cNvPr id="14" name="Text 12"/>
-          <p:cNvSpPr/>
-          <p:nvPr/>
-        </p:nvSpPr>
-        <p:spPr>
-          <a:xfrm>
-            <a:off x="347472" y="969264"/>
-            <a:ext cx="11521440" cy="219456"/>
-          </a:xfrm>
-          <a:prstGeom prst="rect">
-            <a:avLst/>
-          </a:prstGeom>
-          <a:noFill/>
-          <a:ln/>
-        </p:spPr>
-        <p:txBody>
-          <a:bodyPr wrap="square" lIns="0" tIns="0" rIns="0" bIns="0" rtlCol="0" anchor="ctr"/>
-          <a:lstStyle/>
-          <a:p>
-            <a:pPr indent="0" marL="0">
-              <a:buNone/>
-            </a:pPr>
-            <a:r>
-              <a:rPr lang="en-US" sz="730" dirty="0">
-                <a:solidFill>
-                  <a:srgbClr val="FFFFFF"/>
-                </a:solidFill>
-                <a:latin typeface="Meiryo UI" pitchFamily="34" charset="0"/>
-                <a:ea typeface="Meiryo UI" pitchFamily="34" charset="-122"/>
-                <a:cs typeface="Meiryo UI" pitchFamily="34" charset="-120"/>
-              </a:rPr>
-              <a:t>工場の要員数＝基準・規定が要求する作業の総和 —「デジタル以前に業務量自体を見直す」。Howから入れば人事PJT「スリム化前のアウトソーシングで工数増大」と同じ失敗 ⇒ フィジカルAI要件凍結は台帳完成後(26/12)のゲート制</a:t>
-            </a:r>
-            <a:endParaRPr lang="en-US" sz="730" dirty="0"/>
-          </a:p>
-        </p:txBody>
-      </p:sp>
-      <p:sp>
-        <p:nvSpPr>
-          <p:cNvPr id="15" name="Shape 13"/>
-          <p:cNvSpPr/>
-          <p:nvPr/>
-        </p:nvSpPr>
-        <p:spPr>
-          <a:xfrm>
-            <a:off x="228600" y="1316736"/>
-            <a:ext cx="2843784" cy="1335024"/>
-          </a:xfrm>
-          <a:prstGeom prst="roundRect">
-            <a:avLst>
-              <a:gd name="adj" fmla="val 3425"/>
-            </a:avLst>
-          </a:prstGeom>
-          <a:solidFill>
-            <a:srgbClr val="F3F8F1"/>
-          </a:solidFill>
-          <a:ln w="9525">
-            <a:solidFill>
-              <a:srgbClr val="C9DCC4"/>
-            </a:solidFill>
-            <a:prstDash val="solid"/>
-          </a:ln>
-        </p:spPr>
-      </p:sp>
-      <p:sp>
-        <p:nvSpPr>
-          <p:cNvPr id="16" name="Text 14"/>
-          <p:cNvSpPr/>
-          <p:nvPr/>
-        </p:nvSpPr>
-        <p:spPr>
-          <a:xfrm>
-            <a:off x="320040" y="1353312"/>
-            <a:ext cx="2660904" cy="201168"/>
+            <a:off x="411480" y="694944"/>
+            <a:ext cx="3383280" cy="201168"/>
           </a:xfrm>
           <a:prstGeom prst="rect">
             <a:avLst/>
@@ -1569,13 +1096,13 @@
             <a:r>
               <a:rPr lang="en-US" sz="1000" b="1" dirty="0">
                 <a:solidFill>
-                  <a:srgbClr val="1F3D20"/>
+                  <a:srgbClr val="595959"/>
                 </a:solidFill>
                 <a:latin typeface="Meiryo UI" pitchFamily="34" charset="0"/>
                 <a:ea typeface="Meiryo UI" pitchFamily="34" charset="-122"/>
                 <a:cs typeface="Meiryo UI" pitchFamily="34" charset="-120"/>
               </a:rPr>
-              <a:t>To-Be(2030・3レイヤー)</a:t>
+              <a:t>現状</a:t>
             </a:r>
             <a:endParaRPr lang="en-US" sz="1000" dirty="0"/>
           </a:p>
@@ -1583,14 +1110,14 @@
       </p:sp>
       <p:sp>
         <p:nvSpPr>
-          <p:cNvPr id="17" name="Text 15"/>
+          <p:cNvPr id="6" name="Text 4"/>
           <p:cNvSpPr/>
           <p:nvPr/>
         </p:nvSpPr>
         <p:spPr>
           <a:xfrm>
-            <a:off x="320040" y="1572768"/>
-            <a:ext cx="2660904" cy="1024128"/>
+            <a:off x="411480" y="896112"/>
+            <a:ext cx="3383280" cy="566928"/>
           </a:xfrm>
           <a:prstGeom prst="rect">
             <a:avLst/>
@@ -1604,12 +1131,12 @@
           <a:p>
             <a:pPr indent="0" marL="0">
               <a:lnSpc>
-                <a:spcPct val="100000"/>
+                <a:spcPct val="105000"/>
               </a:lnSpc>
               <a:buNone/>
             </a:pPr>
             <a:r>
-              <a:rPr lang="en-US" sz="710" b="1" dirty="0">
+              <a:rPr lang="en-US" sz="1500" b="1" dirty="0">
                 <a:solidFill>
                   <a:srgbClr val="2B2B2B"/>
                 </a:solidFill>
@@ -1617,16 +1144,17 @@
                 <a:ea typeface="Meiryo UI" pitchFamily="34" charset="-122"/>
                 <a:cs typeface="Meiryo UI" pitchFamily="34" charset="-120"/>
               </a:rPr>
-              <a:t>L1 基準: </a:t>
+              <a:t>植毛ライン 115名
+</a:t>
             </a:r>
             <a:pPr indent="0" marL="0">
               <a:lnSpc>
-                <a:spcPct val="100000"/>
+                <a:spcPct val="105000"/>
               </a:lnSpc>
               <a:buNone/>
             </a:pPr>
             <a:r>
-              <a:rPr lang="en-US" sz="710" dirty="0">
+              <a:rPr lang="en-US" sz="800" dirty="0">
                 <a:solidFill>
                   <a:srgbClr val="2B2B2B"/>
                 </a:solidFill>
@@ -1634,297 +1162,32 @@
                 <a:ea typeface="Meiryo UI" pitchFamily="34" charset="-122"/>
                 <a:cs typeface="Meiryo UI" pitchFamily="34" charset="-120"/>
               </a:rPr>
-              <a:t>全基準を要求根拠で棚卸し済み。自動検査+統計的管理が規定のデフォルト
-</a:t>
+              <a:t>現行計画(フィジカルAI導入のみ)では100名までしか減らない</a:t>
             </a:r>
-            <a:pPr indent="0" marL="0">
-              <a:lnSpc>
-                <a:spcPct val="100000"/>
-              </a:lnSpc>
-              <a:buNone/>
-            </a:pPr>
-            <a:r>
-              <a:rPr lang="en-US" sz="710" b="1" dirty="0">
-                <a:solidFill>
-                  <a:srgbClr val="2B2B2B"/>
-                </a:solidFill>
-                <a:latin typeface="Meiryo UI" pitchFamily="34" charset="0"/>
-                <a:ea typeface="Meiryo UI" pitchFamily="34" charset="-122"/>
-                <a:cs typeface="Meiryo UI" pitchFamily="34" charset="-120"/>
-              </a:rPr>
-              <a:t>L2 プロセス: </a:t>
-            </a:r>
-            <a:pPr indent="0" marL="0">
-              <a:lnSpc>
-                <a:spcPct val="100000"/>
-              </a:lnSpc>
-              <a:buNone/>
-            </a:pPr>
-            <a:r>
-              <a:rPr lang="en-US" sz="710" dirty="0">
-                <a:solidFill>
-                  <a:srgbClr val="2B2B2B"/>
-                </a:solidFill>
-                <a:latin typeface="Meiryo UI" pitchFamily="34" charset="0"/>
-                <a:ea typeface="Meiryo UI" pitchFamily="34" charset="-122"/>
-                <a:cs typeface="Meiryo UI" pitchFamily="34" charset="-120"/>
-              </a:rPr>
-              <a:t>改定後基準で再設計。人は異常対応と改善に限定
-</a:t>
-            </a:r>
-            <a:pPr indent="0" marL="0">
-              <a:lnSpc>
-                <a:spcPct val="100000"/>
-              </a:lnSpc>
-              <a:buNone/>
-            </a:pPr>
-            <a:r>
-              <a:rPr lang="en-US" sz="710" b="1" dirty="0">
-                <a:solidFill>
-                  <a:srgbClr val="2B2B2B"/>
-                </a:solidFill>
-                <a:latin typeface="Meiryo UI" pitchFamily="34" charset="0"/>
-                <a:ea typeface="Meiryo UI" pitchFamily="34" charset="-122"/>
-                <a:cs typeface="Meiryo UI" pitchFamily="34" charset="-120"/>
-              </a:rPr>
-              <a:t>L3 実行: </a:t>
-            </a:r>
-            <a:pPr indent="0" marL="0">
-              <a:lnSpc>
-                <a:spcPct val="100000"/>
-              </a:lnSpc>
-              <a:buNone/>
-            </a:pPr>
-            <a:r>
-              <a:rPr lang="en-US" sz="710" dirty="0">
-                <a:solidFill>
-                  <a:srgbClr val="2B2B2B"/>
-                </a:solidFill>
-                <a:latin typeface="Meiryo UI" pitchFamily="34" charset="0"/>
-                <a:ea typeface="Meiryo UI" pitchFamily="34" charset="-122"/>
-                <a:cs typeface="Meiryo UI" pitchFamily="34" charset="-120"/>
-              </a:rPr>
-              <a:t>植毛57名(半減)・工場264名(▲53名)・KGI一人当たり生産金額+20%</a:t>
-            </a:r>
-            <a:endParaRPr lang="en-US" sz="710" dirty="0"/>
+            <a:endParaRPr lang="en-US" sz="1500" dirty="0"/>
           </a:p>
         </p:txBody>
       </p:sp>
       <p:sp>
         <p:nvSpPr>
-          <p:cNvPr id="18" name="Shape 16"/>
+          <p:cNvPr id="7" name="Shape 5"/>
           <p:cNvSpPr/>
           <p:nvPr/>
         </p:nvSpPr>
         <p:spPr>
           <a:xfrm>
-            <a:off x="3168396" y="1316736"/>
-            <a:ext cx="2843784" cy="1335024"/>
+            <a:off x="4114800" y="621792"/>
+            <a:ext cx="3931920" cy="914400"/>
           </a:xfrm>
           <a:prstGeom prst="roundRect">
             <a:avLst>
-              <a:gd name="adj" fmla="val 3425"/>
-            </a:avLst>
-          </a:prstGeom>
-          <a:solidFill>
-            <a:srgbClr val="F7F7F7"/>
-          </a:solidFill>
-          <a:ln w="9525">
-            <a:solidFill>
-              <a:srgbClr val="D9D9D9"/>
-            </a:solidFill>
-            <a:prstDash val="solid"/>
-          </a:ln>
-        </p:spPr>
-      </p:sp>
-      <p:sp>
-        <p:nvSpPr>
-          <p:cNvPr id="19" name="Text 17"/>
-          <p:cNvSpPr/>
-          <p:nvPr/>
-        </p:nvSpPr>
-        <p:spPr>
-          <a:xfrm>
-            <a:off x="3259836" y="1353312"/>
-            <a:ext cx="2660904" cy="201168"/>
-          </a:xfrm>
-          <a:prstGeom prst="rect">
-            <a:avLst/>
-          </a:prstGeom>
-          <a:noFill/>
-          <a:ln/>
-        </p:spPr>
-        <p:txBody>
-          <a:bodyPr wrap="square" lIns="0" tIns="0" rIns="0" bIns="0" rtlCol="0" anchor="ctr"/>
-          <a:lstStyle/>
-          <a:p>
-            <a:pPr indent="0" marL="0">
-              <a:buNone/>
-            </a:pPr>
-            <a:r>
-              <a:rPr lang="en-US" sz="1000" b="1" dirty="0">
-                <a:solidFill>
-                  <a:srgbClr val="2B2B2B"/>
-                </a:solidFill>
-                <a:latin typeface="Meiryo UI" pitchFamily="34" charset="0"/>
-                <a:ea typeface="Meiryo UI" pitchFamily="34" charset="-122"/>
-                <a:cs typeface="Meiryo UI" pitchFamily="34" charset="-120"/>
-              </a:rPr>
-              <a:t>As-Is(現状)</a:t>
-            </a:r>
-            <a:endParaRPr lang="en-US" sz="1000" dirty="0"/>
-          </a:p>
-        </p:txBody>
-      </p:sp>
-      <p:sp>
-        <p:nvSpPr>
-          <p:cNvPr id="20" name="Text 18"/>
-          <p:cNvSpPr/>
-          <p:nvPr/>
-        </p:nvSpPr>
-        <p:spPr>
-          <a:xfrm>
-            <a:off x="3259836" y="1572768"/>
-            <a:ext cx="2660904" cy="1024128"/>
-          </a:xfrm>
-          <a:prstGeom prst="rect">
-            <a:avLst/>
-          </a:prstGeom>
-          <a:noFill/>
-          <a:ln/>
-        </p:spPr>
-        <p:txBody>
-          <a:bodyPr wrap="square" lIns="0" tIns="0" rIns="0" bIns="0" rtlCol="0" anchor="t"/>
-          <a:lstStyle/>
-          <a:p>
-            <a:pPr indent="0" marL="0">
-              <a:lnSpc>
-                <a:spcPct val="100000"/>
-              </a:lnSpc>
-              <a:buNone/>
-            </a:pPr>
-            <a:r>
-              <a:rPr lang="en-US" sz="710" b="1" dirty="0">
-                <a:solidFill>
-                  <a:srgbClr val="2B2B2B"/>
-                </a:solidFill>
-                <a:latin typeface="Meiryo UI" pitchFamily="34" charset="0"/>
-                <a:ea typeface="Meiryo UI" pitchFamily="34" charset="-122"/>
-                <a:cs typeface="Meiryo UI" pitchFamily="34" charset="-120"/>
-              </a:rPr>
-              <a:t>L1: </a:t>
-            </a:r>
-            <a:pPr indent="0" marL="0">
-              <a:lnSpc>
-                <a:spcPct val="100000"/>
-              </a:lnSpc>
-              <a:buNone/>
-            </a:pPr>
-            <a:r>
-              <a:rPr lang="en-US" sz="710" dirty="0">
-                <a:solidFill>
-                  <a:srgbClr val="2B2B2B"/>
-                </a:solidFill>
-                <a:latin typeface="Meiryo UI" pitchFamily="34" charset="0"/>
-                <a:ea typeface="Meiryo UI" pitchFamily="34" charset="-122"/>
-                <a:cs typeface="Meiryo UI" pitchFamily="34" charset="-120"/>
-              </a:rPr>
-              <a:t>基準は品質事象対応で積層。全数目視・長毛処理は人手前提の規定のまま
-</a:t>
-            </a:r>
-            <a:pPr indent="0" marL="0">
-              <a:lnSpc>
-                <a:spcPct val="100000"/>
-              </a:lnSpc>
-              <a:buNone/>
-            </a:pPr>
-            <a:r>
-              <a:rPr lang="en-US" sz="710" b="1" dirty="0">
-                <a:solidFill>
-                  <a:srgbClr val="2B2B2B"/>
-                </a:solidFill>
-                <a:latin typeface="Meiryo UI" pitchFamily="34" charset="0"/>
-                <a:ea typeface="Meiryo UI" pitchFamily="34" charset="-122"/>
-                <a:cs typeface="Meiryo UI" pitchFamily="34" charset="-120"/>
-              </a:rPr>
-              <a:t>L2: </a:t>
-            </a:r>
-            <a:pPr indent="0" marL="0">
-              <a:lnSpc>
-                <a:spcPct val="100000"/>
-              </a:lnSpc>
-              <a:buNone/>
-            </a:pPr>
-            <a:r>
-              <a:rPr lang="en-US" sz="710" dirty="0">
-                <a:solidFill>
-                  <a:srgbClr val="2B2B2B"/>
-                </a:solidFill>
-                <a:latin typeface="Meiryo UI" pitchFamily="34" charset="0"/>
-                <a:ea typeface="Meiryo UI" pitchFamily="34" charset="-122"/>
-                <a:cs typeface="Meiryo UI" pitchFamily="34" charset="-120"/>
-              </a:rPr>
-              <a:t>要員は積み上げ設定(検証データ無し)。B停止を人が吸収
-</a:t>
-            </a:r>
-            <a:pPr indent="0" marL="0">
-              <a:lnSpc>
-                <a:spcPct val="100000"/>
-              </a:lnSpc>
-              <a:buNone/>
-            </a:pPr>
-            <a:r>
-              <a:rPr lang="en-US" sz="710" b="1" dirty="0">
-                <a:solidFill>
-                  <a:srgbClr val="2B2B2B"/>
-                </a:solidFill>
-                <a:latin typeface="Meiryo UI" pitchFamily="34" charset="0"/>
-                <a:ea typeface="Meiryo UI" pitchFamily="34" charset="-122"/>
-                <a:cs typeface="Meiryo UI" pitchFamily="34" charset="-120"/>
-              </a:rPr>
-              <a:t>L3: </a:t>
-            </a:r>
-            <a:pPr indent="0" marL="0">
-              <a:lnSpc>
-                <a:spcPct val="100000"/>
-              </a:lnSpc>
-              <a:buNone/>
-            </a:pPr>
-            <a:r>
-              <a:rPr lang="en-US" sz="710" dirty="0">
-                <a:solidFill>
-                  <a:srgbClr val="2B2B2B"/>
-                </a:solidFill>
-                <a:latin typeface="Meiryo UI" pitchFamily="34" charset="0"/>
-                <a:ea typeface="Meiryo UI" pitchFamily="34" charset="-122"/>
-                <a:cs typeface="Meiryo UI" pitchFamily="34" charset="-120"/>
-              </a:rPr>
-              <a:t>フィジカルAI計画は現行基準を所与とし植毛100名止まり。既設カメラ転用不可</a:t>
-            </a:r>
-            <a:endParaRPr lang="en-US" sz="710" dirty="0"/>
-          </a:p>
-        </p:txBody>
-      </p:sp>
-      <p:sp>
-        <p:nvSpPr>
-          <p:cNvPr id="21" name="Shape 19"/>
-          <p:cNvSpPr/>
-          <p:nvPr/>
-        </p:nvSpPr>
-        <p:spPr>
-          <a:xfrm>
-            <a:off x="6108192" y="1316736"/>
-            <a:ext cx="2843784" cy="1335024"/>
-          </a:xfrm>
-          <a:prstGeom prst="roundRect">
-            <a:avLst>
-              <a:gd name="adj" fmla="val 3425"/>
+              <a:gd name="adj" fmla="val 6000"/>
             </a:avLst>
           </a:prstGeom>
           <a:solidFill>
             <a:srgbClr val="FBEDEA"/>
           </a:solidFill>
-          <a:ln w="9525">
+          <a:ln w="12700">
             <a:solidFill>
               <a:srgbClr val="B85042"/>
             </a:solidFill>
@@ -1934,14 +1197,14 @@
       </p:sp>
       <p:sp>
         <p:nvSpPr>
-          <p:cNvPr id="22" name="Text 20"/>
+          <p:cNvPr id="8" name="Text 6"/>
           <p:cNvSpPr/>
           <p:nvPr/>
         </p:nvSpPr>
         <p:spPr>
           <a:xfrm>
-            <a:off x="6199632" y="1353312"/>
-            <a:ext cx="2660904" cy="201168"/>
+            <a:off x="4251960" y="694944"/>
+            <a:ext cx="3657600" cy="201168"/>
           </a:xfrm>
           <a:prstGeom prst="rect">
             <a:avLst/>
@@ -1965,7 +1228,7 @@
                 <a:ea typeface="Meiryo UI" pitchFamily="34" charset="-122"/>
                 <a:cs typeface="Meiryo UI" pitchFamily="34" charset="-120"/>
               </a:rPr>
-              <a:t>GAP</a:t>
+              <a:t>ギャップ</a:t>
             </a:r>
             <a:endParaRPr lang="en-US" sz="1000" dirty="0"/>
           </a:p>
@@ -1973,14 +1236,280 @@
       </p:sp>
       <p:sp>
         <p:nvSpPr>
-          <p:cNvPr id="23" name="Text 21"/>
+          <p:cNvPr id="9" name="Text 7"/>
           <p:cNvSpPr/>
           <p:nvPr/>
         </p:nvSpPr>
         <p:spPr>
           <a:xfrm>
-            <a:off x="6199632" y="1572768"/>
-            <a:ext cx="2660904" cy="1024128"/>
+            <a:off x="4251960" y="896112"/>
+            <a:ext cx="3657600" cy="566928"/>
+          </a:xfrm>
+          <a:prstGeom prst="rect">
+            <a:avLst/>
+          </a:prstGeom>
+          <a:noFill/>
+          <a:ln/>
+        </p:spPr>
+        <p:txBody>
+          <a:bodyPr wrap="square" lIns="0" tIns="0" rIns="0" bIns="0" rtlCol="0" anchor="t"/>
+          <a:lstStyle/>
+          <a:p>
+            <a:pPr indent="0" marL="0">
+              <a:lnSpc>
+                <a:spcPct val="105000"/>
+              </a:lnSpc>
+              <a:buNone/>
+            </a:pPr>
+            <a:r>
+              <a:rPr lang="en-US" sz="1500" b="1" dirty="0">
+                <a:solidFill>
+                  <a:srgbClr val="B85042"/>
+                </a:solidFill>
+                <a:latin typeface="Meiryo UI" pitchFamily="34" charset="0"/>
+                <a:ea typeface="Meiryo UI" pitchFamily="34" charset="-122"/>
+                <a:cs typeface="Meiryo UI" pitchFamily="34" charset="-120"/>
+              </a:rPr>
+              <a:t>あと43名分の打ち手が無い
+</a:t>
+            </a:r>
+            <a:pPr indent="0" marL="0">
+              <a:lnSpc>
+                <a:spcPct val="105000"/>
+              </a:lnSpc>
+              <a:buNone/>
+            </a:pPr>
+            <a:r>
+              <a:rPr lang="en-US" sz="800" dirty="0">
+                <a:solidFill>
+                  <a:srgbClr val="2B2B2B"/>
+                </a:solidFill>
+                <a:latin typeface="Meiryo UI" pitchFamily="34" charset="0"/>
+                <a:ea typeface="Meiryo UI" pitchFamily="34" charset="-122"/>
+                <a:cs typeface="Meiryo UI" pitchFamily="34" charset="-120"/>
+              </a:rPr>
+              <a:t>埋める鍵は、打ち手の中身より「検討の順番」</a:t>
+            </a:r>
+            <a:endParaRPr lang="en-US" sz="1500" dirty="0"/>
+          </a:p>
+        </p:txBody>
+      </p:sp>
+      <p:sp>
+        <p:nvSpPr>
+          <p:cNvPr id="10" name="Shape 8"/>
+          <p:cNvSpPr/>
+          <p:nvPr/>
+        </p:nvSpPr>
+        <p:spPr>
+          <a:xfrm>
+            <a:off x="8220456" y="621792"/>
+            <a:ext cx="3694176" cy="914400"/>
+          </a:xfrm>
+          <a:prstGeom prst="roundRect">
+            <a:avLst>
+              <a:gd name="adj" fmla="val 6000"/>
+            </a:avLst>
+          </a:prstGeom>
+          <a:solidFill>
+            <a:srgbClr val="2C5F2D"/>
+          </a:solidFill>
+          <a:ln w="12700">
+            <a:solidFill>
+              <a:srgbClr val="2C5F2D"/>
+            </a:solidFill>
+            <a:prstDash val="solid"/>
+          </a:ln>
+        </p:spPr>
+      </p:sp>
+      <p:sp>
+        <p:nvSpPr>
+          <p:cNvPr id="11" name="Text 9"/>
+          <p:cNvSpPr/>
+          <p:nvPr/>
+        </p:nvSpPr>
+        <p:spPr>
+          <a:xfrm>
+            <a:off x="8357616" y="694944"/>
+            <a:ext cx="3419856" cy="201168"/>
+          </a:xfrm>
+          <a:prstGeom prst="rect">
+            <a:avLst/>
+          </a:prstGeom>
+          <a:noFill/>
+          <a:ln/>
+        </p:spPr>
+        <p:txBody>
+          <a:bodyPr wrap="square" lIns="0" tIns="0" rIns="0" bIns="0" rtlCol="0" anchor="ctr"/>
+          <a:lstStyle/>
+          <a:p>
+            <a:pPr indent="0" marL="0">
+              <a:buNone/>
+            </a:pPr>
+            <a:r>
+              <a:rPr lang="en-US" sz="1000" b="1" dirty="0">
+                <a:solidFill>
+                  <a:srgbClr val="D8E8D4"/>
+                </a:solidFill>
+                <a:latin typeface="Meiryo UI" pitchFamily="34" charset="0"/>
+                <a:ea typeface="Meiryo UI" pitchFamily="34" charset="-122"/>
+                <a:cs typeface="Meiryo UI" pitchFamily="34" charset="-120"/>
+              </a:rPr>
+              <a:t>理想(2030年・役員期待)</a:t>
+            </a:r>
+            <a:endParaRPr lang="en-US" sz="1000" dirty="0"/>
+          </a:p>
+        </p:txBody>
+      </p:sp>
+      <p:sp>
+        <p:nvSpPr>
+          <p:cNvPr id="12" name="Text 10"/>
+          <p:cNvSpPr/>
+          <p:nvPr/>
+        </p:nvSpPr>
+        <p:spPr>
+          <a:xfrm>
+            <a:off x="8357616" y="896112"/>
+            <a:ext cx="3419856" cy="566928"/>
+          </a:xfrm>
+          <a:prstGeom prst="rect">
+            <a:avLst/>
+          </a:prstGeom>
+          <a:noFill/>
+          <a:ln/>
+        </p:spPr>
+        <p:txBody>
+          <a:bodyPr wrap="square" lIns="0" tIns="0" rIns="0" bIns="0" rtlCol="0" anchor="t"/>
+          <a:lstStyle/>
+          <a:p>
+            <a:pPr indent="0" marL="0">
+              <a:lnSpc>
+                <a:spcPct val="105000"/>
+              </a:lnSpc>
+              <a:buNone/>
+            </a:pPr>
+            <a:r>
+              <a:rPr lang="en-US" sz="1500" b="1" dirty="0">
+                <a:solidFill>
+                  <a:srgbClr val="FFFFFF"/>
+                </a:solidFill>
+                <a:latin typeface="Meiryo UI" pitchFamily="34" charset="0"/>
+                <a:ea typeface="Meiryo UI" pitchFamily="34" charset="-122"/>
+                <a:cs typeface="Meiryo UI" pitchFamily="34" charset="-120"/>
+              </a:rPr>
+              <a:t>57名(半減)
+</a:t>
+            </a:r>
+            <a:pPr indent="0" marL="0">
+              <a:lnSpc>
+                <a:spcPct val="105000"/>
+              </a:lnSpc>
+              <a:buNone/>
+            </a:pPr>
+            <a:r>
+              <a:rPr lang="en-US" sz="800" dirty="0">
+                <a:solidFill>
+                  <a:srgbClr val="FFFFFF"/>
+                </a:solidFill>
+                <a:latin typeface="Meiryo UI" pitchFamily="34" charset="0"/>
+                <a:ea typeface="Meiryo UI" pitchFamily="34" charset="-122"/>
+                <a:cs typeface="Meiryo UI" pitchFamily="34" charset="-120"/>
+              </a:rPr>
+              <a:t>工場全体317→264名・一人当たり生産金額+20%</a:t>
+            </a:r>
+            <a:endParaRPr lang="en-US" sz="1500" dirty="0"/>
+          </a:p>
+        </p:txBody>
+      </p:sp>
+      <p:sp>
+        <p:nvSpPr>
+          <p:cNvPr id="13" name="Text 11"/>
+          <p:cNvSpPr/>
+          <p:nvPr/>
+        </p:nvSpPr>
+        <p:spPr>
+          <a:xfrm>
+            <a:off x="274320" y="1664208"/>
+            <a:ext cx="11640312" cy="237744"/>
+          </a:xfrm>
+          <a:prstGeom prst="rect">
+            <a:avLst/>
+          </a:prstGeom>
+          <a:noFill/>
+          <a:ln/>
+        </p:spPr>
+        <p:txBody>
+          <a:bodyPr wrap="square" lIns="0" tIns="0" rIns="0" bIns="0" rtlCol="0" anchor="ctr"/>
+          <a:lstStyle/>
+          <a:p>
+            <a:pPr indent="0" marL="0">
+              <a:buNone/>
+            </a:pPr>
+            <a:r>
+              <a:rPr lang="en-US" sz="1100" b="1" dirty="0">
+                <a:solidFill>
+                  <a:srgbClr val="1F3D20"/>
+                </a:solidFill>
+                <a:latin typeface="Meiryo UI" pitchFamily="34" charset="0"/>
+                <a:ea typeface="Meiryo UI" pitchFamily="34" charset="-122"/>
+                <a:cs typeface="Meiryo UI" pitchFamily="34" charset="-120"/>
+              </a:rPr>
+              <a:t>進め方 — すべての作業を「3つの問い」に順番にかける  </a:t>
+            </a:r>
+            <a:pPr indent="0" marL="0">
+              <a:buNone/>
+            </a:pPr>
+            <a:r>
+              <a:rPr lang="en-US" sz="850" b="1" dirty="0">
+                <a:solidFill>
+                  <a:srgbClr val="B85042"/>
+                </a:solidFill>
+                <a:latin typeface="Meiryo UI" pitchFamily="34" charset="0"/>
+                <a:ea typeface="Meiryo UI" pitchFamily="34" charset="-122"/>
+                <a:cs typeface="Meiryo UI" pitchFamily="34" charset="-120"/>
+              </a:rPr>
+              <a:t>(①②③は同列の施策ではなく手順。前の問いを通り抜けた作業だけが、次の問いに進む)</a:t>
+            </a:r>
+            <a:endParaRPr lang="en-US" sz="1100" dirty="0"/>
+          </a:p>
+        </p:txBody>
+      </p:sp>
+      <p:sp>
+        <p:nvSpPr>
+          <p:cNvPr id="14" name="Shape 12"/>
+          <p:cNvSpPr/>
+          <p:nvPr/>
+        </p:nvSpPr>
+        <p:spPr>
+          <a:xfrm>
+            <a:off x="274320" y="1956816"/>
+            <a:ext cx="1371600" cy="1874520"/>
+          </a:xfrm>
+          <a:prstGeom prst="roundRect">
+            <a:avLst>
+              <a:gd name="adj" fmla="val 4000"/>
+            </a:avLst>
+          </a:prstGeom>
+          <a:solidFill>
+            <a:srgbClr val="DFEBDB"/>
+          </a:solidFill>
+          <a:ln w="12700">
+            <a:solidFill>
+              <a:srgbClr val="C9DCC4"/>
+            </a:solidFill>
+            <a:prstDash val="solid"/>
+          </a:ln>
+        </p:spPr>
+      </p:sp>
+      <p:sp>
+        <p:nvSpPr>
+          <p:cNvPr id="15" name="Text 13"/>
+          <p:cNvSpPr/>
+          <p:nvPr/>
+        </p:nvSpPr>
+        <p:spPr>
+          <a:xfrm>
+            <a:off x="347472" y="2029968"/>
+            <a:ext cx="1225296" cy="1728216"/>
           </a:xfrm>
           <a:prstGeom prst="rect">
             <a:avLst/>
@@ -1999,15 +1528,15 @@
               <a:buNone/>
             </a:pPr>
             <a:r>
-              <a:rPr lang="en-US" sz="1100" b="1" dirty="0">
+              <a:rPr lang="en-US" sz="900" b="1" dirty="0">
                 <a:solidFill>
-                  <a:srgbClr val="B85042"/>
+                  <a:srgbClr val="1F3D20"/>
                 </a:solidFill>
                 <a:latin typeface="Meiryo UI" pitchFamily="34" charset="0"/>
                 <a:ea typeface="Meiryo UI" pitchFamily="34" charset="-122"/>
                 <a:cs typeface="Meiryo UI" pitchFamily="34" charset="-120"/>
               </a:rPr>
-              <a:t>植毛▲43名の打ち手不在
+              <a:t>まず
 </a:t>
             </a:r>
             <a:pPr indent="0" marL="0">
@@ -2017,15 +1546,16 @@
               <a:buNone/>
             </a:pPr>
             <a:r>
-              <a:rPr lang="en-US" sz="710" b="1" dirty="0">
+              <a:rPr lang="en-US" sz="1100" b="1" dirty="0">
                 <a:solidFill>
-                  <a:srgbClr val="2B2B2B"/>
+                  <a:srgbClr val="1F3D20"/>
                 </a:solidFill>
                 <a:latin typeface="Meiryo UI" pitchFamily="34" charset="0"/>
                 <a:ea typeface="Meiryo UI" pitchFamily="34" charset="-122"/>
                 <a:cs typeface="Meiryo UI" pitchFamily="34" charset="-120"/>
               </a:rPr>
-              <a:t>正体は「基準レイヤー未着手」(技術限界ではない)
+              <a:t>全作業の
+棚卸し
 </a:t>
             </a:r>
             <a:pPr indent="0" marL="0">
@@ -2035,7 +1565,7 @@
               <a:buNone/>
             </a:pPr>
             <a:r>
-              <a:rPr lang="en-US" sz="710" dirty="0">
+              <a:rPr lang="en-US" sz="750" dirty="0">
                 <a:solidFill>
                   <a:srgbClr val="2B2B2B"/>
                 </a:solidFill>
@@ -2043,9 +1573,17 @@
                 <a:ea typeface="Meiryo UI" pitchFamily="34" charset="-122"/>
                 <a:cs typeface="Meiryo UI" pitchFamily="34" charset="-120"/>
               </a:rPr>
-              <a:t>・基準に踏み込む意思決定の枠組み不在(効果の過半がここに眠る)</a:t>
+              <a:t>
+115名分の作業を、根拠となる基準・規定と対応付けて一覧化(台帳)
+</a:t>
             </a:r>
-            <a:endParaRPr lang="en-US" sz="1100" dirty="0"/>
+            <a:pPr indent="0" marL="0">
+              <a:lnSpc>
+                <a:spcPct val="100000"/>
+              </a:lnSpc>
+              <a:buNone/>
+            </a:pPr>
+            <a:endParaRPr lang="en-US" sz="900" dirty="0"/>
           </a:p>
           <a:p>
             <a:pPr indent="0" marL="0">
@@ -2055,62 +1593,42 @@
               <a:buNone/>
             </a:pPr>
             <a:r>
-              <a:rPr lang="en-US" sz="710" dirty="0">
+              <a:rPr lang="en-US" sz="750" b="1" dirty="0">
                 <a:solidFill>
-                  <a:srgbClr val="2B2B2B"/>
+                  <a:srgbClr val="595959"/>
                 </a:solidFill>
                 <a:latin typeface="Meiryo UI" pitchFamily="34" charset="0"/>
                 <a:ea typeface="Meiryo UI" pitchFamily="34" charset="-122"/>
                 <a:cs typeface="Meiryo UI" pitchFamily="34" charset="-120"/>
               </a:rPr>
-              <a:t>・AI先行で仕様固定化→投資1〜2億円過大化リスク</a:t>
+              <a:t>26/8〜10</a:t>
             </a:r>
-            <a:endParaRPr lang="en-US" sz="1100" dirty="0"/>
-          </a:p>
-          <a:p>
-            <a:pPr indent="0" marL="0">
-              <a:lnSpc>
-                <a:spcPct val="100000"/>
-              </a:lnSpc>
-              <a:buNone/>
-            </a:pPr>
-            <a:r>
-              <a:rPr lang="en-US" sz="710" dirty="0">
-                <a:solidFill>
-                  <a:srgbClr val="2B2B2B"/>
-                </a:solidFill>
-                <a:latin typeface="Meiryo UI" pitchFamily="34" charset="0"/>
-                <a:ea typeface="Meiryo UI" pitchFamily="34" charset="-122"/>
-                <a:cs typeface="Meiryo UI" pitchFamily="34" charset="-120"/>
-              </a:rPr>
-              <a:t>・作業×規定の対応データ不在</a:t>
-            </a:r>
-            <a:endParaRPr lang="en-US" sz="1100" dirty="0"/>
+            <a:endParaRPr lang="en-US" sz="900" dirty="0"/>
           </a:p>
         </p:txBody>
       </p:sp>
       <p:sp>
         <p:nvSpPr>
-          <p:cNvPr id="24" name="Shape 22"/>
+          <p:cNvPr id="16" name="Shape 14"/>
           <p:cNvSpPr/>
           <p:nvPr/>
         </p:nvSpPr>
         <p:spPr>
           <a:xfrm>
-            <a:off x="9047988" y="1316736"/>
-            <a:ext cx="2843784" cy="1335024"/>
+            <a:off x="1837944" y="1956816"/>
+            <a:ext cx="2651760" cy="1874520"/>
           </a:xfrm>
           <a:prstGeom prst="roundRect">
             <a:avLst>
-              <a:gd name="adj" fmla="val 3425"/>
+              <a:gd name="adj" fmla="val 2927"/>
             </a:avLst>
           </a:prstGeom>
           <a:solidFill>
             <a:srgbClr val="F3F8F1"/>
           </a:solidFill>
-          <a:ln w="9525">
+          <a:ln w="12700">
             <a:solidFill>
-              <a:srgbClr val="C9DCC4"/>
+              <a:srgbClr val="2C5F2D"/>
             </a:solidFill>
             <a:prstDash val="solid"/>
           </a:ln>
@@ -2118,14 +1636,14 @@
       </p:sp>
       <p:sp>
         <p:nvSpPr>
-          <p:cNvPr id="25" name="Text 23"/>
+          <p:cNvPr id="17" name="Text 15"/>
           <p:cNvSpPr/>
           <p:nvPr/>
         </p:nvSpPr>
         <p:spPr>
           <a:xfrm>
-            <a:off x="9139428" y="1353312"/>
-            <a:ext cx="2660904" cy="201168"/>
+            <a:off x="1947672" y="2029968"/>
+            <a:ext cx="2432304" cy="256032"/>
           </a:xfrm>
           <a:prstGeom prst="rect">
             <a:avLst/>
@@ -2141,7 +1659,7 @@
               <a:buNone/>
             </a:pPr>
             <a:r>
-              <a:rPr lang="en-US" sz="1000" b="1" dirty="0">
+              <a:rPr lang="en-US" sz="1300" b="1" dirty="0">
                 <a:solidFill>
                   <a:srgbClr val="1F3D20"/>
                 </a:solidFill>
@@ -2149,22 +1667,36 @@
                 <a:ea typeface="Meiryo UI" pitchFamily="34" charset="-122"/>
                 <a:cs typeface="Meiryo UI" pitchFamily="34" charset="-120"/>
               </a:rPr>
-              <a:t>原因: 植毛115名の「要求元」分解</a:t>
+              <a:t>① 無くす  </a:t>
             </a:r>
-            <a:endParaRPr lang="en-US" sz="1000" dirty="0"/>
+            <a:pPr indent="0" marL="0">
+              <a:buNone/>
+            </a:pPr>
+            <a:r>
+              <a:rPr lang="en-US" sz="850" dirty="0">
+                <a:solidFill>
+                  <a:srgbClr val="595959"/>
+                </a:solidFill>
+                <a:latin typeface="Meiryo UI" pitchFamily="34" charset="0"/>
+                <a:ea typeface="Meiryo UI" pitchFamily="34" charset="-122"/>
+                <a:cs typeface="Meiryo UI" pitchFamily="34" charset="-120"/>
+              </a:rPr>
+              <a:t>基準を正す</a:t>
+            </a:r>
+            <a:endParaRPr lang="en-US" sz="1300" dirty="0"/>
           </a:p>
         </p:txBody>
       </p:sp>
       <p:sp>
         <p:nvSpPr>
-          <p:cNvPr id="26" name="Text 24"/>
+          <p:cNvPr id="18" name="Text 16"/>
           <p:cNvSpPr/>
           <p:nvPr/>
         </p:nvSpPr>
         <p:spPr>
           <a:xfrm>
-            <a:off x="9139428" y="1572768"/>
-            <a:ext cx="2660904" cy="1024128"/>
+            <a:off x="1947672" y="2304288"/>
+            <a:ext cx="2432304" cy="329184"/>
           </a:xfrm>
           <a:prstGeom prst="rect">
             <a:avLst/>
@@ -2183,26 +1715,7 @@
               <a:buNone/>
             </a:pPr>
             <a:r>
-              <a:rPr lang="en-US" sz="690" dirty="0">
-                <a:solidFill>
-                  <a:srgbClr val="2B2B2B"/>
-                </a:solidFill>
-                <a:latin typeface="Meiryo UI" pitchFamily="34" charset="0"/>
-                <a:ea typeface="Meiryo UI" pitchFamily="34" charset="-122"/>
-                <a:cs typeface="Meiryo UI" pitchFamily="34" charset="-120"/>
-              </a:rPr>
-              <a:t>A 法規・公的規格 〜10名(不可動)
-B 業界標準・顧客要求 〜20名
-</a:t>
-            </a:r>
-            <a:pPr indent="0" marL="0">
-              <a:lnSpc>
-                <a:spcPct val="100000"/>
-              </a:lnSpc>
-              <a:buNone/>
-            </a:pPr>
-            <a:r>
-              <a:rPr lang="en-US" sz="690" b="1" dirty="0">
+              <a:rPr lang="en-US" sz="950" b="1" dirty="0">
                 <a:solidFill>
                   <a:srgbClr val="B85042"/>
                 </a:solidFill>
@@ -2210,59 +1723,22 @@
                 <a:ea typeface="Meiryo UI" pitchFamily="34" charset="-122"/>
                 <a:cs typeface="Meiryo UI" pitchFamily="34" charset="-120"/>
               </a:rPr>
-              <a:t>C 当社独自基準 〜40名 ←本丸
-</a:t>
+              <a:t>「その作業は、そもそも必要か?」</a:t>
             </a:r>
-            <a:pPr indent="0" marL="0">
-              <a:lnSpc>
-                <a:spcPct val="100000"/>
-              </a:lnSpc>
-              <a:buNone/>
-            </a:pPr>
-            <a:r>
-              <a:rPr lang="en-US" sz="690" dirty="0">
-                <a:solidFill>
-                  <a:srgbClr val="2B2B2B"/>
-                </a:solidFill>
-                <a:latin typeface="Meiryo UI" pitchFamily="34" charset="0"/>
-                <a:ea typeface="Meiryo UI" pitchFamily="34" charset="-122"/>
-                <a:cs typeface="Meiryo UI" pitchFamily="34" charset="-120"/>
-              </a:rPr>
-              <a:t>D 設備起因(B停止等) 〜25名
-E 定型作業 〜20名 ←現行AI計画の対象はここだけ
-</a:t>
-            </a:r>
-            <a:pPr indent="0" marL="0">
-              <a:lnSpc>
-                <a:spcPct val="100000"/>
-              </a:lnSpc>
-              <a:buNone/>
-            </a:pPr>
-            <a:r>
-              <a:rPr lang="en-US" sz="690" b="1" dirty="0">
-                <a:solidFill>
-                  <a:srgbClr val="2B2B2B"/>
-                </a:solidFill>
-                <a:latin typeface="Meiryo UI" pitchFamily="34" charset="0"/>
-                <a:ea typeface="Meiryo UI" pitchFamily="34" charset="-122"/>
-                <a:cs typeface="Meiryo UI" pitchFamily="34" charset="-120"/>
-              </a:rPr>
-              <a:t>真因: 基準は追加される一方「削除するプロセス」が無い</a:t>
-            </a:r>
-            <a:endParaRPr lang="en-US" sz="690" dirty="0"/>
+            <a:endParaRPr lang="en-US" sz="950" dirty="0"/>
           </a:p>
         </p:txBody>
       </p:sp>
       <p:sp>
         <p:nvSpPr>
-          <p:cNvPr id="27" name="Text 25"/>
+          <p:cNvPr id="19" name="Text 17"/>
           <p:cNvSpPr/>
           <p:nvPr/>
         </p:nvSpPr>
         <p:spPr>
           <a:xfrm>
-            <a:off x="228600" y="2761488"/>
-            <a:ext cx="8503920" cy="182880"/>
+            <a:off x="1947672" y="2651760"/>
+            <a:ext cx="2432304" cy="658368"/>
           </a:xfrm>
           <a:prstGeom prst="rect">
             <a:avLst/>
@@ -2271,2046 +1747,40 @@
           <a:ln/>
         </p:spPr>
         <p:txBody>
-          <a:bodyPr wrap="square" lIns="0" tIns="0" rIns="0" bIns="0" rtlCol="0" anchor="ctr"/>
+          <a:bodyPr wrap="square" lIns="0" tIns="0" rIns="0" bIns="0" rtlCol="0" anchor="t"/>
           <a:lstStyle/>
           <a:p>
             <a:pPr indent="0" marL="0">
+              <a:lnSpc>
+                <a:spcPct val="105000"/>
+              </a:lnSpc>
               <a:buNone/>
             </a:pPr>
             <a:r>
-              <a:rPr lang="en-US" sz="900" b="1" dirty="0">
+              <a:rPr lang="en-US" sz="780" dirty="0">
                 <a:solidFill>
-                  <a:srgbClr val="1F3D20"/>
+                  <a:srgbClr val="2B2B2B"/>
                 </a:solidFill>
                 <a:latin typeface="Meiryo UI" pitchFamily="34" charset="0"/>
                 <a:ea typeface="Meiryo UI" pitchFamily="34" charset="-122"/>
                 <a:cs typeface="Meiryo UI" pitchFamily="34" charset="-120"/>
               </a:rPr>
-              <a:t>解決策 — 依存関係を持つ3ステップ(①→②→③の順に成果物が前提となる。並列の打ち手リストではない)</a:t>
+              <a:t>作業を要求している品質基準・安全基準・規定に遡り、根拠を検証。根拠が確認できない基準は改定し、作業ごと無くす。</a:t>
             </a:r>
-            <a:endParaRPr lang="en-US" sz="900" dirty="0"/>
+            <a:endParaRPr lang="en-US" sz="780" dirty="0"/>
           </a:p>
         </p:txBody>
       </p:sp>
-      <p:graphicFrame>
-        <p:nvGraphicFramePr>
-          <p:cNvPr id="2" name="Table 0"/>
-          <p:cNvGraphicFramePr>
-            <a:graphicFrameLocks noGrp="1"/>
-          </p:cNvGraphicFramePr>
-          <p:nvPr>
-            <p:extLst>
-              <p:ext uri="{D42A27DB-BD31-4B8C-83A1-F6EECF244321}">
-                <p14:modId xmlns:p14="http://schemas.microsoft.com/office/powerpoint/2010/main" val="1579011935"/>
-              </p:ext>
-            </p:extLst>
-          </p:nvPr>
-        </p:nvGraphicFramePr>
-        <p:xfrm>
-          <a:off x="228600" y="2980944"/>
-          <a:ext cx="8503920" cy="914400"/>
-        </p:xfrm>
-        <a:graphic>
-          <a:graphicData uri="http://schemas.openxmlformats.org/drawingml/2006/table">
-            <a:tbl>
-              <a:tblPr/>
-              <a:tblGrid>
-                <a:gridCol w="1051560"/>
-                <a:gridCol w="3429000"/>
-                <a:gridCol w="777240"/>
-                <a:gridCol w="1874520"/>
-                <a:gridCol w="1371600"/>
-              </a:tblGrid>
-              <a:tr h="201168">
-                <a:tc>
-                  <a:txBody>
-                    <a:bodyPr/>
-                    <a:lstStyle/>
-                    <a:p>
-                      <a:pPr indent="0" marL="0">
-                        <a:buNone/>
-                      </a:pPr>
-                      <a:r>
-                        <a:rPr lang="en-US" sz="720" b="1" dirty="0">
-                          <a:solidFill>
-                            <a:srgbClr val="FFFFFF"/>
-                          </a:solidFill>
-                          <a:latin typeface="Meiryo UI" pitchFamily="34" charset="0"/>
-                          <a:ea typeface="Meiryo UI" pitchFamily="34" charset="-122"/>
-                          <a:cs typeface="Meiryo UI" pitchFamily="34" charset="-120"/>
-                        </a:rPr>
-                        <a:t>STEP</a:t>
-                      </a:r>
-                      <a:endParaRPr lang="en-US" sz="720" dirty="0">
-                        <a:latin typeface="Meiryo UI" charset="0"/>
-                        <a:ea typeface="Meiryo UI" charset="0"/>
-                        <a:cs typeface="Meiryo UI" charset="0"/>
-                      </a:endParaRPr>
-                    </a:p>
-                  </a:txBody>
-                  <a:tcPr marL="32004" marR="32004" marT="32004" marB="32004" anchor="ctr">
-                    <a:lnL w="6350" cap="flat" cmpd="sng" algn="ctr">
-                      <a:solidFill>
-                        <a:srgbClr val="D3DED0"/>
-                      </a:solidFill>
-                      <a:prstDash val="solid"/>
-                      <a:round/>
-                      <a:headEnd type="none" w="med" len="med"/>
-                      <a:tailEnd type="none" w="med" len="med"/>
-                    </a:lnL>
-                    <a:lnR w="6350" cap="flat" cmpd="sng" algn="ctr">
-                      <a:solidFill>
-                        <a:srgbClr val="D3DED0"/>
-                      </a:solidFill>
-                      <a:prstDash val="solid"/>
-                      <a:round/>
-                      <a:headEnd type="none" w="med" len="med"/>
-                      <a:tailEnd type="none" w="med" len="med"/>
-                    </a:lnR>
-                    <a:lnT w="6350" cap="flat" cmpd="sng" algn="ctr">
-                      <a:solidFill>
-                        <a:srgbClr val="D3DED0"/>
-                      </a:solidFill>
-                      <a:prstDash val="solid"/>
-                      <a:round/>
-                      <a:headEnd type="none" w="med" len="med"/>
-                      <a:tailEnd type="none" w="med" len="med"/>
-                    </a:lnT>
-                    <a:lnB w="6350" cap="flat" cmpd="sng" algn="ctr">
-                      <a:solidFill>
-                        <a:srgbClr val="D3DED0"/>
-                      </a:solidFill>
-                      <a:prstDash val="solid"/>
-                      <a:round/>
-                      <a:headEnd type="none" w="med" len="med"/>
-                      <a:tailEnd type="none" w="med" len="med"/>
-                    </a:lnB>
-                    <a:solidFill>
-                      <a:srgbClr val="2C5F2D"/>
-                    </a:solidFill>
-                  </a:tcPr>
-                </a:tc>
-                <a:tc>
-                  <a:txBody>
-                    <a:bodyPr/>
-                    <a:lstStyle/>
-                    <a:p>
-                      <a:pPr indent="0" marL="0">
-                        <a:buNone/>
-                      </a:pPr>
-                      <a:r>
-                        <a:rPr lang="en-US" sz="720" b="1" dirty="0">
-                          <a:solidFill>
-                            <a:srgbClr val="FFFFFF"/>
-                          </a:solidFill>
-                          <a:latin typeface="Meiryo UI" pitchFamily="34" charset="0"/>
-                          <a:ea typeface="Meiryo UI" pitchFamily="34" charset="-122"/>
-                          <a:cs typeface="Meiryo UI" pitchFamily="34" charset="-120"/>
-                        </a:rPr>
-                        <a:t>打ち手</a:t>
-                      </a:r>
-                      <a:endParaRPr lang="en-US" sz="720" dirty="0">
-                        <a:latin typeface="Meiryo UI" charset="0"/>
-                        <a:ea typeface="Meiryo UI" charset="0"/>
-                        <a:cs typeface="Meiryo UI" charset="0"/>
-                      </a:endParaRPr>
-                    </a:p>
-                  </a:txBody>
-                  <a:tcPr marL="32004" marR="32004" marT="32004" marB="32004" anchor="ctr">
-                    <a:lnL w="6350" cap="flat" cmpd="sng" algn="ctr">
-                      <a:solidFill>
-                        <a:srgbClr val="D3DED0"/>
-                      </a:solidFill>
-                      <a:prstDash val="solid"/>
-                      <a:round/>
-                      <a:headEnd type="none" w="med" len="med"/>
-                      <a:tailEnd type="none" w="med" len="med"/>
-                    </a:lnL>
-                    <a:lnR w="6350" cap="flat" cmpd="sng" algn="ctr">
-                      <a:solidFill>
-                        <a:srgbClr val="D3DED0"/>
-                      </a:solidFill>
-                      <a:prstDash val="solid"/>
-                      <a:round/>
-                      <a:headEnd type="none" w="med" len="med"/>
-                      <a:tailEnd type="none" w="med" len="med"/>
-                    </a:lnR>
-                    <a:lnT w="6350" cap="flat" cmpd="sng" algn="ctr">
-                      <a:solidFill>
-                        <a:srgbClr val="D3DED0"/>
-                      </a:solidFill>
-                      <a:prstDash val="solid"/>
-                      <a:round/>
-                      <a:headEnd type="none" w="med" len="med"/>
-                      <a:tailEnd type="none" w="med" len="med"/>
-                    </a:lnT>
-                    <a:lnB w="6350" cap="flat" cmpd="sng" algn="ctr">
-                      <a:solidFill>
-                        <a:srgbClr val="D3DED0"/>
-                      </a:solidFill>
-                      <a:prstDash val="solid"/>
-                      <a:round/>
-                      <a:headEnd type="none" w="med" len="med"/>
-                      <a:tailEnd type="none" w="med" len="med"/>
-                    </a:lnB>
-                    <a:solidFill>
-                      <a:srgbClr val="2C5F2D"/>
-                    </a:solidFill>
-                  </a:tcPr>
-                </a:tc>
-                <a:tc>
-                  <a:txBody>
-                    <a:bodyPr/>
-                    <a:lstStyle/>
-                    <a:p>
-                      <a:pPr indent="0" marL="0">
-                        <a:buNone/>
-                      </a:pPr>
-                      <a:r>
-                        <a:rPr lang="en-US" sz="720" b="1" dirty="0">
-                          <a:solidFill>
-                            <a:srgbClr val="FFFFFF"/>
-                          </a:solidFill>
-                          <a:latin typeface="Meiryo UI" pitchFamily="34" charset="0"/>
-                          <a:ea typeface="Meiryo UI" pitchFamily="34" charset="-122"/>
-                          <a:cs typeface="Meiryo UI" pitchFamily="34" charset="-120"/>
-                        </a:rPr>
-                        <a:t>効果(植毛)</a:t>
-                      </a:r>
-                      <a:endParaRPr lang="en-US" sz="720" dirty="0">
-                        <a:latin typeface="Meiryo UI" charset="0"/>
-                        <a:ea typeface="Meiryo UI" charset="0"/>
-                        <a:cs typeface="Meiryo UI" charset="0"/>
-                      </a:endParaRPr>
-                    </a:p>
-                  </a:txBody>
-                  <a:tcPr marL="32004" marR="32004" marT="32004" marB="32004" anchor="ctr">
-                    <a:lnL w="6350" cap="flat" cmpd="sng" algn="ctr">
-                      <a:solidFill>
-                        <a:srgbClr val="D3DED0"/>
-                      </a:solidFill>
-                      <a:prstDash val="solid"/>
-                      <a:round/>
-                      <a:headEnd type="none" w="med" len="med"/>
-                      <a:tailEnd type="none" w="med" len="med"/>
-                    </a:lnL>
-                    <a:lnR w="6350" cap="flat" cmpd="sng" algn="ctr">
-                      <a:solidFill>
-                        <a:srgbClr val="D3DED0"/>
-                      </a:solidFill>
-                      <a:prstDash val="solid"/>
-                      <a:round/>
-                      <a:headEnd type="none" w="med" len="med"/>
-                      <a:tailEnd type="none" w="med" len="med"/>
-                    </a:lnR>
-                    <a:lnT w="6350" cap="flat" cmpd="sng" algn="ctr">
-                      <a:solidFill>
-                        <a:srgbClr val="D3DED0"/>
-                      </a:solidFill>
-                      <a:prstDash val="solid"/>
-                      <a:round/>
-                      <a:headEnd type="none" w="med" len="med"/>
-                      <a:tailEnd type="none" w="med" len="med"/>
-                    </a:lnT>
-                    <a:lnB w="6350" cap="flat" cmpd="sng" algn="ctr">
-                      <a:solidFill>
-                        <a:srgbClr val="D3DED0"/>
-                      </a:solidFill>
-                      <a:prstDash val="solid"/>
-                      <a:round/>
-                      <a:headEnd type="none" w="med" len="med"/>
-                      <a:tailEnd type="none" w="med" len="med"/>
-                    </a:lnB>
-                    <a:solidFill>
-                      <a:srgbClr val="2C5F2D"/>
-                    </a:solidFill>
-                  </a:tcPr>
-                </a:tc>
-                <a:tc>
-                  <a:txBody>
-                    <a:bodyPr/>
-                    <a:lstStyle/>
-                    <a:p>
-                      <a:pPr indent="0" marL="0">
-                        <a:buNone/>
-                      </a:pPr>
-                      <a:r>
-                        <a:rPr lang="en-US" sz="720" b="1" dirty="0">
-                          <a:solidFill>
-                            <a:srgbClr val="FFFFFF"/>
-                          </a:solidFill>
-                          <a:latin typeface="Meiryo UI" pitchFamily="34" charset="0"/>
-                          <a:ea typeface="Meiryo UI" pitchFamily="34" charset="-122"/>
-                          <a:cs typeface="Meiryo UI" pitchFamily="34" charset="-120"/>
-                        </a:rPr>
-                        <a:t>誰が(3チーム体制)</a:t>
-                      </a:r>
-                      <a:endParaRPr lang="en-US" sz="720" dirty="0">
-                        <a:latin typeface="Meiryo UI" charset="0"/>
-                        <a:ea typeface="Meiryo UI" charset="0"/>
-                        <a:cs typeface="Meiryo UI" charset="0"/>
-                      </a:endParaRPr>
-                    </a:p>
-                  </a:txBody>
-                  <a:tcPr marL="32004" marR="32004" marT="32004" marB="32004" anchor="ctr">
-                    <a:lnL w="6350" cap="flat" cmpd="sng" algn="ctr">
-                      <a:solidFill>
-                        <a:srgbClr val="D3DED0"/>
-                      </a:solidFill>
-                      <a:prstDash val="solid"/>
-                      <a:round/>
-                      <a:headEnd type="none" w="med" len="med"/>
-                      <a:tailEnd type="none" w="med" len="med"/>
-                    </a:lnL>
-                    <a:lnR w="6350" cap="flat" cmpd="sng" algn="ctr">
-                      <a:solidFill>
-                        <a:srgbClr val="D3DED0"/>
-                      </a:solidFill>
-                      <a:prstDash val="solid"/>
-                      <a:round/>
-                      <a:headEnd type="none" w="med" len="med"/>
-                      <a:tailEnd type="none" w="med" len="med"/>
-                    </a:lnR>
-                    <a:lnT w="6350" cap="flat" cmpd="sng" algn="ctr">
-                      <a:solidFill>
-                        <a:srgbClr val="D3DED0"/>
-                      </a:solidFill>
-                      <a:prstDash val="solid"/>
-                      <a:round/>
-                      <a:headEnd type="none" w="med" len="med"/>
-                      <a:tailEnd type="none" w="med" len="med"/>
-                    </a:lnT>
-                    <a:lnB w="6350" cap="flat" cmpd="sng" algn="ctr">
-                      <a:solidFill>
-                        <a:srgbClr val="D3DED0"/>
-                      </a:solidFill>
-                      <a:prstDash val="solid"/>
-                      <a:round/>
-                      <a:headEnd type="none" w="med" len="med"/>
-                      <a:tailEnd type="none" w="med" len="med"/>
-                    </a:lnB>
-                    <a:solidFill>
-                      <a:srgbClr val="2C5F2D"/>
-                    </a:solidFill>
-                  </a:tcPr>
-                </a:tc>
-                <a:tc>
-                  <a:txBody>
-                    <a:bodyPr/>
-                    <a:lstStyle/>
-                    <a:p>
-                      <a:pPr indent="0" marL="0">
-                        <a:buNone/>
-                      </a:pPr>
-                      <a:r>
-                        <a:rPr lang="en-US" sz="720" b="1" dirty="0">
-                          <a:solidFill>
-                            <a:srgbClr val="FFFFFF"/>
-                          </a:solidFill>
-                          <a:latin typeface="Meiryo UI" pitchFamily="34" charset="0"/>
-                          <a:ea typeface="Meiryo UI" pitchFamily="34" charset="-122"/>
-                          <a:cs typeface="Meiryo UI" pitchFamily="34" charset="-120"/>
-                        </a:rPr>
-                        <a:t>いつまでに</a:t>
-                      </a:r>
-                      <a:endParaRPr lang="en-US" sz="720" dirty="0">
-                        <a:latin typeface="Meiryo UI" charset="0"/>
-                        <a:ea typeface="Meiryo UI" charset="0"/>
-                        <a:cs typeface="Meiryo UI" charset="0"/>
-                      </a:endParaRPr>
-                    </a:p>
-                  </a:txBody>
-                  <a:tcPr marL="32004" marR="32004" marT="32004" marB="32004" anchor="ctr">
-                    <a:lnL w="6350" cap="flat" cmpd="sng" algn="ctr">
-                      <a:solidFill>
-                        <a:srgbClr val="D3DED0"/>
-                      </a:solidFill>
-                      <a:prstDash val="solid"/>
-                      <a:round/>
-                      <a:headEnd type="none" w="med" len="med"/>
-                      <a:tailEnd type="none" w="med" len="med"/>
-                    </a:lnL>
-                    <a:lnR w="6350" cap="flat" cmpd="sng" algn="ctr">
-                      <a:solidFill>
-                        <a:srgbClr val="D3DED0"/>
-                      </a:solidFill>
-                      <a:prstDash val="solid"/>
-                      <a:round/>
-                      <a:headEnd type="none" w="med" len="med"/>
-                      <a:tailEnd type="none" w="med" len="med"/>
-                    </a:lnR>
-                    <a:lnT w="6350" cap="flat" cmpd="sng" algn="ctr">
-                      <a:solidFill>
-                        <a:srgbClr val="D3DED0"/>
-                      </a:solidFill>
-                      <a:prstDash val="solid"/>
-                      <a:round/>
-                      <a:headEnd type="none" w="med" len="med"/>
-                      <a:tailEnd type="none" w="med" len="med"/>
-                    </a:lnT>
-                    <a:lnB w="6350" cap="flat" cmpd="sng" algn="ctr">
-                      <a:solidFill>
-                        <a:srgbClr val="D3DED0"/>
-                      </a:solidFill>
-                      <a:prstDash val="solid"/>
-                      <a:round/>
-                      <a:headEnd type="none" w="med" len="med"/>
-                      <a:tailEnd type="none" w="med" len="med"/>
-                    </a:lnB>
-                    <a:solidFill>
-                      <a:srgbClr val="2C5F2D"/>
-                    </a:solidFill>
-                  </a:tcPr>
-                </a:tc>
-              </a:tr>
-              <a:tr h="475488">
-                <a:tc>
-                  <a:txBody>
-                    <a:bodyPr/>
-                    <a:lstStyle/>
-                    <a:p>
-                      <a:pPr indent="0" marL="0">
-                        <a:buNone/>
-                      </a:pPr>
-                      <a:r>
-                        <a:rPr lang="en-US" sz="690" b="1" dirty="0">
-                          <a:solidFill>
-                            <a:srgbClr val="2B2B2B"/>
-                          </a:solidFill>
-                          <a:latin typeface="Meiryo UI" pitchFamily="34" charset="0"/>
-                          <a:ea typeface="Meiryo UI" pitchFamily="34" charset="-122"/>
-                          <a:cs typeface="Meiryo UI" pitchFamily="34" charset="-120"/>
-                        </a:rPr>
-                        <a:t>① 基準是正</a:t>
-                      </a:r>
-                      <a:endParaRPr lang="en-US" sz="690" dirty="0">
-                        <a:latin typeface="Meiryo UI" charset="0"/>
-                        <a:ea typeface="Meiryo UI" charset="0"/>
-                        <a:cs typeface="Meiryo UI" charset="0"/>
-                      </a:endParaRPr>
-                    </a:p>
-                    <a:p>
-                      <a:pPr indent="0" marL="0">
-                        <a:buNone/>
-                      </a:pPr>
-                      <a:r>
-                        <a:rPr lang="en-US" sz="690" b="1" dirty="0">
-                          <a:solidFill>
-                            <a:srgbClr val="2B2B2B"/>
-                          </a:solidFill>
-                          <a:latin typeface="Meiryo UI" pitchFamily="34" charset="0"/>
-                          <a:ea typeface="Meiryo UI" pitchFamily="34" charset="-122"/>
-                          <a:cs typeface="Meiryo UI" pitchFamily="34" charset="-120"/>
-                        </a:rPr>
-                        <a:t>=消す</a:t>
-                      </a:r>
-                      <a:endParaRPr lang="en-US" sz="690" dirty="0">
-                        <a:latin typeface="Meiryo UI" charset="0"/>
-                        <a:ea typeface="Meiryo UI" charset="0"/>
-                        <a:cs typeface="Meiryo UI" charset="0"/>
-                      </a:endParaRPr>
-                    </a:p>
-                  </a:txBody>
-                  <a:tcPr marL="32004" marR="32004" marT="32004" marB="32004" anchor="ctr">
-                    <a:lnL w="6350" cap="flat" cmpd="sng" algn="ctr">
-                      <a:solidFill>
-                        <a:srgbClr val="D3DED0"/>
-                      </a:solidFill>
-                      <a:prstDash val="solid"/>
-                      <a:round/>
-                      <a:headEnd type="none" w="med" len="med"/>
-                      <a:tailEnd type="none" w="med" len="med"/>
-                    </a:lnL>
-                    <a:lnR w="6350" cap="flat" cmpd="sng" algn="ctr">
-                      <a:solidFill>
-                        <a:srgbClr val="D3DED0"/>
-                      </a:solidFill>
-                      <a:prstDash val="solid"/>
-                      <a:round/>
-                      <a:headEnd type="none" w="med" len="med"/>
-                      <a:tailEnd type="none" w="med" len="med"/>
-                    </a:lnR>
-                    <a:lnT w="6350" cap="flat" cmpd="sng" algn="ctr">
-                      <a:solidFill>
-                        <a:srgbClr val="D3DED0"/>
-                      </a:solidFill>
-                      <a:prstDash val="solid"/>
-                      <a:round/>
-                      <a:headEnd type="none" w="med" len="med"/>
-                      <a:tailEnd type="none" w="med" len="med"/>
-                    </a:lnT>
-                    <a:lnB w="6350" cap="flat" cmpd="sng" algn="ctr">
-                      <a:solidFill>
-                        <a:srgbClr val="D3DED0"/>
-                      </a:solidFill>
-                      <a:prstDash val="solid"/>
-                      <a:round/>
-                      <a:headEnd type="none" w="med" len="med"/>
-                      <a:tailEnd type="none" w="med" len="med"/>
-                    </a:lnB>
-                    <a:solidFill>
-                      <a:srgbClr val="DFEBDB"/>
-                    </a:solidFill>
-                  </a:tcPr>
-                </a:tc>
-                <a:tc>
-                  <a:txBody>
-                    <a:bodyPr/>
-                    <a:lstStyle/>
-                    <a:p>
-                      <a:pPr indent="0" marL="0">
-                        <a:buNone/>
-                      </a:pPr>
-                      <a:r>
-                        <a:rPr lang="en-US" sz="690" dirty="0">
-                          <a:solidFill>
-                            <a:srgbClr val="2B2B2B"/>
-                          </a:solidFill>
-                          <a:latin typeface="Meiryo UI" pitchFamily="34" charset="0"/>
-                          <a:ea typeface="Meiryo UI" pitchFamily="34" charset="-122"/>
-                          <a:cs typeface="Meiryo UI" pitchFamily="34" charset="-120"/>
-                        </a:rPr>
-                        <a:t>検査規定変更(全数目視→AI全数+統計監査)・長毛処理の発生源対策と公差再設定・記録/点検のリスクベース化。目視実力値の測定→並行運転で同等性以上を実証してから切替</a:t>
-                      </a:r>
-                      <a:endParaRPr lang="en-US" sz="690" dirty="0">
-                        <a:latin typeface="Meiryo UI" charset="0"/>
-                        <a:ea typeface="Meiryo UI" charset="0"/>
-                        <a:cs typeface="Meiryo UI" charset="0"/>
-                      </a:endParaRPr>
-                    </a:p>
-                  </a:txBody>
-                  <a:tcPr marL="32004" marR="32004" marT="32004" marB="32004" anchor="ctr">
-                    <a:lnL w="6350" cap="flat" cmpd="sng" algn="ctr">
-                      <a:solidFill>
-                        <a:srgbClr val="D3DED0"/>
-                      </a:solidFill>
-                      <a:prstDash val="solid"/>
-                      <a:round/>
-                      <a:headEnd type="none" w="med" len="med"/>
-                      <a:tailEnd type="none" w="med" len="med"/>
-                    </a:lnL>
-                    <a:lnR w="6350" cap="flat" cmpd="sng" algn="ctr">
-                      <a:solidFill>
-                        <a:srgbClr val="D3DED0"/>
-                      </a:solidFill>
-                      <a:prstDash val="solid"/>
-                      <a:round/>
-                      <a:headEnd type="none" w="med" len="med"/>
-                      <a:tailEnd type="none" w="med" len="med"/>
-                    </a:lnR>
-                    <a:lnT w="6350" cap="flat" cmpd="sng" algn="ctr">
-                      <a:solidFill>
-                        <a:srgbClr val="D3DED0"/>
-                      </a:solidFill>
-                      <a:prstDash val="solid"/>
-                      <a:round/>
-                      <a:headEnd type="none" w="med" len="med"/>
-                      <a:tailEnd type="none" w="med" len="med"/>
-                    </a:lnT>
-                    <a:lnB w="6350" cap="flat" cmpd="sng" algn="ctr">
-                      <a:solidFill>
-                        <a:srgbClr val="D3DED0"/>
-                      </a:solidFill>
-                      <a:prstDash val="solid"/>
-                      <a:round/>
-                      <a:headEnd type="none" w="med" len="med"/>
-                      <a:tailEnd type="none" w="med" len="med"/>
-                    </a:lnB>
-                  </a:tcPr>
-                </a:tc>
-                <a:tc>
-                  <a:txBody>
-                    <a:bodyPr/>
-                    <a:lstStyle/>
-                    <a:p>
-                      <a:pPr indent="0" marL="0">
-                        <a:buNone/>
-                      </a:pPr>
-                      <a:r>
-                        <a:rPr lang="en-US" sz="690" b="1" dirty="0">
-                          <a:solidFill>
-                            <a:srgbClr val="2B2B2B"/>
-                          </a:solidFill>
-                          <a:latin typeface="Meiryo UI" pitchFamily="34" charset="0"/>
-                          <a:ea typeface="Meiryo UI" pitchFamily="34" charset="-122"/>
-                          <a:cs typeface="Meiryo UI" pitchFamily="34" charset="-120"/>
-                        </a:rPr>
-                        <a:t>▲12〜18名</a:t>
-                      </a:r>
-                      <a:endParaRPr lang="en-US" sz="690" dirty="0">
-                        <a:latin typeface="Meiryo UI" charset="0"/>
-                        <a:ea typeface="Meiryo UI" charset="0"/>
-                        <a:cs typeface="Meiryo UI" charset="0"/>
-                      </a:endParaRPr>
-                    </a:p>
-                  </a:txBody>
-                  <a:tcPr marL="32004" marR="32004" marT="32004" marB="32004" anchor="ctr">
-                    <a:lnL w="6350" cap="flat" cmpd="sng" algn="ctr">
-                      <a:solidFill>
-                        <a:srgbClr val="D3DED0"/>
-                      </a:solidFill>
-                      <a:prstDash val="solid"/>
-                      <a:round/>
-                      <a:headEnd type="none" w="med" len="med"/>
-                      <a:tailEnd type="none" w="med" len="med"/>
-                    </a:lnL>
-                    <a:lnR w="6350" cap="flat" cmpd="sng" algn="ctr">
-                      <a:solidFill>
-                        <a:srgbClr val="D3DED0"/>
-                      </a:solidFill>
-                      <a:prstDash val="solid"/>
-                      <a:round/>
-                      <a:headEnd type="none" w="med" len="med"/>
-                      <a:tailEnd type="none" w="med" len="med"/>
-                    </a:lnR>
-                    <a:lnT w="6350" cap="flat" cmpd="sng" algn="ctr">
-                      <a:solidFill>
-                        <a:srgbClr val="D3DED0"/>
-                      </a:solidFill>
-                      <a:prstDash val="solid"/>
-                      <a:round/>
-                      <a:headEnd type="none" w="med" len="med"/>
-                      <a:tailEnd type="none" w="med" len="med"/>
-                    </a:lnT>
-                    <a:lnB w="6350" cap="flat" cmpd="sng" algn="ctr">
-                      <a:solidFill>
-                        <a:srgbClr val="D3DED0"/>
-                      </a:solidFill>
-                      <a:prstDash val="solid"/>
-                      <a:round/>
-                      <a:headEnd type="none" w="med" len="med"/>
-                      <a:tailEnd type="none" w="med" len="med"/>
-                    </a:lnB>
-                  </a:tcPr>
-                </a:tc>
-                <a:tc>
-                  <a:txBody>
-                    <a:bodyPr/>
-                    <a:lstStyle/>
-                    <a:p>
-                      <a:pPr indent="0" marL="0">
-                        <a:buNone/>
-                      </a:pPr>
-                      <a:r>
-                        <a:rPr lang="en-US" sz="690" dirty="0">
-                          <a:solidFill>
-                            <a:srgbClr val="2B2B2B"/>
-                          </a:solidFill>
-                          <a:latin typeface="Meiryo UI" pitchFamily="34" charset="0"/>
-                          <a:ea typeface="Meiryo UI" pitchFamily="34" charset="-122"/>
-                          <a:cs typeface="Meiryo UI" pitchFamily="34" charset="-120"/>
-                        </a:rPr>
-                        <a:t>基準・規定改定チーム: 品質保証部門L+R&amp;D+工場QA(改定オーナーは品質保証=社内正統性)</a:t>
-                      </a:r>
-                      <a:endParaRPr lang="en-US" sz="690" dirty="0">
-                        <a:latin typeface="Meiryo UI" charset="0"/>
-                        <a:ea typeface="Meiryo UI" charset="0"/>
-                        <a:cs typeface="Meiryo UI" charset="0"/>
-                      </a:endParaRPr>
-                    </a:p>
-                  </a:txBody>
-                  <a:tcPr marL="32004" marR="32004" marT="32004" marB="32004" anchor="ctr">
-                    <a:lnL w="6350" cap="flat" cmpd="sng" algn="ctr">
-                      <a:solidFill>
-                        <a:srgbClr val="D3DED0"/>
-                      </a:solidFill>
-                      <a:prstDash val="solid"/>
-                      <a:round/>
-                      <a:headEnd type="none" w="med" len="med"/>
-                      <a:tailEnd type="none" w="med" len="med"/>
-                    </a:lnL>
-                    <a:lnR w="6350" cap="flat" cmpd="sng" algn="ctr">
-                      <a:solidFill>
-                        <a:srgbClr val="D3DED0"/>
-                      </a:solidFill>
-                      <a:prstDash val="solid"/>
-                      <a:round/>
-                      <a:headEnd type="none" w="med" len="med"/>
-                      <a:tailEnd type="none" w="med" len="med"/>
-                    </a:lnR>
-                    <a:lnT w="6350" cap="flat" cmpd="sng" algn="ctr">
-                      <a:solidFill>
-                        <a:srgbClr val="D3DED0"/>
-                      </a:solidFill>
-                      <a:prstDash val="solid"/>
-                      <a:round/>
-                      <a:headEnd type="none" w="med" len="med"/>
-                      <a:tailEnd type="none" w="med" len="med"/>
-                    </a:lnT>
-                    <a:lnB w="6350" cap="flat" cmpd="sng" algn="ctr">
-                      <a:solidFill>
-                        <a:srgbClr val="D3DED0"/>
-                      </a:solidFill>
-                      <a:prstDash val="solid"/>
-                      <a:round/>
-                      <a:headEnd type="none" w="med" len="med"/>
-                      <a:tailEnd type="none" w="med" len="med"/>
-                    </a:lnB>
-                  </a:tcPr>
-                </a:tc>
-                <a:tc>
-                  <a:txBody>
-                    <a:bodyPr/>
-                    <a:lstStyle/>
-                    <a:p>
-                      <a:pPr indent="0" marL="0">
-                        <a:buNone/>
-                      </a:pPr>
-                      <a:r>
-                        <a:rPr lang="en-US" sz="690" dirty="0">
-                          <a:solidFill>
-                            <a:srgbClr val="2B2B2B"/>
-                          </a:solidFill>
-                          <a:latin typeface="Meiryo UI" pitchFamily="34" charset="0"/>
-                          <a:ea typeface="Meiryo UI" pitchFamily="34" charset="-122"/>
-                          <a:cs typeface="Meiryo UI" pitchFamily="34" charset="-120"/>
-                        </a:rPr>
-                        <a:t>26/9台帳→26/12方針合意→27/6改定第1弾</a:t>
-                      </a:r>
-                      <a:endParaRPr lang="en-US" sz="690" dirty="0">
-                        <a:latin typeface="Meiryo UI" charset="0"/>
-                        <a:ea typeface="Meiryo UI" charset="0"/>
-                        <a:cs typeface="Meiryo UI" charset="0"/>
-                      </a:endParaRPr>
-                    </a:p>
-                  </a:txBody>
-                  <a:tcPr marL="32004" marR="32004" marT="32004" marB="32004" anchor="ctr">
-                    <a:lnL w="6350" cap="flat" cmpd="sng" algn="ctr">
-                      <a:solidFill>
-                        <a:srgbClr val="D3DED0"/>
-                      </a:solidFill>
-                      <a:prstDash val="solid"/>
-                      <a:round/>
-                      <a:headEnd type="none" w="med" len="med"/>
-                      <a:tailEnd type="none" w="med" len="med"/>
-                    </a:lnL>
-                    <a:lnR w="6350" cap="flat" cmpd="sng" algn="ctr">
-                      <a:solidFill>
-                        <a:srgbClr val="D3DED0"/>
-                      </a:solidFill>
-                      <a:prstDash val="solid"/>
-                      <a:round/>
-                      <a:headEnd type="none" w="med" len="med"/>
-                      <a:tailEnd type="none" w="med" len="med"/>
-                    </a:lnR>
-                    <a:lnT w="6350" cap="flat" cmpd="sng" algn="ctr">
-                      <a:solidFill>
-                        <a:srgbClr val="D3DED0"/>
-                      </a:solidFill>
-                      <a:prstDash val="solid"/>
-                      <a:round/>
-                      <a:headEnd type="none" w="med" len="med"/>
-                      <a:tailEnd type="none" w="med" len="med"/>
-                    </a:lnT>
-                    <a:lnB w="6350" cap="flat" cmpd="sng" algn="ctr">
-                      <a:solidFill>
-                        <a:srgbClr val="D3DED0"/>
-                      </a:solidFill>
-                      <a:prstDash val="solid"/>
-                      <a:round/>
-                      <a:headEnd type="none" w="med" len="med"/>
-                      <a:tailEnd type="none" w="med" len="med"/>
-                    </a:lnB>
-                  </a:tcPr>
-                </a:tc>
-              </a:tr>
-              <a:tr h="475488">
-                <a:tc>
-                  <a:txBody>
-                    <a:bodyPr/>
-                    <a:lstStyle/>
-                    <a:p>
-                      <a:pPr indent="0" marL="0">
-                        <a:buNone/>
-                      </a:pPr>
-                      <a:r>
-                        <a:rPr lang="en-US" sz="690" b="1" dirty="0">
-                          <a:solidFill>
-                            <a:srgbClr val="2B2B2B"/>
-                          </a:solidFill>
-                          <a:latin typeface="Meiryo UI" pitchFamily="34" charset="0"/>
-                          <a:ea typeface="Meiryo UI" pitchFamily="34" charset="-122"/>
-                          <a:cs typeface="Meiryo UI" pitchFamily="34" charset="-120"/>
-                        </a:rPr>
-                        <a:t>② プロセス再設計</a:t>
-                      </a:r>
-                      <a:endParaRPr lang="en-US" sz="690" dirty="0">
-                        <a:latin typeface="Meiryo UI" charset="0"/>
-                        <a:ea typeface="Meiryo UI" charset="0"/>
-                        <a:cs typeface="Meiryo UI" charset="0"/>
-                      </a:endParaRPr>
-                    </a:p>
-                    <a:p>
-                      <a:pPr indent="0" marL="0">
-                        <a:buNone/>
-                      </a:pPr>
-                      <a:r>
-                        <a:rPr lang="en-US" sz="690" b="1" dirty="0">
-                          <a:solidFill>
-                            <a:srgbClr val="2B2B2B"/>
-                          </a:solidFill>
-                          <a:latin typeface="Meiryo UI" pitchFamily="34" charset="0"/>
-                          <a:ea typeface="Meiryo UI" pitchFamily="34" charset="-122"/>
-                          <a:cs typeface="Meiryo UI" pitchFamily="34" charset="-120"/>
-                        </a:rPr>
-                        <a:t>=減らす</a:t>
-                      </a:r>
-                      <a:endParaRPr lang="en-US" sz="690" dirty="0">
-                        <a:latin typeface="Meiryo UI" charset="0"/>
-                        <a:ea typeface="Meiryo UI" charset="0"/>
-                        <a:cs typeface="Meiryo UI" charset="0"/>
-                      </a:endParaRPr>
-                    </a:p>
-                  </a:txBody>
-                  <a:tcPr marL="32004" marR="32004" marT="32004" marB="32004" anchor="ctr">
-                    <a:lnL w="6350" cap="flat" cmpd="sng" algn="ctr">
-                      <a:solidFill>
-                        <a:srgbClr val="D3DED0"/>
-                      </a:solidFill>
-                      <a:prstDash val="solid"/>
-                      <a:round/>
-                      <a:headEnd type="none" w="med" len="med"/>
-                      <a:tailEnd type="none" w="med" len="med"/>
-                    </a:lnL>
-                    <a:lnR w="6350" cap="flat" cmpd="sng" algn="ctr">
-                      <a:solidFill>
-                        <a:srgbClr val="D3DED0"/>
-                      </a:solidFill>
-                      <a:prstDash val="solid"/>
-                      <a:round/>
-                      <a:headEnd type="none" w="med" len="med"/>
-                      <a:tailEnd type="none" w="med" len="med"/>
-                    </a:lnR>
-                    <a:lnT w="6350" cap="flat" cmpd="sng" algn="ctr">
-                      <a:solidFill>
-                        <a:srgbClr val="D3DED0"/>
-                      </a:solidFill>
-                      <a:prstDash val="solid"/>
-                      <a:round/>
-                      <a:headEnd type="none" w="med" len="med"/>
-                      <a:tailEnd type="none" w="med" len="med"/>
-                    </a:lnT>
-                    <a:lnB w="6350" cap="flat" cmpd="sng" algn="ctr">
-                      <a:solidFill>
-                        <a:srgbClr val="D3DED0"/>
-                      </a:solidFill>
-                      <a:prstDash val="solid"/>
-                      <a:round/>
-                      <a:headEnd type="none" w="med" len="med"/>
-                      <a:tailEnd type="none" w="med" len="med"/>
-                    </a:lnB>
-                    <a:solidFill>
-                      <a:srgbClr val="DFEBDB"/>
-                    </a:solidFill>
-                  </a:tcPr>
-                </a:tc>
-                <a:tc>
-                  <a:txBody>
-                    <a:bodyPr/>
-                    <a:lstStyle/>
-                    <a:p>
-                      <a:pPr indent="0" marL="0">
-                        <a:buNone/>
-                      </a:pPr>
-                      <a:r>
-                        <a:rPr lang="en-US" sz="690" dirty="0">
-                          <a:solidFill>
-                            <a:srgbClr val="2B2B2B"/>
-                          </a:solidFill>
-                          <a:latin typeface="Meiryo UI" pitchFamily="34" charset="0"/>
-                          <a:ea typeface="Meiryo UI" pitchFamily="34" charset="-122"/>
-                          <a:cs typeface="Meiryo UI" pitchFamily="34" charset="-120"/>
-                        </a:rPr>
-                        <a:t>改定後基準を前提にECRSで再設計。B停止の原因潰し込み・復旧標準化・SMED・A停止再設計で効果の食い潰し防止。重複削除(二重検査/重複記録)・セルフ化(源流管理/自主保全)・集約化(監視/供給/QA共通化)・権限委譲(復旧承認の現場化)を網羅適用</a:t>
-                      </a:r>
-                      <a:endParaRPr lang="en-US" sz="690" dirty="0">
-                        <a:latin typeface="Meiryo UI" charset="0"/>
-                        <a:ea typeface="Meiryo UI" charset="0"/>
-                        <a:cs typeface="Meiryo UI" charset="0"/>
-                      </a:endParaRPr>
-                    </a:p>
-                  </a:txBody>
-                  <a:tcPr marL="32004" marR="32004" marT="32004" marB="32004" anchor="ctr">
-                    <a:lnL w="6350" cap="flat" cmpd="sng" algn="ctr">
-                      <a:solidFill>
-                        <a:srgbClr val="D3DED0"/>
-                      </a:solidFill>
-                      <a:prstDash val="solid"/>
-                      <a:round/>
-                      <a:headEnd type="none" w="med" len="med"/>
-                      <a:tailEnd type="none" w="med" len="med"/>
-                    </a:lnL>
-                    <a:lnR w="6350" cap="flat" cmpd="sng" algn="ctr">
-                      <a:solidFill>
-                        <a:srgbClr val="D3DED0"/>
-                      </a:solidFill>
-                      <a:prstDash val="solid"/>
-                      <a:round/>
-                      <a:headEnd type="none" w="med" len="med"/>
-                      <a:tailEnd type="none" w="med" len="med"/>
-                    </a:lnR>
-                    <a:lnT w="6350" cap="flat" cmpd="sng" algn="ctr">
-                      <a:solidFill>
-                        <a:srgbClr val="D3DED0"/>
-                      </a:solidFill>
-                      <a:prstDash val="solid"/>
-                      <a:round/>
-                      <a:headEnd type="none" w="med" len="med"/>
-                      <a:tailEnd type="none" w="med" len="med"/>
-                    </a:lnT>
-                    <a:lnB w="6350" cap="flat" cmpd="sng" algn="ctr">
-                      <a:solidFill>
-                        <a:srgbClr val="D3DED0"/>
-                      </a:solidFill>
-                      <a:prstDash val="solid"/>
-                      <a:round/>
-                      <a:headEnd type="none" w="med" len="med"/>
-                      <a:tailEnd type="none" w="med" len="med"/>
-                    </a:lnB>
-                  </a:tcPr>
-                </a:tc>
-                <a:tc>
-                  <a:txBody>
-                    <a:bodyPr/>
-                    <a:lstStyle/>
-                    <a:p>
-                      <a:pPr indent="0" marL="0">
-                        <a:buNone/>
-                      </a:pPr>
-                      <a:r>
-                        <a:rPr lang="en-US" sz="690" b="1" dirty="0">
-                          <a:solidFill>
-                            <a:srgbClr val="2B2B2B"/>
-                          </a:solidFill>
-                          <a:latin typeface="Meiryo UI" pitchFamily="34" charset="0"/>
-                          <a:ea typeface="Meiryo UI" pitchFamily="34" charset="-122"/>
-                          <a:cs typeface="Meiryo UI" pitchFamily="34" charset="-120"/>
-                        </a:rPr>
-                        <a:t>▲8〜12名</a:t>
-                      </a:r>
-                      <a:endParaRPr lang="en-US" sz="690" dirty="0">
-                        <a:latin typeface="Meiryo UI" charset="0"/>
-                        <a:ea typeface="Meiryo UI" charset="0"/>
-                        <a:cs typeface="Meiryo UI" charset="0"/>
-                      </a:endParaRPr>
-                    </a:p>
-                  </a:txBody>
-                  <a:tcPr marL="32004" marR="32004" marT="32004" marB="32004" anchor="ctr">
-                    <a:lnL w="6350" cap="flat" cmpd="sng" algn="ctr">
-                      <a:solidFill>
-                        <a:srgbClr val="D3DED0"/>
-                      </a:solidFill>
-                      <a:prstDash val="solid"/>
-                      <a:round/>
-                      <a:headEnd type="none" w="med" len="med"/>
-                      <a:tailEnd type="none" w="med" len="med"/>
-                    </a:lnL>
-                    <a:lnR w="6350" cap="flat" cmpd="sng" algn="ctr">
-                      <a:solidFill>
-                        <a:srgbClr val="D3DED0"/>
-                      </a:solidFill>
-                      <a:prstDash val="solid"/>
-                      <a:round/>
-                      <a:headEnd type="none" w="med" len="med"/>
-                      <a:tailEnd type="none" w="med" len="med"/>
-                    </a:lnR>
-                    <a:lnT w="6350" cap="flat" cmpd="sng" algn="ctr">
-                      <a:solidFill>
-                        <a:srgbClr val="D3DED0"/>
-                      </a:solidFill>
-                      <a:prstDash val="solid"/>
-                      <a:round/>
-                      <a:headEnd type="none" w="med" len="med"/>
-                      <a:tailEnd type="none" w="med" len="med"/>
-                    </a:lnT>
-                    <a:lnB w="6350" cap="flat" cmpd="sng" algn="ctr">
-                      <a:solidFill>
-                        <a:srgbClr val="D3DED0"/>
-                      </a:solidFill>
-                      <a:prstDash val="solid"/>
-                      <a:round/>
-                      <a:headEnd type="none" w="med" len="med"/>
-                      <a:tailEnd type="none" w="med" len="med"/>
-                    </a:lnB>
-                  </a:tcPr>
-                </a:tc>
-                <a:tc>
-                  <a:txBody>
-                    <a:bodyPr/>
-                    <a:lstStyle/>
-                    <a:p>
-                      <a:pPr indent="0" marL="0">
-                        <a:buNone/>
-                      </a:pPr>
-                      <a:r>
-                        <a:rPr lang="en-US" sz="690" dirty="0">
-                          <a:solidFill>
-                            <a:srgbClr val="2B2B2B"/>
-                          </a:solidFill>
-                          <a:latin typeface="Meiryo UI" pitchFamily="34" charset="0"/>
-                          <a:ea typeface="Meiryo UI" pitchFamily="34" charset="-122"/>
-                          <a:cs typeface="Meiryo UI" pitchFamily="34" charset="-120"/>
-                        </a:rPr>
-                        <a:t>業務プロセス改善チーム: 明石工場(中林氏)L+プロ包技室+製造現場</a:t>
-                      </a:r>
-                      <a:endParaRPr lang="en-US" sz="690" dirty="0">
-                        <a:latin typeface="Meiryo UI" charset="0"/>
-                        <a:ea typeface="Meiryo UI" charset="0"/>
-                        <a:cs typeface="Meiryo UI" charset="0"/>
-                      </a:endParaRPr>
-                    </a:p>
-                  </a:txBody>
-                  <a:tcPr marL="32004" marR="32004" marT="32004" marB="32004" anchor="ctr">
-                    <a:lnL w="6350" cap="flat" cmpd="sng" algn="ctr">
-                      <a:solidFill>
-                        <a:srgbClr val="D3DED0"/>
-                      </a:solidFill>
-                      <a:prstDash val="solid"/>
-                      <a:round/>
-                      <a:headEnd type="none" w="med" len="med"/>
-                      <a:tailEnd type="none" w="med" len="med"/>
-                    </a:lnL>
-                    <a:lnR w="6350" cap="flat" cmpd="sng" algn="ctr">
-                      <a:solidFill>
-                        <a:srgbClr val="D3DED0"/>
-                      </a:solidFill>
-                      <a:prstDash val="solid"/>
-                      <a:round/>
-                      <a:headEnd type="none" w="med" len="med"/>
-                      <a:tailEnd type="none" w="med" len="med"/>
-                    </a:lnR>
-                    <a:lnT w="6350" cap="flat" cmpd="sng" algn="ctr">
-                      <a:solidFill>
-                        <a:srgbClr val="D3DED0"/>
-                      </a:solidFill>
-                      <a:prstDash val="solid"/>
-                      <a:round/>
-                      <a:headEnd type="none" w="med" len="med"/>
-                      <a:tailEnd type="none" w="med" len="med"/>
-                    </a:lnT>
-                    <a:lnB w="6350" cap="flat" cmpd="sng" algn="ctr">
-                      <a:solidFill>
-                        <a:srgbClr val="D3DED0"/>
-                      </a:solidFill>
-                      <a:prstDash val="solid"/>
-                      <a:round/>
-                      <a:headEnd type="none" w="med" len="med"/>
-                      <a:tailEnd type="none" w="med" len="med"/>
-                    </a:lnB>
-                  </a:tcPr>
-                </a:tc>
-                <a:tc>
-                  <a:txBody>
-                    <a:bodyPr/>
-                    <a:lstStyle/>
-                    <a:p>
-                      <a:pPr indent="0" marL="0">
-                        <a:buNone/>
-                      </a:pPr>
-                      <a:r>
-                        <a:rPr lang="en-US" sz="690" dirty="0">
-                          <a:solidFill>
-                            <a:srgbClr val="2B2B2B"/>
-                          </a:solidFill>
-                          <a:latin typeface="Meiryo UI" pitchFamily="34" charset="0"/>
-                          <a:ea typeface="Meiryo UI" pitchFamily="34" charset="-122"/>
-                          <a:cs typeface="Meiryo UI" pitchFamily="34" charset="-120"/>
-                        </a:rPr>
-                        <a:t>26/11分析→27/12実装</a:t>
-                      </a:r>
-                      <a:endParaRPr lang="en-US" sz="690" dirty="0">
-                        <a:latin typeface="Meiryo UI" charset="0"/>
-                        <a:ea typeface="Meiryo UI" charset="0"/>
-                        <a:cs typeface="Meiryo UI" charset="0"/>
-                      </a:endParaRPr>
-                    </a:p>
-                  </a:txBody>
-                  <a:tcPr marL="32004" marR="32004" marT="32004" marB="32004" anchor="ctr">
-                    <a:lnL w="6350" cap="flat" cmpd="sng" algn="ctr">
-                      <a:solidFill>
-                        <a:srgbClr val="D3DED0"/>
-                      </a:solidFill>
-                      <a:prstDash val="solid"/>
-                      <a:round/>
-                      <a:headEnd type="none" w="med" len="med"/>
-                      <a:tailEnd type="none" w="med" len="med"/>
-                    </a:lnL>
-                    <a:lnR w="6350" cap="flat" cmpd="sng" algn="ctr">
-                      <a:solidFill>
-                        <a:srgbClr val="D3DED0"/>
-                      </a:solidFill>
-                      <a:prstDash val="solid"/>
-                      <a:round/>
-                      <a:headEnd type="none" w="med" len="med"/>
-                      <a:tailEnd type="none" w="med" len="med"/>
-                    </a:lnR>
-                    <a:lnT w="6350" cap="flat" cmpd="sng" algn="ctr">
-                      <a:solidFill>
-                        <a:srgbClr val="D3DED0"/>
-                      </a:solidFill>
-                      <a:prstDash val="solid"/>
-                      <a:round/>
-                      <a:headEnd type="none" w="med" len="med"/>
-                      <a:tailEnd type="none" w="med" len="med"/>
-                    </a:lnT>
-                    <a:lnB w="6350" cap="flat" cmpd="sng" algn="ctr">
-                      <a:solidFill>
-                        <a:srgbClr val="D3DED0"/>
-                      </a:solidFill>
-                      <a:prstDash val="solid"/>
-                      <a:round/>
-                      <a:headEnd type="none" w="med" len="med"/>
-                      <a:tailEnd type="none" w="med" len="med"/>
-                    </a:lnB>
-                  </a:tcPr>
-                </a:tc>
-              </a:tr>
-              <a:tr h="475488">
-                <a:tc>
-                  <a:txBody>
-                    <a:bodyPr/>
-                    <a:lstStyle/>
-                    <a:p>
-                      <a:pPr indent="0" marL="0">
-                        <a:buNone/>
-                      </a:pPr>
-                      <a:r>
-                        <a:rPr lang="en-US" sz="690" b="1" dirty="0">
-                          <a:solidFill>
-                            <a:srgbClr val="2B2B2B"/>
-                          </a:solidFill>
-                          <a:latin typeface="Meiryo UI" pitchFamily="34" charset="0"/>
-                          <a:ea typeface="Meiryo UI" pitchFamily="34" charset="-122"/>
-                          <a:cs typeface="Meiryo UI" pitchFamily="34" charset="-120"/>
-                        </a:rPr>
-                        <a:t>③ 実行手段の割当て</a:t>
-                      </a:r>
-                      <a:endParaRPr lang="en-US" sz="690" dirty="0">
-                        <a:latin typeface="Meiryo UI" charset="0"/>
-                        <a:ea typeface="Meiryo UI" charset="0"/>
-                        <a:cs typeface="Meiryo UI" charset="0"/>
-                      </a:endParaRPr>
-                    </a:p>
-                    <a:p>
-                      <a:pPr indent="0" marL="0">
-                        <a:buNone/>
-                      </a:pPr>
-                      <a:r>
-                        <a:rPr lang="en-US" sz="690" b="1" dirty="0">
-                          <a:solidFill>
-                            <a:srgbClr val="2B2B2B"/>
-                          </a:solidFill>
-                          <a:latin typeface="Meiryo UI" pitchFamily="34" charset="0"/>
-                          <a:ea typeface="Meiryo UI" pitchFamily="34" charset="-122"/>
-                          <a:cs typeface="Meiryo UI" pitchFamily="34" charset="-120"/>
-                        </a:rPr>
-                        <a:t>=置き換える</a:t>
-                      </a:r>
-                      <a:endParaRPr lang="en-US" sz="690" dirty="0">
-                        <a:latin typeface="Meiryo UI" charset="0"/>
-                        <a:ea typeface="Meiryo UI" charset="0"/>
-                        <a:cs typeface="Meiryo UI" charset="0"/>
-                      </a:endParaRPr>
-                    </a:p>
-                  </a:txBody>
-                  <a:tcPr marL="32004" marR="32004" marT="32004" marB="32004" anchor="ctr">
-                    <a:lnL w="6350" cap="flat" cmpd="sng" algn="ctr">
-                      <a:solidFill>
-                        <a:srgbClr val="D3DED0"/>
-                      </a:solidFill>
-                      <a:prstDash val="solid"/>
-                      <a:round/>
-                      <a:headEnd type="none" w="med" len="med"/>
-                      <a:tailEnd type="none" w="med" len="med"/>
-                    </a:lnL>
-                    <a:lnR w="6350" cap="flat" cmpd="sng" algn="ctr">
-                      <a:solidFill>
-                        <a:srgbClr val="D3DED0"/>
-                      </a:solidFill>
-                      <a:prstDash val="solid"/>
-                      <a:round/>
-                      <a:headEnd type="none" w="med" len="med"/>
-                      <a:tailEnd type="none" w="med" len="med"/>
-                    </a:lnR>
-                    <a:lnT w="6350" cap="flat" cmpd="sng" algn="ctr">
-                      <a:solidFill>
-                        <a:srgbClr val="D3DED0"/>
-                      </a:solidFill>
-                      <a:prstDash val="solid"/>
-                      <a:round/>
-                      <a:headEnd type="none" w="med" len="med"/>
-                      <a:tailEnd type="none" w="med" len="med"/>
-                    </a:lnT>
-                    <a:lnB w="6350" cap="flat" cmpd="sng" algn="ctr">
-                      <a:solidFill>
-                        <a:srgbClr val="D3DED0"/>
-                      </a:solidFill>
-                      <a:prstDash val="solid"/>
-                      <a:round/>
-                      <a:headEnd type="none" w="med" len="med"/>
-                      <a:tailEnd type="none" w="med" len="med"/>
-                    </a:lnB>
-                    <a:solidFill>
-                      <a:srgbClr val="DFEBDB"/>
-                    </a:solidFill>
-                  </a:tcPr>
-                </a:tc>
-                <a:tc>
-                  <a:txBody>
-                    <a:bodyPr/>
-                    <a:lstStyle/>
-                    <a:p>
-                      <a:pPr indent="0" marL="0">
-                        <a:buNone/>
-                      </a:pPr>
-                      <a:r>
-                        <a:rPr lang="en-US" sz="690" dirty="0">
-                          <a:solidFill>
-                            <a:srgbClr val="2B2B2B"/>
-                          </a:solidFill>
-                          <a:latin typeface="Meiryo UI" pitchFamily="34" charset="0"/>
-                          <a:ea typeface="Meiryo UI" pitchFamily="34" charset="-122"/>
-                          <a:cs typeface="Meiryo UI" pitchFamily="34" charset="-120"/>
-                        </a:rPr>
-                        <a:t>残存作業のみに人/フィジカルAI(供給・箱詰)/自動検査装置/AMRを最適割当て。要件は「改定後の基準・プロセス」を前提に凍結(Fit to Standard)。非コア業務の外部化はスリム化後に判断</a:t>
-                      </a:r>
-                      <a:endParaRPr lang="en-US" sz="690" dirty="0">
-                        <a:latin typeface="Meiryo UI" charset="0"/>
-                        <a:ea typeface="Meiryo UI" charset="0"/>
-                        <a:cs typeface="Meiryo UI" charset="0"/>
-                      </a:endParaRPr>
-                    </a:p>
-                  </a:txBody>
-                  <a:tcPr marL="32004" marR="32004" marT="32004" marB="32004" anchor="ctr">
-                    <a:lnL w="6350" cap="flat" cmpd="sng" algn="ctr">
-                      <a:solidFill>
-                        <a:srgbClr val="D3DED0"/>
-                      </a:solidFill>
-                      <a:prstDash val="solid"/>
-                      <a:round/>
-                      <a:headEnd type="none" w="med" len="med"/>
-                      <a:tailEnd type="none" w="med" len="med"/>
-                    </a:lnL>
-                    <a:lnR w="6350" cap="flat" cmpd="sng" algn="ctr">
-                      <a:solidFill>
-                        <a:srgbClr val="D3DED0"/>
-                      </a:solidFill>
-                      <a:prstDash val="solid"/>
-                      <a:round/>
-                      <a:headEnd type="none" w="med" len="med"/>
-                      <a:tailEnd type="none" w="med" len="med"/>
-                    </a:lnR>
-                    <a:lnT w="6350" cap="flat" cmpd="sng" algn="ctr">
-                      <a:solidFill>
-                        <a:srgbClr val="D3DED0"/>
-                      </a:solidFill>
-                      <a:prstDash val="solid"/>
-                      <a:round/>
-                      <a:headEnd type="none" w="med" len="med"/>
-                      <a:tailEnd type="none" w="med" len="med"/>
-                    </a:lnT>
-                    <a:lnB w="6350" cap="flat" cmpd="sng" algn="ctr">
-                      <a:solidFill>
-                        <a:srgbClr val="D3DED0"/>
-                      </a:solidFill>
-                      <a:prstDash val="solid"/>
-                      <a:round/>
-                      <a:headEnd type="none" w="med" len="med"/>
-                      <a:tailEnd type="none" w="med" len="med"/>
-                    </a:lnB>
-                  </a:tcPr>
-                </a:tc>
-                <a:tc>
-                  <a:txBody>
-                    <a:bodyPr/>
-                    <a:lstStyle/>
-                    <a:p>
-                      <a:pPr indent="0" marL="0">
-                        <a:buNone/>
-                      </a:pPr>
-                      <a:r>
-                        <a:rPr lang="en-US" sz="690" b="1" dirty="0">
-                          <a:solidFill>
-                            <a:srgbClr val="2B2B2B"/>
-                          </a:solidFill>
-                          <a:latin typeface="Meiryo UI" pitchFamily="34" charset="0"/>
-                          <a:ea typeface="Meiryo UI" pitchFamily="34" charset="-122"/>
-                          <a:cs typeface="Meiryo UI" pitchFamily="34" charset="-120"/>
-                        </a:rPr>
-                        <a:t>▲25〜30名</a:t>
-                      </a:r>
-                      <a:endParaRPr lang="en-US" sz="690" dirty="0">
-                        <a:latin typeface="Meiryo UI" charset="0"/>
-                        <a:ea typeface="Meiryo UI" charset="0"/>
-                        <a:cs typeface="Meiryo UI" charset="0"/>
-                      </a:endParaRPr>
-                    </a:p>
-                  </a:txBody>
-                  <a:tcPr marL="32004" marR="32004" marT="32004" marB="32004" anchor="ctr">
-                    <a:lnL w="6350" cap="flat" cmpd="sng" algn="ctr">
-                      <a:solidFill>
-                        <a:srgbClr val="D3DED0"/>
-                      </a:solidFill>
-                      <a:prstDash val="solid"/>
-                      <a:round/>
-                      <a:headEnd type="none" w="med" len="med"/>
-                      <a:tailEnd type="none" w="med" len="med"/>
-                    </a:lnL>
-                    <a:lnR w="6350" cap="flat" cmpd="sng" algn="ctr">
-                      <a:solidFill>
-                        <a:srgbClr val="D3DED0"/>
-                      </a:solidFill>
-                      <a:prstDash val="solid"/>
-                      <a:round/>
-                      <a:headEnd type="none" w="med" len="med"/>
-                      <a:tailEnd type="none" w="med" len="med"/>
-                    </a:lnR>
-                    <a:lnT w="6350" cap="flat" cmpd="sng" algn="ctr">
-                      <a:solidFill>
-                        <a:srgbClr val="D3DED0"/>
-                      </a:solidFill>
-                      <a:prstDash val="solid"/>
-                      <a:round/>
-                      <a:headEnd type="none" w="med" len="med"/>
-                      <a:tailEnd type="none" w="med" len="med"/>
-                    </a:lnT>
-                    <a:lnB w="6350" cap="flat" cmpd="sng" algn="ctr">
-                      <a:solidFill>
-                        <a:srgbClr val="D3DED0"/>
-                      </a:solidFill>
-                      <a:prstDash val="solid"/>
-                      <a:round/>
-                      <a:headEnd type="none" w="med" len="med"/>
-                      <a:tailEnd type="none" w="med" len="med"/>
-                    </a:lnB>
-                  </a:tcPr>
-                </a:tc>
-                <a:tc>
-                  <a:txBody>
-                    <a:bodyPr/>
-                    <a:lstStyle/>
-                    <a:p>
-                      <a:pPr indent="0" marL="0">
-                        <a:buNone/>
-                      </a:pPr>
-                      <a:r>
-                        <a:rPr lang="en-US" sz="690" dirty="0">
-                          <a:solidFill>
-                            <a:srgbClr val="2B2B2B"/>
-                          </a:solidFill>
-                          <a:latin typeface="Meiryo UI" pitchFamily="34" charset="0"/>
-                          <a:ea typeface="Meiryo UI" pitchFamily="34" charset="-122"/>
-                          <a:cs typeface="Meiryo UI" pitchFamily="34" charset="-120"/>
-                        </a:rPr>
-                        <a:t>自動化・システムチーム: 生技セL+デジ戦(工場DX)+SCM戦略部(投資評価)</a:t>
-                      </a:r>
-                      <a:endParaRPr lang="en-US" sz="690" dirty="0">
-                        <a:latin typeface="Meiryo UI" charset="0"/>
-                        <a:ea typeface="Meiryo UI" charset="0"/>
-                        <a:cs typeface="Meiryo UI" charset="0"/>
-                      </a:endParaRPr>
-                    </a:p>
-                  </a:txBody>
-                  <a:tcPr marL="32004" marR="32004" marT="32004" marB="32004" anchor="ctr">
-                    <a:lnL w="6350" cap="flat" cmpd="sng" algn="ctr">
-                      <a:solidFill>
-                        <a:srgbClr val="D3DED0"/>
-                      </a:solidFill>
-                      <a:prstDash val="solid"/>
-                      <a:round/>
-                      <a:headEnd type="none" w="med" len="med"/>
-                      <a:tailEnd type="none" w="med" len="med"/>
-                    </a:lnL>
-                    <a:lnR w="6350" cap="flat" cmpd="sng" algn="ctr">
-                      <a:solidFill>
-                        <a:srgbClr val="D3DED0"/>
-                      </a:solidFill>
-                      <a:prstDash val="solid"/>
-                      <a:round/>
-                      <a:headEnd type="none" w="med" len="med"/>
-                      <a:tailEnd type="none" w="med" len="med"/>
-                    </a:lnR>
-                    <a:lnT w="6350" cap="flat" cmpd="sng" algn="ctr">
-                      <a:solidFill>
-                        <a:srgbClr val="D3DED0"/>
-                      </a:solidFill>
-                      <a:prstDash val="solid"/>
-                      <a:round/>
-                      <a:headEnd type="none" w="med" len="med"/>
-                      <a:tailEnd type="none" w="med" len="med"/>
-                    </a:lnT>
-                    <a:lnB w="6350" cap="flat" cmpd="sng" algn="ctr">
-                      <a:solidFill>
-                        <a:srgbClr val="D3DED0"/>
-                      </a:solidFill>
-                      <a:prstDash val="solid"/>
-                      <a:round/>
-                      <a:headEnd type="none" w="med" len="med"/>
-                      <a:tailEnd type="none" w="med" len="med"/>
-                    </a:lnB>
-                  </a:tcPr>
-                </a:tc>
-                <a:tc>
-                  <a:txBody>
-                    <a:bodyPr/>
-                    <a:lstStyle/>
-                    <a:p>
-                      <a:pPr indent="0" marL="0">
-                        <a:buNone/>
-                      </a:pPr>
-                      <a:r>
-                        <a:rPr lang="en-US" sz="690" dirty="0">
-                          <a:solidFill>
-                            <a:srgbClr val="2B2B2B"/>
-                          </a:solidFill>
-                          <a:latin typeface="Meiryo UI" pitchFamily="34" charset="0"/>
-                          <a:ea typeface="Meiryo UI" pitchFamily="34" charset="-122"/>
-                          <a:cs typeface="Meiryo UI" pitchFamily="34" charset="-120"/>
-                        </a:rPr>
-                        <a:t>26/12要件定義→27年PoC→28〜29実装</a:t>
-                      </a:r>
-                      <a:endParaRPr lang="en-US" sz="690" dirty="0">
-                        <a:latin typeface="Meiryo UI" charset="0"/>
-                        <a:ea typeface="Meiryo UI" charset="0"/>
-                        <a:cs typeface="Meiryo UI" charset="0"/>
-                      </a:endParaRPr>
-                    </a:p>
-                  </a:txBody>
-                  <a:tcPr marL="32004" marR="32004" marT="32004" marB="32004" anchor="ctr">
-                    <a:lnL w="6350" cap="flat" cmpd="sng" algn="ctr">
-                      <a:solidFill>
-                        <a:srgbClr val="D3DED0"/>
-                      </a:solidFill>
-                      <a:prstDash val="solid"/>
-                      <a:round/>
-                      <a:headEnd type="none" w="med" len="med"/>
-                      <a:tailEnd type="none" w="med" len="med"/>
-                    </a:lnL>
-                    <a:lnR w="6350" cap="flat" cmpd="sng" algn="ctr">
-                      <a:solidFill>
-                        <a:srgbClr val="D3DED0"/>
-                      </a:solidFill>
-                      <a:prstDash val="solid"/>
-                      <a:round/>
-                      <a:headEnd type="none" w="med" len="med"/>
-                      <a:tailEnd type="none" w="med" len="med"/>
-                    </a:lnR>
-                    <a:lnT w="6350" cap="flat" cmpd="sng" algn="ctr">
-                      <a:solidFill>
-                        <a:srgbClr val="D3DED0"/>
-                      </a:solidFill>
-                      <a:prstDash val="solid"/>
-                      <a:round/>
-                      <a:headEnd type="none" w="med" len="med"/>
-                      <a:tailEnd type="none" w="med" len="med"/>
-                    </a:lnT>
-                    <a:lnB w="6350" cap="flat" cmpd="sng" algn="ctr">
-                      <a:solidFill>
-                        <a:srgbClr val="D3DED0"/>
-                      </a:solidFill>
-                      <a:prstDash val="solid"/>
-                      <a:round/>
-                      <a:headEnd type="none" w="med" len="med"/>
-                      <a:tailEnd type="none" w="med" len="med"/>
-                    </a:lnB>
-                  </a:tcPr>
-                </a:tc>
-              </a:tr>
-            </a:tbl>
-          </a:graphicData>
-        </a:graphic>
-      </p:graphicFrame>
       <p:sp>
         <p:nvSpPr>
-          <p:cNvPr id="29" name="Text 26"/>
+          <p:cNvPr id="20" name="Text 18"/>
           <p:cNvSpPr/>
           <p:nvPr/>
         </p:nvSpPr>
         <p:spPr>
           <a:xfrm>
-            <a:off x="228600" y="4736592"/>
-            <a:ext cx="1417320" cy="402336"/>
-          </a:xfrm>
-          <a:prstGeom prst="rect">
-            <a:avLst/>
-          </a:prstGeom>
-          <a:noFill/>
-          <a:ln/>
-        </p:spPr>
-        <p:txBody>
-          <a:bodyPr wrap="square" lIns="0" tIns="0" rIns="0" bIns="0" rtlCol="0" anchor="ctr"/>
-          <a:lstStyle/>
-          <a:p>
-            <a:pPr indent="0" marL="0">
-              <a:buNone/>
-            </a:pPr>
-            <a:r>
-              <a:rPr lang="en-US" sz="750" b="1" dirty="0">
-                <a:solidFill>
-                  <a:srgbClr val="1F3D20"/>
-                </a:solidFill>
-                <a:latin typeface="Meiryo UI" pitchFamily="34" charset="0"/>
-                <a:ea typeface="Meiryo UI" pitchFamily="34" charset="-122"/>
-                <a:cs typeface="Meiryo UI" pitchFamily="34" charset="-120"/>
-              </a:rPr>
-              <a:t>効果のウォーターフォール:</a:t>
-            </a:r>
-            <a:endParaRPr lang="en-US" sz="750" dirty="0"/>
-          </a:p>
-        </p:txBody>
-      </p:sp>
-      <p:sp>
-        <p:nvSpPr>
-          <p:cNvPr id="30" name="Shape 27"/>
-          <p:cNvSpPr/>
-          <p:nvPr/>
-        </p:nvSpPr>
-        <p:spPr>
-          <a:xfrm>
-            <a:off x="1645920" y="4736592"/>
-            <a:ext cx="1417320" cy="402336"/>
-          </a:xfrm>
-          <a:prstGeom prst="roundRect">
-            <a:avLst>
-              <a:gd name="adj" fmla="val 9091"/>
-            </a:avLst>
-          </a:prstGeom>
-          <a:solidFill>
-            <a:srgbClr val="F3F8F1"/>
-          </a:solidFill>
-          <a:ln w="9525">
-            <a:solidFill>
-              <a:srgbClr val="C9DCC4"/>
-            </a:solidFill>
-            <a:prstDash val="solid"/>
-          </a:ln>
-        </p:spPr>
-      </p:sp>
-      <p:sp>
-        <p:nvSpPr>
-          <p:cNvPr id="31" name="Text 28"/>
-          <p:cNvSpPr/>
-          <p:nvPr/>
-        </p:nvSpPr>
-        <p:spPr>
-          <a:xfrm>
-            <a:off x="1691640" y="4736592"/>
-            <a:ext cx="1325880" cy="402336"/>
-          </a:xfrm>
-          <a:prstGeom prst="rect">
-            <a:avLst/>
-          </a:prstGeom>
-          <a:noFill/>
-          <a:ln/>
-        </p:spPr>
-        <p:txBody>
-          <a:bodyPr wrap="square" lIns="0" tIns="0" rIns="0" bIns="0" rtlCol="0" anchor="ctr"/>
-          <a:lstStyle/>
-          <a:p>
-            <a:pPr algn="ctr" indent="0" marL="0">
-              <a:buNone/>
-            </a:pPr>
-            <a:r>
-              <a:rPr lang="en-US" sz="640" dirty="0">
-                <a:solidFill>
-                  <a:srgbClr val="1F3D20"/>
-                </a:solidFill>
-                <a:latin typeface="Meiryo UI" pitchFamily="34" charset="0"/>
-                <a:ea typeface="Meiryo UI" pitchFamily="34" charset="-122"/>
-                <a:cs typeface="Meiryo UI" pitchFamily="34" charset="-120"/>
-              </a:rPr>
-              <a:t>現状 </a:t>
-            </a:r>
-            <a:pPr algn="ctr" indent="0" marL="0">
-              <a:buNone/>
-            </a:pPr>
-            <a:r>
-              <a:rPr lang="en-US" sz="1050" b="1" dirty="0">
-                <a:solidFill>
-                  <a:srgbClr val="1F3D20"/>
-                </a:solidFill>
-                <a:latin typeface="Meiryo UI" pitchFamily="34" charset="0"/>
-                <a:ea typeface="Meiryo UI" pitchFamily="34" charset="-122"/>
-                <a:cs typeface="Meiryo UI" pitchFamily="34" charset="-120"/>
-              </a:rPr>
-              <a:t>115名</a:t>
-            </a:r>
-            <a:endParaRPr lang="en-US" sz="640" dirty="0"/>
-          </a:p>
-        </p:txBody>
-      </p:sp>
-      <p:sp>
-        <p:nvSpPr>
-          <p:cNvPr id="32" name="Text 29"/>
-          <p:cNvSpPr/>
-          <p:nvPr/>
-        </p:nvSpPr>
-        <p:spPr>
-          <a:xfrm>
-            <a:off x="3099816" y="4736592"/>
-            <a:ext cx="219456" cy="402336"/>
-          </a:xfrm>
-          <a:prstGeom prst="rect">
-            <a:avLst/>
-          </a:prstGeom>
-          <a:noFill/>
-          <a:ln/>
-        </p:spPr>
-        <p:txBody>
-          <a:bodyPr wrap="square" lIns="0" tIns="0" rIns="0" bIns="0" rtlCol="0" anchor="ctr"/>
-          <a:lstStyle/>
-          <a:p>
-            <a:pPr algn="ctr" indent="0" marL="0">
-              <a:buNone/>
-            </a:pPr>
-            <a:r>
-              <a:rPr lang="en-US" sz="1000" b="1" dirty="0">
-                <a:solidFill>
-                  <a:srgbClr val="2C5F2D"/>
-                </a:solidFill>
-                <a:latin typeface="Meiryo UI" pitchFamily="34" charset="0"/>
-                <a:ea typeface="Meiryo UI" pitchFamily="34" charset="-122"/>
-                <a:cs typeface="Meiryo UI" pitchFamily="34" charset="-120"/>
-              </a:rPr>
-              <a:t>▶</a:t>
-            </a:r>
-            <a:endParaRPr lang="en-US" sz="1000" dirty="0"/>
-          </a:p>
-        </p:txBody>
-      </p:sp>
-      <p:sp>
-        <p:nvSpPr>
-          <p:cNvPr id="33" name="Shape 30"/>
-          <p:cNvSpPr/>
-          <p:nvPr/>
-        </p:nvSpPr>
-        <p:spPr>
-          <a:xfrm>
-            <a:off x="3319272" y="4736592"/>
-            <a:ext cx="1417320" cy="402336"/>
-          </a:xfrm>
-          <a:prstGeom prst="roundRect">
-            <a:avLst>
-              <a:gd name="adj" fmla="val 9091"/>
-            </a:avLst>
-          </a:prstGeom>
-          <a:solidFill>
-            <a:srgbClr val="F3F8F1"/>
-          </a:solidFill>
-          <a:ln w="9525">
-            <a:solidFill>
-              <a:srgbClr val="C9DCC4"/>
-            </a:solidFill>
-            <a:prstDash val="solid"/>
-          </a:ln>
-        </p:spPr>
-      </p:sp>
-      <p:sp>
-        <p:nvSpPr>
-          <p:cNvPr id="34" name="Text 31"/>
-          <p:cNvSpPr/>
-          <p:nvPr/>
-        </p:nvSpPr>
-        <p:spPr>
-          <a:xfrm>
-            <a:off x="3364992" y="4736592"/>
-            <a:ext cx="1325880" cy="402336"/>
-          </a:xfrm>
-          <a:prstGeom prst="rect">
-            <a:avLst/>
-          </a:prstGeom>
-          <a:noFill/>
-          <a:ln/>
-        </p:spPr>
-        <p:txBody>
-          <a:bodyPr wrap="square" lIns="0" tIns="0" rIns="0" bIns="0" rtlCol="0" anchor="ctr"/>
-          <a:lstStyle/>
-          <a:p>
-            <a:pPr algn="ctr" indent="0" marL="0">
-              <a:buNone/>
-            </a:pPr>
-            <a:r>
-              <a:rPr lang="en-US" sz="640" dirty="0">
-                <a:solidFill>
-                  <a:srgbClr val="1F3D20"/>
-                </a:solidFill>
-                <a:latin typeface="Meiryo UI" pitchFamily="34" charset="0"/>
-                <a:ea typeface="Meiryo UI" pitchFamily="34" charset="-122"/>
-                <a:cs typeface="Meiryo UI" pitchFamily="34" charset="-120"/>
-              </a:rPr>
-              <a:t>STEP①後 </a:t>
-            </a:r>
-            <a:pPr algn="ctr" indent="0" marL="0">
-              <a:buNone/>
-            </a:pPr>
-            <a:r>
-              <a:rPr lang="en-US" sz="1050" b="1" dirty="0">
-                <a:solidFill>
-                  <a:srgbClr val="1F3D20"/>
-                </a:solidFill>
-                <a:latin typeface="Meiryo UI" pitchFamily="34" charset="0"/>
-                <a:ea typeface="Meiryo UI" pitchFamily="34" charset="-122"/>
-                <a:cs typeface="Meiryo UI" pitchFamily="34" charset="-120"/>
-              </a:rPr>
-              <a:t>〜100名</a:t>
-            </a:r>
-            <a:endParaRPr lang="en-US" sz="640" dirty="0"/>
-          </a:p>
-        </p:txBody>
-      </p:sp>
-      <p:sp>
-        <p:nvSpPr>
-          <p:cNvPr id="35" name="Text 32"/>
-          <p:cNvSpPr/>
-          <p:nvPr/>
-        </p:nvSpPr>
-        <p:spPr>
-          <a:xfrm>
-            <a:off x="4773168" y="4736592"/>
-            <a:ext cx="219456" cy="402336"/>
-          </a:xfrm>
-          <a:prstGeom prst="rect">
-            <a:avLst/>
-          </a:prstGeom>
-          <a:noFill/>
-          <a:ln/>
-        </p:spPr>
-        <p:txBody>
-          <a:bodyPr wrap="square" lIns="0" tIns="0" rIns="0" bIns="0" rtlCol="0" anchor="ctr"/>
-          <a:lstStyle/>
-          <a:p>
-            <a:pPr algn="ctr" indent="0" marL="0">
-              <a:buNone/>
-            </a:pPr>
-            <a:r>
-              <a:rPr lang="en-US" sz="1000" b="1" dirty="0">
-                <a:solidFill>
-                  <a:srgbClr val="2C5F2D"/>
-                </a:solidFill>
-                <a:latin typeface="Meiryo UI" pitchFamily="34" charset="0"/>
-                <a:ea typeface="Meiryo UI" pitchFamily="34" charset="-122"/>
-                <a:cs typeface="Meiryo UI" pitchFamily="34" charset="-120"/>
-              </a:rPr>
-              <a:t>▶</a:t>
-            </a:r>
-            <a:endParaRPr lang="en-US" sz="1000" dirty="0"/>
-          </a:p>
-        </p:txBody>
-      </p:sp>
-      <p:sp>
-        <p:nvSpPr>
-          <p:cNvPr id="36" name="Shape 33"/>
-          <p:cNvSpPr/>
-          <p:nvPr/>
-        </p:nvSpPr>
-        <p:spPr>
-          <a:xfrm>
-            <a:off x="4992624" y="4736592"/>
-            <a:ext cx="1417320" cy="402336"/>
-          </a:xfrm>
-          <a:prstGeom prst="roundRect">
-            <a:avLst>
-              <a:gd name="adj" fmla="val 9091"/>
-            </a:avLst>
-          </a:prstGeom>
-          <a:solidFill>
-            <a:srgbClr val="F3F8F1"/>
-          </a:solidFill>
-          <a:ln w="9525">
-            <a:solidFill>
-              <a:srgbClr val="C9DCC4"/>
-            </a:solidFill>
-            <a:prstDash val="solid"/>
-          </a:ln>
-        </p:spPr>
-      </p:sp>
-      <p:sp>
-        <p:nvSpPr>
-          <p:cNvPr id="37" name="Text 34"/>
-          <p:cNvSpPr/>
-          <p:nvPr/>
-        </p:nvSpPr>
-        <p:spPr>
-          <a:xfrm>
-            <a:off x="5038344" y="4736592"/>
-            <a:ext cx="1325880" cy="402336"/>
-          </a:xfrm>
-          <a:prstGeom prst="rect">
-            <a:avLst/>
-          </a:prstGeom>
-          <a:noFill/>
-          <a:ln/>
-        </p:spPr>
-        <p:txBody>
-          <a:bodyPr wrap="square" lIns="0" tIns="0" rIns="0" bIns="0" rtlCol="0" anchor="ctr"/>
-          <a:lstStyle/>
-          <a:p>
-            <a:pPr algn="ctr" indent="0" marL="0">
-              <a:buNone/>
-            </a:pPr>
-            <a:r>
-              <a:rPr lang="en-US" sz="640" dirty="0">
-                <a:solidFill>
-                  <a:srgbClr val="1F3D20"/>
-                </a:solidFill>
-                <a:latin typeface="Meiryo UI" pitchFamily="34" charset="0"/>
-                <a:ea typeface="Meiryo UI" pitchFamily="34" charset="-122"/>
-                <a:cs typeface="Meiryo UI" pitchFamily="34" charset="-120"/>
-              </a:rPr>
-              <a:t>STEP②後 </a:t>
-            </a:r>
-            <a:pPr algn="ctr" indent="0" marL="0">
-              <a:buNone/>
-            </a:pPr>
-            <a:r>
-              <a:rPr lang="en-US" sz="1050" b="1" dirty="0">
-                <a:solidFill>
-                  <a:srgbClr val="1F3D20"/>
-                </a:solidFill>
-                <a:latin typeface="Meiryo UI" pitchFamily="34" charset="0"/>
-                <a:ea typeface="Meiryo UI" pitchFamily="34" charset="-122"/>
-                <a:cs typeface="Meiryo UI" pitchFamily="34" charset="-120"/>
-              </a:rPr>
-              <a:t>〜90名</a:t>
-            </a:r>
-            <a:endParaRPr lang="en-US" sz="640" dirty="0"/>
-          </a:p>
-        </p:txBody>
-      </p:sp>
-      <p:sp>
-        <p:nvSpPr>
-          <p:cNvPr id="38" name="Text 35"/>
-          <p:cNvSpPr/>
-          <p:nvPr/>
-        </p:nvSpPr>
-        <p:spPr>
-          <a:xfrm>
-            <a:off x="6446520" y="4736592"/>
-            <a:ext cx="219456" cy="402336"/>
-          </a:xfrm>
-          <a:prstGeom prst="rect">
-            <a:avLst/>
-          </a:prstGeom>
-          <a:noFill/>
-          <a:ln/>
-        </p:spPr>
-        <p:txBody>
-          <a:bodyPr wrap="square" lIns="0" tIns="0" rIns="0" bIns="0" rtlCol="0" anchor="ctr"/>
-          <a:lstStyle/>
-          <a:p>
-            <a:pPr algn="ctr" indent="0" marL="0">
-              <a:buNone/>
-            </a:pPr>
-            <a:r>
-              <a:rPr lang="en-US" sz="1000" b="1" dirty="0">
-                <a:solidFill>
-                  <a:srgbClr val="2C5F2D"/>
-                </a:solidFill>
-                <a:latin typeface="Meiryo UI" pitchFamily="34" charset="0"/>
-                <a:ea typeface="Meiryo UI" pitchFamily="34" charset="-122"/>
-                <a:cs typeface="Meiryo UI" pitchFamily="34" charset="-120"/>
-              </a:rPr>
-              <a:t>▶</a:t>
-            </a:r>
-            <a:endParaRPr lang="en-US" sz="1000" dirty="0"/>
-          </a:p>
-        </p:txBody>
-      </p:sp>
-      <p:sp>
-        <p:nvSpPr>
-          <p:cNvPr id="39" name="Shape 36"/>
-          <p:cNvSpPr/>
-          <p:nvPr/>
-        </p:nvSpPr>
-        <p:spPr>
-          <a:xfrm>
-            <a:off x="6665976" y="4736592"/>
-            <a:ext cx="2057400" cy="402336"/>
-          </a:xfrm>
-          <a:prstGeom prst="roundRect">
-            <a:avLst>
-              <a:gd name="adj" fmla="val 9091"/>
-            </a:avLst>
-          </a:prstGeom>
-          <a:solidFill>
-            <a:srgbClr val="2C5F2D"/>
-          </a:solidFill>
-          <a:ln w="9525">
-            <a:solidFill>
-              <a:srgbClr val="2C5F2D"/>
-            </a:solidFill>
-            <a:prstDash val="solid"/>
-          </a:ln>
-        </p:spPr>
-      </p:sp>
-      <p:sp>
-        <p:nvSpPr>
-          <p:cNvPr id="40" name="Text 37"/>
-          <p:cNvSpPr/>
-          <p:nvPr/>
-        </p:nvSpPr>
-        <p:spPr>
-          <a:xfrm>
-            <a:off x="6711696" y="4736592"/>
-            <a:ext cx="1965960" cy="402336"/>
-          </a:xfrm>
-          <a:prstGeom prst="rect">
-            <a:avLst/>
-          </a:prstGeom>
-          <a:noFill/>
-          <a:ln/>
-        </p:spPr>
-        <p:txBody>
-          <a:bodyPr wrap="square" lIns="0" tIns="0" rIns="0" bIns="0" rtlCol="0" anchor="ctr"/>
-          <a:lstStyle/>
-          <a:p>
-            <a:pPr algn="ctr" indent="0" marL="0">
-              <a:buNone/>
-            </a:pPr>
-            <a:r>
-              <a:rPr lang="en-US" sz="640" dirty="0">
-                <a:solidFill>
-                  <a:srgbClr val="FFFFFF"/>
-                </a:solidFill>
-                <a:latin typeface="Meiryo UI" pitchFamily="34" charset="0"/>
-                <a:ea typeface="Meiryo UI" pitchFamily="34" charset="-122"/>
-                <a:cs typeface="Meiryo UI" pitchFamily="34" charset="-120"/>
-              </a:rPr>
-              <a:t>STEP③後 </a:t>
-            </a:r>
-            <a:pPr algn="ctr" indent="0" marL="0">
-              <a:buNone/>
-            </a:pPr>
-            <a:r>
-              <a:rPr lang="en-US" sz="1050" b="1" dirty="0">
-                <a:solidFill>
-                  <a:srgbClr val="FFFFFF"/>
-                </a:solidFill>
-                <a:latin typeface="Meiryo UI" pitchFamily="34" charset="0"/>
-                <a:ea typeface="Meiryo UI" pitchFamily="34" charset="-122"/>
-                <a:cs typeface="Meiryo UI" pitchFamily="34" charset="-120"/>
-              </a:rPr>
-              <a:t>57〜65名(半減)</a:t>
-            </a:r>
-            <a:endParaRPr lang="en-US" sz="640" dirty="0"/>
-          </a:p>
-        </p:txBody>
-      </p:sp>
-      <p:sp>
-        <p:nvSpPr>
-          <p:cNvPr id="41" name="Text 38"/>
-          <p:cNvSpPr/>
-          <p:nvPr/>
-        </p:nvSpPr>
-        <p:spPr>
-          <a:xfrm>
-            <a:off x="228600" y="5212080"/>
-            <a:ext cx="8503920" cy="201168"/>
-          </a:xfrm>
-          <a:prstGeom prst="rect">
-            <a:avLst/>
-          </a:prstGeom>
-          <a:noFill/>
-          <a:ln/>
-        </p:spPr>
-        <p:txBody>
-          <a:bodyPr wrap="square" lIns="0" tIns="0" rIns="0" bIns="0" rtlCol="0" anchor="ctr"/>
-          <a:lstStyle/>
-          <a:p>
-            <a:pPr indent="0" marL="0">
-              <a:buNone/>
-            </a:pPr>
-            <a:r>
-              <a:rPr lang="en-US" sz="730" b="1" dirty="0">
-                <a:solidFill>
-                  <a:srgbClr val="B85042"/>
-                </a:solidFill>
-                <a:latin typeface="Meiryo UI" pitchFamily="34" charset="0"/>
-                <a:ea typeface="Meiryo UI" pitchFamily="34" charset="-122"/>
-                <a:cs typeface="Meiryo UI" pitchFamily="34" charset="-120"/>
-              </a:rPr>
-              <a:t>順序の経済価値: STEP①②の先行で③の対象作業が2〜3割減 → 植毛向けフィジカルAI 9〜15機→7〜10機に圧縮 ＝ 投資▲1〜2億円</a:t>
-            </a:r>
-            <a:endParaRPr lang="en-US" sz="730" dirty="0"/>
-          </a:p>
-        </p:txBody>
-      </p:sp>
-      <p:sp>
-        <p:nvSpPr>
-          <p:cNvPr id="42" name="Shape 39"/>
-          <p:cNvSpPr/>
-          <p:nvPr/>
-        </p:nvSpPr>
-        <p:spPr>
-          <a:xfrm>
-            <a:off x="8887968" y="2761488"/>
-            <a:ext cx="3072384" cy="969264"/>
-          </a:xfrm>
-          <a:prstGeom prst="roundRect">
-            <a:avLst>
-              <a:gd name="adj" fmla="val 4717"/>
-            </a:avLst>
-          </a:prstGeom>
-          <a:solidFill>
-            <a:srgbClr val="FBEDEA"/>
-          </a:solidFill>
-          <a:ln w="9525">
-            <a:solidFill>
-              <a:srgbClr val="B85042"/>
-            </a:solidFill>
-            <a:prstDash val="solid"/>
-          </a:ln>
-        </p:spPr>
-      </p:sp>
-      <p:sp>
-        <p:nvSpPr>
-          <p:cNvPr id="43" name="Text 40"/>
-          <p:cNvSpPr/>
-          <p:nvPr/>
-        </p:nvSpPr>
-        <p:spPr>
-          <a:xfrm>
-            <a:off x="8979408" y="2798064"/>
-            <a:ext cx="2889504" cy="201168"/>
-          </a:xfrm>
-          <a:prstGeom prst="rect">
-            <a:avLst/>
-          </a:prstGeom>
-          <a:noFill/>
-          <a:ln/>
-        </p:spPr>
-        <p:txBody>
-          <a:bodyPr wrap="square" lIns="0" tIns="0" rIns="0" bIns="0" rtlCol="0" anchor="ctr"/>
-          <a:lstStyle/>
-          <a:p>
-            <a:pPr indent="0" marL="0">
-              <a:buNone/>
-            </a:pPr>
-            <a:r>
-              <a:rPr lang="en-US" sz="1000" b="1" dirty="0">
-                <a:solidFill>
-                  <a:srgbClr val="B85042"/>
-                </a:solidFill>
-                <a:latin typeface="Meiryo UI" pitchFamily="34" charset="0"/>
-                <a:ea typeface="Meiryo UI" pitchFamily="34" charset="-122"/>
-                <a:cs typeface="Meiryo UI" pitchFamily="34" charset="-120"/>
-              </a:rPr>
-              <a:t>経営論点とQA合意の4原則</a:t>
-            </a:r>
-            <a:endParaRPr lang="en-US" sz="1000" dirty="0"/>
-          </a:p>
-        </p:txBody>
-      </p:sp>
-      <p:sp>
-        <p:nvSpPr>
-          <p:cNvPr id="44" name="Text 41"/>
-          <p:cNvSpPr/>
-          <p:nvPr/>
-        </p:nvSpPr>
-        <p:spPr>
-          <a:xfrm>
-            <a:off x="8979408" y="2999232"/>
-            <a:ext cx="2889504" cy="676656"/>
+            <a:off x="1947672" y="3355848"/>
+            <a:ext cx="2432304" cy="420624"/>
           </a:xfrm>
           <a:prstGeom prst="rect">
             <a:avLst/>
@@ -4329,15 +1799,15 @@
               <a:buNone/>
             </a:pPr>
             <a:r>
-              <a:rPr lang="en-US" sz="680" dirty="0">
+              <a:rPr lang="en-US" sz="730" dirty="0">
                 <a:solidFill>
-                  <a:srgbClr val="2B2B2B"/>
+                  <a:srgbClr val="595959"/>
                 </a:solidFill>
                 <a:latin typeface="Meiryo UI" pitchFamily="34" charset="0"/>
                 <a:ea typeface="Meiryo UI" pitchFamily="34" charset="-122"/>
                 <a:cs typeface="Meiryo UI" pitchFamily="34" charset="-120"/>
               </a:rPr>
-              <a:t>配慮スコープのみ=植毛70名台止まり/踏み込みスコープ=半減の必要条件 ⇒ 26/10役員協議へ上程
+              <a:t>主担当: 品質保証部門｜〜27/6 改定第1弾
 </a:t>
             </a:r>
             <a:pPr indent="0" marL="0">
@@ -4347,59 +1817,42 @@
               <a:buNone/>
             </a:pPr>
             <a:r>
-              <a:rPr lang="en-US" sz="680" b="1" dirty="0">
+              <a:rPr lang="en-US" sz="1000" b="1" dirty="0">
                 <a:solidFill>
-                  <a:srgbClr val="2B2B2B"/>
+                  <a:srgbClr val="2C5F2D"/>
                 </a:solidFill>
                 <a:latin typeface="Meiryo UI" pitchFamily="34" charset="0"/>
                 <a:ea typeface="Meiryo UI" pitchFamily="34" charset="-122"/>
                 <a:cs typeface="Meiryo UI" pitchFamily="34" charset="-120"/>
               </a:rPr>
-              <a:t>QA合意の4原則: </a:t>
+              <a:t>効果 ▲12〜18名</a:t>
             </a:r>
-            <a:pPr indent="0" marL="0">
-              <a:lnSpc>
-                <a:spcPct val="100000"/>
-              </a:lnSpc>
-              <a:buNone/>
-            </a:pPr>
-            <a:r>
-              <a:rPr lang="en-US" sz="680" dirty="0">
-                <a:solidFill>
-                  <a:srgbClr val="2B2B2B"/>
-                </a:solidFill>
-                <a:latin typeface="Meiryo UI" pitchFamily="34" charset="0"/>
-                <a:ea typeface="Meiryo UI" pitchFamily="34" charset="-122"/>
-                <a:cs typeface="Meiryo UI" pitchFamily="34" charset="-120"/>
-              </a:rPr>
-              <a:t>①目視の実力値を測定し並行運転で同等性以上を実証 ②FMEAでリスクベース評価 ③段階移行+QA単独のロールバック権 ④採否はQAの変更管理で決定(存続も正当な結論)</a:t>
-            </a:r>
-            <a:endParaRPr lang="en-US" sz="680" dirty="0"/>
+            <a:endParaRPr lang="en-US" sz="730" dirty="0"/>
           </a:p>
         </p:txBody>
       </p:sp>
       <p:sp>
         <p:nvSpPr>
-          <p:cNvPr id="45" name="Shape 42"/>
+          <p:cNvPr id="21" name="Shape 19"/>
           <p:cNvSpPr/>
           <p:nvPr/>
         </p:nvSpPr>
         <p:spPr>
           <a:xfrm>
-            <a:off x="8887968" y="3803904"/>
-            <a:ext cx="3072384" cy="877824"/>
+            <a:off x="4681728" y="1956816"/>
+            <a:ext cx="2651760" cy="1874520"/>
           </a:xfrm>
           <a:prstGeom prst="roundRect">
             <a:avLst>
-              <a:gd name="adj" fmla="val 5208"/>
+              <a:gd name="adj" fmla="val 2927"/>
             </a:avLst>
           </a:prstGeom>
           <a:solidFill>
             <a:srgbClr val="F3F8F1"/>
           </a:solidFill>
-          <a:ln w="9525">
+          <a:ln w="12700">
             <a:solidFill>
-              <a:srgbClr val="C9DCC4"/>
+              <a:srgbClr val="2C5F2D"/>
             </a:solidFill>
             <a:prstDash val="solid"/>
           </a:ln>
@@ -4407,14 +1860,14 @@
       </p:sp>
       <p:sp>
         <p:nvSpPr>
-          <p:cNvPr id="46" name="Text 43"/>
+          <p:cNvPr id="22" name="Text 20"/>
           <p:cNvSpPr/>
           <p:nvPr/>
         </p:nvSpPr>
         <p:spPr>
           <a:xfrm>
-            <a:off x="8979408" y="3840480"/>
-            <a:ext cx="2889504" cy="201168"/>
+            <a:off x="4791456" y="2029968"/>
+            <a:ext cx="2432304" cy="256032"/>
           </a:xfrm>
           <a:prstGeom prst="rect">
             <a:avLst/>
@@ -4430,7 +1883,7 @@
               <a:buNone/>
             </a:pPr>
             <a:r>
-              <a:rPr lang="en-US" sz="1000" b="1" dirty="0">
+              <a:rPr lang="en-US" sz="1300" b="1" dirty="0">
                 <a:solidFill>
                   <a:srgbClr val="1F3D20"/>
                 </a:solidFill>
@@ -4438,22 +1891,36 @@
                 <a:ea typeface="Meiryo UI" pitchFamily="34" charset="-122"/>
                 <a:cs typeface="Meiryo UI" pitchFamily="34" charset="-120"/>
               </a:rPr>
-              <a:t>調査の中核成果物</a:t>
+              <a:t>② 減らす  </a:t>
             </a:r>
-            <a:endParaRPr lang="en-US" sz="1000" dirty="0"/>
+            <a:pPr indent="0" marL="0">
+              <a:buNone/>
+            </a:pPr>
+            <a:r>
+              <a:rPr lang="en-US" sz="850" dirty="0">
+                <a:solidFill>
+                  <a:srgbClr val="595959"/>
+                </a:solidFill>
+                <a:latin typeface="Meiryo UI" pitchFamily="34" charset="0"/>
+                <a:ea typeface="Meiryo UI" pitchFamily="34" charset="-122"/>
+                <a:cs typeface="Meiryo UI" pitchFamily="34" charset="-120"/>
+              </a:rPr>
+              <a:t>ムダを絞る</a:t>
+            </a:r>
+            <a:endParaRPr lang="en-US" sz="1300" dirty="0"/>
           </a:p>
         </p:txBody>
       </p:sp>
       <p:sp>
         <p:nvSpPr>
-          <p:cNvPr id="47" name="Text 44"/>
+          <p:cNvPr id="23" name="Text 21"/>
           <p:cNvSpPr/>
           <p:nvPr/>
         </p:nvSpPr>
         <p:spPr>
           <a:xfrm>
-            <a:off x="8979408" y="4041648"/>
-            <a:ext cx="2889504" cy="585216"/>
+            <a:off x="4791456" y="2304288"/>
+            <a:ext cx="2432304" cy="329184"/>
           </a:xfrm>
           <a:prstGeom prst="rect">
             <a:avLst/>
@@ -4472,75 +1939,30 @@
               <a:buNone/>
             </a:pPr>
             <a:r>
-              <a:rPr lang="en-US" sz="800" b="1" dirty="0">
+              <a:rPr lang="en-US" sz="950" b="1" dirty="0">
                 <a:solidFill>
-                  <a:srgbClr val="2B2B2B"/>
+                  <a:srgbClr val="B85042"/>
                 </a:solidFill>
                 <a:latin typeface="Meiryo UI" pitchFamily="34" charset="0"/>
                 <a:ea typeface="Meiryo UI" pitchFamily="34" charset="-122"/>
                 <a:cs typeface="Meiryo UI" pitchFamily="34" charset="-120"/>
               </a:rPr>
-              <a:t>作業-規定トレーサビリティ台帳
-</a:t>
+              <a:t>「残った作業を、少なくできないか?」</a:t>
             </a:r>
-            <a:pPr indent="0" marL="0">
-              <a:lnSpc>
-                <a:spcPct val="100000"/>
-              </a:lnSpc>
-              <a:buNone/>
-            </a:pPr>
-            <a:r>
-              <a:rPr lang="en-US" sz="680" dirty="0">
-                <a:solidFill>
-                  <a:srgbClr val="2B2B2B"/>
-                </a:solidFill>
-                <a:latin typeface="Meiryo UI" pitchFamily="34" charset="0"/>
-                <a:ea typeface="Meiryo UI" pitchFamily="34" charset="-122"/>
-                <a:cs typeface="Meiryo UI" pitchFamily="34" charset="-120"/>
-              </a:rPr>
-              <a:t>全作業×要求元規定×A〜E分類×品質実績整合×改定方針×実行手段(人事PJT「課題18件一覧」の生産版)。各作業に時間創出8レバー(廃止/簡素化/重複削除/自動化/セルフ化/集約化/権限委譲/外部化)を照合し、効果の高い順に施策を一覧化=現実解の整理</a:t>
-            </a:r>
-            <a:endParaRPr lang="en-US" sz="680" dirty="0"/>
+            <a:endParaRPr lang="en-US" sz="950" dirty="0"/>
           </a:p>
         </p:txBody>
       </p:sp>
       <p:sp>
         <p:nvSpPr>
-          <p:cNvPr id="48" name="Shape 45"/>
+          <p:cNvPr id="24" name="Text 22"/>
           <p:cNvSpPr/>
           <p:nvPr/>
         </p:nvSpPr>
         <p:spPr>
           <a:xfrm>
-            <a:off x="8887968" y="4754880"/>
-            <a:ext cx="3072384" cy="841248"/>
-          </a:xfrm>
-          <a:prstGeom prst="roundRect">
-            <a:avLst>
-              <a:gd name="adj" fmla="val 5435"/>
-            </a:avLst>
-          </a:prstGeom>
-          <a:solidFill>
-            <a:srgbClr val="FBEDEA"/>
-          </a:solidFill>
-          <a:ln w="9525">
-            <a:solidFill>
-              <a:srgbClr val="B85042"/>
-            </a:solidFill>
-            <a:prstDash val="solid"/>
-          </a:ln>
-        </p:spPr>
-      </p:sp>
-      <p:sp>
-        <p:nvSpPr>
-          <p:cNvPr id="49" name="Text 46"/>
-          <p:cNvSpPr/>
-          <p:nvPr/>
-        </p:nvSpPr>
-        <p:spPr>
-          <a:xfrm>
-            <a:off x="8979408" y="4791456"/>
-            <a:ext cx="2889504" cy="201168"/>
+            <a:off x="4791456" y="2651760"/>
+            <a:ext cx="2432304" cy="658368"/>
           </a:xfrm>
           <a:prstGeom prst="rect">
             <a:avLst/>
@@ -4549,37 +1971,40 @@
           <a:ln/>
         </p:spPr>
         <p:txBody>
-          <a:bodyPr wrap="square" lIns="0" tIns="0" rIns="0" bIns="0" rtlCol="0" anchor="ctr"/>
+          <a:bodyPr wrap="square" lIns="0" tIns="0" rIns="0" bIns="0" rtlCol="0" anchor="t"/>
           <a:lstStyle/>
           <a:p>
             <a:pPr indent="0" marL="0">
+              <a:lnSpc>
+                <a:spcPct val="105000"/>
+              </a:lnSpc>
               <a:buNone/>
             </a:pPr>
             <a:r>
-              <a:rPr lang="en-US" sz="1000" b="1" dirty="0">
+              <a:rPr lang="en-US" sz="780" dirty="0">
                 <a:solidFill>
-                  <a:srgbClr val="B85042"/>
+                  <a:srgbClr val="2B2B2B"/>
                 </a:solidFill>
                 <a:latin typeface="Meiryo UI" pitchFamily="34" charset="0"/>
                 <a:ea typeface="Meiryo UI" pitchFamily="34" charset="-122"/>
                 <a:cs typeface="Meiryo UI" pitchFamily="34" charset="-120"/>
               </a:rPr>
-              <a:t>投資対効果(いくら)</a:t>
+              <a:t>二重チェックの解消・記録/点検頻度の見直し・チョコ停の原因除去・段替え短縮・複数ラインの業務の集約。</a:t>
             </a:r>
-            <a:endParaRPr lang="en-US" sz="1000" dirty="0"/>
+            <a:endParaRPr lang="en-US" sz="780" dirty="0"/>
           </a:p>
         </p:txBody>
       </p:sp>
       <p:sp>
         <p:nvSpPr>
-          <p:cNvPr id="50" name="Text 47"/>
+          <p:cNvPr id="25" name="Text 23"/>
           <p:cNvSpPr/>
           <p:nvPr/>
         </p:nvSpPr>
         <p:spPr>
           <a:xfrm>
-            <a:off x="8979408" y="4992624"/>
-            <a:ext cx="2889504" cy="548640"/>
+            <a:off x="4791456" y="3355848"/>
+            <a:ext cx="2432304" cy="420624"/>
           </a:xfrm>
           <a:prstGeom prst="rect">
             <a:avLst/>
@@ -4598,15 +2023,15 @@
               <a:buNone/>
             </a:pPr>
             <a:r>
-              <a:rPr lang="en-US" sz="1050" b="1" dirty="0">
+              <a:rPr lang="en-US" sz="730" dirty="0">
                 <a:solidFill>
-                  <a:srgbClr val="B85042"/>
+                  <a:srgbClr val="595959"/>
                 </a:solidFill>
                 <a:latin typeface="Meiryo UI" pitchFamily="34" charset="0"/>
                 <a:ea typeface="Meiryo UI" pitchFamily="34" charset="-122"/>
                 <a:cs typeface="Meiryo UI" pitchFamily="34" charset="-120"/>
               </a:rPr>
-              <a:t>年3.0〜3.5億円 + 投資圧縮1〜2億円
+              <a:t>主担当: 明石工場(中林氏)｜26/11〜27年
 </a:t>
             </a:r>
             <a:pPr indent="0" marL="0">
@@ -4616,42 +2041,42 @@
               <a:buNone/>
             </a:pPr>
             <a:r>
-              <a:rPr lang="en-US" sz="680" dirty="0">
+              <a:rPr lang="en-US" sz="1000" b="1" dirty="0">
                 <a:solidFill>
-                  <a:srgbClr val="2B2B2B"/>
+                  <a:srgbClr val="2C5F2D"/>
                 </a:solidFill>
                 <a:latin typeface="Meiryo UI" pitchFamily="34" charset="0"/>
                 <a:ea typeface="Meiryo UI" pitchFamily="34" charset="-122"/>
                 <a:cs typeface="Meiryo UI" pitchFamily="34" charset="-120"/>
               </a:rPr>
-              <a:t>基準・プロセス 年1.0〜1.5億(投資ほぼゼロ・27年〜)+自動化 年1.7〜2.2億(投資2.5〜3億)。踏み込み見送り時は効果6割前後に減衰</a:t>
+              <a:t>効果 ▲8〜12名</a:t>
             </a:r>
-            <a:endParaRPr lang="en-US" sz="1050" dirty="0"/>
+            <a:endParaRPr lang="en-US" sz="730" dirty="0"/>
           </a:p>
         </p:txBody>
       </p:sp>
       <p:sp>
         <p:nvSpPr>
-          <p:cNvPr id="51" name="Shape 48"/>
+          <p:cNvPr id="26" name="Shape 24"/>
           <p:cNvSpPr/>
           <p:nvPr/>
         </p:nvSpPr>
         <p:spPr>
           <a:xfrm>
-            <a:off x="228600" y="5687568"/>
-            <a:ext cx="1879092" cy="786384"/>
+            <a:off x="7525512" y="1956816"/>
+            <a:ext cx="2651760" cy="1874520"/>
           </a:xfrm>
           <a:prstGeom prst="roundRect">
             <a:avLst>
-              <a:gd name="adj" fmla="val 4651"/>
+              <a:gd name="adj" fmla="val 2927"/>
             </a:avLst>
           </a:prstGeom>
           <a:solidFill>
             <a:srgbClr val="F3F8F1"/>
           </a:solidFill>
-          <a:ln w="9525">
+          <a:ln w="12700">
             <a:solidFill>
-              <a:srgbClr val="C9DCC4"/>
+              <a:srgbClr val="2C5F2D"/>
             </a:solidFill>
             <a:prstDash val="solid"/>
           </a:ln>
@@ -4659,14 +2084,14 @@
       </p:sp>
       <p:sp>
         <p:nvSpPr>
-          <p:cNvPr id="52" name="Text 49"/>
+          <p:cNvPr id="27" name="Text 25"/>
           <p:cNvSpPr/>
           <p:nvPr/>
         </p:nvSpPr>
         <p:spPr>
           <a:xfrm>
-            <a:off x="301752" y="5715000"/>
-            <a:ext cx="1732788" cy="164592"/>
+            <a:off x="7635240" y="2029968"/>
+            <a:ext cx="2432304" cy="256032"/>
           </a:xfrm>
           <a:prstGeom prst="rect">
             <a:avLst/>
@@ -4682,7 +2107,7 @@
               <a:buNone/>
             </a:pPr>
             <a:r>
-              <a:rPr lang="en-US" sz="850" b="1" dirty="0">
+              <a:rPr lang="en-US" sz="1300" b="1" dirty="0">
                 <a:solidFill>
                   <a:srgbClr val="1F3D20"/>
                 </a:solidFill>
@@ -4690,22 +2115,36 @@
                 <a:ea typeface="Meiryo UI" pitchFamily="34" charset="-122"/>
                 <a:cs typeface="Meiryo UI" pitchFamily="34" charset="-120"/>
               </a:rPr>
-              <a:t>26/8</a:t>
+              <a:t>③ 置き換える  </a:t>
             </a:r>
-            <a:endParaRPr lang="en-US" sz="850" dirty="0"/>
+            <a:pPr indent="0" marL="0">
+              <a:buNone/>
+            </a:pPr>
+            <a:r>
+              <a:rPr lang="en-US" sz="850" dirty="0">
+                <a:solidFill>
+                  <a:srgbClr val="595959"/>
+                </a:solidFill>
+                <a:latin typeface="Meiryo UI" pitchFamily="34" charset="0"/>
+                <a:ea typeface="Meiryo UI" pitchFamily="34" charset="-122"/>
+                <a:cs typeface="Meiryo UI" pitchFamily="34" charset="-120"/>
+              </a:rPr>
+              <a:t>自動化する</a:t>
+            </a:r>
+            <a:endParaRPr lang="en-US" sz="1300" dirty="0"/>
           </a:p>
         </p:txBody>
       </p:sp>
       <p:sp>
         <p:nvSpPr>
-          <p:cNvPr id="53" name="Text 50"/>
+          <p:cNvPr id="28" name="Text 26"/>
           <p:cNvSpPr/>
           <p:nvPr/>
         </p:nvSpPr>
         <p:spPr>
           <a:xfrm>
-            <a:off x="301752" y="5888736"/>
-            <a:ext cx="1732788" cy="539496"/>
+            <a:off x="7635240" y="2304288"/>
+            <a:ext cx="2432304" cy="329184"/>
           </a:xfrm>
           <a:prstGeom prst="rect">
             <a:avLst/>
@@ -4724,57 +2163,30 @@
               <a:buNone/>
             </a:pPr>
             <a:r>
-              <a:rPr lang="en-US" sz="650" dirty="0">
+              <a:rPr lang="en-US" sz="950" b="1" dirty="0">
                 <a:solidFill>
-                  <a:srgbClr val="2B2B2B"/>
+                  <a:srgbClr val="B85042"/>
                 </a:solidFill>
                 <a:latin typeface="Meiryo UI" pitchFamily="34" charset="0"/>
                 <a:ea typeface="Meiryo UI" pitchFamily="34" charset="-122"/>
                 <a:cs typeface="Meiryo UI" pitchFamily="34" charset="-120"/>
               </a:rPr>
-              <a:t>3チーム組成(オーナー:内藤本部長/PMO:生技セ)・現状施策の棚卸し(二重投資排除)・調査設計</a:t>
+              <a:t>「残った作業を、機械に任せられないか?」</a:t>
             </a:r>
-            <a:endParaRPr lang="en-US" sz="650" dirty="0"/>
+            <a:endParaRPr lang="en-US" sz="950" dirty="0"/>
           </a:p>
         </p:txBody>
       </p:sp>
       <p:sp>
         <p:nvSpPr>
-          <p:cNvPr id="54" name="Shape 51"/>
+          <p:cNvPr id="29" name="Text 27"/>
           <p:cNvSpPr/>
           <p:nvPr/>
         </p:nvSpPr>
         <p:spPr>
           <a:xfrm>
-            <a:off x="2180844" y="5687568"/>
-            <a:ext cx="1879092" cy="786384"/>
-          </a:xfrm>
-          <a:prstGeom prst="roundRect">
-            <a:avLst>
-              <a:gd name="adj" fmla="val 4651"/>
-            </a:avLst>
-          </a:prstGeom>
-          <a:solidFill>
-            <a:srgbClr val="F3F8F1"/>
-          </a:solidFill>
-          <a:ln w="9525">
-            <a:solidFill>
-              <a:srgbClr val="C9DCC4"/>
-            </a:solidFill>
-            <a:prstDash val="solid"/>
-          </a:ln>
-        </p:spPr>
-      </p:sp>
-      <p:sp>
-        <p:nvSpPr>
-          <p:cNvPr id="55" name="Text 52"/>
-          <p:cNvSpPr/>
-          <p:nvPr/>
-        </p:nvSpPr>
-        <p:spPr>
-          <a:xfrm>
-            <a:off x="2253996" y="5715000"/>
-            <a:ext cx="1732788" cy="164592"/>
+            <a:off x="7635240" y="2651760"/>
+            <a:ext cx="2432304" cy="658368"/>
           </a:xfrm>
           <a:prstGeom prst="rect">
             <a:avLst/>
@@ -4783,37 +2195,40 @@
           <a:ln/>
         </p:spPr>
         <p:txBody>
-          <a:bodyPr wrap="square" lIns="0" tIns="0" rIns="0" bIns="0" rtlCol="0" anchor="ctr"/>
+          <a:bodyPr wrap="square" lIns="0" tIns="0" rIns="0" bIns="0" rtlCol="0" anchor="t"/>
           <a:lstStyle/>
           <a:p>
             <a:pPr indent="0" marL="0">
+              <a:lnSpc>
+                <a:spcPct val="105000"/>
+              </a:lnSpc>
               <a:buNone/>
             </a:pPr>
             <a:r>
-              <a:rPr lang="en-US" sz="850" b="1" dirty="0">
+              <a:rPr lang="en-US" sz="780" dirty="0">
                 <a:solidFill>
-                  <a:srgbClr val="1F3D20"/>
+                  <a:srgbClr val="2B2B2B"/>
                 </a:solidFill>
                 <a:latin typeface="Meiryo UI" pitchFamily="34" charset="0"/>
                 <a:ea typeface="Meiryo UI" pitchFamily="34" charset="-122"/>
                 <a:cs typeface="Meiryo UI" pitchFamily="34" charset="-120"/>
               </a:rPr>
-              <a:t>26/10</a:t>
+              <a:t>フィジカルAI・自動検査・AMRを割当て。①②の後に設計するため必要台数が減り、投資を1〜2億円圧縮できる。</a:t>
             </a:r>
-            <a:endParaRPr lang="en-US" sz="850" dirty="0"/>
+            <a:endParaRPr lang="en-US" sz="780" dirty="0"/>
           </a:p>
         </p:txBody>
       </p:sp>
       <p:sp>
         <p:nvSpPr>
-          <p:cNvPr id="56" name="Text 53"/>
+          <p:cNvPr id="30" name="Text 28"/>
           <p:cNvSpPr/>
           <p:nvPr/>
         </p:nvSpPr>
         <p:spPr>
           <a:xfrm>
-            <a:off x="2253996" y="5888736"/>
-            <a:ext cx="1732788" cy="539496"/>
+            <a:off x="7635240" y="3355848"/>
+            <a:ext cx="2432304" cy="420624"/>
           </a:xfrm>
           <a:prstGeom prst="rect">
             <a:avLst/>
@@ -4832,42 +2247,60 @@
               <a:buNone/>
             </a:pPr>
             <a:r>
-              <a:rPr lang="en-US" sz="650" dirty="0">
+              <a:rPr lang="en-US" sz="730" dirty="0">
                 <a:solidFill>
-                  <a:srgbClr val="2B2B2B"/>
+                  <a:srgbClr val="595959"/>
                 </a:solidFill>
                 <a:latin typeface="Meiryo UI" pitchFamily="34" charset="0"/>
                 <a:ea typeface="Meiryo UI" pitchFamily="34" charset="-122"/>
                 <a:cs typeface="Meiryo UI" pitchFamily="34" charset="-120"/>
               </a:rPr>
-              <a:t>台帳第1版(植毛115名分)+役員中間報告: 踏み込みスコープ論点を正式上程</a:t>
+              <a:t>主担当: 生技セ+デジ戦｜27年PoC→29年
+</a:t>
             </a:r>
-            <a:endParaRPr lang="en-US" sz="650" dirty="0"/>
+            <a:pPr indent="0" marL="0">
+              <a:lnSpc>
+                <a:spcPct val="100000"/>
+              </a:lnSpc>
+              <a:buNone/>
+            </a:pPr>
+            <a:r>
+              <a:rPr lang="en-US" sz="1000" b="1" dirty="0">
+                <a:solidFill>
+                  <a:srgbClr val="2C5F2D"/>
+                </a:solidFill>
+                <a:latin typeface="Meiryo UI" pitchFamily="34" charset="0"/>
+                <a:ea typeface="Meiryo UI" pitchFamily="34" charset="-122"/>
+                <a:cs typeface="Meiryo UI" pitchFamily="34" charset="-120"/>
+              </a:rPr>
+              <a:t>効果 ▲25〜30名</a:t>
+            </a:r>
+            <a:endParaRPr lang="en-US" sz="730" dirty="0"/>
           </a:p>
         </p:txBody>
       </p:sp>
       <p:sp>
         <p:nvSpPr>
-          <p:cNvPr id="57" name="Shape 54"/>
+          <p:cNvPr id="31" name="Shape 29"/>
           <p:cNvSpPr/>
           <p:nvPr/>
         </p:nvSpPr>
         <p:spPr>
           <a:xfrm>
-            <a:off x="4133088" y="5687568"/>
-            <a:ext cx="1879092" cy="786384"/>
+            <a:off x="10369296" y="1956816"/>
+            <a:ext cx="1371600" cy="1874520"/>
           </a:xfrm>
           <a:prstGeom prst="roundRect">
             <a:avLst>
-              <a:gd name="adj" fmla="val 4651"/>
+              <a:gd name="adj" fmla="val 4000"/>
             </a:avLst>
           </a:prstGeom>
           <a:solidFill>
-            <a:srgbClr val="F3F8F1"/>
+            <a:srgbClr val="2C5F2D"/>
           </a:solidFill>
-          <a:ln w="9525">
+          <a:ln w="12700">
             <a:solidFill>
-              <a:srgbClr val="C9DCC4"/>
+              <a:srgbClr val="2C5F2D"/>
             </a:solidFill>
             <a:prstDash val="solid"/>
           </a:ln>
@@ -4875,53 +2308,14 @@
       </p:sp>
       <p:sp>
         <p:nvSpPr>
-          <p:cNvPr id="58" name="Text 55"/>
+          <p:cNvPr id="32" name="Text 30"/>
           <p:cNvSpPr/>
           <p:nvPr/>
         </p:nvSpPr>
         <p:spPr>
           <a:xfrm>
-            <a:off x="4206240" y="5715000"/>
-            <a:ext cx="1732788" cy="164592"/>
-          </a:xfrm>
-          <a:prstGeom prst="rect">
-            <a:avLst/>
-          </a:prstGeom>
-          <a:noFill/>
-          <a:ln/>
-        </p:spPr>
-        <p:txBody>
-          <a:bodyPr wrap="square" lIns="0" tIns="0" rIns="0" bIns="0" rtlCol="0" anchor="ctr"/>
-          <a:lstStyle/>
-          <a:p>
-            <a:pPr indent="0" marL="0">
-              <a:buNone/>
-            </a:pPr>
-            <a:r>
-              <a:rPr lang="en-US" sz="850" b="1" dirty="0">
-                <a:solidFill>
-                  <a:srgbClr val="1F3D20"/>
-                </a:solidFill>
-                <a:latin typeface="Meiryo UI" pitchFamily="34" charset="0"/>
-                <a:ea typeface="Meiryo UI" pitchFamily="34" charset="-122"/>
-                <a:cs typeface="Meiryo UI" pitchFamily="34" charset="-120"/>
-              </a:rPr>
-              <a:t>26/12</a:t>
-            </a:r>
-            <a:endParaRPr lang="en-US" sz="850" dirty="0"/>
-          </a:p>
-        </p:txBody>
-      </p:sp>
-      <p:sp>
-        <p:nvSpPr>
-          <p:cNvPr id="59" name="Text 56"/>
-          <p:cNvSpPr/>
-          <p:nvPr/>
-        </p:nvSpPr>
-        <p:spPr>
-          <a:xfrm>
-            <a:off x="4206240" y="5888736"/>
-            <a:ext cx="1732788" cy="539496"/>
+            <a:off x="10442448" y="2066544"/>
+            <a:ext cx="1225296" cy="1655064"/>
           </a:xfrm>
           <a:prstGeom prst="rect">
             <a:avLst/>
@@ -4940,40 +2334,457 @@
               <a:buNone/>
             </a:pPr>
             <a:r>
-              <a:rPr lang="en-US" sz="650" dirty="0">
+              <a:rPr lang="en-US" sz="950" b="1" dirty="0">
                 <a:solidFill>
-                  <a:srgbClr val="2B2B2B"/>
+                  <a:srgbClr val="D8E8D4"/>
                 </a:solidFill>
                 <a:latin typeface="Meiryo UI" pitchFamily="34" charset="0"/>
                 <a:ea typeface="Meiryo UI" pitchFamily="34" charset="-122"/>
                 <a:cs typeface="Meiryo UI" pitchFamily="34" charset="-120"/>
               </a:rPr>
-              <a:t>改定方針合意・ボトルネック特定完了。AI要件定義を「改定後基準前提」で開始(ゲート)</a:t>
+              <a:t>人に残る仕事
+</a:t>
             </a:r>
-            <a:endParaRPr lang="en-US" sz="650" dirty="0"/>
+            <a:pPr indent="0" marL="0">
+              <a:lnSpc>
+                <a:spcPct val="100000"/>
+              </a:lnSpc>
+              <a:buNone/>
+            </a:pPr>
+            <a:r>
+              <a:rPr lang="en-US" sz="1400" b="1" dirty="0">
+                <a:solidFill>
+                  <a:srgbClr val="FFFFFF"/>
+                </a:solidFill>
+                <a:latin typeface="Meiryo UI" pitchFamily="34" charset="0"/>
+                <a:ea typeface="Meiryo UI" pitchFamily="34" charset="-122"/>
+                <a:cs typeface="Meiryo UI" pitchFamily="34" charset="-120"/>
+              </a:rPr>
+              <a:t>57〜65名
+</a:t>
+            </a:r>
+            <a:pPr indent="0" marL="0">
+              <a:lnSpc>
+                <a:spcPct val="100000"/>
+              </a:lnSpc>
+              <a:buNone/>
+            </a:pPr>
+            <a:r>
+              <a:rPr lang="en-US" sz="850" b="1" dirty="0">
+                <a:solidFill>
+                  <a:srgbClr val="FFFFFF"/>
+                </a:solidFill>
+                <a:latin typeface="Meiryo UI" pitchFamily="34" charset="0"/>
+                <a:ea typeface="Meiryo UI" pitchFamily="34" charset="-122"/>
+                <a:cs typeface="Meiryo UI" pitchFamily="34" charset="-120"/>
+              </a:rPr>
+              <a:t>(半減達成)
+</a:t>
+            </a:r>
+            <a:pPr indent="0" marL="0">
+              <a:lnSpc>
+                <a:spcPct val="100000"/>
+              </a:lnSpc>
+              <a:buNone/>
+            </a:pPr>
+            <a:endParaRPr lang="en-US" sz="950" dirty="0"/>
+          </a:p>
+          <a:p>
+            <a:pPr indent="0" marL="0">
+              <a:lnSpc>
+                <a:spcPct val="100000"/>
+              </a:lnSpc>
+              <a:buNone/>
+            </a:pPr>
+            <a:r>
+              <a:rPr lang="en-US" sz="750" dirty="0">
+                <a:solidFill>
+                  <a:srgbClr val="FFFFFF"/>
+                </a:solidFill>
+                <a:latin typeface="Meiryo UI" pitchFamily="34" charset="0"/>
+                <a:ea typeface="Meiryo UI" pitchFamily="34" charset="-122"/>
+                <a:cs typeface="Meiryo UI" pitchFamily="34" charset="-120"/>
+              </a:rPr>
+              <a:t>異常への対応と、改善の仕事に集中</a:t>
+            </a:r>
+            <a:endParaRPr lang="en-US" sz="950" dirty="0"/>
           </a:p>
         </p:txBody>
       </p:sp>
       <p:sp>
         <p:nvSpPr>
-          <p:cNvPr id="60" name="Shape 57"/>
+          <p:cNvPr id="33" name="Text 31"/>
           <p:cNvSpPr/>
           <p:nvPr/>
         </p:nvSpPr>
         <p:spPr>
           <a:xfrm>
-            <a:off x="6085332" y="5687568"/>
-            <a:ext cx="1879092" cy="786384"/>
+            <a:off x="1632204" y="1956816"/>
+            <a:ext cx="219456" cy="1874520"/>
+          </a:xfrm>
+          <a:prstGeom prst="rect">
+            <a:avLst/>
+          </a:prstGeom>
+          <a:noFill/>
+          <a:ln/>
+        </p:spPr>
+        <p:txBody>
+          <a:bodyPr wrap="square" lIns="0" tIns="0" rIns="0" bIns="0" rtlCol="0" anchor="ctr"/>
+          <a:lstStyle/>
+          <a:p>
+            <a:pPr algn="ctr" indent="0" marL="0">
+              <a:buNone/>
+            </a:pPr>
+            <a:r>
+              <a:rPr lang="en-US" sz="1300" b="1" dirty="0">
+                <a:solidFill>
+                  <a:srgbClr val="2C5F2D"/>
+                </a:solidFill>
+                <a:latin typeface="Meiryo UI" pitchFamily="34" charset="0"/>
+                <a:ea typeface="Meiryo UI" pitchFamily="34" charset="-122"/>
+                <a:cs typeface="Meiryo UI" pitchFamily="34" charset="-120"/>
+              </a:rPr>
+              <a:t>▶</a:t>
+            </a:r>
+            <a:endParaRPr lang="en-US" sz="1300" dirty="0"/>
+          </a:p>
+        </p:txBody>
+      </p:sp>
+      <p:sp>
+        <p:nvSpPr>
+          <p:cNvPr id="34" name="Text 32"/>
+          <p:cNvSpPr/>
+          <p:nvPr/>
+        </p:nvSpPr>
+        <p:spPr>
+          <a:xfrm>
+            <a:off x="4475988" y="1956816"/>
+            <a:ext cx="219456" cy="1874520"/>
+          </a:xfrm>
+          <a:prstGeom prst="rect">
+            <a:avLst/>
+          </a:prstGeom>
+          <a:noFill/>
+          <a:ln/>
+        </p:spPr>
+        <p:txBody>
+          <a:bodyPr wrap="square" lIns="0" tIns="0" rIns="0" bIns="0" rtlCol="0" anchor="ctr"/>
+          <a:lstStyle/>
+          <a:p>
+            <a:pPr algn="ctr" indent="0" marL="0">
+              <a:buNone/>
+            </a:pPr>
+            <a:r>
+              <a:rPr lang="en-US" sz="1300" b="1" dirty="0">
+                <a:solidFill>
+                  <a:srgbClr val="2C5F2D"/>
+                </a:solidFill>
+                <a:latin typeface="Meiryo UI" pitchFamily="34" charset="0"/>
+                <a:ea typeface="Meiryo UI" pitchFamily="34" charset="-122"/>
+                <a:cs typeface="Meiryo UI" pitchFamily="34" charset="-120"/>
+              </a:rPr>
+              <a:t>▶</a:t>
+            </a:r>
+            <a:endParaRPr lang="en-US" sz="1300" dirty="0"/>
+          </a:p>
+        </p:txBody>
+      </p:sp>
+      <p:sp>
+        <p:nvSpPr>
+          <p:cNvPr id="35" name="Text 33"/>
+          <p:cNvSpPr/>
+          <p:nvPr/>
+        </p:nvSpPr>
+        <p:spPr>
+          <a:xfrm>
+            <a:off x="7319772" y="1956816"/>
+            <a:ext cx="219456" cy="1874520"/>
+          </a:xfrm>
+          <a:prstGeom prst="rect">
+            <a:avLst/>
+          </a:prstGeom>
+          <a:noFill/>
+          <a:ln/>
+        </p:spPr>
+        <p:txBody>
+          <a:bodyPr wrap="square" lIns="0" tIns="0" rIns="0" bIns="0" rtlCol="0" anchor="ctr"/>
+          <a:lstStyle/>
+          <a:p>
+            <a:pPr algn="ctr" indent="0" marL="0">
+              <a:buNone/>
+            </a:pPr>
+            <a:r>
+              <a:rPr lang="en-US" sz="1300" b="1" dirty="0">
+                <a:solidFill>
+                  <a:srgbClr val="2C5F2D"/>
+                </a:solidFill>
+                <a:latin typeface="Meiryo UI" pitchFamily="34" charset="0"/>
+                <a:ea typeface="Meiryo UI" pitchFamily="34" charset="-122"/>
+                <a:cs typeface="Meiryo UI" pitchFamily="34" charset="-120"/>
+              </a:rPr>
+              <a:t>▶</a:t>
+            </a:r>
+            <a:endParaRPr lang="en-US" sz="1300" dirty="0"/>
+          </a:p>
+        </p:txBody>
+      </p:sp>
+      <p:sp>
+        <p:nvSpPr>
+          <p:cNvPr id="36" name="Text 34"/>
+          <p:cNvSpPr/>
+          <p:nvPr/>
+        </p:nvSpPr>
+        <p:spPr>
+          <a:xfrm>
+            <a:off x="10163556" y="1956816"/>
+            <a:ext cx="219456" cy="1874520"/>
+          </a:xfrm>
+          <a:prstGeom prst="rect">
+            <a:avLst/>
+          </a:prstGeom>
+          <a:noFill/>
+          <a:ln/>
+        </p:spPr>
+        <p:txBody>
+          <a:bodyPr wrap="square" lIns="0" tIns="0" rIns="0" bIns="0" rtlCol="0" anchor="ctr"/>
+          <a:lstStyle/>
+          <a:p>
+            <a:pPr algn="ctr" indent="0" marL="0">
+              <a:buNone/>
+            </a:pPr>
+            <a:r>
+              <a:rPr lang="en-US" sz="1300" b="1" dirty="0">
+                <a:solidFill>
+                  <a:srgbClr val="2C5F2D"/>
+                </a:solidFill>
+                <a:latin typeface="Meiryo UI" pitchFamily="34" charset="0"/>
+                <a:ea typeface="Meiryo UI" pitchFamily="34" charset="-122"/>
+                <a:cs typeface="Meiryo UI" pitchFamily="34" charset="-120"/>
+              </a:rPr>
+              <a:t>▶</a:t>
+            </a:r>
+            <a:endParaRPr lang="en-US" sz="1300" dirty="0"/>
+          </a:p>
+        </p:txBody>
+      </p:sp>
+      <p:sp>
+        <p:nvSpPr>
+          <p:cNvPr id="37" name="Text 35"/>
+          <p:cNvSpPr/>
+          <p:nvPr/>
+        </p:nvSpPr>
+        <p:spPr>
+          <a:xfrm>
+            <a:off x="274320" y="3904488"/>
+            <a:ext cx="1371600" cy="182880"/>
+          </a:xfrm>
+          <a:prstGeom prst="rect">
+            <a:avLst/>
+          </a:prstGeom>
+          <a:noFill/>
+          <a:ln/>
+        </p:spPr>
+        <p:txBody>
+          <a:bodyPr wrap="square" lIns="0" tIns="0" rIns="0" bIns="0" rtlCol="0" anchor="ctr"/>
+          <a:lstStyle/>
+          <a:p>
+            <a:pPr algn="ctr" indent="0" marL="0">
+              <a:buNone/>
+            </a:pPr>
+            <a:r>
+              <a:rPr lang="en-US" sz="850" b="1" dirty="0">
+                <a:solidFill>
+                  <a:srgbClr val="595959"/>
+                </a:solidFill>
+                <a:latin typeface="Meiryo UI" pitchFamily="34" charset="0"/>
+                <a:ea typeface="Meiryo UI" pitchFamily="34" charset="-122"/>
+                <a:cs typeface="Meiryo UI" pitchFamily="34" charset="-120"/>
+              </a:rPr>
+              <a:t>115名</a:t>
+            </a:r>
+            <a:endParaRPr lang="en-US" sz="850" dirty="0"/>
+          </a:p>
+        </p:txBody>
+      </p:sp>
+      <p:sp>
+        <p:nvSpPr>
+          <p:cNvPr id="38" name="Text 36"/>
+          <p:cNvSpPr/>
+          <p:nvPr/>
+        </p:nvSpPr>
+        <p:spPr>
+          <a:xfrm>
+            <a:off x="1837944" y="3904488"/>
+            <a:ext cx="2651760" cy="182880"/>
+          </a:xfrm>
+          <a:prstGeom prst="rect">
+            <a:avLst/>
+          </a:prstGeom>
+          <a:noFill/>
+          <a:ln/>
+        </p:spPr>
+        <p:txBody>
+          <a:bodyPr wrap="square" lIns="0" tIns="0" rIns="0" bIns="0" rtlCol="0" anchor="ctr"/>
+          <a:lstStyle/>
+          <a:p>
+            <a:pPr algn="ctr" indent="0" marL="0">
+              <a:buNone/>
+            </a:pPr>
+            <a:r>
+              <a:rPr lang="en-US" sz="850" b="1" dirty="0">
+                <a:solidFill>
+                  <a:srgbClr val="1F3D20"/>
+                </a:solidFill>
+                <a:latin typeface="Meiryo UI" pitchFamily="34" charset="0"/>
+                <a:ea typeface="Meiryo UI" pitchFamily="34" charset="-122"/>
+                <a:cs typeface="Meiryo UI" pitchFamily="34" charset="-120"/>
+              </a:rPr>
+              <a:t>残り 約100名</a:t>
+            </a:r>
+            <a:endParaRPr lang="en-US" sz="850" dirty="0"/>
+          </a:p>
+        </p:txBody>
+      </p:sp>
+      <p:sp>
+        <p:nvSpPr>
+          <p:cNvPr id="39" name="Text 37"/>
+          <p:cNvSpPr/>
+          <p:nvPr/>
+        </p:nvSpPr>
+        <p:spPr>
+          <a:xfrm>
+            <a:off x="4681728" y="3904488"/>
+            <a:ext cx="2651760" cy="182880"/>
+          </a:xfrm>
+          <a:prstGeom prst="rect">
+            <a:avLst/>
+          </a:prstGeom>
+          <a:noFill/>
+          <a:ln/>
+        </p:spPr>
+        <p:txBody>
+          <a:bodyPr wrap="square" lIns="0" tIns="0" rIns="0" bIns="0" rtlCol="0" anchor="ctr"/>
+          <a:lstStyle/>
+          <a:p>
+            <a:pPr algn="ctr" indent="0" marL="0">
+              <a:buNone/>
+            </a:pPr>
+            <a:r>
+              <a:rPr lang="en-US" sz="850" b="1" dirty="0">
+                <a:solidFill>
+                  <a:srgbClr val="1F3D20"/>
+                </a:solidFill>
+                <a:latin typeface="Meiryo UI" pitchFamily="34" charset="0"/>
+                <a:ea typeface="Meiryo UI" pitchFamily="34" charset="-122"/>
+                <a:cs typeface="Meiryo UI" pitchFamily="34" charset="-120"/>
+              </a:rPr>
+              <a:t>残り 約90名</a:t>
+            </a:r>
+            <a:endParaRPr lang="en-US" sz="850" dirty="0"/>
+          </a:p>
+        </p:txBody>
+      </p:sp>
+      <p:sp>
+        <p:nvSpPr>
+          <p:cNvPr id="40" name="Text 38"/>
+          <p:cNvSpPr/>
+          <p:nvPr/>
+        </p:nvSpPr>
+        <p:spPr>
+          <a:xfrm>
+            <a:off x="7525512" y="3904488"/>
+            <a:ext cx="2651760" cy="182880"/>
+          </a:xfrm>
+          <a:prstGeom prst="rect">
+            <a:avLst/>
+          </a:prstGeom>
+          <a:noFill/>
+          <a:ln/>
+        </p:spPr>
+        <p:txBody>
+          <a:bodyPr wrap="square" lIns="0" tIns="0" rIns="0" bIns="0" rtlCol="0" anchor="ctr"/>
+          <a:lstStyle/>
+          <a:p>
+            <a:pPr algn="ctr" indent="0" marL="0">
+              <a:buNone/>
+            </a:pPr>
+            <a:r>
+              <a:rPr lang="en-US" sz="850" b="1" dirty="0">
+                <a:solidFill>
+                  <a:srgbClr val="1F3D20"/>
+                </a:solidFill>
+                <a:latin typeface="Meiryo UI" pitchFamily="34" charset="0"/>
+                <a:ea typeface="Meiryo UI" pitchFamily="34" charset="-122"/>
+                <a:cs typeface="Meiryo UI" pitchFamily="34" charset="-120"/>
+              </a:rPr>
+              <a:t>残り 57〜65名</a:t>
+            </a:r>
+            <a:endParaRPr lang="en-US" sz="850" dirty="0"/>
+          </a:p>
+        </p:txBody>
+      </p:sp>
+      <p:sp>
+        <p:nvSpPr>
+          <p:cNvPr id="41" name="Text 39"/>
+          <p:cNvSpPr/>
+          <p:nvPr/>
+        </p:nvSpPr>
+        <p:spPr>
+          <a:xfrm>
+            <a:off x="274320" y="4142232"/>
+            <a:ext cx="11640312" cy="329184"/>
+          </a:xfrm>
+          <a:prstGeom prst="rect">
+            <a:avLst/>
+          </a:prstGeom>
+          <a:noFill/>
+          <a:ln/>
+        </p:spPr>
+        <p:txBody>
+          <a:bodyPr wrap="square" lIns="0" tIns="0" rIns="0" bIns="0" rtlCol="0" anchor="t"/>
+          <a:lstStyle/>
+          <a:p>
+            <a:pPr indent="0" marL="0">
+              <a:lnSpc>
+                <a:spcPct val="105000"/>
+              </a:lnSpc>
+              <a:buNone/>
+            </a:pPr>
+            <a:r>
+              <a:rPr lang="en-US" sz="850" b="1" dirty="0">
+                <a:solidFill>
+                  <a:srgbClr val="B85042"/>
+                </a:solidFill>
+                <a:latin typeface="Meiryo UI" pitchFamily="34" charset="0"/>
+                <a:ea typeface="Meiryo UI" pitchFamily="34" charset="-122"/>
+                <a:cs typeface="Meiryo UI" pitchFamily="34" charset="-120"/>
+              </a:rPr>
+              <a:t>順番を逆にすると: 本来「無くせる」作業にロボット投資をしてしまい約1〜2億円がムダになるうえ、ムダな作業が設備仕様として固定化され後から消せなくなる。だからフィジカルAIの仕様決定は、①②の結論が出る26年12月まで待つ(ゲート制)。</a:t>
+            </a:r>
+            <a:endParaRPr lang="en-US" sz="850" dirty="0"/>
+          </a:p>
+        </p:txBody>
+      </p:sp>
+      <p:sp>
+        <p:nvSpPr>
+          <p:cNvPr id="42" name="Shape 40"/>
+          <p:cNvSpPr/>
+          <p:nvPr/>
+        </p:nvSpPr>
+        <p:spPr>
+          <a:xfrm>
+            <a:off x="274320" y="4681728"/>
+            <a:ext cx="3785616" cy="1572768"/>
           </a:xfrm>
           <a:prstGeom prst="roundRect">
             <a:avLst>
-              <a:gd name="adj" fmla="val 4651"/>
+              <a:gd name="adj" fmla="val 3488"/>
             </a:avLst>
           </a:prstGeom>
           <a:solidFill>
             <a:srgbClr val="F3F8F1"/>
           </a:solidFill>
-          <a:ln w="9525">
+          <a:ln w="12700">
             <a:solidFill>
               <a:srgbClr val="C9DCC4"/>
             </a:solidFill>
@@ -4983,14 +2794,14 @@
       </p:sp>
       <p:sp>
         <p:nvSpPr>
-          <p:cNvPr id="61" name="Text 58"/>
+          <p:cNvPr id="43" name="Text 41"/>
           <p:cNvSpPr/>
           <p:nvPr/>
         </p:nvSpPr>
         <p:spPr>
           <a:xfrm>
-            <a:off x="6158484" y="5715000"/>
-            <a:ext cx="1732788" cy="164592"/>
+            <a:off x="384048" y="4745736"/>
+            <a:ext cx="3566160" cy="219456"/>
           </a:xfrm>
           <a:prstGeom prst="rect">
             <a:avLst/>
@@ -5006,7 +2817,7 @@
               <a:buNone/>
             </a:pPr>
             <a:r>
-              <a:rPr lang="en-US" sz="850" b="1" dirty="0">
+              <a:rPr lang="en-US" sz="950" b="1" dirty="0">
                 <a:solidFill>
                   <a:srgbClr val="1F3D20"/>
                 </a:solidFill>
@@ -5014,22 +2825,22 @@
                 <a:ea typeface="Meiryo UI" pitchFamily="34" charset="-122"/>
                 <a:cs typeface="Meiryo UI" pitchFamily="34" charset="-120"/>
               </a:rPr>
-              <a:t>27/6</a:t>
+              <a:t>品質は下げない — 品質保証部門との4つの約束</a:t>
             </a:r>
-            <a:endParaRPr lang="en-US" sz="850" dirty="0"/>
+            <a:endParaRPr lang="en-US" sz="950" dirty="0"/>
           </a:p>
         </p:txBody>
       </p:sp>
       <p:sp>
         <p:nvSpPr>
-          <p:cNvPr id="62" name="Text 59"/>
+          <p:cNvPr id="44" name="Text 42"/>
           <p:cNvSpPr/>
           <p:nvPr/>
         </p:nvSpPr>
         <p:spPr>
           <a:xfrm>
-            <a:off x="6158484" y="5888736"/>
-            <a:ext cx="1732788" cy="539496"/>
+            <a:off x="384048" y="4992624"/>
+            <a:ext cx="3566160" cy="1188720"/>
           </a:xfrm>
           <a:prstGeom prst="rect">
             <a:avLst/>
@@ -5043,12 +2854,12 @@
           <a:p>
             <a:pPr indent="0" marL="0">
               <a:lnSpc>
-                <a:spcPct val="100000"/>
+                <a:spcPct val="108000"/>
               </a:lnSpc>
               <a:buNone/>
             </a:pPr>
             <a:r>
-              <a:rPr lang="en-US" sz="650" dirty="0">
+              <a:rPr lang="en-US" sz="760" dirty="0">
                 <a:solidFill>
                   <a:srgbClr val="2B2B2B"/>
                 </a:solidFill>
@@ -5056,34 +2867,88 @@
                 <a:ea typeface="Meiryo UI" pitchFamily="34" charset="-122"/>
                 <a:cs typeface="Meiryo UI" pitchFamily="34" charset="-120"/>
               </a:rPr>
-              <a:t>規定改定第1弾施行+プロセス改善 → ▲10名規模を投資ゼロで先行実現</a:t>
+              <a:t>1. 今の目視検査の実力(見逃し率)をまず測定し、自動検査が同等以上であることを並行運転(3〜6か月)で実証してから切替える
+</a:t>
             </a:r>
-            <a:endParaRPr lang="en-US" sz="650" dirty="0"/>
+            <a:pPr indent="0" marL="0">
+              <a:lnSpc>
+                <a:spcPct val="108000"/>
+              </a:lnSpc>
+              <a:buNone/>
+            </a:pPr>
+            <a:r>
+              <a:rPr lang="en-US" sz="760" dirty="0">
+                <a:solidFill>
+                  <a:srgbClr val="2B2B2B"/>
+                </a:solidFill>
+                <a:latin typeface="Meiryo UI" pitchFamily="34" charset="0"/>
+                <a:ea typeface="Meiryo UI" pitchFamily="34" charset="-122"/>
+                <a:cs typeface="Meiryo UI" pitchFamily="34" charset="-120"/>
+              </a:rPr>
+              <a:t>2. 使用者への影響が大きい項目は保守側に判断する(FMEA)
+</a:t>
+            </a:r>
+            <a:pPr indent="0" marL="0">
+              <a:lnSpc>
+                <a:spcPct val="108000"/>
+              </a:lnSpc>
+              <a:buNone/>
+            </a:pPr>
+            <a:r>
+              <a:rPr lang="en-US" sz="760" dirty="0">
+                <a:solidFill>
+                  <a:srgbClr val="2B2B2B"/>
+                </a:solidFill>
+                <a:latin typeface="Meiryo UI" pitchFamily="34" charset="0"/>
+                <a:ea typeface="Meiryo UI" pitchFamily="34" charset="-122"/>
+                <a:cs typeface="Meiryo UI" pitchFamily="34" charset="-120"/>
+              </a:rPr>
+              <a:t>3. 段階的に切替え、問題があれば即座に元へ戻す(戻す権限は品質保証が単独で持つ)
+</a:t>
+            </a:r>
+            <a:pPr indent="0" marL="0">
+              <a:lnSpc>
+                <a:spcPct val="108000"/>
+              </a:lnSpc>
+              <a:buNone/>
+            </a:pPr>
+            <a:r>
+              <a:rPr lang="en-US" sz="760" dirty="0">
+                <a:solidFill>
+                  <a:srgbClr val="2B2B2B"/>
+                </a:solidFill>
+                <a:latin typeface="Meiryo UI" pitchFamily="34" charset="0"/>
+                <a:ea typeface="Meiryo UI" pitchFamily="34" charset="-122"/>
+                <a:cs typeface="Meiryo UI" pitchFamily="34" charset="-120"/>
+              </a:rPr>
+              <a:t>4. 変える/変えないの最終判断は品質保証部門(変更管理プロセス)。「変えない」も正当な結論</a:t>
+            </a:r>
+            <a:endParaRPr lang="en-US" sz="760" dirty="0"/>
           </a:p>
         </p:txBody>
       </p:sp>
       <p:sp>
         <p:nvSpPr>
-          <p:cNvPr id="63" name="Shape 60"/>
+          <p:cNvPr id="45" name="Shape 43"/>
           <p:cNvSpPr/>
           <p:nvPr/>
         </p:nvSpPr>
         <p:spPr>
           <a:xfrm>
-            <a:off x="8037576" y="5687568"/>
-            <a:ext cx="1879092" cy="786384"/>
+            <a:off x="4201668" y="4681728"/>
+            <a:ext cx="3785616" cy="1572768"/>
           </a:xfrm>
           <a:prstGeom prst="roundRect">
             <a:avLst>
-              <a:gd name="adj" fmla="val 4651"/>
+              <a:gd name="adj" fmla="val 3488"/>
             </a:avLst>
           </a:prstGeom>
           <a:solidFill>
-            <a:srgbClr val="F3F8F1"/>
+            <a:srgbClr val="FBEDEA"/>
           </a:solidFill>
-          <a:ln w="9525">
+          <a:ln w="12700">
             <a:solidFill>
-              <a:srgbClr val="C9DCC4"/>
+              <a:srgbClr val="B85042"/>
             </a:solidFill>
             <a:prstDash val="solid"/>
           </a:ln>
@@ -5091,14 +2956,14 @@
       </p:sp>
       <p:sp>
         <p:nvSpPr>
-          <p:cNvPr id="64" name="Text 61"/>
+          <p:cNvPr id="46" name="Text 44"/>
           <p:cNvSpPr/>
           <p:nvPr/>
         </p:nvSpPr>
         <p:spPr>
           <a:xfrm>
-            <a:off x="8110728" y="5715000"/>
-            <a:ext cx="1732788" cy="164592"/>
+            <a:off x="4311396" y="4745736"/>
+            <a:ext cx="3566160" cy="219456"/>
           </a:xfrm>
           <a:prstGeom prst="rect">
             <a:avLst/>
@@ -5114,30 +2979,30 @@
               <a:buNone/>
             </a:pPr>
             <a:r>
-              <a:rPr lang="en-US" sz="850" b="1" dirty="0">
+              <a:rPr lang="en-US" sz="950" b="1" dirty="0">
                 <a:solidFill>
-                  <a:srgbClr val="1F3D20"/>
+                  <a:srgbClr val="B85042"/>
                 </a:solidFill>
                 <a:latin typeface="Meiryo UI" pitchFamily="34" charset="0"/>
                 <a:ea typeface="Meiryo UI" pitchFamily="34" charset="-122"/>
                 <a:cs typeface="Meiryo UI" pitchFamily="34" charset="-120"/>
               </a:rPr>
-              <a:t>27〜29</a:t>
+              <a:t>効果(いくら・いつから)</a:t>
             </a:r>
-            <a:endParaRPr lang="en-US" sz="850" dirty="0"/>
+            <a:endParaRPr lang="en-US" sz="950" dirty="0"/>
           </a:p>
         </p:txBody>
       </p:sp>
       <p:sp>
         <p:nvSpPr>
-          <p:cNvPr id="65" name="Text 62"/>
+          <p:cNvPr id="47" name="Text 45"/>
           <p:cNvSpPr/>
           <p:nvPr/>
         </p:nvSpPr>
         <p:spPr>
           <a:xfrm>
-            <a:off x="8110728" y="5888736"/>
-            <a:ext cx="1732788" cy="539496"/>
+            <a:off x="4311396" y="4992624"/>
+            <a:ext cx="3566160" cy="1188720"/>
           </a:xfrm>
           <a:prstGeom prst="rect">
             <a:avLst/>
@@ -5151,12 +3016,30 @@
           <a:p>
             <a:pPr indent="0" marL="0">
               <a:lnSpc>
-                <a:spcPct val="100000"/>
+                <a:spcPct val="108000"/>
               </a:lnSpc>
               <a:buNone/>
             </a:pPr>
             <a:r>
-              <a:rPr lang="en-US" sz="650" dirty="0">
+              <a:rPr lang="en-US" sz="1400" b="1" dirty="0">
+                <a:solidFill>
+                  <a:srgbClr val="B85042"/>
+                </a:solidFill>
+                <a:latin typeface="Meiryo UI" pitchFamily="34" charset="0"/>
+                <a:ea typeface="Meiryo UI" pitchFamily="34" charset="-122"/>
+                <a:cs typeface="Meiryo UI" pitchFamily="34" charset="-120"/>
+              </a:rPr>
+              <a:t>リターン 年3.0〜3.5億円
+</a:t>
+            </a:r>
+            <a:pPr indent="0" marL="0">
+              <a:lnSpc>
+                <a:spcPct val="108000"/>
+              </a:lnSpc>
+              <a:buNone/>
+            </a:pPr>
+            <a:r>
+              <a:rPr lang="en-US" sz="760" dirty="0">
                 <a:solidFill>
                   <a:srgbClr val="2B2B2B"/>
                 </a:solidFill>
@@ -5164,34 +3047,70 @@
                 <a:ea typeface="Meiryo UI" pitchFamily="34" charset="-122"/>
                 <a:cs typeface="Meiryo UI" pitchFamily="34" charset="-120"/>
               </a:rPr>
-              <a:t>フィジカルAI・自動検査PoC→実装。踏み込み改定第2弾施行</a:t>
+              <a:t>内訳: 省人化53名分=約2.7億円+基準・プロセス見直し0.3〜0.6億円(こちらは投資ほぼゼロで27年から発現)
+</a:t>
             </a:r>
-            <a:endParaRPr lang="en-US" sz="650" dirty="0"/>
+            <a:pPr indent="0" marL="0">
+              <a:lnSpc>
+                <a:spcPct val="108000"/>
+              </a:lnSpc>
+              <a:buNone/>
+            </a:pPr>
+            <a:r>
+              <a:rPr lang="en-US" sz="760" dirty="0">
+                <a:solidFill>
+                  <a:srgbClr val="2B2B2B"/>
+                </a:solidFill>
+                <a:latin typeface="Meiryo UI" pitchFamily="34" charset="0"/>
+                <a:ea typeface="Meiryo UI" pitchFamily="34" charset="-122"/>
+                <a:cs typeface="Meiryo UI" pitchFamily="34" charset="-120"/>
+              </a:rPr>
+              <a:t>投資: 約2.5〜3億円 → 実装後1年強で回収
+</a:t>
+            </a:r>
+            <a:pPr indent="0" marL="0">
+              <a:lnSpc>
+                <a:spcPct val="108000"/>
+              </a:lnSpc>
+              <a:buNone/>
+            </a:pPr>
+            <a:r>
+              <a:rPr lang="en-US" sz="760" b="1" dirty="0">
+                <a:solidFill>
+                  <a:srgbClr val="2B2B2B"/>
+                </a:solidFill>
+                <a:latin typeface="Meiryo UI" pitchFamily="34" charset="0"/>
+                <a:ea typeface="Meiryo UI" pitchFamily="34" charset="-122"/>
+                <a:cs typeface="Meiryo UI" pitchFamily="34" charset="-120"/>
+              </a:rPr>
+              <a:t>加えて「順番」の効果で自動化投資を1〜2億円圧縮</a:t>
+            </a:r>
+            <a:endParaRPr lang="en-US" sz="1400" dirty="0"/>
           </a:p>
         </p:txBody>
       </p:sp>
       <p:sp>
         <p:nvSpPr>
-          <p:cNvPr id="66" name="Shape 63"/>
+          <p:cNvPr id="48" name="Shape 46"/>
           <p:cNvSpPr/>
           <p:nvPr/>
         </p:nvSpPr>
         <p:spPr>
           <a:xfrm>
-            <a:off x="9989820" y="5687568"/>
-            <a:ext cx="1879092" cy="786384"/>
+            <a:off x="8129016" y="4681728"/>
+            <a:ext cx="3785616" cy="1572768"/>
           </a:xfrm>
           <a:prstGeom prst="roundRect">
             <a:avLst>
-              <a:gd name="adj" fmla="val 4651"/>
+              <a:gd name="adj" fmla="val 3488"/>
             </a:avLst>
           </a:prstGeom>
           <a:solidFill>
-            <a:srgbClr val="2C5F2D"/>
+            <a:srgbClr val="F3F8F1"/>
           </a:solidFill>
-          <a:ln w="9525">
+          <a:ln w="12700">
             <a:solidFill>
-              <a:srgbClr val="2C5F2D"/>
+              <a:srgbClr val="C9DCC4"/>
             </a:solidFill>
             <a:prstDash val="solid"/>
           </a:ln>
@@ -5199,14 +3118,14 @@
       </p:sp>
       <p:sp>
         <p:nvSpPr>
-          <p:cNvPr id="67" name="Text 64"/>
+          <p:cNvPr id="49" name="Text 47"/>
           <p:cNvSpPr/>
           <p:nvPr/>
         </p:nvSpPr>
         <p:spPr>
           <a:xfrm>
-            <a:off x="10062972" y="5715000"/>
-            <a:ext cx="1732788" cy="164592"/>
+            <a:off x="8238744" y="4745736"/>
+            <a:ext cx="3566160" cy="219456"/>
           </a:xfrm>
           <a:prstGeom prst="rect">
             <a:avLst/>
@@ -5222,30 +3141,30 @@
               <a:buNone/>
             </a:pPr>
             <a:r>
-              <a:rPr lang="en-US" sz="850" b="1" dirty="0">
+              <a:rPr lang="en-US" sz="950" b="1" dirty="0">
                 <a:solidFill>
-                  <a:srgbClr val="FFFFFF"/>
+                  <a:srgbClr val="1F3D20"/>
                 </a:solidFill>
                 <a:latin typeface="Meiryo UI" pitchFamily="34" charset="0"/>
                 <a:ea typeface="Meiryo UI" pitchFamily="34" charset="-122"/>
                 <a:cs typeface="Meiryo UI" pitchFamily="34" charset="-120"/>
               </a:rPr>
-              <a:t>30年</a:t>
+              <a:t>主要マイルストーン</a:t>
             </a:r>
-            <a:endParaRPr lang="en-US" sz="850" dirty="0"/>
+            <a:endParaRPr lang="en-US" sz="950" dirty="0"/>
           </a:p>
         </p:txBody>
       </p:sp>
       <p:sp>
         <p:nvSpPr>
-          <p:cNvPr id="68" name="Text 65"/>
+          <p:cNvPr id="50" name="Text 48"/>
           <p:cNvSpPr/>
           <p:nvPr/>
         </p:nvSpPr>
         <p:spPr>
           <a:xfrm>
-            <a:off x="10062972" y="5888736"/>
-            <a:ext cx="1732788" cy="539496"/>
+            <a:off x="8238744" y="4992624"/>
+            <a:ext cx="3566160" cy="1188720"/>
           </a:xfrm>
           <a:prstGeom prst="rect">
             <a:avLst/>
@@ -5259,35 +3178,227 @@
           <a:p>
             <a:pPr indent="0" marL="0">
               <a:lnSpc>
-                <a:spcPct val="100000"/>
+                <a:spcPct val="112000"/>
               </a:lnSpc>
               <a:buNone/>
             </a:pPr>
             <a:r>
-              <a:rPr lang="en-US" sz="650" dirty="0">
+              <a:rPr lang="en-US" sz="760" b="1" dirty="0">
                 <a:solidFill>
-                  <a:srgbClr val="FFFFFF"/>
+                  <a:srgbClr val="2B2B2B"/>
                 </a:solidFill>
                 <a:latin typeface="Meiryo UI" pitchFamily="34" charset="0"/>
                 <a:ea typeface="Meiryo UI" pitchFamily="34" charset="-122"/>
                 <a:cs typeface="Meiryo UI" pitchFamily="34" charset="-120"/>
               </a:rPr>
-              <a:t>植毛57名・工場264名・KGI一人当たり生産金額+20%達成</a:t>
+              <a:t>26/8   </a:t>
             </a:r>
-            <a:endParaRPr lang="en-US" sz="650" dirty="0"/>
+            <a:pPr indent="0" marL="0">
+              <a:lnSpc>
+                <a:spcPct val="112000"/>
+              </a:lnSpc>
+              <a:buNone/>
+            </a:pPr>
+            <a:r>
+              <a:rPr lang="en-US" sz="760" dirty="0">
+                <a:solidFill>
+                  <a:srgbClr val="2B2B2B"/>
+                </a:solidFill>
+                <a:latin typeface="Meiryo UI" pitchFamily="34" charset="0"/>
+                <a:ea typeface="Meiryo UI" pitchFamily="34" charset="-122"/>
+                <a:cs typeface="Meiryo UI" pitchFamily="34" charset="-120"/>
+              </a:rPr>
+              <a:t>3チーム組成(品質保証/工場/生技セ+デジ戦)
+</a:t>
+            </a:r>
+            <a:pPr indent="0" marL="0">
+              <a:lnSpc>
+                <a:spcPct val="112000"/>
+              </a:lnSpc>
+              <a:buNone/>
+            </a:pPr>
+            <a:r>
+              <a:rPr lang="en-US" sz="760" b="1" dirty="0">
+                <a:solidFill>
+                  <a:srgbClr val="2B2B2B"/>
+                </a:solidFill>
+                <a:latin typeface="Meiryo UI" pitchFamily="34" charset="0"/>
+                <a:ea typeface="Meiryo UI" pitchFamily="34" charset="-122"/>
+                <a:cs typeface="Meiryo UI" pitchFamily="34" charset="-120"/>
+              </a:rPr>
+              <a:t>26/10 </a:t>
+            </a:r>
+            <a:pPr indent="0" marL="0">
+              <a:lnSpc>
+                <a:spcPct val="112000"/>
+              </a:lnSpc>
+              <a:buNone/>
+            </a:pPr>
+            <a:r>
+              <a:rPr lang="en-US" sz="760" dirty="0">
+                <a:solidFill>
+                  <a:srgbClr val="2B2B2B"/>
+                </a:solidFill>
+                <a:latin typeface="Meiryo UI" pitchFamily="34" charset="0"/>
+                <a:ea typeface="Meiryo UI" pitchFamily="34" charset="-122"/>
+                <a:cs typeface="Meiryo UI" pitchFamily="34" charset="-120"/>
+              </a:rPr>
+              <a:t>台帳完成 → 役員中間報告
+</a:t>
+            </a:r>
+            <a:pPr indent="0" marL="0">
+              <a:lnSpc>
+                <a:spcPct val="112000"/>
+              </a:lnSpc>
+              <a:buNone/>
+            </a:pPr>
+            <a:r>
+              <a:rPr lang="en-US" sz="760" b="1" dirty="0">
+                <a:solidFill>
+                  <a:srgbClr val="2B2B2B"/>
+                </a:solidFill>
+                <a:latin typeface="Meiryo UI" pitchFamily="34" charset="0"/>
+                <a:ea typeface="Meiryo UI" pitchFamily="34" charset="-122"/>
+                <a:cs typeface="Meiryo UI" pitchFamily="34" charset="-120"/>
+              </a:rPr>
+              <a:t>26/12 </a:t>
+            </a:r>
+            <a:pPr indent="0" marL="0">
+              <a:lnSpc>
+                <a:spcPct val="112000"/>
+              </a:lnSpc>
+              <a:buNone/>
+            </a:pPr>
+            <a:r>
+              <a:rPr lang="en-US" sz="760" dirty="0">
+                <a:solidFill>
+                  <a:srgbClr val="2B2B2B"/>
+                </a:solidFill>
+                <a:latin typeface="Meiryo UI" pitchFamily="34" charset="0"/>
+                <a:ea typeface="Meiryo UI" pitchFamily="34" charset="-122"/>
+                <a:cs typeface="Meiryo UI" pitchFamily="34" charset="-120"/>
+              </a:rPr>
+              <a:t>基準改定の方針合意・AI要件定義に着手
+</a:t>
+            </a:r>
+            <a:pPr indent="0" marL="0">
+              <a:lnSpc>
+                <a:spcPct val="112000"/>
+              </a:lnSpc>
+              <a:buNone/>
+            </a:pPr>
+            <a:r>
+              <a:rPr lang="en-US" sz="760" b="1" dirty="0">
+                <a:solidFill>
+                  <a:srgbClr val="2B2B2B"/>
+                </a:solidFill>
+                <a:latin typeface="Meiryo UI" pitchFamily="34" charset="0"/>
+                <a:ea typeface="Meiryo UI" pitchFamily="34" charset="-122"/>
+                <a:cs typeface="Meiryo UI" pitchFamily="34" charset="-120"/>
+              </a:rPr>
+              <a:t>27/6   </a:t>
+            </a:r>
+            <a:pPr indent="0" marL="0">
+              <a:lnSpc>
+                <a:spcPct val="112000"/>
+              </a:lnSpc>
+              <a:buNone/>
+            </a:pPr>
+            <a:r>
+              <a:rPr lang="en-US" sz="760" dirty="0">
+                <a:solidFill>
+                  <a:srgbClr val="2B2B2B"/>
+                </a:solidFill>
+                <a:latin typeface="Meiryo UI" pitchFamily="34" charset="0"/>
+                <a:ea typeface="Meiryo UI" pitchFamily="34" charset="-122"/>
+                <a:cs typeface="Meiryo UI" pitchFamily="34" charset="-120"/>
+              </a:rPr>
+              <a:t>基準改定第1弾(▲10名規模を投資ゼロで)
+</a:t>
+            </a:r>
+            <a:pPr indent="0" marL="0">
+              <a:lnSpc>
+                <a:spcPct val="112000"/>
+              </a:lnSpc>
+              <a:buNone/>
+            </a:pPr>
+            <a:r>
+              <a:rPr lang="en-US" sz="760" b="1" dirty="0">
+                <a:solidFill>
+                  <a:srgbClr val="2B2B2B"/>
+                </a:solidFill>
+                <a:latin typeface="Meiryo UI" pitchFamily="34" charset="0"/>
+                <a:ea typeface="Meiryo UI" pitchFamily="34" charset="-122"/>
+                <a:cs typeface="Meiryo UI" pitchFamily="34" charset="-120"/>
+              </a:rPr>
+              <a:t>27〜29 </a:t>
+            </a:r>
+            <a:pPr indent="0" marL="0">
+              <a:lnSpc>
+                <a:spcPct val="112000"/>
+              </a:lnSpc>
+              <a:buNone/>
+            </a:pPr>
+            <a:r>
+              <a:rPr lang="en-US" sz="760" dirty="0">
+                <a:solidFill>
+                  <a:srgbClr val="2B2B2B"/>
+                </a:solidFill>
+                <a:latin typeface="Meiryo UI" pitchFamily="34" charset="0"/>
+                <a:ea typeface="Meiryo UI" pitchFamily="34" charset="-122"/>
+                <a:cs typeface="Meiryo UI" pitchFamily="34" charset="-120"/>
+              </a:rPr>
+              <a:t>自動化PoC→実装
+</a:t>
+            </a:r>
+            <a:pPr indent="0" marL="0">
+              <a:lnSpc>
+                <a:spcPct val="112000"/>
+              </a:lnSpc>
+              <a:buNone/>
+            </a:pPr>
+            <a:r>
+              <a:rPr lang="en-US" sz="760" b="1" dirty="0">
+                <a:solidFill>
+                  <a:srgbClr val="2B2B2B"/>
+                </a:solidFill>
+                <a:latin typeface="Meiryo UI" pitchFamily="34" charset="0"/>
+                <a:ea typeface="Meiryo UI" pitchFamily="34" charset="-122"/>
+                <a:cs typeface="Meiryo UI" pitchFamily="34" charset="-120"/>
+              </a:rPr>
+              <a:t>2030  </a:t>
+            </a:r>
+            <a:pPr indent="0" marL="0">
+              <a:lnSpc>
+                <a:spcPct val="112000"/>
+              </a:lnSpc>
+              <a:buNone/>
+            </a:pPr>
+            <a:r>
+              <a:rPr lang="en-US" sz="760" dirty="0">
+                <a:solidFill>
+                  <a:srgbClr val="2B2B2B"/>
+                </a:solidFill>
+                <a:latin typeface="Meiryo UI" pitchFamily="34" charset="0"/>
+                <a:ea typeface="Meiryo UI" pitchFamily="34" charset="-122"/>
+                <a:cs typeface="Meiryo UI" pitchFamily="34" charset="-120"/>
+              </a:rPr>
+              <a:t>半減達成・一人当たり生産金額+20%</a:t>
+            </a:r>
+            <a:endParaRPr lang="en-US" sz="760" dirty="0"/>
           </a:p>
         </p:txBody>
       </p:sp>
       <p:sp>
         <p:nvSpPr>
-          <p:cNvPr id="69" name="Text 66"/>
+          <p:cNvPr id="51" name="Text 49"/>
           <p:cNvSpPr/>
           <p:nvPr/>
         </p:nvSpPr>
         <p:spPr>
           <a:xfrm>
-            <a:off x="228600" y="6528816"/>
-            <a:ext cx="11731752" cy="274320"/>
+            <a:off x="274320" y="6419088"/>
+            <a:ext cx="11640312" cy="292608"/>
           </a:xfrm>
           <a:prstGeom prst="rect">
             <a:avLst/>
@@ -5303,7 +3414,7 @@
               <a:buNone/>
             </a:pPr>
             <a:r>
-              <a:rPr lang="en-US" sz="630" dirty="0">
+              <a:rPr lang="en-US" sz="650" dirty="0">
                 <a:solidFill>
                   <a:srgbClr val="595959"/>
                 </a:solidFill>
@@ -5311,9 +3422,9 @@
                 <a:ea typeface="Meiryo UI" pitchFamily="34" charset="-122"/>
                 <a:cs typeface="Meiryo UI" pitchFamily="34" charset="-120"/>
               </a:rPr>
-              <a:t>※ 効果人数・金額は仮説値(人件費5百万円/人・年で換算)。台帳完成(26/10)後に検証・確定。 出典: 社内資料(人事業務 経営リスク低減・業務効率化 役員会議資料 2025/5・生産技術戦略会議骨子案・フィジカルAI効果見積もり・7/23役員打合せメモ・6/10デジ戦打合せ)+公開情報(Vision2030 2nd STAGE)</a:t>
+              <a:t>※ 人数・金額は仮説値(人件費5百万円/人・年で換算)。26/10の台帳(作業と基準の対応表)完成後に検証・確定 ※詳細タスク・担当・時期は次頁WBS参照 ※出典: 生産技術戦略会議骨子案・フィジカルAI効果見積もり・7/23役員打合せメモ・人事業務効率化PJT資料・Vision2030 2nd STAGE(公開情報)</a:t>
             </a:r>
-            <a:endParaRPr lang="en-US" sz="630" dirty="0"/>
+            <a:endParaRPr lang="en-US" sz="650" dirty="0"/>
           </a:p>
         </p:txBody>
       </p:sp>

--- a/docs/bottleneck-survey-plan.pptx
+++ b/docs/bottleneck-survey-plan.pptx
@@ -7,9 +7,11 @@
   <p:sldIdLst>
     <p:sldId id="256" r:id="rId2"/>
     <p:sldId id="257" r:id="rId3"/>
+    <p:sldId id="258" r:id="rId4"/>
+    <p:sldId id="259" r:id="rId5"/>
   </p:sldIdLst>
   <p:notesMasterIdLst>
-    <p:notesMasterId r:id="rId4"/>
+    <p:notesMasterId r:id="rId6"/>
   </p:notesMasterIdLst>
   <p:sldSz cx="12192000" cy="6858000"/>
   <p:notesSz cx="6858000" cy="12192000"/>
@@ -633,6 +635,182 @@
 </p:notes>
 </file>
 
+<file path=ppt/notesSlides/notesSlide3.xml><?xml version="1.0" encoding="utf-8"?>
+<p:notes xmlns:a="http://schemas.openxmlformats.org/drawingml/2006/main" xmlns:r="http://schemas.openxmlformats.org/officeDocument/2006/relationships" xmlns:p="http://schemas.openxmlformats.org/presentationml/2006/main">
+  <p:cSld>
+    <p:spTree>
+      <p:nvGrpSpPr>
+        <p:cNvPr id="1" name=""/>
+        <p:cNvGrpSpPr/>
+        <p:nvPr/>
+      </p:nvGrpSpPr>
+      <p:grpSpPr>
+        <a:xfrm>
+          <a:off x="0" y="0"/>
+          <a:ext cx="0" cy="0"/>
+          <a:chOff x="0" y="0"/>
+          <a:chExt cx="0" cy="0"/>
+        </a:xfrm>
+      </p:grpSpPr>
+      <p:sp>
+        <p:nvSpPr>
+          <p:cNvPr id="2" name="Slide Image Placeholder 1"/>
+          <p:cNvSpPr>
+            <a:spLocks noGrp="1" noRot="1" noChangeAspect="1"/>
+          </p:cNvSpPr>
+          <p:nvPr>
+            <p:ph type="sldImg"/>
+          </p:nvPr>
+        </p:nvSpPr>
+        <p:spPr/>
+      </p:sp>
+      <p:sp>
+        <p:nvSpPr>
+          <p:cNvPr id="3" name="Notes Placeholder 2"/>
+          <p:cNvSpPr>
+            <a:spLocks noGrp="1"/>
+          </p:cNvSpPr>
+          <p:nvPr>
+            <p:ph type="body" idx="1"/>
+          </p:nvPr>
+        </p:nvSpPr>
+        <p:spPr/>
+        <p:txBody>
+          <a:bodyPr/>
+          <a:lstStyle/>
+          <a:p>
+            <a:r>
+              <a:rPr lang="en-US" dirty="0"/>
+              <a:t/>
+            </a:r>
+            <a:endParaRPr lang="en-US" dirty="0"/>
+          </a:p>
+        </p:txBody>
+      </p:sp>
+      <p:sp>
+        <p:nvSpPr>
+          <p:cNvPr id="4" name="Slide Number Placeholder 3"/>
+          <p:cNvSpPr>
+            <a:spLocks noGrp="1"/>
+          </p:cNvSpPr>
+          <p:nvPr>
+            <p:ph type="sldNum" sz="quarter" idx="10"/>
+          </p:nvPr>
+        </p:nvSpPr>
+        <p:spPr/>
+        <p:txBody>
+          <a:bodyPr/>
+          <a:lstStyle/>
+          <a:p>
+            <a:fld id="{F7021451-1387-4CA6-816F-3879F97B5CBC}" type="slidenum">
+              <a:rPr lang="en-US"/>
+              <a:t>3</a:t>
+            </a:fld>
+            <a:endParaRPr lang="en-US"/>
+          </a:p>
+        </p:txBody>
+      </p:sp>
+    </p:spTree>
+    <p:extLst>
+      <p:ext uri="{BB962C8B-B14F-4D97-AF65-F5344CB8AC3E}">
+        <p14:creationId xmlns:p14="http://schemas.microsoft.com/office/powerpoint/2010/main" val="1024086991"/>
+      </p:ext>
+    </p:extLst>
+  </p:cSld>
+  <p:clrMapOvr>
+    <a:masterClrMapping/>
+  </p:clrMapOvr>
+</p:notes>
+</file>
+
+<file path=ppt/notesSlides/notesSlide4.xml><?xml version="1.0" encoding="utf-8"?>
+<p:notes xmlns:a="http://schemas.openxmlformats.org/drawingml/2006/main" xmlns:r="http://schemas.openxmlformats.org/officeDocument/2006/relationships" xmlns:p="http://schemas.openxmlformats.org/presentationml/2006/main">
+  <p:cSld>
+    <p:spTree>
+      <p:nvGrpSpPr>
+        <p:cNvPr id="1" name=""/>
+        <p:cNvGrpSpPr/>
+        <p:nvPr/>
+      </p:nvGrpSpPr>
+      <p:grpSpPr>
+        <a:xfrm>
+          <a:off x="0" y="0"/>
+          <a:ext cx="0" cy="0"/>
+          <a:chOff x="0" y="0"/>
+          <a:chExt cx="0" cy="0"/>
+        </a:xfrm>
+      </p:grpSpPr>
+      <p:sp>
+        <p:nvSpPr>
+          <p:cNvPr id="2" name="Slide Image Placeholder 1"/>
+          <p:cNvSpPr>
+            <a:spLocks noGrp="1" noRot="1" noChangeAspect="1"/>
+          </p:cNvSpPr>
+          <p:nvPr>
+            <p:ph type="sldImg"/>
+          </p:nvPr>
+        </p:nvSpPr>
+        <p:spPr/>
+      </p:sp>
+      <p:sp>
+        <p:nvSpPr>
+          <p:cNvPr id="3" name="Notes Placeholder 2"/>
+          <p:cNvSpPr>
+            <a:spLocks noGrp="1"/>
+          </p:cNvSpPr>
+          <p:nvPr>
+            <p:ph type="body" idx="1"/>
+          </p:nvPr>
+        </p:nvSpPr>
+        <p:spPr/>
+        <p:txBody>
+          <a:bodyPr/>
+          <a:lstStyle/>
+          <a:p>
+            <a:r>
+              <a:rPr lang="en-US" dirty="0"/>
+              <a:t/>
+            </a:r>
+            <a:endParaRPr lang="en-US" dirty="0"/>
+          </a:p>
+        </p:txBody>
+      </p:sp>
+      <p:sp>
+        <p:nvSpPr>
+          <p:cNvPr id="4" name="Slide Number Placeholder 3"/>
+          <p:cNvSpPr>
+            <a:spLocks noGrp="1"/>
+          </p:cNvSpPr>
+          <p:nvPr>
+            <p:ph type="sldNum" sz="quarter" idx="10"/>
+          </p:nvPr>
+        </p:nvSpPr>
+        <p:spPr/>
+        <p:txBody>
+          <a:bodyPr/>
+          <a:lstStyle/>
+          <a:p>
+            <a:fld id="{F7021451-1387-4CA6-816F-3879F97B5CBC}" type="slidenum">
+              <a:rPr lang="en-US"/>
+              <a:t>4</a:t>
+            </a:fld>
+            <a:endParaRPr lang="en-US"/>
+          </a:p>
+        </p:txBody>
+      </p:sp>
+    </p:spTree>
+    <p:extLst>
+      <p:ext uri="{BB962C8B-B14F-4D97-AF65-F5344CB8AC3E}">
+        <p14:creationId xmlns:p14="http://schemas.microsoft.com/office/powerpoint/2010/main" val="1024086991"/>
+      </p:ext>
+    </p:extLst>
+  </p:cSld>
+  <p:clrMapOvr>
+    <a:masterClrMapping/>
+  </p:clrMapOvr>
+</p:notes>
+</file>
+
 <file path=ppt/slideLayouts/slideLayout1.xml><?xml version="1.0" encoding="utf-8"?>
 <p:sldLayout xmlns:a="http://schemas.openxmlformats.org/drawingml/2006/main" xmlns:r="http://schemas.openxmlformats.org/officeDocument/2006/relationships" xmlns:p="http://schemas.openxmlformats.org/presentationml/2006/main" preserve="1">
   <p:cSld name="DEFAULT">
@@ -973,6 +1151,3152 @@
         <p:spPr>
           <a:xfrm>
             <a:off x="274320" y="91440"/>
+            <a:ext cx="8686800" cy="411480"/>
+          </a:xfrm>
+          <a:prstGeom prst="rect">
+            <a:avLst/>
+          </a:prstGeom>
+          <a:noFill/>
+          <a:ln/>
+        </p:spPr>
+        <p:txBody>
+          <a:bodyPr wrap="square" lIns="0" tIns="0" rIns="0" bIns="0" rtlCol="0" anchor="ctr"/>
+          <a:lstStyle/>
+          <a:p>
+            <a:pPr indent="0" marL="0">
+              <a:buNone/>
+            </a:pPr>
+            <a:r>
+              <a:rPr lang="en-US" sz="1800" b="1" dirty="0">
+                <a:solidFill>
+                  <a:srgbClr val="1F3D20"/>
+                </a:solidFill>
+                <a:latin typeface="Meiryo UI" pitchFamily="34" charset="0"/>
+                <a:ea typeface="Meiryo UI" pitchFamily="34" charset="-122"/>
+                <a:cs typeface="Meiryo UI" pitchFamily="34" charset="-120"/>
+              </a:rPr>
+              <a:t>前提 — なぜ「明石工場・ハブラシ植毛ライン」なのか</a:t>
+            </a:r>
+            <a:endParaRPr lang="en-US" sz="1800" dirty="0"/>
+          </a:p>
+        </p:txBody>
+      </p:sp>
+      <p:sp>
+        <p:nvSpPr>
+          <p:cNvPr id="3" name="Text 1"/>
+          <p:cNvSpPr/>
+          <p:nvPr/>
+        </p:nvSpPr>
+        <p:spPr>
+          <a:xfrm>
+            <a:off x="9052560" y="91440"/>
+            <a:ext cx="2862072" cy="411480"/>
+          </a:xfrm>
+          <a:prstGeom prst="rect">
+            <a:avLst/>
+          </a:prstGeom>
+          <a:noFill/>
+          <a:ln/>
+        </p:spPr>
+        <p:txBody>
+          <a:bodyPr wrap="square" lIns="0" tIns="0" rIns="0" bIns="0" rtlCol="0" anchor="ctr"/>
+          <a:lstStyle/>
+          <a:p>
+            <a:pPr algn="r" indent="0" marL="0">
+              <a:buNone/>
+            </a:pPr>
+            <a:r>
+              <a:rPr lang="en-US" sz="800" dirty="0">
+                <a:solidFill>
+                  <a:srgbClr val="595959"/>
+                </a:solidFill>
+                <a:latin typeface="Meiryo UI" pitchFamily="34" charset="0"/>
+                <a:ea typeface="Meiryo UI" pitchFamily="34" charset="-122"/>
+                <a:cs typeface="Meiryo UI" pitchFamily="34" charset="-120"/>
+              </a:rPr>
+              <a:t>スコープ選定の論理(全社 → 明石 → 植毛)｜2026年8月</a:t>
+            </a:r>
+            <a:endParaRPr lang="en-US" sz="800" dirty="0"/>
+          </a:p>
+        </p:txBody>
+      </p:sp>
+      <p:sp>
+        <p:nvSpPr>
+          <p:cNvPr id="4" name="Shape 2"/>
+          <p:cNvSpPr/>
+          <p:nvPr/>
+        </p:nvSpPr>
+        <p:spPr>
+          <a:xfrm>
+            <a:off x="274320" y="603504"/>
+            <a:ext cx="11640312" cy="1060704"/>
+          </a:xfrm>
+          <a:prstGeom prst="roundRect">
+            <a:avLst>
+              <a:gd name="adj" fmla="val 5172"/>
+            </a:avLst>
+          </a:prstGeom>
+          <a:solidFill>
+            <a:srgbClr val="F3F8F1"/>
+          </a:solidFill>
+          <a:ln w="12700">
+            <a:solidFill>
+              <a:srgbClr val="2C5F2D"/>
+            </a:solidFill>
+            <a:prstDash val="solid"/>
+          </a:ln>
+        </p:spPr>
+      </p:sp>
+      <p:sp>
+        <p:nvSpPr>
+          <p:cNvPr id="5" name="Text 3"/>
+          <p:cNvSpPr/>
+          <p:nvPr/>
+        </p:nvSpPr>
+        <p:spPr>
+          <a:xfrm>
+            <a:off x="411480" y="667512"/>
+            <a:ext cx="11365992" cy="237744"/>
+          </a:xfrm>
+          <a:prstGeom prst="rect">
+            <a:avLst/>
+          </a:prstGeom>
+          <a:noFill/>
+          <a:ln/>
+        </p:spPr>
+        <p:txBody>
+          <a:bodyPr wrap="square" lIns="0" tIns="0" rIns="0" bIns="0" rtlCol="0" anchor="ctr"/>
+          <a:lstStyle/>
+          <a:p>
+            <a:pPr indent="0" marL="0">
+              <a:buNone/>
+            </a:pPr>
+            <a:r>
+              <a:rPr lang="en-US" sz="1100" b="1" dirty="0">
+                <a:solidFill>
+                  <a:srgbClr val="FFFFFF"/>
+                </a:solidFill>
+                <a:highlight>
+                  <a:srgbClr val="2C5F2D"/>
+                </a:highlight>
+                <a:latin typeface="Meiryo UI" pitchFamily="34" charset="0"/>
+                <a:ea typeface="Meiryo UI" pitchFamily="34" charset="-122"/>
+                <a:cs typeface="Meiryo UI" pitchFamily="34" charset="-120"/>
+              </a:rPr>
+              <a:t>Q1  </a:t>
+            </a:r>
+            <a:pPr indent="0" marL="0">
+              <a:buNone/>
+            </a:pPr>
+            <a:r>
+              <a:rPr lang="en-US" sz="1100" b="1" dirty="0">
+                <a:solidFill>
+                  <a:srgbClr val="1F3D20"/>
+                </a:solidFill>
+                <a:latin typeface="Meiryo UI" pitchFamily="34" charset="0"/>
+                <a:ea typeface="Meiryo UI" pitchFamily="34" charset="-122"/>
+                <a:cs typeface="Meiryo UI" pitchFamily="34" charset="-120"/>
+              </a:rPr>
+              <a:t> なぜ「生産性・省人化」か — 全社戦略の要請</a:t>
+            </a:r>
+            <a:endParaRPr lang="en-US" sz="1100" dirty="0"/>
+          </a:p>
+        </p:txBody>
+      </p:sp>
+      <p:sp>
+        <p:nvSpPr>
+          <p:cNvPr id="6" name="Text 4"/>
+          <p:cNvSpPr/>
+          <p:nvPr/>
+        </p:nvSpPr>
+        <p:spPr>
+          <a:xfrm>
+            <a:off x="438912" y="941832"/>
+            <a:ext cx="11311128" cy="658368"/>
+          </a:xfrm>
+          <a:prstGeom prst="rect">
+            <a:avLst/>
+          </a:prstGeom>
+          <a:noFill/>
+          <a:ln/>
+        </p:spPr>
+        <p:txBody>
+          <a:bodyPr wrap="square" lIns="0" tIns="0" rIns="0" bIns="0" rtlCol="0" anchor="t"/>
+          <a:lstStyle/>
+          <a:p>
+            <a:pPr marL="101600" indent="-101600">
+              <a:lnSpc>
+                <a:spcPct val="105000"/>
+              </a:lnSpc>
+              <a:spcAft>
+                <a:spcPts val="200"/>
+              </a:spcAft>
+              <a:buSzPct val="100000"/>
+              <a:buChar char="•"/>
+            </a:pPr>
+            <a:r>
+              <a:rPr lang="en-US" sz="820" dirty="0">
+                <a:solidFill>
+                  <a:srgbClr val="2B2B2B"/>
+                </a:solidFill>
+                <a:latin typeface="Meiryo UI" pitchFamily="34" charset="0"/>
+                <a:ea typeface="Meiryo UI" pitchFamily="34" charset="-122"/>
+                <a:cs typeface="Meiryo UI" pitchFamily="34" charset="-120"/>
+              </a:rPr>
+              <a:t>中計Vision2030 2nd STAGE(25〜27年)は「収益力強靭化」: 27年EBITDAマージン13%超・ROIC8〜9%(公開情報)</a:t>
+            </a:r>
+            <a:endParaRPr lang="en-US" sz="820" dirty="0"/>
+          </a:p>
+          <a:p>
+            <a:pPr marL="101600" indent="-101600">
+              <a:lnSpc>
+                <a:spcPct val="105000"/>
+              </a:lnSpc>
+              <a:spcAft>
+                <a:spcPts val="200"/>
+              </a:spcAft>
+              <a:buSzPct val="100000"/>
+              <a:buChar char="•"/>
+            </a:pPr>
+            <a:r>
+              <a:rPr lang="en-US" sz="820" dirty="0">
+                <a:solidFill>
+                  <a:srgbClr val="2B2B2B"/>
+                </a:solidFill>
+                <a:latin typeface="Meiryo UI" pitchFamily="34" charset="0"/>
+                <a:ea typeface="Meiryo UI" pitchFamily="34" charset="-122"/>
+                <a:cs typeface="Meiryo UI" pitchFamily="34" charset="-120"/>
+              </a:rPr>
+              <a:t>生産技術のKGI = 国内工場の一人当たり生産金額 2030年+20%(生産技術戦略会議で設定済み)</a:t>
+            </a:r>
+            <a:endParaRPr lang="en-US" sz="820" dirty="0"/>
+          </a:p>
+          <a:p>
+            <a:pPr marL="101600" indent="-101600">
+              <a:lnSpc>
+                <a:spcPct val="105000"/>
+              </a:lnSpc>
+              <a:spcAft>
+                <a:spcPts val="200"/>
+              </a:spcAft>
+              <a:buSzPct val="100000"/>
+              <a:buChar char="•"/>
+            </a:pPr>
+            <a:r>
+              <a:rPr lang="en-US" sz="820" dirty="0">
+                <a:solidFill>
+                  <a:srgbClr val="2B2B2B"/>
+                </a:solidFill>
+                <a:latin typeface="Meiryo UI" pitchFamily="34" charset="0"/>
+                <a:ea typeface="Meiryo UI" pitchFamily="34" charset="-122"/>
+                <a:cs typeface="Meiryo UI" pitchFamily="34" charset="-120"/>
+              </a:rPr>
+              <a:t>労働力人口の減少で製造要員の確保は年々困難に — 省人化はコスト削減ではなく「事業継続の条件」</a:t>
+            </a:r>
+            <a:endParaRPr lang="en-US" sz="820" dirty="0"/>
+          </a:p>
+        </p:txBody>
+      </p:sp>
+      <p:sp>
+        <p:nvSpPr>
+          <p:cNvPr id="7" name="Text 5"/>
+          <p:cNvSpPr/>
+          <p:nvPr/>
+        </p:nvSpPr>
+        <p:spPr>
+          <a:xfrm>
+            <a:off x="822960" y="1664208"/>
+            <a:ext cx="365760" cy="164592"/>
+          </a:xfrm>
+          <a:prstGeom prst="rect">
+            <a:avLst/>
+          </a:prstGeom>
+          <a:noFill/>
+          <a:ln/>
+        </p:spPr>
+        <p:txBody>
+          <a:bodyPr wrap="square" lIns="0" tIns="0" rIns="0" bIns="0" rtlCol="0" anchor="ctr"/>
+          <a:lstStyle/>
+          <a:p>
+            <a:pPr algn="ctr" indent="0" marL="0">
+              <a:buNone/>
+            </a:pPr>
+            <a:r>
+              <a:rPr lang="en-US" sz="1000" b="1" dirty="0">
+                <a:solidFill>
+                  <a:srgbClr val="2C5F2D"/>
+                </a:solidFill>
+                <a:latin typeface="Meiryo UI" pitchFamily="34" charset="0"/>
+                <a:ea typeface="Meiryo UI" pitchFamily="34" charset="-122"/>
+                <a:cs typeface="Meiryo UI" pitchFamily="34" charset="-120"/>
+              </a:rPr>
+              <a:t>▼</a:t>
+            </a:r>
+            <a:endParaRPr lang="en-US" sz="1000" dirty="0"/>
+          </a:p>
+        </p:txBody>
+      </p:sp>
+      <p:sp>
+        <p:nvSpPr>
+          <p:cNvPr id="8" name="Shape 6"/>
+          <p:cNvSpPr/>
+          <p:nvPr/>
+        </p:nvSpPr>
+        <p:spPr>
+          <a:xfrm>
+            <a:off x="1005840" y="1828800"/>
+            <a:ext cx="10908792" cy="1060704"/>
+          </a:xfrm>
+          <a:prstGeom prst="roundRect">
+            <a:avLst>
+              <a:gd name="adj" fmla="val 5172"/>
+            </a:avLst>
+          </a:prstGeom>
+          <a:solidFill>
+            <a:srgbClr val="F3F8F1"/>
+          </a:solidFill>
+          <a:ln w="12700">
+            <a:solidFill>
+              <a:srgbClr val="2C5F2D"/>
+            </a:solidFill>
+            <a:prstDash val="solid"/>
+          </a:ln>
+        </p:spPr>
+      </p:sp>
+      <p:sp>
+        <p:nvSpPr>
+          <p:cNvPr id="9" name="Text 7"/>
+          <p:cNvSpPr/>
+          <p:nvPr/>
+        </p:nvSpPr>
+        <p:spPr>
+          <a:xfrm>
+            <a:off x="1143000" y="1892808"/>
+            <a:ext cx="10634472" cy="237744"/>
+          </a:xfrm>
+          <a:prstGeom prst="rect">
+            <a:avLst/>
+          </a:prstGeom>
+          <a:noFill/>
+          <a:ln/>
+        </p:spPr>
+        <p:txBody>
+          <a:bodyPr wrap="square" lIns="0" tIns="0" rIns="0" bIns="0" rtlCol="0" anchor="ctr"/>
+          <a:lstStyle/>
+          <a:p>
+            <a:pPr indent="0" marL="0">
+              <a:buNone/>
+            </a:pPr>
+            <a:r>
+              <a:rPr lang="en-US" sz="1100" b="1" dirty="0">
+                <a:solidFill>
+                  <a:srgbClr val="FFFFFF"/>
+                </a:solidFill>
+                <a:highlight>
+                  <a:srgbClr val="2C5F2D"/>
+                </a:highlight>
+                <a:latin typeface="Meiryo UI" pitchFamily="34" charset="0"/>
+                <a:ea typeface="Meiryo UI" pitchFamily="34" charset="-122"/>
+                <a:cs typeface="Meiryo UI" pitchFamily="34" charset="-120"/>
+              </a:rPr>
+              <a:t>Q2  </a:t>
+            </a:r>
+            <a:pPr indent="0" marL="0">
+              <a:buNone/>
+            </a:pPr>
+            <a:r>
+              <a:rPr lang="en-US" sz="1100" b="1" dirty="0">
+                <a:solidFill>
+                  <a:srgbClr val="1F3D20"/>
+                </a:solidFill>
+                <a:latin typeface="Meiryo UI" pitchFamily="34" charset="0"/>
+                <a:ea typeface="Meiryo UI" pitchFamily="34" charset="-122"/>
+                <a:cs typeface="Meiryo UI" pitchFamily="34" charset="-120"/>
+              </a:rPr>
+              <a:t> なぜ「明石工場」か — 最重点事業の特化拠点</a:t>
+            </a:r>
+            <a:endParaRPr lang="en-US" sz="1100" dirty="0"/>
+          </a:p>
+        </p:txBody>
+      </p:sp>
+      <p:sp>
+        <p:nvSpPr>
+          <p:cNvPr id="10" name="Text 8"/>
+          <p:cNvSpPr/>
+          <p:nvPr/>
+        </p:nvSpPr>
+        <p:spPr>
+          <a:xfrm>
+            <a:off x="1170432" y="2167128"/>
+            <a:ext cx="10579608" cy="658368"/>
+          </a:xfrm>
+          <a:prstGeom prst="rect">
+            <a:avLst/>
+          </a:prstGeom>
+          <a:noFill/>
+          <a:ln/>
+        </p:spPr>
+        <p:txBody>
+          <a:bodyPr wrap="square" lIns="0" tIns="0" rIns="0" bIns="0" rtlCol="0" anchor="t"/>
+          <a:lstStyle/>
+          <a:p>
+            <a:pPr marL="101600" indent="-101600">
+              <a:lnSpc>
+                <a:spcPct val="105000"/>
+              </a:lnSpc>
+              <a:spcAft>
+                <a:spcPts val="200"/>
+              </a:spcAft>
+              <a:buSzPct val="100000"/>
+              <a:buChar char="•"/>
+            </a:pPr>
+            <a:r>
+              <a:rPr lang="en-US" sz="820" dirty="0">
+                <a:solidFill>
+                  <a:srgbClr val="2B2B2B"/>
+                </a:solidFill>
+                <a:latin typeface="Meiryo UI" pitchFamily="34" charset="0"/>
+                <a:ea typeface="Meiryo UI" pitchFamily="34" charset="-122"/>
+                <a:cs typeface="Meiryo UI" pitchFamily="34" charset="-120"/>
+              </a:rPr>
+              <a:t>オーラルヘルスケアは2nd STAGEの最重点事業(成長ドライバー)。明石はハブラシの特化拠点 = OHC生産性の主戦場</a:t>
+            </a:r>
+            <a:endParaRPr lang="en-US" sz="820" dirty="0"/>
+          </a:p>
+          <a:p>
+            <a:pPr marL="101600" indent="-101600">
+              <a:lnSpc>
+                <a:spcPct val="105000"/>
+              </a:lnSpc>
+              <a:spcAft>
+                <a:spcPts val="200"/>
+              </a:spcAft>
+              <a:buSzPct val="100000"/>
+              <a:buChar char="•"/>
+            </a:pPr>
+            <a:r>
+              <a:rPr lang="en-US" sz="820" dirty="0">
+                <a:solidFill>
+                  <a:srgbClr val="2B2B2B"/>
+                </a:solidFill>
+                <a:latin typeface="Meiryo UI" pitchFamily="34" charset="0"/>
+                <a:ea typeface="Meiryo UI" pitchFamily="34" charset="-122"/>
+                <a:cs typeface="Meiryo UI" pitchFamily="34" charset="-120"/>
+              </a:rPr>
+              <a:t>「明石・オーラル注力」はデジ戦とも合意済み(6/10打合せ) — 関係部門のベクトルが既に揃っている</a:t>
+            </a:r>
+            <a:endParaRPr lang="en-US" sz="820" dirty="0"/>
+          </a:p>
+          <a:p>
+            <a:pPr marL="101600" indent="-101600">
+              <a:lnSpc>
+                <a:spcPct val="105000"/>
+              </a:lnSpc>
+              <a:spcAft>
+                <a:spcPts val="200"/>
+              </a:spcAft>
+              <a:buSzPct val="100000"/>
+              <a:buChar char="•"/>
+            </a:pPr>
+            <a:r>
+              <a:rPr lang="en-US" sz="820" dirty="0">
+                <a:solidFill>
+                  <a:srgbClr val="2B2B2B"/>
+                </a:solidFill>
+                <a:latin typeface="Meiryo UI" pitchFamily="34" charset="0"/>
+                <a:ea typeface="Meiryo UI" pitchFamily="34" charset="-122"/>
+                <a:cs typeface="Meiryo UI" pitchFamily="34" charset="-120"/>
+              </a:rPr>
+              <a:t>フィジカルAI効果見積もり(31〜52機・省人化目標53名・工場317→264名)の対象拠点</a:t>
+            </a:r>
+            <a:endParaRPr lang="en-US" sz="820" dirty="0"/>
+          </a:p>
+        </p:txBody>
+      </p:sp>
+      <p:sp>
+        <p:nvSpPr>
+          <p:cNvPr id="11" name="Text 9"/>
+          <p:cNvSpPr/>
+          <p:nvPr/>
+        </p:nvSpPr>
+        <p:spPr>
+          <a:xfrm>
+            <a:off x="1554480" y="2889504"/>
+            <a:ext cx="365760" cy="164592"/>
+          </a:xfrm>
+          <a:prstGeom prst="rect">
+            <a:avLst/>
+          </a:prstGeom>
+          <a:noFill/>
+          <a:ln/>
+        </p:spPr>
+        <p:txBody>
+          <a:bodyPr wrap="square" lIns="0" tIns="0" rIns="0" bIns="0" rtlCol="0" anchor="ctr"/>
+          <a:lstStyle/>
+          <a:p>
+            <a:pPr algn="ctr" indent="0" marL="0">
+              <a:buNone/>
+            </a:pPr>
+            <a:r>
+              <a:rPr lang="en-US" sz="1000" b="1" dirty="0">
+                <a:solidFill>
+                  <a:srgbClr val="2C5F2D"/>
+                </a:solidFill>
+                <a:latin typeface="Meiryo UI" pitchFamily="34" charset="0"/>
+                <a:ea typeface="Meiryo UI" pitchFamily="34" charset="-122"/>
+                <a:cs typeface="Meiryo UI" pitchFamily="34" charset="-120"/>
+              </a:rPr>
+              <a:t>▼</a:t>
+            </a:r>
+            <a:endParaRPr lang="en-US" sz="1000" dirty="0"/>
+          </a:p>
+        </p:txBody>
+      </p:sp>
+      <p:sp>
+        <p:nvSpPr>
+          <p:cNvPr id="12" name="Shape 10"/>
+          <p:cNvSpPr/>
+          <p:nvPr/>
+        </p:nvSpPr>
+        <p:spPr>
+          <a:xfrm>
+            <a:off x="1737360" y="3054096"/>
+            <a:ext cx="10177272" cy="1389888"/>
+          </a:xfrm>
+          <a:prstGeom prst="roundRect">
+            <a:avLst>
+              <a:gd name="adj" fmla="val 3947"/>
+            </a:avLst>
+          </a:prstGeom>
+          <a:solidFill>
+            <a:srgbClr val="F3F8F1"/>
+          </a:solidFill>
+          <a:ln w="12700">
+            <a:solidFill>
+              <a:srgbClr val="2C5F2D"/>
+            </a:solidFill>
+            <a:prstDash val="solid"/>
+          </a:ln>
+        </p:spPr>
+      </p:sp>
+      <p:sp>
+        <p:nvSpPr>
+          <p:cNvPr id="13" name="Text 11"/>
+          <p:cNvSpPr/>
+          <p:nvPr/>
+        </p:nvSpPr>
+        <p:spPr>
+          <a:xfrm>
+            <a:off x="1874520" y="3118104"/>
+            <a:ext cx="9902952" cy="237744"/>
+          </a:xfrm>
+          <a:prstGeom prst="rect">
+            <a:avLst/>
+          </a:prstGeom>
+          <a:noFill/>
+          <a:ln/>
+        </p:spPr>
+        <p:txBody>
+          <a:bodyPr wrap="square" lIns="0" tIns="0" rIns="0" bIns="0" rtlCol="0" anchor="ctr"/>
+          <a:lstStyle/>
+          <a:p>
+            <a:pPr indent="0" marL="0">
+              <a:buNone/>
+            </a:pPr>
+            <a:r>
+              <a:rPr lang="en-US" sz="1100" b="1" dirty="0">
+                <a:solidFill>
+                  <a:srgbClr val="FFFFFF"/>
+                </a:solidFill>
+                <a:highlight>
+                  <a:srgbClr val="2C5F2D"/>
+                </a:highlight>
+                <a:latin typeface="Meiryo UI" pitchFamily="34" charset="0"/>
+                <a:ea typeface="Meiryo UI" pitchFamily="34" charset="-122"/>
+                <a:cs typeface="Meiryo UI" pitchFamily="34" charset="-120"/>
+              </a:rPr>
+              <a:t>Q3  </a:t>
+            </a:r>
+            <a:pPr indent="0" marL="0">
+              <a:buNone/>
+            </a:pPr>
+            <a:r>
+              <a:rPr lang="en-US" sz="1100" b="1" dirty="0">
+                <a:solidFill>
+                  <a:srgbClr val="1F3D20"/>
+                </a:solidFill>
+                <a:latin typeface="Meiryo UI" pitchFamily="34" charset="0"/>
+                <a:ea typeface="Meiryo UI" pitchFamily="34" charset="-122"/>
+                <a:cs typeface="Meiryo UI" pitchFamily="34" charset="-120"/>
+              </a:rPr>
+              <a:t> なぜ「植毛ライン」か — ギャップと改善余地の集中点</a:t>
+            </a:r>
+            <a:endParaRPr lang="en-US" sz="1100" dirty="0"/>
+          </a:p>
+        </p:txBody>
+      </p:sp>
+      <p:sp>
+        <p:nvSpPr>
+          <p:cNvPr id="14" name="Text 12"/>
+          <p:cNvSpPr/>
+          <p:nvPr/>
+        </p:nvSpPr>
+        <p:spPr>
+          <a:xfrm>
+            <a:off x="1901952" y="3392424"/>
+            <a:ext cx="9848088" cy="987552"/>
+          </a:xfrm>
+          <a:prstGeom prst="rect">
+            <a:avLst/>
+          </a:prstGeom>
+          <a:noFill/>
+          <a:ln/>
+        </p:spPr>
+        <p:txBody>
+          <a:bodyPr wrap="square" lIns="0" tIns="0" rIns="0" bIns="0" rtlCol="0" anchor="t"/>
+          <a:lstStyle/>
+          <a:p>
+            <a:pPr marL="101600" indent="-101600">
+              <a:lnSpc>
+                <a:spcPct val="105000"/>
+              </a:lnSpc>
+              <a:spcAft>
+                <a:spcPts val="200"/>
+              </a:spcAft>
+              <a:buSzPct val="100000"/>
+              <a:buChar char="•"/>
+            </a:pPr>
+            <a:r>
+              <a:rPr lang="en-US" sz="820" dirty="0">
+                <a:solidFill>
+                  <a:srgbClr val="2B2B2B"/>
+                </a:solidFill>
+                <a:latin typeface="Meiryo UI" pitchFamily="34" charset="0"/>
+                <a:ea typeface="Meiryo UI" pitchFamily="34" charset="-122"/>
+                <a:cs typeface="Meiryo UI" pitchFamily="34" charset="-120"/>
+              </a:rPr>
+              <a:t>工場最大の要員集中点: 植毛115名 = 工場317名の約36%</a:t>
+            </a:r>
+            <a:endParaRPr lang="en-US" sz="820" dirty="0"/>
+          </a:p>
+          <a:p>
+            <a:pPr marL="101600" indent="-101600">
+              <a:lnSpc>
+                <a:spcPct val="105000"/>
+              </a:lnSpc>
+              <a:spcAft>
+                <a:spcPts val="200"/>
+              </a:spcAft>
+              <a:buSzPct val="100000"/>
+              <a:buChar char="•"/>
+            </a:pPr>
+            <a:r>
+              <a:rPr lang="en-US" sz="820" dirty="0">
+                <a:solidFill>
+                  <a:srgbClr val="2B2B2B"/>
+                </a:solidFill>
+                <a:latin typeface="Meiryo UI" pitchFamily="34" charset="0"/>
+                <a:ea typeface="Meiryo UI" pitchFamily="34" charset="-122"/>
+                <a:cs typeface="Meiryo UI" pitchFamily="34" charset="-120"/>
+              </a:rPr>
+              <a:t>国内工場の工程比較で「要員が多い × 一人当たり生産金額が低い」象限に位置(改善余地が最大)</a:t>
+            </a:r>
+            <a:endParaRPr lang="en-US" sz="820" dirty="0"/>
+          </a:p>
+          <a:p>
+            <a:pPr marL="101600" indent="-101600">
+              <a:lnSpc>
+                <a:spcPct val="105000"/>
+              </a:lnSpc>
+              <a:spcAft>
+                <a:spcPts val="200"/>
+              </a:spcAft>
+              <a:buSzPct val="100000"/>
+              <a:buChar char="•"/>
+            </a:pPr>
+            <a:r>
+              <a:rPr lang="en-US" sz="820" dirty="0">
+                <a:solidFill>
+                  <a:srgbClr val="2B2B2B"/>
+                </a:solidFill>
+                <a:latin typeface="Meiryo UI" pitchFamily="34" charset="0"/>
+                <a:ea typeface="Meiryo UI" pitchFamily="34" charset="-122"/>
+                <a:cs typeface="Meiryo UI" pitchFamily="34" charset="-120"/>
+              </a:rPr>
+              <a:t>包装2ラインは38→9名/37→10名と構造転換の道筋が既にある。植毛だけが100名止まり — 工場のギャップのほぼ全てが植毛に集中</a:t>
+            </a:r>
+            <a:endParaRPr lang="en-US" sz="820" dirty="0"/>
+          </a:p>
+          <a:p>
+            <a:pPr marL="101600" indent="-101600">
+              <a:lnSpc>
+                <a:spcPct val="105000"/>
+              </a:lnSpc>
+              <a:spcAft>
+                <a:spcPts val="200"/>
+              </a:spcAft>
+              <a:buSzPct val="100000"/>
+              <a:buChar char="•"/>
+            </a:pPr>
+            <a:r>
+              <a:rPr lang="en-US" sz="820" dirty="0">
+                <a:solidFill>
+                  <a:srgbClr val="2B2B2B"/>
+                </a:solidFill>
+                <a:latin typeface="Meiryo UI" pitchFamily="34" charset="0"/>
+                <a:ea typeface="Meiryo UI" pitchFamily="34" charset="-122"/>
+                <a:cs typeface="Meiryo UI" pitchFamily="34" charset="-120"/>
+              </a:rPr>
+              <a:t>役員の名指し期待: 「115→100人ではなく、半減レベルを」(7/23役員打合せ)</a:t>
+            </a:r>
+            <a:endParaRPr lang="en-US" sz="820" dirty="0"/>
+          </a:p>
+        </p:txBody>
+      </p:sp>
+      <p:sp>
+        <p:nvSpPr>
+          <p:cNvPr id="15" name="Shape 13"/>
+          <p:cNvSpPr/>
+          <p:nvPr/>
+        </p:nvSpPr>
+        <p:spPr>
+          <a:xfrm>
+            <a:off x="274320" y="4681728"/>
+            <a:ext cx="5715000" cy="1417320"/>
+          </a:xfrm>
+          <a:prstGeom prst="roundRect">
+            <a:avLst>
+              <a:gd name="adj" fmla="val 3871"/>
+            </a:avLst>
+          </a:prstGeom>
+          <a:solidFill>
+            <a:srgbClr val="FBEDEA"/>
+          </a:solidFill>
+          <a:ln w="12700">
+            <a:solidFill>
+              <a:srgbClr val="B85042"/>
+            </a:solidFill>
+            <a:prstDash val="solid"/>
+          </a:ln>
+        </p:spPr>
+      </p:sp>
+      <p:sp>
+        <p:nvSpPr>
+          <p:cNvPr id="16" name="Text 14"/>
+          <p:cNvSpPr/>
+          <p:nvPr/>
+        </p:nvSpPr>
+        <p:spPr>
+          <a:xfrm>
+            <a:off x="411480" y="4754880"/>
+            <a:ext cx="5440680" cy="219456"/>
+          </a:xfrm>
+          <a:prstGeom prst="rect">
+            <a:avLst/>
+          </a:prstGeom>
+          <a:noFill/>
+          <a:ln/>
+        </p:spPr>
+        <p:txBody>
+          <a:bodyPr wrap="square" lIns="0" tIns="0" rIns="0" bIns="0" rtlCol="0" anchor="ctr"/>
+          <a:lstStyle/>
+          <a:p>
+            <a:pPr indent="0" marL="0">
+              <a:buNone/>
+            </a:pPr>
+            <a:r>
+              <a:rPr lang="en-US" sz="1050" b="1" dirty="0">
+                <a:solidFill>
+                  <a:srgbClr val="B85042"/>
+                </a:solidFill>
+                <a:latin typeface="Meiryo UI" pitchFamily="34" charset="0"/>
+                <a:ea typeface="Meiryo UI" pitchFamily="34" charset="-122"/>
+                <a:cs typeface="Meiryo UI" pitchFamily="34" charset="-120"/>
+              </a:rPr>
+              <a:t>なぜ「今」か</a:t>
+            </a:r>
+            <a:endParaRPr lang="en-US" sz="1050" dirty="0"/>
+          </a:p>
+        </p:txBody>
+      </p:sp>
+      <p:sp>
+        <p:nvSpPr>
+          <p:cNvPr id="17" name="Text 15"/>
+          <p:cNvSpPr/>
+          <p:nvPr/>
+        </p:nvSpPr>
+        <p:spPr>
+          <a:xfrm>
+            <a:off x="411480" y="5010912"/>
+            <a:ext cx="5440680" cy="1005840"/>
+          </a:xfrm>
+          <a:prstGeom prst="rect">
+            <a:avLst/>
+          </a:prstGeom>
+          <a:noFill/>
+          <a:ln/>
+        </p:spPr>
+        <p:txBody>
+          <a:bodyPr wrap="square" lIns="0" tIns="0" rIns="0" bIns="0" rtlCol="0" anchor="t"/>
+          <a:lstStyle/>
+          <a:p>
+            <a:pPr marL="101600" indent="-101600">
+              <a:lnSpc>
+                <a:spcPct val="105000"/>
+              </a:lnSpc>
+              <a:spcAft>
+                <a:spcPts val="300"/>
+              </a:spcAft>
+              <a:buSzPct val="100000"/>
+              <a:buChar char="•"/>
+            </a:pPr>
+            <a:r>
+              <a:rPr lang="en-US" sz="820" dirty="0">
+                <a:solidFill>
+                  <a:srgbClr val="2B2B2B"/>
+                </a:solidFill>
+                <a:latin typeface="Meiryo UI" pitchFamily="34" charset="0"/>
+                <a:ea typeface="Meiryo UI" pitchFamily="34" charset="-122"/>
+                <a:cs typeface="Meiryo UI" pitchFamily="34" charset="-120"/>
+              </a:rPr>
+              <a:t>フィジカルAIのPoCは27年開始 — 仕様が固まる前の今しか「基準から見直す順序」を組み込めない(凍結後では投資1〜2億円のムダが確定)</a:t>
+            </a:r>
+            <a:endParaRPr lang="en-US" sz="820" dirty="0"/>
+          </a:p>
+          <a:p>
+            <a:pPr marL="101600" indent="-101600">
+              <a:lnSpc>
+                <a:spcPct val="105000"/>
+              </a:lnSpc>
+              <a:buSzPct val="100000"/>
+              <a:buChar char="•"/>
+            </a:pPr>
+            <a:r>
+              <a:rPr lang="en-US" sz="820" dirty="0">
+                <a:solidFill>
+                  <a:srgbClr val="2B2B2B"/>
+                </a:solidFill>
+                <a:latin typeface="Meiryo UI" pitchFamily="34" charset="0"/>
+                <a:ea typeface="Meiryo UI" pitchFamily="34" charset="-122"/>
+                <a:cs typeface="Meiryo UI" pitchFamily="34" charset="-120"/>
+              </a:rPr>
+              <a:t>基準見直し(効果の約4割)は投資ゼロで27年から効果発現 — 2nd STAGE最終年(27年)の成果報告に間に合う</a:t>
+            </a:r>
+            <a:endParaRPr lang="en-US" sz="820" dirty="0"/>
+          </a:p>
+        </p:txBody>
+      </p:sp>
+      <p:sp>
+        <p:nvSpPr>
+          <p:cNvPr id="18" name="Shape 16"/>
+          <p:cNvSpPr/>
+          <p:nvPr/>
+        </p:nvSpPr>
+        <p:spPr>
+          <a:xfrm>
+            <a:off x="6199632" y="4681728"/>
+            <a:ext cx="5715000" cy="1417320"/>
+          </a:xfrm>
+          <a:prstGeom prst="roundRect">
+            <a:avLst>
+              <a:gd name="adj" fmla="val 3871"/>
+            </a:avLst>
+          </a:prstGeom>
+          <a:solidFill>
+            <a:srgbClr val="2C5F2D"/>
+          </a:solidFill>
+          <a:ln w="12700">
+            <a:solidFill>
+              <a:srgbClr val="2C5F2D"/>
+            </a:solidFill>
+            <a:prstDash val="solid"/>
+          </a:ln>
+        </p:spPr>
+      </p:sp>
+      <p:sp>
+        <p:nvSpPr>
+          <p:cNvPr id="19" name="Text 17"/>
+          <p:cNvSpPr/>
+          <p:nvPr/>
+        </p:nvSpPr>
+        <p:spPr>
+          <a:xfrm>
+            <a:off x="6336792" y="4754880"/>
+            <a:ext cx="5440680" cy="219456"/>
+          </a:xfrm>
+          <a:prstGeom prst="rect">
+            <a:avLst/>
+          </a:prstGeom>
+          <a:noFill/>
+          <a:ln/>
+        </p:spPr>
+        <p:txBody>
+          <a:bodyPr wrap="square" lIns="0" tIns="0" rIns="0" bIns="0" rtlCol="0" anchor="ctr"/>
+          <a:lstStyle/>
+          <a:p>
+            <a:pPr indent="0" marL="0">
+              <a:buNone/>
+            </a:pPr>
+            <a:r>
+              <a:rPr lang="en-US" sz="1050" b="1" dirty="0">
+                <a:solidFill>
+                  <a:srgbClr val="D8E8D4"/>
+                </a:solidFill>
+                <a:latin typeface="Meiryo UI" pitchFamily="34" charset="0"/>
+                <a:ea typeface="Meiryo UI" pitchFamily="34" charset="-122"/>
+                <a:cs typeface="Meiryo UI" pitchFamily="34" charset="-120"/>
+              </a:rPr>
+              <a:t>結論(本調査のスコープ)</a:t>
+            </a:r>
+            <a:endParaRPr lang="en-US" sz="1050" dirty="0"/>
+          </a:p>
+        </p:txBody>
+      </p:sp>
+      <p:sp>
+        <p:nvSpPr>
+          <p:cNvPr id="20" name="Text 18"/>
+          <p:cNvSpPr/>
+          <p:nvPr/>
+        </p:nvSpPr>
+        <p:spPr>
+          <a:xfrm>
+            <a:off x="6336792" y="5029200"/>
+            <a:ext cx="5440680" cy="1005840"/>
+          </a:xfrm>
+          <a:prstGeom prst="rect">
+            <a:avLst/>
+          </a:prstGeom>
+          <a:noFill/>
+          <a:ln/>
+        </p:spPr>
+        <p:txBody>
+          <a:bodyPr wrap="square" lIns="0" tIns="0" rIns="0" bIns="0" rtlCol="0" anchor="t"/>
+          <a:lstStyle/>
+          <a:p>
+            <a:pPr indent="0" marL="0">
+              <a:lnSpc>
+                <a:spcPct val="110000"/>
+              </a:lnSpc>
+              <a:buNone/>
+            </a:pPr>
+            <a:r>
+              <a:rPr lang="en-US" sz="1100" b="1" dirty="0">
+                <a:solidFill>
+                  <a:srgbClr val="FFFFFF"/>
+                </a:solidFill>
+                <a:latin typeface="Meiryo UI" pitchFamily="34" charset="0"/>
+                <a:ea typeface="Meiryo UI" pitchFamily="34" charset="-122"/>
+                <a:cs typeface="Meiryo UI" pitchFamily="34" charset="-120"/>
+              </a:rPr>
+              <a:t>明石工場・ハブラシ植毛ラインを最優先スコープとする。
+</a:t>
+            </a:r>
+            <a:pPr indent="0" marL="0">
+              <a:lnSpc>
+                <a:spcPct val="110000"/>
+              </a:lnSpc>
+              <a:buNone/>
+            </a:pPr>
+            <a:r>
+              <a:rPr lang="en-US" sz="850" dirty="0">
+                <a:solidFill>
+                  <a:srgbClr val="FFFFFF"/>
+                </a:solidFill>
+                <a:latin typeface="Meiryo UI" pitchFamily="34" charset="0"/>
+                <a:ea typeface="Meiryo UI" pitchFamily="34" charset="-122"/>
+                <a:cs typeface="Meiryo UI" pitchFamily="34" charset="-120"/>
+              </a:rPr>
+              <a:t>ここで「基準に遡って作業を無くす型」を確立し、包装ライン → 他工場 → 海外拠点へ横展開する(Phase 2以降)。</a:t>
+            </a:r>
+            <a:endParaRPr lang="en-US" sz="1100" dirty="0"/>
+          </a:p>
+        </p:txBody>
+      </p:sp>
+      <p:sp>
+        <p:nvSpPr>
+          <p:cNvPr id="21" name="Text 19"/>
+          <p:cNvSpPr/>
+          <p:nvPr/>
+        </p:nvSpPr>
+        <p:spPr>
+          <a:xfrm>
+            <a:off x="274320" y="6263640"/>
+            <a:ext cx="11640312" cy="228600"/>
+          </a:xfrm>
+          <a:prstGeom prst="rect">
+            <a:avLst/>
+          </a:prstGeom>
+          <a:noFill/>
+          <a:ln/>
+        </p:spPr>
+        <p:txBody>
+          <a:bodyPr wrap="square" lIns="0" tIns="0" rIns="0" bIns="0" rtlCol="0" anchor="t"/>
+          <a:lstStyle/>
+          <a:p>
+            <a:pPr indent="0" marL="0">
+              <a:buNone/>
+            </a:pPr>
+            <a:r>
+              <a:rPr lang="en-US" sz="650" dirty="0">
+                <a:solidFill>
+                  <a:srgbClr val="595959"/>
+                </a:solidFill>
+                <a:latin typeface="Meiryo UI" pitchFamily="34" charset="0"/>
+                <a:ea typeface="Meiryo UI" pitchFamily="34" charset="-122"/>
+                <a:cs typeface="Meiryo UI" pitchFamily="34" charset="-120"/>
+              </a:rPr>
+              <a:t>出典: 生産技術戦略会議骨子案(2026/7)・フィジカルAI導入効果見積もり・7/23役員打合せメモ・6/10デジ戦打合せ議事録・Vision2030 2nd STAGE(公開情報)</a:t>
+            </a:r>
+            <a:endParaRPr lang="en-US" sz="650" dirty="0"/>
+          </a:p>
+        </p:txBody>
+      </p:sp>
+    </p:spTree>
+  </p:cSld>
+  <p:clrMapOvr>
+    <a:masterClrMapping/>
+  </p:clrMapOvr>
+</p:sld>
+</file>
+
+<file path=ppt/slides/slide2.xml><?xml version="1.0" encoding="utf-8"?>
+<p:sld xmlns:a="http://schemas.openxmlformats.org/drawingml/2006/main" xmlns:r="http://schemas.openxmlformats.org/officeDocument/2006/relationships" xmlns:p="http://schemas.openxmlformats.org/presentationml/2006/main">
+  <p:cSld name="Slide 2">
+    <p:bg>
+      <p:bgPr>
+        <a:solidFill>
+          <a:srgbClr val="FFFFFF"/>
+        </a:solidFill>
+      </p:bgPr>
+    </p:bg>
+    <p:spTree>
+      <p:nvGrpSpPr>
+        <p:cNvPr id="1" name=""/>
+        <p:cNvGrpSpPr/>
+        <p:nvPr/>
+      </p:nvGrpSpPr>
+      <p:grpSpPr>
+        <a:xfrm>
+          <a:off x="0" y="0"/>
+          <a:ext cx="0" cy="0"/>
+          <a:chOff x="0" y="0"/>
+          <a:chExt cx="0" cy="0"/>
+        </a:xfrm>
+      </p:grpSpPr>
+      <p:sp>
+        <p:nvSpPr>
+          <p:cNvPr id="2" name="Text 0"/>
+          <p:cNvSpPr/>
+          <p:nvPr/>
+        </p:nvSpPr>
+        <p:spPr>
+          <a:xfrm>
+            <a:off x="274320" y="91440"/>
+            <a:ext cx="9601200" cy="384048"/>
+          </a:xfrm>
+          <a:prstGeom prst="rect">
+            <a:avLst/>
+          </a:prstGeom>
+          <a:noFill/>
+          <a:ln/>
+        </p:spPr>
+        <p:txBody>
+          <a:bodyPr wrap="square" lIns="0" tIns="0" rIns="0" bIns="0" rtlCol="0" anchor="ctr"/>
+          <a:lstStyle/>
+          <a:p>
+            <a:pPr indent="0" marL="0">
+              <a:buNone/>
+            </a:pPr>
+            <a:r>
+              <a:rPr lang="en-US" sz="1700" b="1" dirty="0">
+                <a:solidFill>
+                  <a:srgbClr val="1F3D20"/>
+                </a:solidFill>
+                <a:latin typeface="Meiryo UI" pitchFamily="34" charset="0"/>
+                <a:ea typeface="Meiryo UI" pitchFamily="34" charset="-122"/>
+                <a:cs typeface="Meiryo UI" pitchFamily="34" charset="-120"/>
+              </a:rPr>
+              <a:t>全体サマリー — What / Where / Why / How / Who / When / How Much</a:t>
+            </a:r>
+            <a:endParaRPr lang="en-US" sz="1700" dirty="0"/>
+          </a:p>
+        </p:txBody>
+      </p:sp>
+      <p:sp>
+        <p:nvSpPr>
+          <p:cNvPr id="3" name="Text 1"/>
+          <p:cNvSpPr/>
+          <p:nvPr/>
+        </p:nvSpPr>
+        <p:spPr>
+          <a:xfrm>
+            <a:off x="9875520" y="91440"/>
+            <a:ext cx="2039112" cy="384048"/>
+          </a:xfrm>
+          <a:prstGeom prst="rect">
+            <a:avLst/>
+          </a:prstGeom>
+          <a:noFill/>
+          <a:ln/>
+        </p:spPr>
+        <p:txBody>
+          <a:bodyPr wrap="square" lIns="0" tIns="0" rIns="0" bIns="0" rtlCol="0" anchor="ctr"/>
+          <a:lstStyle/>
+          <a:p>
+            <a:pPr algn="r" indent="0" marL="0">
+              <a:buNone/>
+            </a:pPr>
+            <a:r>
+              <a:rPr lang="en-US" sz="750" dirty="0">
+                <a:solidFill>
+                  <a:srgbClr val="595959"/>
+                </a:solidFill>
+                <a:latin typeface="Meiryo UI" pitchFamily="34" charset="0"/>
+                <a:ea typeface="Meiryo UI" pitchFamily="34" charset="-122"/>
+                <a:cs typeface="Meiryo UI" pitchFamily="34" charset="-120"/>
+              </a:rPr>
+              <a:t>対象: 明石工場 ハブラシ植毛ライン(前提は前頁)</a:t>
+            </a:r>
+            <a:endParaRPr lang="en-US" sz="750" dirty="0"/>
+          </a:p>
+        </p:txBody>
+      </p:sp>
+      <p:graphicFrame>
+        <p:nvGraphicFramePr>
+          <p:cNvPr id="3" name="Table 0"/>
+          <p:cNvGraphicFramePr>
+            <a:graphicFrameLocks noGrp="1"/>
+          </p:cNvGraphicFramePr>
+          <p:nvPr>
+            <p:extLst>
+              <p:ext uri="{D42A27DB-BD31-4B8C-83A1-F6EECF244321}">
+                <p14:modId xmlns:p14="http://schemas.microsoft.com/office/powerpoint/2010/main" val="1579011935"/>
+              </p:ext>
+            </p:extLst>
+          </p:nvPr>
+        </p:nvGraphicFramePr>
+        <p:xfrm>
+          <a:off x="274320" y="603504"/>
+          <a:ext cx="11640312" cy="914400"/>
+        </p:xfrm>
+        <a:graphic>
+          <a:graphicData uri="http://schemas.openxmlformats.org/drawingml/2006/table">
+            <a:tbl>
+              <a:tblPr/>
+              <a:tblGrid>
+                <a:gridCol w="1325880"/>
+                <a:gridCol w="7708392"/>
+                <a:gridCol w="2606040"/>
+              </a:tblGrid>
+              <a:tr h="786384">
+                <a:tc>
+                  <a:txBody>
+                    <a:bodyPr/>
+                    <a:lstStyle/>
+                    <a:p>
+                      <a:pPr algn="ctr" indent="0" marL="0">
+                        <a:buNone/>
+                      </a:pPr>
+                      <a:r>
+                        <a:rPr lang="en-US" sz="900" b="1" dirty="0">
+                          <a:solidFill>
+                            <a:srgbClr val="FFFFFF"/>
+                          </a:solidFill>
+                          <a:latin typeface="Meiryo UI" pitchFamily="34" charset="0"/>
+                          <a:ea typeface="Meiryo UI" pitchFamily="34" charset="-122"/>
+                          <a:cs typeface="Meiryo UI" pitchFamily="34" charset="-120"/>
+                        </a:rPr>
+                        <a:t>What</a:t>
+                      </a:r>
+                      <a:endParaRPr lang="en-US" sz="900" dirty="0">
+                        <a:latin typeface="Meiryo UI" charset="0"/>
+                        <a:ea typeface="Meiryo UI" charset="0"/>
+                        <a:cs typeface="Meiryo UI" charset="0"/>
+                      </a:endParaRPr>
+                    </a:p>
+                    <a:p>
+                      <a:pPr algn="ctr" indent="0" marL="0">
+                        <a:buNone/>
+                      </a:pPr>
+                      <a:r>
+                        <a:rPr lang="en-US" sz="900" b="1" dirty="0">
+                          <a:solidFill>
+                            <a:srgbClr val="FFFFFF"/>
+                          </a:solidFill>
+                          <a:latin typeface="Meiryo UI" pitchFamily="34" charset="0"/>
+                          <a:ea typeface="Meiryo UI" pitchFamily="34" charset="-122"/>
+                          <a:cs typeface="Meiryo UI" pitchFamily="34" charset="-120"/>
+                        </a:rPr>
+                        <a:t>何が問題</a:t>
+                      </a:r>
+                      <a:endParaRPr lang="en-US" sz="900" dirty="0">
+                        <a:latin typeface="Meiryo UI" charset="0"/>
+                        <a:ea typeface="Meiryo UI" charset="0"/>
+                        <a:cs typeface="Meiryo UI" charset="0"/>
+                      </a:endParaRPr>
+                    </a:p>
+                  </a:txBody>
+                  <a:tcPr marL="91440" marR="91440" marT="45720" marB="45720" anchor="ctr">
+                    <a:lnL w="9525" cap="flat" cmpd="sng" algn="ctr">
+                      <a:solidFill>
+                        <a:srgbClr val="D3DED0"/>
+                      </a:solidFill>
+                      <a:prstDash val="solid"/>
+                      <a:round/>
+                      <a:headEnd type="none" w="med" len="med"/>
+                      <a:tailEnd type="none" w="med" len="med"/>
+                    </a:lnL>
+                    <a:lnR w="9525" cap="flat" cmpd="sng" algn="ctr">
+                      <a:solidFill>
+                        <a:srgbClr val="D3DED0"/>
+                      </a:solidFill>
+                      <a:prstDash val="solid"/>
+                      <a:round/>
+                      <a:headEnd type="none" w="med" len="med"/>
+                      <a:tailEnd type="none" w="med" len="med"/>
+                    </a:lnR>
+                    <a:lnT w="9525" cap="flat" cmpd="sng" algn="ctr">
+                      <a:solidFill>
+                        <a:srgbClr val="D3DED0"/>
+                      </a:solidFill>
+                      <a:prstDash val="solid"/>
+                      <a:round/>
+                      <a:headEnd type="none" w="med" len="med"/>
+                      <a:tailEnd type="none" w="med" len="med"/>
+                    </a:lnT>
+                    <a:lnB w="9525" cap="flat" cmpd="sng" algn="ctr">
+                      <a:solidFill>
+                        <a:srgbClr val="D3DED0"/>
+                      </a:solidFill>
+                      <a:prstDash val="solid"/>
+                      <a:round/>
+                      <a:headEnd type="none" w="med" len="med"/>
+                      <a:tailEnd type="none" w="med" len="med"/>
+                    </a:lnB>
+                    <a:solidFill>
+                      <a:srgbClr val="2C5F2D"/>
+                    </a:solidFill>
+                  </a:tcPr>
+                </a:tc>
+                <a:tc>
+                  <a:txBody>
+                    <a:bodyPr/>
+                    <a:lstStyle/>
+                    <a:p>
+                      <a:pPr indent="0" marL="0">
+                        <a:buNone/>
+                      </a:pPr>
+                      <a:r>
+                        <a:rPr lang="en-US" sz="820" dirty="0">
+                          <a:solidFill>
+                            <a:srgbClr val="2B2B2B"/>
+                          </a:solidFill>
+                          <a:latin typeface="Meiryo UI" pitchFamily="34" charset="0"/>
+                          <a:ea typeface="Meiryo UI" pitchFamily="34" charset="-122"/>
+                          <a:cs typeface="Meiryo UI" pitchFamily="34" charset="-120"/>
+                        </a:rPr>
+                        <a:t>To-Be: 植毛57名(半減・2030年、工場264名・一人当たり生産金額+20%) ⇔ As-Is: 115名。現行計画(フィジカルAI導入のみ)では100名止まり。</a:t>
+                      </a:r>
+                      <a:pPr indent="0" marL="0">
+                        <a:buNone/>
+                      </a:pPr>
+                      <a:r>
+                        <a:rPr lang="en-US" sz="820" b="1" dirty="0">
+                          <a:solidFill>
+                            <a:srgbClr val="B85042"/>
+                          </a:solidFill>
+                          <a:latin typeface="Meiryo UI" pitchFamily="34" charset="0"/>
+                          <a:ea typeface="Meiryo UI" pitchFamily="34" charset="-122"/>
+                          <a:cs typeface="Meiryo UI" pitchFamily="34" charset="-120"/>
+                        </a:rPr>
+                        <a:t> GAP = 43名分の打ち手が存在しない。</a:t>
+                      </a:r>
+                      <a:endParaRPr lang="en-US" sz="820" dirty="0">
+                        <a:latin typeface="Meiryo UI" charset="0"/>
+                        <a:ea typeface="Meiryo UI" charset="0"/>
+                        <a:cs typeface="Meiryo UI" charset="0"/>
+                      </a:endParaRPr>
+                    </a:p>
+                  </a:txBody>
+                  <a:tcPr marL="54864" marR="54864" marT="54864" marB="54864" anchor="ctr">
+                    <a:lnL w="9525" cap="flat" cmpd="sng" algn="ctr">
+                      <a:solidFill>
+                        <a:srgbClr val="D3DED0"/>
+                      </a:solidFill>
+                      <a:prstDash val="solid"/>
+                      <a:round/>
+                      <a:headEnd type="none" w="med" len="med"/>
+                      <a:tailEnd type="none" w="med" len="med"/>
+                    </a:lnL>
+                    <a:lnR w="9525" cap="flat" cmpd="sng" algn="ctr">
+                      <a:solidFill>
+                        <a:srgbClr val="D3DED0"/>
+                      </a:solidFill>
+                      <a:prstDash val="solid"/>
+                      <a:round/>
+                      <a:headEnd type="none" w="med" len="med"/>
+                      <a:tailEnd type="none" w="med" len="med"/>
+                    </a:lnR>
+                    <a:lnT w="9525" cap="flat" cmpd="sng" algn="ctr">
+                      <a:solidFill>
+                        <a:srgbClr val="D3DED0"/>
+                      </a:solidFill>
+                      <a:prstDash val="solid"/>
+                      <a:round/>
+                      <a:headEnd type="none" w="med" len="med"/>
+                      <a:tailEnd type="none" w="med" len="med"/>
+                    </a:lnT>
+                    <a:lnB w="9525" cap="flat" cmpd="sng" algn="ctr">
+                      <a:solidFill>
+                        <a:srgbClr val="D3DED0"/>
+                      </a:solidFill>
+                      <a:prstDash val="solid"/>
+                      <a:round/>
+                      <a:headEnd type="none" w="med" len="med"/>
+                      <a:tailEnd type="none" w="med" len="med"/>
+                    </a:lnB>
+                  </a:tcPr>
+                </a:tc>
+                <a:tc>
+                  <a:txBody>
+                    <a:bodyPr/>
+                    <a:lstStyle/>
+                    <a:p>
+                      <a:pPr algn="ctr" indent="0" marL="0">
+                        <a:buNone/>
+                      </a:pPr>
+                      <a:r>
+                        <a:rPr lang="en-US" sz="1250" b="1" dirty="0">
+                          <a:solidFill>
+                            <a:srgbClr val="B85042"/>
+                          </a:solidFill>
+                          <a:latin typeface="Meiryo UI" pitchFamily="34" charset="0"/>
+                          <a:ea typeface="Meiryo UI" pitchFamily="34" charset="-122"/>
+                          <a:cs typeface="Meiryo UI" pitchFamily="34" charset="-120"/>
+                        </a:rPr>
+                        <a:t>▲43名
+</a:t>
+                      </a:r>
+                      <a:pPr algn="ctr" indent="0" marL="0">
+                        <a:buNone/>
+                      </a:pPr>
+                      <a:r>
+                        <a:rPr lang="en-US" sz="680" dirty="0">
+                          <a:solidFill>
+                            <a:srgbClr val="595959"/>
+                          </a:solidFill>
+                          <a:latin typeface="Meiryo UI" pitchFamily="34" charset="0"/>
+                          <a:ea typeface="Meiryo UI" pitchFamily="34" charset="-122"/>
+                          <a:cs typeface="Meiryo UI" pitchFamily="34" charset="-120"/>
+                        </a:rPr>
+                        <a:t>年約2.2億円相当の打ち手不在</a:t>
+                      </a:r>
+                      <a:endParaRPr lang="en-US" sz="1200" dirty="0">
+                        <a:latin typeface="Meiryo UI" charset="0"/>
+                        <a:ea typeface="Meiryo UI" charset="0"/>
+                        <a:cs typeface="Meiryo UI" charset="0"/>
+                      </a:endParaRPr>
+                    </a:p>
+                  </a:txBody>
+                  <a:tcPr marL="91440" marR="91440" marT="45720" marB="45720" anchor="ctr">
+                    <a:lnL w="9525" cap="flat" cmpd="sng" algn="ctr">
+                      <a:solidFill>
+                        <a:srgbClr val="D3DED0"/>
+                      </a:solidFill>
+                      <a:prstDash val="solid"/>
+                      <a:round/>
+                      <a:headEnd type="none" w="med" len="med"/>
+                      <a:tailEnd type="none" w="med" len="med"/>
+                    </a:lnL>
+                    <a:lnR w="9525" cap="flat" cmpd="sng" algn="ctr">
+                      <a:solidFill>
+                        <a:srgbClr val="D3DED0"/>
+                      </a:solidFill>
+                      <a:prstDash val="solid"/>
+                      <a:round/>
+                      <a:headEnd type="none" w="med" len="med"/>
+                      <a:tailEnd type="none" w="med" len="med"/>
+                    </a:lnR>
+                    <a:lnT w="9525" cap="flat" cmpd="sng" algn="ctr">
+                      <a:solidFill>
+                        <a:srgbClr val="D3DED0"/>
+                      </a:solidFill>
+                      <a:prstDash val="solid"/>
+                      <a:round/>
+                      <a:headEnd type="none" w="med" len="med"/>
+                      <a:tailEnd type="none" w="med" len="med"/>
+                    </a:lnT>
+                    <a:lnB w="9525" cap="flat" cmpd="sng" algn="ctr">
+                      <a:solidFill>
+                        <a:srgbClr val="D3DED0"/>
+                      </a:solidFill>
+                      <a:prstDash val="solid"/>
+                      <a:round/>
+                      <a:headEnd type="none" w="med" len="med"/>
+                      <a:tailEnd type="none" w="med" len="med"/>
+                    </a:lnB>
+                    <a:solidFill>
+                      <a:srgbClr val="FBEDEA"/>
+                    </a:solidFill>
+                  </a:tcPr>
+                </a:tc>
+              </a:tr>
+              <a:tr h="786384">
+                <a:tc>
+                  <a:txBody>
+                    <a:bodyPr/>
+                    <a:lstStyle/>
+                    <a:p>
+                      <a:pPr algn="ctr" indent="0" marL="0">
+                        <a:buNone/>
+                      </a:pPr>
+                      <a:r>
+                        <a:rPr lang="en-US" sz="900" b="1" dirty="0">
+                          <a:solidFill>
+                            <a:srgbClr val="FFFFFF"/>
+                          </a:solidFill>
+                          <a:latin typeface="Meiryo UI" pitchFamily="34" charset="0"/>
+                          <a:ea typeface="Meiryo UI" pitchFamily="34" charset="-122"/>
+                          <a:cs typeface="Meiryo UI" pitchFamily="34" charset="-120"/>
+                        </a:rPr>
+                        <a:t>Where</a:t>
+                      </a:r>
+                      <a:endParaRPr lang="en-US" sz="900" dirty="0">
+                        <a:latin typeface="Meiryo UI" charset="0"/>
+                        <a:ea typeface="Meiryo UI" charset="0"/>
+                        <a:cs typeface="Meiryo UI" charset="0"/>
+                      </a:endParaRPr>
+                    </a:p>
+                    <a:p>
+                      <a:pPr algn="ctr" indent="0" marL="0">
+                        <a:buNone/>
+                      </a:pPr>
+                      <a:r>
+                        <a:rPr lang="en-US" sz="900" b="1" dirty="0">
+                          <a:solidFill>
+                            <a:srgbClr val="FFFFFF"/>
+                          </a:solidFill>
+                          <a:latin typeface="Meiryo UI" pitchFamily="34" charset="0"/>
+                          <a:ea typeface="Meiryo UI" pitchFamily="34" charset="-122"/>
+                          <a:cs typeface="Meiryo UI" pitchFamily="34" charset="-120"/>
+                        </a:rPr>
+                        <a:t>特に問題</a:t>
+                      </a:r>
+                      <a:endParaRPr lang="en-US" sz="900" dirty="0">
+                        <a:latin typeface="Meiryo UI" charset="0"/>
+                        <a:ea typeface="Meiryo UI" charset="0"/>
+                        <a:cs typeface="Meiryo UI" charset="0"/>
+                      </a:endParaRPr>
+                    </a:p>
+                  </a:txBody>
+                  <a:tcPr marL="91440" marR="91440" marT="45720" marB="45720" anchor="ctr">
+                    <a:lnL w="9525" cap="flat" cmpd="sng" algn="ctr">
+                      <a:solidFill>
+                        <a:srgbClr val="D3DED0"/>
+                      </a:solidFill>
+                      <a:prstDash val="solid"/>
+                      <a:round/>
+                      <a:headEnd type="none" w="med" len="med"/>
+                      <a:tailEnd type="none" w="med" len="med"/>
+                    </a:lnL>
+                    <a:lnR w="9525" cap="flat" cmpd="sng" algn="ctr">
+                      <a:solidFill>
+                        <a:srgbClr val="D3DED0"/>
+                      </a:solidFill>
+                      <a:prstDash val="solid"/>
+                      <a:round/>
+                      <a:headEnd type="none" w="med" len="med"/>
+                      <a:tailEnd type="none" w="med" len="med"/>
+                    </a:lnR>
+                    <a:lnT w="9525" cap="flat" cmpd="sng" algn="ctr">
+                      <a:solidFill>
+                        <a:srgbClr val="D3DED0"/>
+                      </a:solidFill>
+                      <a:prstDash val="solid"/>
+                      <a:round/>
+                      <a:headEnd type="none" w="med" len="med"/>
+                      <a:tailEnd type="none" w="med" len="med"/>
+                    </a:lnT>
+                    <a:lnB w="9525" cap="flat" cmpd="sng" algn="ctr">
+                      <a:solidFill>
+                        <a:srgbClr val="D3DED0"/>
+                      </a:solidFill>
+                      <a:prstDash val="solid"/>
+                      <a:round/>
+                      <a:headEnd type="none" w="med" len="med"/>
+                      <a:tailEnd type="none" w="med" len="med"/>
+                    </a:lnB>
+                    <a:solidFill>
+                      <a:srgbClr val="2C5F2D"/>
+                    </a:solidFill>
+                  </a:tcPr>
+                </a:tc>
+                <a:tc>
+                  <a:txBody>
+                    <a:bodyPr/>
+                    <a:lstStyle/>
+                    <a:p>
+                      <a:pPr indent="0" marL="0">
+                        <a:buNone/>
+                      </a:pPr>
+                      <a:r>
+                        <a:rPr lang="en-US" sz="820" dirty="0">
+                          <a:solidFill>
+                            <a:srgbClr val="2B2B2B"/>
+                          </a:solidFill>
+                          <a:latin typeface="Meiryo UI" pitchFamily="34" charset="0"/>
+                          <a:ea typeface="Meiryo UI" pitchFamily="34" charset="-122"/>
+                          <a:cs typeface="Meiryo UI" pitchFamily="34" charset="-120"/>
+                        </a:rPr>
+                        <a:t>GAPは</a:t>
+                      </a:r>
+                      <a:pPr indent="0" marL="0">
+                        <a:buNone/>
+                      </a:pPr>
+                      <a:r>
+                        <a:rPr lang="en-US" sz="820" b="1" dirty="0">
+                          <a:solidFill>
+                            <a:srgbClr val="2B2B2B"/>
+                          </a:solidFill>
+                          <a:latin typeface="Meiryo UI" pitchFamily="34" charset="0"/>
+                          <a:ea typeface="Meiryo UI" pitchFamily="34" charset="-122"/>
+                          <a:cs typeface="Meiryo UI" pitchFamily="34" charset="-120"/>
+                        </a:rPr>
+                        <a:t>当社独自の品質基準・規定が要求する作業(〜40名)</a:t>
+                      </a:r>
+                      <a:pPr indent="0" marL="0">
+                        <a:buNone/>
+                      </a:pPr>
+                      <a:r>
+                        <a:rPr lang="en-US" sz="820" dirty="0">
+                          <a:solidFill>
+                            <a:srgbClr val="2B2B2B"/>
+                          </a:solidFill>
+                          <a:latin typeface="Meiryo UI" pitchFamily="34" charset="0"/>
+                          <a:ea typeface="Meiryo UI" pitchFamily="34" charset="-122"/>
+                          <a:cs typeface="Meiryo UI" pitchFamily="34" charset="-120"/>
+                        </a:rPr>
+                        <a:t>と設備起因の停止対応(〜25名)に集中。現行AI計画がカバーするのは定型作業(〜20名)のみで、</a:t>
+                      </a:r>
+                      <a:pPr indent="0" marL="0">
+                        <a:buNone/>
+                      </a:pPr>
+                      <a:r>
+                        <a:rPr lang="en-US" sz="820" b="1" dirty="0">
+                          <a:solidFill>
+                            <a:srgbClr val="2B2B2B"/>
+                          </a:solidFill>
+                          <a:latin typeface="Meiryo UI" pitchFamily="34" charset="0"/>
+                          <a:ea typeface="Meiryo UI" pitchFamily="34" charset="-122"/>
+                          <a:cs typeface="Meiryo UI" pitchFamily="34" charset="-120"/>
+                        </a:rPr>
+                        <a:t>最大の塊に手が付いていない。</a:t>
+                      </a:r>
+                      <a:endParaRPr lang="en-US" sz="820" dirty="0">
+                        <a:latin typeface="Meiryo UI" charset="0"/>
+                        <a:ea typeface="Meiryo UI" charset="0"/>
+                        <a:cs typeface="Meiryo UI" charset="0"/>
+                      </a:endParaRPr>
+                    </a:p>
+                  </a:txBody>
+                  <a:tcPr marL="54864" marR="54864" marT="54864" marB="54864" anchor="ctr">
+                    <a:lnL w="9525" cap="flat" cmpd="sng" algn="ctr">
+                      <a:solidFill>
+                        <a:srgbClr val="D3DED0"/>
+                      </a:solidFill>
+                      <a:prstDash val="solid"/>
+                      <a:round/>
+                      <a:headEnd type="none" w="med" len="med"/>
+                      <a:tailEnd type="none" w="med" len="med"/>
+                    </a:lnL>
+                    <a:lnR w="9525" cap="flat" cmpd="sng" algn="ctr">
+                      <a:solidFill>
+                        <a:srgbClr val="D3DED0"/>
+                      </a:solidFill>
+                      <a:prstDash val="solid"/>
+                      <a:round/>
+                      <a:headEnd type="none" w="med" len="med"/>
+                      <a:tailEnd type="none" w="med" len="med"/>
+                    </a:lnR>
+                    <a:lnT w="9525" cap="flat" cmpd="sng" algn="ctr">
+                      <a:solidFill>
+                        <a:srgbClr val="D3DED0"/>
+                      </a:solidFill>
+                      <a:prstDash val="solid"/>
+                      <a:round/>
+                      <a:headEnd type="none" w="med" len="med"/>
+                      <a:tailEnd type="none" w="med" len="med"/>
+                    </a:lnT>
+                    <a:lnB w="9525" cap="flat" cmpd="sng" algn="ctr">
+                      <a:solidFill>
+                        <a:srgbClr val="D3DED0"/>
+                      </a:solidFill>
+                      <a:prstDash val="solid"/>
+                      <a:round/>
+                      <a:headEnd type="none" w="med" len="med"/>
+                      <a:tailEnd type="none" w="med" len="med"/>
+                    </a:lnB>
+                  </a:tcPr>
+                </a:tc>
+                <a:tc>
+                  <a:txBody>
+                    <a:bodyPr/>
+                    <a:lstStyle/>
+                    <a:p>
+                      <a:pPr algn="ctr" indent="0" marL="0">
+                        <a:buNone/>
+                      </a:pPr>
+                      <a:r>
+                        <a:rPr lang="en-US" sz="1250" b="1" dirty="0">
+                          <a:solidFill>
+                            <a:srgbClr val="B85042"/>
+                          </a:solidFill>
+                          <a:latin typeface="Meiryo UI" pitchFamily="34" charset="0"/>
+                          <a:ea typeface="Meiryo UI" pitchFamily="34" charset="-122"/>
+                          <a:cs typeface="Meiryo UI" pitchFamily="34" charset="-120"/>
+                        </a:rPr>
+                        <a:t>独自基準 〜40名
+</a:t>
+                      </a:r>
+                      <a:pPr algn="ctr" indent="0" marL="0">
+                        <a:buNone/>
+                      </a:pPr>
+                      <a:r>
+                        <a:rPr lang="en-US" sz="680" dirty="0">
+                          <a:solidFill>
+                            <a:srgbClr val="595959"/>
+                          </a:solidFill>
+                          <a:latin typeface="Meiryo UI" pitchFamily="34" charset="0"/>
+                          <a:ea typeface="Meiryo UI" pitchFamily="34" charset="-122"/>
+                          <a:cs typeface="Meiryo UI" pitchFamily="34" charset="-120"/>
+                        </a:rPr>
+                        <a:t>GAP最大の塊(未着手)</a:t>
+                      </a:r>
+                      <a:endParaRPr lang="en-US" sz="1200" dirty="0">
+                        <a:latin typeface="Meiryo UI" charset="0"/>
+                        <a:ea typeface="Meiryo UI" charset="0"/>
+                        <a:cs typeface="Meiryo UI" charset="0"/>
+                      </a:endParaRPr>
+                    </a:p>
+                  </a:txBody>
+                  <a:tcPr marL="91440" marR="91440" marT="45720" marB="45720" anchor="ctr">
+                    <a:lnL w="9525" cap="flat" cmpd="sng" algn="ctr">
+                      <a:solidFill>
+                        <a:srgbClr val="D3DED0"/>
+                      </a:solidFill>
+                      <a:prstDash val="solid"/>
+                      <a:round/>
+                      <a:headEnd type="none" w="med" len="med"/>
+                      <a:tailEnd type="none" w="med" len="med"/>
+                    </a:lnL>
+                    <a:lnR w="9525" cap="flat" cmpd="sng" algn="ctr">
+                      <a:solidFill>
+                        <a:srgbClr val="D3DED0"/>
+                      </a:solidFill>
+                      <a:prstDash val="solid"/>
+                      <a:round/>
+                      <a:headEnd type="none" w="med" len="med"/>
+                      <a:tailEnd type="none" w="med" len="med"/>
+                    </a:lnR>
+                    <a:lnT w="9525" cap="flat" cmpd="sng" algn="ctr">
+                      <a:solidFill>
+                        <a:srgbClr val="D3DED0"/>
+                      </a:solidFill>
+                      <a:prstDash val="solid"/>
+                      <a:round/>
+                      <a:headEnd type="none" w="med" len="med"/>
+                      <a:tailEnd type="none" w="med" len="med"/>
+                    </a:lnT>
+                    <a:lnB w="9525" cap="flat" cmpd="sng" algn="ctr">
+                      <a:solidFill>
+                        <a:srgbClr val="D3DED0"/>
+                      </a:solidFill>
+                      <a:prstDash val="solid"/>
+                      <a:round/>
+                      <a:headEnd type="none" w="med" len="med"/>
+                      <a:tailEnd type="none" w="med" len="med"/>
+                    </a:lnB>
+                    <a:solidFill>
+                      <a:srgbClr val="FBEDEA"/>
+                    </a:solidFill>
+                  </a:tcPr>
+                </a:tc>
+              </a:tr>
+              <a:tr h="786384">
+                <a:tc>
+                  <a:txBody>
+                    <a:bodyPr/>
+                    <a:lstStyle/>
+                    <a:p>
+                      <a:pPr algn="ctr" indent="0" marL="0">
+                        <a:buNone/>
+                      </a:pPr>
+                      <a:r>
+                        <a:rPr lang="en-US" sz="900" b="1" dirty="0">
+                          <a:solidFill>
+                            <a:srgbClr val="FFFFFF"/>
+                          </a:solidFill>
+                          <a:latin typeface="Meiryo UI" pitchFamily="34" charset="0"/>
+                          <a:ea typeface="Meiryo UI" pitchFamily="34" charset="-122"/>
+                          <a:cs typeface="Meiryo UI" pitchFamily="34" charset="-120"/>
+                        </a:rPr>
+                        <a:t>Why</a:t>
+                      </a:r>
+                      <a:endParaRPr lang="en-US" sz="900" dirty="0">
+                        <a:latin typeface="Meiryo UI" charset="0"/>
+                        <a:ea typeface="Meiryo UI" charset="0"/>
+                        <a:cs typeface="Meiryo UI" charset="0"/>
+                      </a:endParaRPr>
+                    </a:p>
+                    <a:p>
+                      <a:pPr algn="ctr" indent="0" marL="0">
+                        <a:buNone/>
+                      </a:pPr>
+                      <a:r>
+                        <a:rPr lang="en-US" sz="900" b="1" dirty="0">
+                          <a:solidFill>
+                            <a:srgbClr val="FFFFFF"/>
+                          </a:solidFill>
+                          <a:latin typeface="Meiryo UI" pitchFamily="34" charset="0"/>
+                          <a:ea typeface="Meiryo UI" pitchFamily="34" charset="-122"/>
+                          <a:cs typeface="Meiryo UI" pitchFamily="34" charset="-120"/>
+                        </a:rPr>
+                        <a:t>遠因</a:t>
+                      </a:r>
+                      <a:endParaRPr lang="en-US" sz="900" dirty="0">
+                        <a:latin typeface="Meiryo UI" charset="0"/>
+                        <a:ea typeface="Meiryo UI" charset="0"/>
+                        <a:cs typeface="Meiryo UI" charset="0"/>
+                      </a:endParaRPr>
+                    </a:p>
+                  </a:txBody>
+                  <a:tcPr marL="91440" marR="91440" marT="45720" marB="45720" anchor="ctr">
+                    <a:lnL w="9525" cap="flat" cmpd="sng" algn="ctr">
+                      <a:solidFill>
+                        <a:srgbClr val="D3DED0"/>
+                      </a:solidFill>
+                      <a:prstDash val="solid"/>
+                      <a:round/>
+                      <a:headEnd type="none" w="med" len="med"/>
+                      <a:tailEnd type="none" w="med" len="med"/>
+                    </a:lnL>
+                    <a:lnR w="9525" cap="flat" cmpd="sng" algn="ctr">
+                      <a:solidFill>
+                        <a:srgbClr val="D3DED0"/>
+                      </a:solidFill>
+                      <a:prstDash val="solid"/>
+                      <a:round/>
+                      <a:headEnd type="none" w="med" len="med"/>
+                      <a:tailEnd type="none" w="med" len="med"/>
+                    </a:lnR>
+                    <a:lnT w="9525" cap="flat" cmpd="sng" algn="ctr">
+                      <a:solidFill>
+                        <a:srgbClr val="D3DED0"/>
+                      </a:solidFill>
+                      <a:prstDash val="solid"/>
+                      <a:round/>
+                      <a:headEnd type="none" w="med" len="med"/>
+                      <a:tailEnd type="none" w="med" len="med"/>
+                    </a:lnT>
+                    <a:lnB w="9525" cap="flat" cmpd="sng" algn="ctr">
+                      <a:solidFill>
+                        <a:srgbClr val="D3DED0"/>
+                      </a:solidFill>
+                      <a:prstDash val="solid"/>
+                      <a:round/>
+                      <a:headEnd type="none" w="med" len="med"/>
+                      <a:tailEnd type="none" w="med" len="med"/>
+                    </a:lnB>
+                    <a:solidFill>
+                      <a:srgbClr val="2C5F2D"/>
+                    </a:solidFill>
+                  </a:tcPr>
+                </a:tc>
+                <a:tc>
+                  <a:txBody>
+                    <a:bodyPr/>
+                    <a:lstStyle/>
+                    <a:p>
+                      <a:pPr indent="0" marL="0">
+                        <a:buNone/>
+                      </a:pPr>
+                      <a:r>
+                        <a:rPr lang="en-US" sz="820" dirty="0">
+                          <a:solidFill>
+                            <a:srgbClr val="2B2B2B"/>
+                          </a:solidFill>
+                          <a:latin typeface="Meiryo UI" pitchFamily="34" charset="0"/>
+                          <a:ea typeface="Meiryo UI" pitchFamily="34" charset="-122"/>
+                          <a:cs typeface="Meiryo UI" pitchFamily="34" charset="-120"/>
+                        </a:rPr>
+                        <a:t>①基準は品質事象の度に追加される一方</a:t>
+                      </a:r>
+                      <a:pPr indent="0" marL="0">
+                        <a:buNone/>
+                      </a:pPr>
+                      <a:r>
+                        <a:rPr lang="en-US" sz="820" b="1" dirty="0">
+                          <a:solidFill>
+                            <a:srgbClr val="2B2B2B"/>
+                          </a:solidFill>
+                          <a:latin typeface="Meiryo UI" pitchFamily="34" charset="0"/>
+                          <a:ea typeface="Meiryo UI" pitchFamily="34" charset="-122"/>
+                          <a:cs typeface="Meiryo UI" pitchFamily="34" charset="-120"/>
+                        </a:rPr>
+                        <a:t>「削除するプロセス」が無い</a:t>
+                      </a:r>
+                      <a:pPr indent="0" marL="0">
+                        <a:buNone/>
+                      </a:pPr>
+                      <a:r>
+                        <a:rPr lang="en-US" sz="820" dirty="0">
+                          <a:solidFill>
+                            <a:srgbClr val="2B2B2B"/>
+                          </a:solidFill>
+                          <a:latin typeface="Meiryo UI" pitchFamily="34" charset="0"/>
+                          <a:ea typeface="Meiryo UI" pitchFamily="34" charset="-122"/>
+                          <a:cs typeface="Meiryo UI" pitchFamily="34" charset="-120"/>
+                        </a:rPr>
+                        <a:t>(数十年の積層) ②「基準を緩める」提案は現場から構造的に出ない(リスクだけを負うため) ③要員数の妥当性を検証するデータが無い ④検討がHow(自動化)から始まり、基準・プロセスが「所与」扱い。</a:t>
+                      </a:r>
+                      <a:endParaRPr lang="en-US" sz="820" dirty="0">
+                        <a:latin typeface="Meiryo UI" charset="0"/>
+                        <a:ea typeface="Meiryo UI" charset="0"/>
+                        <a:cs typeface="Meiryo UI" charset="0"/>
+                      </a:endParaRPr>
+                    </a:p>
+                  </a:txBody>
+                  <a:tcPr marL="54864" marR="54864" marT="54864" marB="54864" anchor="ctr">
+                    <a:lnL w="9525" cap="flat" cmpd="sng" algn="ctr">
+                      <a:solidFill>
+                        <a:srgbClr val="D3DED0"/>
+                      </a:solidFill>
+                      <a:prstDash val="solid"/>
+                      <a:round/>
+                      <a:headEnd type="none" w="med" len="med"/>
+                      <a:tailEnd type="none" w="med" len="med"/>
+                    </a:lnL>
+                    <a:lnR w="9525" cap="flat" cmpd="sng" algn="ctr">
+                      <a:solidFill>
+                        <a:srgbClr val="D3DED0"/>
+                      </a:solidFill>
+                      <a:prstDash val="solid"/>
+                      <a:round/>
+                      <a:headEnd type="none" w="med" len="med"/>
+                      <a:tailEnd type="none" w="med" len="med"/>
+                    </a:lnR>
+                    <a:lnT w="9525" cap="flat" cmpd="sng" algn="ctr">
+                      <a:solidFill>
+                        <a:srgbClr val="D3DED0"/>
+                      </a:solidFill>
+                      <a:prstDash val="solid"/>
+                      <a:round/>
+                      <a:headEnd type="none" w="med" len="med"/>
+                      <a:tailEnd type="none" w="med" len="med"/>
+                    </a:lnT>
+                    <a:lnB w="9525" cap="flat" cmpd="sng" algn="ctr">
+                      <a:solidFill>
+                        <a:srgbClr val="D3DED0"/>
+                      </a:solidFill>
+                      <a:prstDash val="solid"/>
+                      <a:round/>
+                      <a:headEnd type="none" w="med" len="med"/>
+                      <a:tailEnd type="none" w="med" len="med"/>
+                    </a:lnB>
+                  </a:tcPr>
+                </a:tc>
+                <a:tc>
+                  <a:txBody>
+                    <a:bodyPr/>
+                    <a:lstStyle/>
+                    <a:p>
+                      <a:pPr algn="ctr" indent="0" marL="0">
+                        <a:buNone/>
+                      </a:pPr>
+                      <a:r>
+                        <a:rPr lang="en-US" sz="1250" b="1" dirty="0">
+                          <a:solidFill>
+                            <a:srgbClr val="1F3D20"/>
+                          </a:solidFill>
+                          <a:latin typeface="Meiryo UI" pitchFamily="34" charset="0"/>
+                          <a:ea typeface="Meiryo UI" pitchFamily="34" charset="-122"/>
+                          <a:cs typeface="Meiryo UI" pitchFamily="34" charset="-120"/>
+                        </a:rPr>
+                        <a:t>削除する仕組みが無い
+</a:t>
+                      </a:r>
+                      <a:pPr algn="ctr" indent="0" marL="0">
+                        <a:buNone/>
+                      </a:pPr>
+                      <a:r>
+                        <a:rPr lang="en-US" sz="680" dirty="0">
+                          <a:solidFill>
+                            <a:srgbClr val="595959"/>
+                          </a:solidFill>
+                          <a:latin typeface="Meiryo UI" pitchFamily="34" charset="0"/>
+                          <a:ea typeface="Meiryo UI" pitchFamily="34" charset="-122"/>
+                          <a:cs typeface="Meiryo UI" pitchFamily="34" charset="-120"/>
+                        </a:rPr>
+                        <a:t>基準は増える一方(構造問題)</a:t>
+                      </a:r>
+                      <a:endParaRPr lang="en-US" sz="1200" dirty="0">
+                        <a:latin typeface="Meiryo UI" charset="0"/>
+                        <a:ea typeface="Meiryo UI" charset="0"/>
+                        <a:cs typeface="Meiryo UI" charset="0"/>
+                      </a:endParaRPr>
+                    </a:p>
+                  </a:txBody>
+                  <a:tcPr marL="91440" marR="91440" marT="45720" marB="45720" anchor="ctr">
+                    <a:lnL w="9525" cap="flat" cmpd="sng" algn="ctr">
+                      <a:solidFill>
+                        <a:srgbClr val="D3DED0"/>
+                      </a:solidFill>
+                      <a:prstDash val="solid"/>
+                      <a:round/>
+                      <a:headEnd type="none" w="med" len="med"/>
+                      <a:tailEnd type="none" w="med" len="med"/>
+                    </a:lnL>
+                    <a:lnR w="9525" cap="flat" cmpd="sng" algn="ctr">
+                      <a:solidFill>
+                        <a:srgbClr val="D3DED0"/>
+                      </a:solidFill>
+                      <a:prstDash val="solid"/>
+                      <a:round/>
+                      <a:headEnd type="none" w="med" len="med"/>
+                      <a:tailEnd type="none" w="med" len="med"/>
+                    </a:lnR>
+                    <a:lnT w="9525" cap="flat" cmpd="sng" algn="ctr">
+                      <a:solidFill>
+                        <a:srgbClr val="D3DED0"/>
+                      </a:solidFill>
+                      <a:prstDash val="solid"/>
+                      <a:round/>
+                      <a:headEnd type="none" w="med" len="med"/>
+                      <a:tailEnd type="none" w="med" len="med"/>
+                    </a:lnT>
+                    <a:lnB w="9525" cap="flat" cmpd="sng" algn="ctr">
+                      <a:solidFill>
+                        <a:srgbClr val="D3DED0"/>
+                      </a:solidFill>
+                      <a:prstDash val="solid"/>
+                      <a:round/>
+                      <a:headEnd type="none" w="med" len="med"/>
+                      <a:tailEnd type="none" w="med" len="med"/>
+                    </a:lnB>
+                    <a:solidFill>
+                      <a:srgbClr val="F3F8F1"/>
+                    </a:solidFill>
+                  </a:tcPr>
+                </a:tc>
+              </a:tr>
+              <a:tr h="786384">
+                <a:tc>
+                  <a:txBody>
+                    <a:bodyPr/>
+                    <a:lstStyle/>
+                    <a:p>
+                      <a:pPr algn="ctr" indent="0" marL="0">
+                        <a:buNone/>
+                      </a:pPr>
+                      <a:r>
+                        <a:rPr lang="en-US" sz="900" b="1" dirty="0">
+                          <a:solidFill>
+                            <a:srgbClr val="FFFFFF"/>
+                          </a:solidFill>
+                          <a:latin typeface="Meiryo UI" pitchFamily="34" charset="0"/>
+                          <a:ea typeface="Meiryo UI" pitchFamily="34" charset="-122"/>
+                          <a:cs typeface="Meiryo UI" pitchFamily="34" charset="-120"/>
+                        </a:rPr>
+                        <a:t>How</a:t>
+                      </a:r>
+                      <a:endParaRPr lang="en-US" sz="900" dirty="0">
+                        <a:latin typeface="Meiryo UI" charset="0"/>
+                        <a:ea typeface="Meiryo UI" charset="0"/>
+                        <a:cs typeface="Meiryo UI" charset="0"/>
+                      </a:endParaRPr>
+                    </a:p>
+                    <a:p>
+                      <a:pPr algn="ctr" indent="0" marL="0">
+                        <a:buNone/>
+                      </a:pPr>
+                      <a:r>
+                        <a:rPr lang="en-US" sz="900" b="1" dirty="0">
+                          <a:solidFill>
+                            <a:srgbClr val="FFFFFF"/>
+                          </a:solidFill>
+                          <a:latin typeface="Meiryo UI" pitchFamily="34" charset="0"/>
+                          <a:ea typeface="Meiryo UI" pitchFamily="34" charset="-122"/>
+                          <a:cs typeface="Meiryo UI" pitchFamily="34" charset="-120"/>
+                        </a:rPr>
+                        <a:t>解決策</a:t>
+                      </a:r>
+                      <a:endParaRPr lang="en-US" sz="900" dirty="0">
+                        <a:latin typeface="Meiryo UI" charset="0"/>
+                        <a:ea typeface="Meiryo UI" charset="0"/>
+                        <a:cs typeface="Meiryo UI" charset="0"/>
+                      </a:endParaRPr>
+                    </a:p>
+                  </a:txBody>
+                  <a:tcPr marL="91440" marR="91440" marT="45720" marB="45720" anchor="ctr">
+                    <a:lnL w="9525" cap="flat" cmpd="sng" algn="ctr">
+                      <a:solidFill>
+                        <a:srgbClr val="D3DED0"/>
+                      </a:solidFill>
+                      <a:prstDash val="solid"/>
+                      <a:round/>
+                      <a:headEnd type="none" w="med" len="med"/>
+                      <a:tailEnd type="none" w="med" len="med"/>
+                    </a:lnL>
+                    <a:lnR w="9525" cap="flat" cmpd="sng" algn="ctr">
+                      <a:solidFill>
+                        <a:srgbClr val="D3DED0"/>
+                      </a:solidFill>
+                      <a:prstDash val="solid"/>
+                      <a:round/>
+                      <a:headEnd type="none" w="med" len="med"/>
+                      <a:tailEnd type="none" w="med" len="med"/>
+                    </a:lnR>
+                    <a:lnT w="9525" cap="flat" cmpd="sng" algn="ctr">
+                      <a:solidFill>
+                        <a:srgbClr val="D3DED0"/>
+                      </a:solidFill>
+                      <a:prstDash val="solid"/>
+                      <a:round/>
+                      <a:headEnd type="none" w="med" len="med"/>
+                      <a:tailEnd type="none" w="med" len="med"/>
+                    </a:lnT>
+                    <a:lnB w="9525" cap="flat" cmpd="sng" algn="ctr">
+                      <a:solidFill>
+                        <a:srgbClr val="D3DED0"/>
+                      </a:solidFill>
+                      <a:prstDash val="solid"/>
+                      <a:round/>
+                      <a:headEnd type="none" w="med" len="med"/>
+                      <a:tailEnd type="none" w="med" len="med"/>
+                    </a:lnB>
+                    <a:solidFill>
+                      <a:srgbClr val="2C5F2D"/>
+                    </a:solidFill>
+                  </a:tcPr>
+                </a:tc>
+                <a:tc>
+                  <a:txBody>
+                    <a:bodyPr/>
+                    <a:lstStyle/>
+                    <a:p>
+                      <a:pPr indent="0" marL="0">
+                        <a:buNone/>
+                      </a:pPr>
+                      <a:r>
+                        <a:rPr lang="en-US" sz="820" dirty="0">
+                          <a:solidFill>
+                            <a:srgbClr val="2B2B2B"/>
+                          </a:solidFill>
+                          <a:latin typeface="Meiryo UI" pitchFamily="34" charset="0"/>
+                          <a:ea typeface="Meiryo UI" pitchFamily="34" charset="-122"/>
+                          <a:cs typeface="Meiryo UI" pitchFamily="34" charset="-120"/>
+                        </a:rPr>
+                        <a:t>全作業を台帳に棚卸しし、3つの問いに</a:t>
+                      </a:r>
+                      <a:pPr indent="0" marL="0">
+                        <a:buNone/>
+                      </a:pPr>
+                      <a:r>
+                        <a:rPr lang="en-US" sz="820" b="1" dirty="0">
+                          <a:solidFill>
+                            <a:srgbClr val="B85042"/>
+                          </a:solidFill>
+                          <a:latin typeface="Meiryo UI" pitchFamily="34" charset="0"/>
+                          <a:ea typeface="Meiryo UI" pitchFamily="34" charset="-122"/>
+                          <a:cs typeface="Meiryo UI" pitchFamily="34" charset="-120"/>
+                        </a:rPr>
+                        <a:t>順番に</a:t>
+                      </a:r>
+                      <a:pPr indent="0" marL="0">
+                        <a:buNone/>
+                      </a:pPr>
+                      <a:r>
+                        <a:rPr lang="en-US" sz="820" dirty="0">
+                          <a:solidFill>
+                            <a:srgbClr val="2B2B2B"/>
+                          </a:solidFill>
+                          <a:latin typeface="Meiryo UI" pitchFamily="34" charset="0"/>
+                          <a:ea typeface="Meiryo UI" pitchFamily="34" charset="-122"/>
+                          <a:cs typeface="Meiryo UI" pitchFamily="34" charset="-120"/>
+                        </a:rPr>
+                        <a:t>かける: ①無くす(基準是正・品質保証との4つの約束: 同等性実証/保守側判断/即時ロールバック/QAが最終決定) → ②減らす(重複削除・停止原因除去・集約) → ③置き換える(フィジカルAI・自動検査・AMR)。AI仕様の決定は①②の結論後(26/12ゲート)。</a:t>
+                      </a:r>
+                      <a:endParaRPr lang="en-US" sz="820" dirty="0">
+                        <a:latin typeface="Meiryo UI" charset="0"/>
+                        <a:ea typeface="Meiryo UI" charset="0"/>
+                        <a:cs typeface="Meiryo UI" charset="0"/>
+                      </a:endParaRPr>
+                    </a:p>
+                  </a:txBody>
+                  <a:tcPr marL="54864" marR="54864" marT="54864" marB="54864" anchor="ctr">
+                    <a:lnL w="9525" cap="flat" cmpd="sng" algn="ctr">
+                      <a:solidFill>
+                        <a:srgbClr val="D3DED0"/>
+                      </a:solidFill>
+                      <a:prstDash val="solid"/>
+                      <a:round/>
+                      <a:headEnd type="none" w="med" len="med"/>
+                      <a:tailEnd type="none" w="med" len="med"/>
+                    </a:lnL>
+                    <a:lnR w="9525" cap="flat" cmpd="sng" algn="ctr">
+                      <a:solidFill>
+                        <a:srgbClr val="D3DED0"/>
+                      </a:solidFill>
+                      <a:prstDash val="solid"/>
+                      <a:round/>
+                      <a:headEnd type="none" w="med" len="med"/>
+                      <a:tailEnd type="none" w="med" len="med"/>
+                    </a:lnR>
+                    <a:lnT w="9525" cap="flat" cmpd="sng" algn="ctr">
+                      <a:solidFill>
+                        <a:srgbClr val="D3DED0"/>
+                      </a:solidFill>
+                      <a:prstDash val="solid"/>
+                      <a:round/>
+                      <a:headEnd type="none" w="med" len="med"/>
+                      <a:tailEnd type="none" w="med" len="med"/>
+                    </a:lnT>
+                    <a:lnB w="9525" cap="flat" cmpd="sng" algn="ctr">
+                      <a:solidFill>
+                        <a:srgbClr val="D3DED0"/>
+                      </a:solidFill>
+                      <a:prstDash val="solid"/>
+                      <a:round/>
+                      <a:headEnd type="none" w="med" len="med"/>
+                      <a:tailEnd type="none" w="med" len="med"/>
+                    </a:lnB>
+                  </a:tcPr>
+                </a:tc>
+                <a:tc>
+                  <a:txBody>
+                    <a:bodyPr/>
+                    <a:lstStyle/>
+                    <a:p>
+                      <a:pPr algn="ctr" indent="0" marL="0">
+                        <a:buNone/>
+                      </a:pPr>
+                      <a:r>
+                        <a:rPr lang="en-US" sz="1250" b="1" dirty="0">
+                          <a:solidFill>
+                            <a:srgbClr val="1F3D20"/>
+                          </a:solidFill>
+                          <a:latin typeface="Meiryo UI" pitchFamily="34" charset="0"/>
+                          <a:ea typeface="Meiryo UI" pitchFamily="34" charset="-122"/>
+                          <a:cs typeface="Meiryo UI" pitchFamily="34" charset="-120"/>
+                        </a:rPr>
+                        <a:t>①→②→③
+</a:t>
+                      </a:r>
+                      <a:pPr algn="ctr" indent="0" marL="0">
+                        <a:buNone/>
+                      </a:pPr>
+                      <a:r>
+                        <a:rPr lang="en-US" sz="680" dirty="0">
+                          <a:solidFill>
+                            <a:srgbClr val="595959"/>
+                          </a:solidFill>
+                          <a:latin typeface="Meiryo UI" pitchFamily="34" charset="0"/>
+                          <a:ea typeface="Meiryo UI" pitchFamily="34" charset="-122"/>
+                          <a:cs typeface="Meiryo UI" pitchFamily="34" charset="-120"/>
+                        </a:rPr>
+                        <a:t>無くす→減らす→置き換える(順序が投資1〜2億円を左右)</a:t>
+                      </a:r>
+                      <a:endParaRPr lang="en-US" sz="1200" dirty="0">
+                        <a:latin typeface="Meiryo UI" charset="0"/>
+                        <a:ea typeface="Meiryo UI" charset="0"/>
+                        <a:cs typeface="Meiryo UI" charset="0"/>
+                      </a:endParaRPr>
+                    </a:p>
+                  </a:txBody>
+                  <a:tcPr marL="91440" marR="91440" marT="45720" marB="45720" anchor="ctr">
+                    <a:lnL w="9525" cap="flat" cmpd="sng" algn="ctr">
+                      <a:solidFill>
+                        <a:srgbClr val="D3DED0"/>
+                      </a:solidFill>
+                      <a:prstDash val="solid"/>
+                      <a:round/>
+                      <a:headEnd type="none" w="med" len="med"/>
+                      <a:tailEnd type="none" w="med" len="med"/>
+                    </a:lnL>
+                    <a:lnR w="9525" cap="flat" cmpd="sng" algn="ctr">
+                      <a:solidFill>
+                        <a:srgbClr val="D3DED0"/>
+                      </a:solidFill>
+                      <a:prstDash val="solid"/>
+                      <a:round/>
+                      <a:headEnd type="none" w="med" len="med"/>
+                      <a:tailEnd type="none" w="med" len="med"/>
+                    </a:lnR>
+                    <a:lnT w="9525" cap="flat" cmpd="sng" algn="ctr">
+                      <a:solidFill>
+                        <a:srgbClr val="D3DED0"/>
+                      </a:solidFill>
+                      <a:prstDash val="solid"/>
+                      <a:round/>
+                      <a:headEnd type="none" w="med" len="med"/>
+                      <a:tailEnd type="none" w="med" len="med"/>
+                    </a:lnT>
+                    <a:lnB w="9525" cap="flat" cmpd="sng" algn="ctr">
+                      <a:solidFill>
+                        <a:srgbClr val="D3DED0"/>
+                      </a:solidFill>
+                      <a:prstDash val="solid"/>
+                      <a:round/>
+                      <a:headEnd type="none" w="med" len="med"/>
+                      <a:tailEnd type="none" w="med" len="med"/>
+                    </a:lnB>
+                    <a:solidFill>
+                      <a:srgbClr val="F3F8F1"/>
+                    </a:solidFill>
+                  </a:tcPr>
+                </a:tc>
+              </a:tr>
+              <a:tr h="786384">
+                <a:tc>
+                  <a:txBody>
+                    <a:bodyPr/>
+                    <a:lstStyle/>
+                    <a:p>
+                      <a:pPr algn="ctr" indent="0" marL="0">
+                        <a:buNone/>
+                      </a:pPr>
+                      <a:r>
+                        <a:rPr lang="en-US" sz="900" b="1" dirty="0">
+                          <a:solidFill>
+                            <a:srgbClr val="FFFFFF"/>
+                          </a:solidFill>
+                          <a:latin typeface="Meiryo UI" pitchFamily="34" charset="0"/>
+                          <a:ea typeface="Meiryo UI" pitchFamily="34" charset="-122"/>
+                          <a:cs typeface="Meiryo UI" pitchFamily="34" charset="-120"/>
+                        </a:rPr>
+                        <a:t>Who</a:t>
+                      </a:r>
+                      <a:endParaRPr lang="en-US" sz="900" dirty="0">
+                        <a:latin typeface="Meiryo UI" charset="0"/>
+                        <a:ea typeface="Meiryo UI" charset="0"/>
+                        <a:cs typeface="Meiryo UI" charset="0"/>
+                      </a:endParaRPr>
+                    </a:p>
+                    <a:p>
+                      <a:pPr algn="ctr" indent="0" marL="0">
+                        <a:buNone/>
+                      </a:pPr>
+                      <a:r>
+                        <a:rPr lang="en-US" sz="900" b="1" dirty="0">
+                          <a:solidFill>
+                            <a:srgbClr val="FFFFFF"/>
+                          </a:solidFill>
+                          <a:latin typeface="Meiryo UI" pitchFamily="34" charset="0"/>
+                          <a:ea typeface="Meiryo UI" pitchFamily="34" charset="-122"/>
+                          <a:cs typeface="Meiryo UI" pitchFamily="34" charset="-120"/>
+                        </a:rPr>
+                        <a:t>誰が</a:t>
+                      </a:r>
+                      <a:endParaRPr lang="en-US" sz="900" dirty="0">
+                        <a:latin typeface="Meiryo UI" charset="0"/>
+                        <a:ea typeface="Meiryo UI" charset="0"/>
+                        <a:cs typeface="Meiryo UI" charset="0"/>
+                      </a:endParaRPr>
+                    </a:p>
+                  </a:txBody>
+                  <a:tcPr marL="91440" marR="91440" marT="45720" marB="45720" anchor="ctr">
+                    <a:lnL w="9525" cap="flat" cmpd="sng" algn="ctr">
+                      <a:solidFill>
+                        <a:srgbClr val="D3DED0"/>
+                      </a:solidFill>
+                      <a:prstDash val="solid"/>
+                      <a:round/>
+                      <a:headEnd type="none" w="med" len="med"/>
+                      <a:tailEnd type="none" w="med" len="med"/>
+                    </a:lnL>
+                    <a:lnR w="9525" cap="flat" cmpd="sng" algn="ctr">
+                      <a:solidFill>
+                        <a:srgbClr val="D3DED0"/>
+                      </a:solidFill>
+                      <a:prstDash val="solid"/>
+                      <a:round/>
+                      <a:headEnd type="none" w="med" len="med"/>
+                      <a:tailEnd type="none" w="med" len="med"/>
+                    </a:lnR>
+                    <a:lnT w="9525" cap="flat" cmpd="sng" algn="ctr">
+                      <a:solidFill>
+                        <a:srgbClr val="D3DED0"/>
+                      </a:solidFill>
+                      <a:prstDash val="solid"/>
+                      <a:round/>
+                      <a:headEnd type="none" w="med" len="med"/>
+                      <a:tailEnd type="none" w="med" len="med"/>
+                    </a:lnT>
+                    <a:lnB w="9525" cap="flat" cmpd="sng" algn="ctr">
+                      <a:solidFill>
+                        <a:srgbClr val="D3DED0"/>
+                      </a:solidFill>
+                      <a:prstDash val="solid"/>
+                      <a:round/>
+                      <a:headEnd type="none" w="med" len="med"/>
+                      <a:tailEnd type="none" w="med" len="med"/>
+                    </a:lnB>
+                    <a:solidFill>
+                      <a:srgbClr val="2C5F2D"/>
+                    </a:solidFill>
+                  </a:tcPr>
+                </a:tc>
+                <a:tc>
+                  <a:txBody>
+                    <a:bodyPr/>
+                    <a:lstStyle/>
+                    <a:p>
+                      <a:pPr indent="0" marL="0">
+                        <a:buNone/>
+                      </a:pPr>
+                      <a:r>
+                        <a:rPr lang="en-US" sz="820" dirty="0">
+                          <a:solidFill>
+                            <a:srgbClr val="2B2B2B"/>
+                          </a:solidFill>
+                          <a:latin typeface="Meiryo UI" pitchFamily="34" charset="0"/>
+                          <a:ea typeface="Meiryo UI" pitchFamily="34" charset="-122"/>
+                          <a:cs typeface="Meiryo UI" pitchFamily="34" charset="-120"/>
+                        </a:rPr>
+                        <a:t>オーナー: 内藤本部長/PMO: 生技セ戦略統括T。実行3チーム = ①基準是正: </a:t>
+                      </a:r>
+                      <a:pPr indent="0" marL="0">
+                        <a:buNone/>
+                      </a:pPr>
+                      <a:r>
+                        <a:rPr lang="en-US" sz="820" b="1" dirty="0">
+                          <a:solidFill>
+                            <a:srgbClr val="2B2B2B"/>
+                          </a:solidFill>
+                          <a:latin typeface="Meiryo UI" pitchFamily="34" charset="0"/>
+                          <a:ea typeface="Meiryo UI" pitchFamily="34" charset="-122"/>
+                          <a:cs typeface="Meiryo UI" pitchFamily="34" charset="-120"/>
+                        </a:rPr>
+                        <a:t>品質保証部門</a:t>
+                      </a:r>
+                      <a:pPr indent="0" marL="0">
+                        <a:buNone/>
+                      </a:pPr>
+                      <a:r>
+                        <a:rPr lang="en-US" sz="820" dirty="0">
+                          <a:solidFill>
+                            <a:srgbClr val="2B2B2B"/>
+                          </a:solidFill>
+                          <a:latin typeface="Meiryo UI" pitchFamily="34" charset="0"/>
+                          <a:ea typeface="Meiryo UI" pitchFamily="34" charset="-122"/>
+                          <a:cs typeface="Meiryo UI" pitchFamily="34" charset="-120"/>
+                        </a:rPr>
+                        <a:t>(採否は変更管理プロセスで決定) ②プロセス再設計: </a:t>
+                      </a:r>
+                      <a:pPr indent="0" marL="0">
+                        <a:buNone/>
+                      </a:pPr>
+                      <a:r>
+                        <a:rPr lang="en-US" sz="820" b="1" dirty="0">
+                          <a:solidFill>
+                            <a:srgbClr val="2B2B2B"/>
+                          </a:solidFill>
+                          <a:latin typeface="Meiryo UI" pitchFamily="34" charset="0"/>
+                          <a:ea typeface="Meiryo UI" pitchFamily="34" charset="-122"/>
+                          <a:cs typeface="Meiryo UI" pitchFamily="34" charset="-120"/>
+                        </a:rPr>
+                        <a:t>明石工場(中林氏)</a:t>
+                      </a:r>
+                      <a:pPr indent="0" marL="0">
+                        <a:buNone/>
+                      </a:pPr>
+                      <a:r>
+                        <a:rPr lang="en-US" sz="820" dirty="0">
+                          <a:solidFill>
+                            <a:srgbClr val="2B2B2B"/>
+                          </a:solidFill>
+                          <a:latin typeface="Meiryo UI" pitchFamily="34" charset="0"/>
+                          <a:ea typeface="Meiryo UI" pitchFamily="34" charset="-122"/>
+                          <a:cs typeface="Meiryo UI" pitchFamily="34" charset="-120"/>
+                        </a:rPr>
+                        <a:t> ③自動化: </a:t>
+                      </a:r>
+                      <a:pPr indent="0" marL="0">
+                        <a:buNone/>
+                      </a:pPr>
+                      <a:r>
+                        <a:rPr lang="en-US" sz="820" b="1" dirty="0">
+                          <a:solidFill>
+                            <a:srgbClr val="2B2B2B"/>
+                          </a:solidFill>
+                          <a:latin typeface="Meiryo UI" pitchFamily="34" charset="0"/>
+                          <a:ea typeface="Meiryo UI" pitchFamily="34" charset="-122"/>
+                          <a:cs typeface="Meiryo UI" pitchFamily="34" charset="-120"/>
+                        </a:rPr>
+                        <a:t>生技セ+デジ戦</a:t>
+                      </a:r>
+                      <a:pPr indent="0" marL="0">
+                        <a:buNone/>
+                      </a:pPr>
+                      <a:r>
+                        <a:rPr lang="en-US" sz="820" dirty="0">
+                          <a:solidFill>
+                            <a:srgbClr val="2B2B2B"/>
+                          </a:solidFill>
+                          <a:latin typeface="Meiryo UI" pitchFamily="34" charset="0"/>
+                          <a:ea typeface="Meiryo UI" pitchFamily="34" charset="-122"/>
+                          <a:cs typeface="Meiryo UI" pitchFamily="34" charset="-120"/>
+                        </a:rPr>
+                        <a:t>(+SCM戦略部が投資評価)。</a:t>
+                      </a:r>
+                      <a:endParaRPr lang="en-US" sz="820" dirty="0">
+                        <a:latin typeface="Meiryo UI" charset="0"/>
+                        <a:ea typeface="Meiryo UI" charset="0"/>
+                        <a:cs typeface="Meiryo UI" charset="0"/>
+                      </a:endParaRPr>
+                    </a:p>
+                  </a:txBody>
+                  <a:tcPr marL="54864" marR="54864" marT="54864" marB="54864" anchor="ctr">
+                    <a:lnL w="9525" cap="flat" cmpd="sng" algn="ctr">
+                      <a:solidFill>
+                        <a:srgbClr val="D3DED0"/>
+                      </a:solidFill>
+                      <a:prstDash val="solid"/>
+                      <a:round/>
+                      <a:headEnd type="none" w="med" len="med"/>
+                      <a:tailEnd type="none" w="med" len="med"/>
+                    </a:lnL>
+                    <a:lnR w="9525" cap="flat" cmpd="sng" algn="ctr">
+                      <a:solidFill>
+                        <a:srgbClr val="D3DED0"/>
+                      </a:solidFill>
+                      <a:prstDash val="solid"/>
+                      <a:round/>
+                      <a:headEnd type="none" w="med" len="med"/>
+                      <a:tailEnd type="none" w="med" len="med"/>
+                    </a:lnR>
+                    <a:lnT w="9525" cap="flat" cmpd="sng" algn="ctr">
+                      <a:solidFill>
+                        <a:srgbClr val="D3DED0"/>
+                      </a:solidFill>
+                      <a:prstDash val="solid"/>
+                      <a:round/>
+                      <a:headEnd type="none" w="med" len="med"/>
+                      <a:tailEnd type="none" w="med" len="med"/>
+                    </a:lnT>
+                    <a:lnB w="9525" cap="flat" cmpd="sng" algn="ctr">
+                      <a:solidFill>
+                        <a:srgbClr val="D3DED0"/>
+                      </a:solidFill>
+                      <a:prstDash val="solid"/>
+                      <a:round/>
+                      <a:headEnd type="none" w="med" len="med"/>
+                      <a:tailEnd type="none" w="med" len="med"/>
+                    </a:lnB>
+                  </a:tcPr>
+                </a:tc>
+                <a:tc>
+                  <a:txBody>
+                    <a:bodyPr/>
+                    <a:lstStyle/>
+                    <a:p>
+                      <a:pPr algn="ctr" indent="0" marL="0">
+                        <a:buNone/>
+                      </a:pPr>
+                      <a:r>
+                        <a:rPr lang="en-US" sz="1250" b="1" dirty="0">
+                          <a:solidFill>
+                            <a:srgbClr val="1F3D20"/>
+                          </a:solidFill>
+                          <a:latin typeface="Meiryo UI" pitchFamily="34" charset="0"/>
+                          <a:ea typeface="Meiryo UI" pitchFamily="34" charset="-122"/>
+                          <a:cs typeface="Meiryo UI" pitchFamily="34" charset="-120"/>
+                        </a:rPr>
+                        <a:t>3チーム
+</a:t>
+                      </a:r>
+                      <a:pPr algn="ctr" indent="0" marL="0">
+                        <a:buNone/>
+                      </a:pPr>
+                      <a:r>
+                        <a:rPr lang="en-US" sz="680" dirty="0">
+                          <a:solidFill>
+                            <a:srgbClr val="595959"/>
+                          </a:solidFill>
+                          <a:latin typeface="Meiryo UI" pitchFamily="34" charset="0"/>
+                          <a:ea typeface="Meiryo UI" pitchFamily="34" charset="-122"/>
+                          <a:cs typeface="Meiryo UI" pitchFamily="34" charset="-120"/>
+                        </a:rPr>
+                        <a:t>品質保証/工場/生技セ+デジ戦</a:t>
+                      </a:r>
+                      <a:endParaRPr lang="en-US" sz="1200" dirty="0">
+                        <a:latin typeface="Meiryo UI" charset="0"/>
+                        <a:ea typeface="Meiryo UI" charset="0"/>
+                        <a:cs typeface="Meiryo UI" charset="0"/>
+                      </a:endParaRPr>
+                    </a:p>
+                  </a:txBody>
+                  <a:tcPr marL="91440" marR="91440" marT="45720" marB="45720" anchor="ctr">
+                    <a:lnL w="9525" cap="flat" cmpd="sng" algn="ctr">
+                      <a:solidFill>
+                        <a:srgbClr val="D3DED0"/>
+                      </a:solidFill>
+                      <a:prstDash val="solid"/>
+                      <a:round/>
+                      <a:headEnd type="none" w="med" len="med"/>
+                      <a:tailEnd type="none" w="med" len="med"/>
+                    </a:lnL>
+                    <a:lnR w="9525" cap="flat" cmpd="sng" algn="ctr">
+                      <a:solidFill>
+                        <a:srgbClr val="D3DED0"/>
+                      </a:solidFill>
+                      <a:prstDash val="solid"/>
+                      <a:round/>
+                      <a:headEnd type="none" w="med" len="med"/>
+                      <a:tailEnd type="none" w="med" len="med"/>
+                    </a:lnR>
+                    <a:lnT w="9525" cap="flat" cmpd="sng" algn="ctr">
+                      <a:solidFill>
+                        <a:srgbClr val="D3DED0"/>
+                      </a:solidFill>
+                      <a:prstDash val="solid"/>
+                      <a:round/>
+                      <a:headEnd type="none" w="med" len="med"/>
+                      <a:tailEnd type="none" w="med" len="med"/>
+                    </a:lnT>
+                    <a:lnB w="9525" cap="flat" cmpd="sng" algn="ctr">
+                      <a:solidFill>
+                        <a:srgbClr val="D3DED0"/>
+                      </a:solidFill>
+                      <a:prstDash val="solid"/>
+                      <a:round/>
+                      <a:headEnd type="none" w="med" len="med"/>
+                      <a:tailEnd type="none" w="med" len="med"/>
+                    </a:lnB>
+                    <a:solidFill>
+                      <a:srgbClr val="F3F8F1"/>
+                    </a:solidFill>
+                  </a:tcPr>
+                </a:tc>
+              </a:tr>
+              <a:tr h="786384">
+                <a:tc>
+                  <a:txBody>
+                    <a:bodyPr/>
+                    <a:lstStyle/>
+                    <a:p>
+                      <a:pPr algn="ctr" indent="0" marL="0">
+                        <a:buNone/>
+                      </a:pPr>
+                      <a:r>
+                        <a:rPr lang="en-US" sz="900" b="1" dirty="0">
+                          <a:solidFill>
+                            <a:srgbClr val="FFFFFF"/>
+                          </a:solidFill>
+                          <a:latin typeface="Meiryo UI" pitchFamily="34" charset="0"/>
+                          <a:ea typeface="Meiryo UI" pitchFamily="34" charset="-122"/>
+                          <a:cs typeface="Meiryo UI" pitchFamily="34" charset="-120"/>
+                        </a:rPr>
+                        <a:t>When</a:t>
+                      </a:r>
+                      <a:endParaRPr lang="en-US" sz="900" dirty="0">
+                        <a:latin typeface="Meiryo UI" charset="0"/>
+                        <a:ea typeface="Meiryo UI" charset="0"/>
+                        <a:cs typeface="Meiryo UI" charset="0"/>
+                      </a:endParaRPr>
+                    </a:p>
+                    <a:p>
+                      <a:pPr algn="ctr" indent="0" marL="0">
+                        <a:buNone/>
+                      </a:pPr>
+                      <a:r>
+                        <a:rPr lang="en-US" sz="900" b="1" dirty="0">
+                          <a:solidFill>
+                            <a:srgbClr val="FFFFFF"/>
+                          </a:solidFill>
+                          <a:latin typeface="Meiryo UI" pitchFamily="34" charset="0"/>
+                          <a:ea typeface="Meiryo UI" pitchFamily="34" charset="-122"/>
+                          <a:cs typeface="Meiryo UI" pitchFamily="34" charset="-120"/>
+                        </a:rPr>
+                        <a:t>いつまでに</a:t>
+                      </a:r>
+                      <a:endParaRPr lang="en-US" sz="900" dirty="0">
+                        <a:latin typeface="Meiryo UI" charset="0"/>
+                        <a:ea typeface="Meiryo UI" charset="0"/>
+                        <a:cs typeface="Meiryo UI" charset="0"/>
+                      </a:endParaRPr>
+                    </a:p>
+                  </a:txBody>
+                  <a:tcPr marL="91440" marR="91440" marT="45720" marB="45720" anchor="ctr">
+                    <a:lnL w="9525" cap="flat" cmpd="sng" algn="ctr">
+                      <a:solidFill>
+                        <a:srgbClr val="D3DED0"/>
+                      </a:solidFill>
+                      <a:prstDash val="solid"/>
+                      <a:round/>
+                      <a:headEnd type="none" w="med" len="med"/>
+                      <a:tailEnd type="none" w="med" len="med"/>
+                    </a:lnL>
+                    <a:lnR w="9525" cap="flat" cmpd="sng" algn="ctr">
+                      <a:solidFill>
+                        <a:srgbClr val="D3DED0"/>
+                      </a:solidFill>
+                      <a:prstDash val="solid"/>
+                      <a:round/>
+                      <a:headEnd type="none" w="med" len="med"/>
+                      <a:tailEnd type="none" w="med" len="med"/>
+                    </a:lnR>
+                    <a:lnT w="9525" cap="flat" cmpd="sng" algn="ctr">
+                      <a:solidFill>
+                        <a:srgbClr val="D3DED0"/>
+                      </a:solidFill>
+                      <a:prstDash val="solid"/>
+                      <a:round/>
+                      <a:headEnd type="none" w="med" len="med"/>
+                      <a:tailEnd type="none" w="med" len="med"/>
+                    </a:lnT>
+                    <a:lnB w="9525" cap="flat" cmpd="sng" algn="ctr">
+                      <a:solidFill>
+                        <a:srgbClr val="D3DED0"/>
+                      </a:solidFill>
+                      <a:prstDash val="solid"/>
+                      <a:round/>
+                      <a:headEnd type="none" w="med" len="med"/>
+                      <a:tailEnd type="none" w="med" len="med"/>
+                    </a:lnB>
+                    <a:solidFill>
+                      <a:srgbClr val="2C5F2D"/>
+                    </a:solidFill>
+                  </a:tcPr>
+                </a:tc>
+                <a:tc>
+                  <a:txBody>
+                    <a:bodyPr/>
+                    <a:lstStyle/>
+                    <a:p>
+                      <a:pPr indent="0" marL="0">
+                        <a:buNone/>
+                      </a:pPr>
+                      <a:r>
+                        <a:rPr lang="en-US" sz="820" dirty="0">
+                          <a:solidFill>
+                            <a:srgbClr val="2B2B2B"/>
+                          </a:solidFill>
+                          <a:latin typeface="Meiryo UI" pitchFamily="34" charset="0"/>
+                          <a:ea typeface="Meiryo UI" pitchFamily="34" charset="-122"/>
+                          <a:cs typeface="Meiryo UI" pitchFamily="34" charset="-120"/>
+                        </a:rPr>
+                        <a:t>26/8 チーム組成 → 26/10 台帳完成・役員中間報告 → 26/12 基準改定の方針合意・AI要件定義着手 → </a:t>
+                      </a:r>
+                      <a:pPr indent="0" marL="0">
+                        <a:buNone/>
+                      </a:pPr>
+                      <a:r>
+                        <a:rPr lang="en-US" sz="820" b="1" dirty="0">
+                          <a:solidFill>
+                            <a:srgbClr val="2B2B2B"/>
+                          </a:solidFill>
+                          <a:latin typeface="Meiryo UI" pitchFamily="34" charset="0"/>
+                          <a:ea typeface="Meiryo UI" pitchFamily="34" charset="-122"/>
+                          <a:cs typeface="Meiryo UI" pitchFamily="34" charset="-120"/>
+                        </a:rPr>
+                        <a:t>27/6 改定第1弾(▲10名規模を投資ゼロで)</a:t>
+                      </a:r>
+                      <a:pPr indent="0" marL="0">
+                        <a:buNone/>
+                      </a:pPr>
+                      <a:r>
+                        <a:rPr lang="en-US" sz="820" dirty="0">
+                          <a:solidFill>
+                            <a:srgbClr val="2B2B2B"/>
+                          </a:solidFill>
+                          <a:latin typeface="Meiryo UI" pitchFamily="34" charset="0"/>
+                          <a:ea typeface="Meiryo UI" pitchFamily="34" charset="-122"/>
+                          <a:cs typeface="Meiryo UI" pitchFamily="34" charset="-120"/>
+                        </a:rPr>
+                        <a:t> → 27〜29 PoC・実装 → 2030 半減達成。</a:t>
+                      </a:r>
+                      <a:endParaRPr lang="en-US" sz="820" dirty="0">
+                        <a:latin typeface="Meiryo UI" charset="0"/>
+                        <a:ea typeface="Meiryo UI" charset="0"/>
+                        <a:cs typeface="Meiryo UI" charset="0"/>
+                      </a:endParaRPr>
+                    </a:p>
+                  </a:txBody>
+                  <a:tcPr marL="54864" marR="54864" marT="54864" marB="54864" anchor="ctr">
+                    <a:lnL w="9525" cap="flat" cmpd="sng" algn="ctr">
+                      <a:solidFill>
+                        <a:srgbClr val="D3DED0"/>
+                      </a:solidFill>
+                      <a:prstDash val="solid"/>
+                      <a:round/>
+                      <a:headEnd type="none" w="med" len="med"/>
+                      <a:tailEnd type="none" w="med" len="med"/>
+                    </a:lnL>
+                    <a:lnR w="9525" cap="flat" cmpd="sng" algn="ctr">
+                      <a:solidFill>
+                        <a:srgbClr val="D3DED0"/>
+                      </a:solidFill>
+                      <a:prstDash val="solid"/>
+                      <a:round/>
+                      <a:headEnd type="none" w="med" len="med"/>
+                      <a:tailEnd type="none" w="med" len="med"/>
+                    </a:lnR>
+                    <a:lnT w="9525" cap="flat" cmpd="sng" algn="ctr">
+                      <a:solidFill>
+                        <a:srgbClr val="D3DED0"/>
+                      </a:solidFill>
+                      <a:prstDash val="solid"/>
+                      <a:round/>
+                      <a:headEnd type="none" w="med" len="med"/>
+                      <a:tailEnd type="none" w="med" len="med"/>
+                    </a:lnT>
+                    <a:lnB w="9525" cap="flat" cmpd="sng" algn="ctr">
+                      <a:solidFill>
+                        <a:srgbClr val="D3DED0"/>
+                      </a:solidFill>
+                      <a:prstDash val="solid"/>
+                      <a:round/>
+                      <a:headEnd type="none" w="med" len="med"/>
+                      <a:tailEnd type="none" w="med" len="med"/>
+                    </a:lnB>
+                  </a:tcPr>
+                </a:tc>
+                <a:tc>
+                  <a:txBody>
+                    <a:bodyPr/>
+                    <a:lstStyle/>
+                    <a:p>
+                      <a:pPr algn="ctr" indent="0" marL="0">
+                        <a:buNone/>
+                      </a:pPr>
+                      <a:r>
+                        <a:rPr lang="en-US" sz="1250" b="1" dirty="0">
+                          <a:solidFill>
+                            <a:srgbClr val="1F3D20"/>
+                          </a:solidFill>
+                          <a:latin typeface="Meiryo UI" pitchFamily="34" charset="0"/>
+                          <a:ea typeface="Meiryo UI" pitchFamily="34" charset="-122"/>
+                          <a:cs typeface="Meiryo UI" pitchFamily="34" charset="-120"/>
+                        </a:rPr>
+                        <a:t>2030年 半減
+</a:t>
+                      </a:r>
+                      <a:pPr algn="ctr" indent="0" marL="0">
+                        <a:buNone/>
+                      </a:pPr>
+                      <a:r>
+                        <a:rPr lang="en-US" sz="680" dirty="0">
+                          <a:solidFill>
+                            <a:srgbClr val="595959"/>
+                          </a:solidFill>
+                          <a:latin typeface="Meiryo UI" pitchFamily="34" charset="0"/>
+                          <a:ea typeface="Meiryo UI" pitchFamily="34" charset="-122"/>
+                          <a:cs typeface="Meiryo UI" pitchFamily="34" charset="-120"/>
+                        </a:rPr>
+                        <a:t>26/10台帳→27/6第1弾→29実装</a:t>
+                      </a:r>
+                      <a:endParaRPr lang="en-US" sz="1200" dirty="0">
+                        <a:latin typeface="Meiryo UI" charset="0"/>
+                        <a:ea typeface="Meiryo UI" charset="0"/>
+                        <a:cs typeface="Meiryo UI" charset="0"/>
+                      </a:endParaRPr>
+                    </a:p>
+                  </a:txBody>
+                  <a:tcPr marL="91440" marR="91440" marT="45720" marB="45720" anchor="ctr">
+                    <a:lnL w="9525" cap="flat" cmpd="sng" algn="ctr">
+                      <a:solidFill>
+                        <a:srgbClr val="D3DED0"/>
+                      </a:solidFill>
+                      <a:prstDash val="solid"/>
+                      <a:round/>
+                      <a:headEnd type="none" w="med" len="med"/>
+                      <a:tailEnd type="none" w="med" len="med"/>
+                    </a:lnL>
+                    <a:lnR w="9525" cap="flat" cmpd="sng" algn="ctr">
+                      <a:solidFill>
+                        <a:srgbClr val="D3DED0"/>
+                      </a:solidFill>
+                      <a:prstDash val="solid"/>
+                      <a:round/>
+                      <a:headEnd type="none" w="med" len="med"/>
+                      <a:tailEnd type="none" w="med" len="med"/>
+                    </a:lnR>
+                    <a:lnT w="9525" cap="flat" cmpd="sng" algn="ctr">
+                      <a:solidFill>
+                        <a:srgbClr val="D3DED0"/>
+                      </a:solidFill>
+                      <a:prstDash val="solid"/>
+                      <a:round/>
+                      <a:headEnd type="none" w="med" len="med"/>
+                      <a:tailEnd type="none" w="med" len="med"/>
+                    </a:lnT>
+                    <a:lnB w="9525" cap="flat" cmpd="sng" algn="ctr">
+                      <a:solidFill>
+                        <a:srgbClr val="D3DED0"/>
+                      </a:solidFill>
+                      <a:prstDash val="solid"/>
+                      <a:round/>
+                      <a:headEnd type="none" w="med" len="med"/>
+                      <a:tailEnd type="none" w="med" len="med"/>
+                    </a:lnB>
+                    <a:solidFill>
+                      <a:srgbClr val="F3F8F1"/>
+                    </a:solidFill>
+                  </a:tcPr>
+                </a:tc>
+              </a:tr>
+              <a:tr h="786384">
+                <a:tc>
+                  <a:txBody>
+                    <a:bodyPr/>
+                    <a:lstStyle/>
+                    <a:p>
+                      <a:pPr algn="ctr" indent="0" marL="0">
+                        <a:buNone/>
+                      </a:pPr>
+                      <a:r>
+                        <a:rPr lang="en-US" sz="900" b="1" dirty="0">
+                          <a:solidFill>
+                            <a:srgbClr val="FFFFFF"/>
+                          </a:solidFill>
+                          <a:latin typeface="Meiryo UI" pitchFamily="34" charset="0"/>
+                          <a:ea typeface="Meiryo UI" pitchFamily="34" charset="-122"/>
+                          <a:cs typeface="Meiryo UI" pitchFamily="34" charset="-120"/>
+                        </a:rPr>
+                        <a:t>How Much</a:t>
+                      </a:r>
+                      <a:endParaRPr lang="en-US" sz="900" dirty="0">
+                        <a:latin typeface="Meiryo UI" charset="0"/>
+                        <a:ea typeface="Meiryo UI" charset="0"/>
+                        <a:cs typeface="Meiryo UI" charset="0"/>
+                      </a:endParaRPr>
+                    </a:p>
+                    <a:p>
+                      <a:pPr algn="ctr" indent="0" marL="0">
+                        <a:buNone/>
+                      </a:pPr>
+                      <a:r>
+                        <a:rPr lang="en-US" sz="900" b="1" dirty="0">
+                          <a:solidFill>
+                            <a:srgbClr val="FFFFFF"/>
+                          </a:solidFill>
+                          <a:latin typeface="Meiryo UI" pitchFamily="34" charset="0"/>
+                          <a:ea typeface="Meiryo UI" pitchFamily="34" charset="-122"/>
+                          <a:cs typeface="Meiryo UI" pitchFamily="34" charset="-120"/>
+                        </a:rPr>
+                        <a:t>費用対効果</a:t>
+                      </a:r>
+                      <a:endParaRPr lang="en-US" sz="900" dirty="0">
+                        <a:latin typeface="Meiryo UI" charset="0"/>
+                        <a:ea typeface="Meiryo UI" charset="0"/>
+                        <a:cs typeface="Meiryo UI" charset="0"/>
+                      </a:endParaRPr>
+                    </a:p>
+                  </a:txBody>
+                  <a:tcPr marL="91440" marR="91440" marT="45720" marB="45720" anchor="ctr">
+                    <a:lnL w="9525" cap="flat" cmpd="sng" algn="ctr">
+                      <a:solidFill>
+                        <a:srgbClr val="D3DED0"/>
+                      </a:solidFill>
+                      <a:prstDash val="solid"/>
+                      <a:round/>
+                      <a:headEnd type="none" w="med" len="med"/>
+                      <a:tailEnd type="none" w="med" len="med"/>
+                    </a:lnL>
+                    <a:lnR w="9525" cap="flat" cmpd="sng" algn="ctr">
+                      <a:solidFill>
+                        <a:srgbClr val="D3DED0"/>
+                      </a:solidFill>
+                      <a:prstDash val="solid"/>
+                      <a:round/>
+                      <a:headEnd type="none" w="med" len="med"/>
+                      <a:tailEnd type="none" w="med" len="med"/>
+                    </a:lnR>
+                    <a:lnT w="9525" cap="flat" cmpd="sng" algn="ctr">
+                      <a:solidFill>
+                        <a:srgbClr val="D3DED0"/>
+                      </a:solidFill>
+                      <a:prstDash val="solid"/>
+                      <a:round/>
+                      <a:headEnd type="none" w="med" len="med"/>
+                      <a:tailEnd type="none" w="med" len="med"/>
+                    </a:lnT>
+                    <a:lnB w="9525" cap="flat" cmpd="sng" algn="ctr">
+                      <a:solidFill>
+                        <a:srgbClr val="D3DED0"/>
+                      </a:solidFill>
+                      <a:prstDash val="solid"/>
+                      <a:round/>
+                      <a:headEnd type="none" w="med" len="med"/>
+                      <a:tailEnd type="none" w="med" len="med"/>
+                    </a:lnB>
+                    <a:solidFill>
+                      <a:srgbClr val="2C5F2D"/>
+                    </a:solidFill>
+                  </a:tcPr>
+                </a:tc>
+                <a:tc>
+                  <a:txBody>
+                    <a:bodyPr/>
+                    <a:lstStyle/>
+                    <a:p>
+                      <a:pPr indent="0" marL="0">
+                        <a:buNone/>
+                      </a:pPr>
+                      <a:r>
+                        <a:rPr lang="en-US" sz="820" dirty="0">
+                          <a:solidFill>
+                            <a:srgbClr val="2B2B2B"/>
+                          </a:solidFill>
+                          <a:latin typeface="Meiryo UI" pitchFamily="34" charset="0"/>
+                          <a:ea typeface="Meiryo UI" pitchFamily="34" charset="-122"/>
+                          <a:cs typeface="Meiryo UI" pitchFamily="34" charset="-120"/>
+                        </a:rPr>
+                        <a:t>投資 約2.5〜3億円(フィジカルAI・自動検査・調査) → リターン </a:t>
+                      </a:r>
+                      <a:pPr indent="0" marL="0">
+                        <a:buNone/>
+                      </a:pPr>
+                      <a:r>
+                        <a:rPr lang="en-US" sz="820" b="1" dirty="0">
+                          <a:solidFill>
+                            <a:srgbClr val="B85042"/>
+                          </a:solidFill>
+                          <a:latin typeface="Meiryo UI" pitchFamily="34" charset="0"/>
+                          <a:ea typeface="Meiryo UI" pitchFamily="34" charset="-122"/>
+                          <a:cs typeface="Meiryo UI" pitchFamily="34" charset="-120"/>
+                        </a:rPr>
+                        <a:t>年3.0〜3.5億円(回収1年強)</a:t>
+                      </a:r>
+                      <a:pPr indent="0" marL="0">
+                        <a:buNone/>
+                      </a:pPr>
+                      <a:r>
+                        <a:rPr lang="en-US" sz="820" dirty="0">
+                          <a:solidFill>
+                            <a:srgbClr val="2B2B2B"/>
+                          </a:solidFill>
+                          <a:latin typeface="Meiryo UI" pitchFamily="34" charset="0"/>
+                          <a:ea typeface="Meiryo UI" pitchFamily="34" charset="-122"/>
+                          <a:cs typeface="Meiryo UI" pitchFamily="34" charset="-120"/>
+                        </a:rPr>
+                        <a:t>。加えて「順序」の効果で自動化投資を1〜2億円圧縮。基準に踏み込まない場合は効果6割前後に減衰(経営論点として26/10に上程)。</a:t>
+                      </a:r>
+                      <a:endParaRPr lang="en-US" sz="820" dirty="0">
+                        <a:latin typeface="Meiryo UI" charset="0"/>
+                        <a:ea typeface="Meiryo UI" charset="0"/>
+                        <a:cs typeface="Meiryo UI" charset="0"/>
+                      </a:endParaRPr>
+                    </a:p>
+                  </a:txBody>
+                  <a:tcPr marL="54864" marR="54864" marT="54864" marB="54864" anchor="ctr">
+                    <a:lnL w="9525" cap="flat" cmpd="sng" algn="ctr">
+                      <a:solidFill>
+                        <a:srgbClr val="D3DED0"/>
+                      </a:solidFill>
+                      <a:prstDash val="solid"/>
+                      <a:round/>
+                      <a:headEnd type="none" w="med" len="med"/>
+                      <a:tailEnd type="none" w="med" len="med"/>
+                    </a:lnL>
+                    <a:lnR w="9525" cap="flat" cmpd="sng" algn="ctr">
+                      <a:solidFill>
+                        <a:srgbClr val="D3DED0"/>
+                      </a:solidFill>
+                      <a:prstDash val="solid"/>
+                      <a:round/>
+                      <a:headEnd type="none" w="med" len="med"/>
+                      <a:tailEnd type="none" w="med" len="med"/>
+                    </a:lnR>
+                    <a:lnT w="9525" cap="flat" cmpd="sng" algn="ctr">
+                      <a:solidFill>
+                        <a:srgbClr val="D3DED0"/>
+                      </a:solidFill>
+                      <a:prstDash val="solid"/>
+                      <a:round/>
+                      <a:headEnd type="none" w="med" len="med"/>
+                      <a:tailEnd type="none" w="med" len="med"/>
+                    </a:lnT>
+                    <a:lnB w="9525" cap="flat" cmpd="sng" algn="ctr">
+                      <a:solidFill>
+                        <a:srgbClr val="D3DED0"/>
+                      </a:solidFill>
+                      <a:prstDash val="solid"/>
+                      <a:round/>
+                      <a:headEnd type="none" w="med" len="med"/>
+                      <a:tailEnd type="none" w="med" len="med"/>
+                    </a:lnB>
+                  </a:tcPr>
+                </a:tc>
+                <a:tc>
+                  <a:txBody>
+                    <a:bodyPr/>
+                    <a:lstStyle/>
+                    <a:p>
+                      <a:pPr algn="ctr" indent="0" marL="0">
+                        <a:buNone/>
+                      </a:pPr>
+                      <a:r>
+                        <a:rPr lang="en-US" sz="1250" b="1" dirty="0">
+                          <a:solidFill>
+                            <a:srgbClr val="B85042"/>
+                          </a:solidFill>
+                          <a:latin typeface="Meiryo UI" pitchFamily="34" charset="0"/>
+                          <a:ea typeface="Meiryo UI" pitchFamily="34" charset="-122"/>
+                          <a:cs typeface="Meiryo UI" pitchFamily="34" charset="-120"/>
+                        </a:rPr>
+                        <a:t>年3.0〜3.5億円
+</a:t>
+                      </a:r>
+                      <a:pPr algn="ctr" indent="0" marL="0">
+                        <a:buNone/>
+                      </a:pPr>
+                      <a:r>
+                        <a:rPr lang="en-US" sz="680" dirty="0">
+                          <a:solidFill>
+                            <a:srgbClr val="595959"/>
+                          </a:solidFill>
+                          <a:latin typeface="Meiryo UI" pitchFamily="34" charset="0"/>
+                          <a:ea typeface="Meiryo UI" pitchFamily="34" charset="-122"/>
+                          <a:cs typeface="Meiryo UI" pitchFamily="34" charset="-120"/>
+                        </a:rPr>
+                        <a:t>投資2.5〜3億円・回収1年強</a:t>
+                      </a:r>
+                      <a:endParaRPr lang="en-US" sz="1200" dirty="0">
+                        <a:latin typeface="Meiryo UI" charset="0"/>
+                        <a:ea typeface="Meiryo UI" charset="0"/>
+                        <a:cs typeface="Meiryo UI" charset="0"/>
+                      </a:endParaRPr>
+                    </a:p>
+                  </a:txBody>
+                  <a:tcPr marL="91440" marR="91440" marT="45720" marB="45720" anchor="ctr">
+                    <a:lnL w="9525" cap="flat" cmpd="sng" algn="ctr">
+                      <a:solidFill>
+                        <a:srgbClr val="D3DED0"/>
+                      </a:solidFill>
+                      <a:prstDash val="solid"/>
+                      <a:round/>
+                      <a:headEnd type="none" w="med" len="med"/>
+                      <a:tailEnd type="none" w="med" len="med"/>
+                    </a:lnL>
+                    <a:lnR w="9525" cap="flat" cmpd="sng" algn="ctr">
+                      <a:solidFill>
+                        <a:srgbClr val="D3DED0"/>
+                      </a:solidFill>
+                      <a:prstDash val="solid"/>
+                      <a:round/>
+                      <a:headEnd type="none" w="med" len="med"/>
+                      <a:tailEnd type="none" w="med" len="med"/>
+                    </a:lnR>
+                    <a:lnT w="9525" cap="flat" cmpd="sng" algn="ctr">
+                      <a:solidFill>
+                        <a:srgbClr val="D3DED0"/>
+                      </a:solidFill>
+                      <a:prstDash val="solid"/>
+                      <a:round/>
+                      <a:headEnd type="none" w="med" len="med"/>
+                      <a:tailEnd type="none" w="med" len="med"/>
+                    </a:lnT>
+                    <a:lnB w="9525" cap="flat" cmpd="sng" algn="ctr">
+                      <a:solidFill>
+                        <a:srgbClr val="D3DED0"/>
+                      </a:solidFill>
+                      <a:prstDash val="solid"/>
+                      <a:round/>
+                      <a:headEnd type="none" w="med" len="med"/>
+                      <a:tailEnd type="none" w="med" len="med"/>
+                    </a:lnB>
+                    <a:solidFill>
+                      <a:srgbClr val="FBEDEA"/>
+                    </a:solidFill>
+                  </a:tcPr>
+                </a:tc>
+              </a:tr>
+            </a:tbl>
+          </a:graphicData>
+        </a:graphic>
+      </p:graphicFrame>
+      <p:sp>
+        <p:nvSpPr>
+          <p:cNvPr id="5" name="Text 2"/>
+          <p:cNvSpPr/>
+          <p:nvPr/>
+        </p:nvSpPr>
+        <p:spPr>
+          <a:xfrm>
+            <a:off x="274320" y="6263640"/>
+            <a:ext cx="11640312" cy="228600"/>
+          </a:xfrm>
+          <a:prstGeom prst="rect">
+            <a:avLst/>
+          </a:prstGeom>
+          <a:noFill/>
+          <a:ln/>
+        </p:spPr>
+        <p:txBody>
+          <a:bodyPr wrap="square" lIns="0" tIns="0" rIns="0" bIns="0" rtlCol="0" anchor="t"/>
+          <a:lstStyle/>
+          <a:p>
+            <a:pPr indent="0" marL="0">
+              <a:buNone/>
+            </a:pPr>
+            <a:r>
+              <a:rPr lang="en-US" sz="650" dirty="0">
+                <a:solidFill>
+                  <a:srgbClr val="595959"/>
+                </a:solidFill>
+                <a:latin typeface="Meiryo UI" pitchFamily="34" charset="0"/>
+                <a:ea typeface="Meiryo UI" pitchFamily="34" charset="-122"/>
+                <a:cs typeface="Meiryo UI" pitchFamily="34" charset="-120"/>
+              </a:rPr>
+              <a:t>※ 人数・金額は仮説値(人件費5百万円/人・年で換算)。26/10の台帳(作業と基準の対応表)完成後に検証・確定。進め方の詳細は次頁、タスク・担当・時期の詳細は最終頁WBS参照。</a:t>
+            </a:r>
+            <a:endParaRPr lang="en-US" sz="650" dirty="0"/>
+          </a:p>
+        </p:txBody>
+      </p:sp>
+    </p:spTree>
+  </p:cSld>
+  <p:clrMapOvr>
+    <a:masterClrMapping/>
+  </p:clrMapOvr>
+</p:sld>
+</file>
+
+<file path=ppt/slides/slide3.xml><?xml version="1.0" encoding="utf-8"?>
+<p:sld xmlns:a="http://schemas.openxmlformats.org/drawingml/2006/main" xmlns:r="http://schemas.openxmlformats.org/officeDocument/2006/relationships" xmlns:p="http://schemas.openxmlformats.org/presentationml/2006/main">
+  <p:cSld name="Slide 3">
+    <p:bg>
+      <p:bgPr>
+        <a:solidFill>
+          <a:srgbClr val="FFFFFF"/>
+        </a:solidFill>
+      </p:bgPr>
+    </p:bg>
+    <p:spTree>
+      <p:nvGrpSpPr>
+        <p:cNvPr id="1" name=""/>
+        <p:cNvGrpSpPr/>
+        <p:nvPr/>
+      </p:nvGrpSpPr>
+      <p:grpSpPr>
+        <a:xfrm>
+          <a:off x="0" y="0"/>
+          <a:ext cx="0" cy="0"/>
+          <a:chOff x="0" y="0"/>
+          <a:chExt cx="0" cy="0"/>
+        </a:xfrm>
+      </p:grpSpPr>
+      <p:sp>
+        <p:nvSpPr>
+          <p:cNvPr id="2" name="Text 0"/>
+          <p:cNvSpPr/>
+          <p:nvPr/>
+        </p:nvSpPr>
+        <p:spPr>
+          <a:xfrm>
+            <a:off x="274320" y="91440"/>
             <a:ext cx="7772400" cy="411480"/>
           </a:xfrm>
           <a:prstGeom prst="rect">
@@ -997,7 +4321,7 @@
                 <a:ea typeface="Meiryo UI" pitchFamily="34" charset="-122"/>
                 <a:cs typeface="Meiryo UI" pitchFamily="34" charset="-120"/>
               </a:rPr>
-              <a:t>生産性ボトルネック調査 推進方法(全体概要)</a:t>
+              <a:t>進め方の詳細 — すべての作業を「3つの問い」に順番にかける</a:t>
             </a:r>
             <a:endParaRPr lang="en-US" sz="1900" dirty="0"/>
           </a:p>
@@ -3436,9 +6760,9 @@
 </p:sld>
 </file>
 
-<file path=ppt/slides/slide2.xml><?xml version="1.0" encoding="utf-8"?>
+<file path=ppt/slides/slide4.xml><?xml version="1.0" encoding="utf-8"?>
 <p:sld xmlns:a="http://schemas.openxmlformats.org/drawingml/2006/main" xmlns:r="http://schemas.openxmlformats.org/officeDocument/2006/relationships" xmlns:p="http://schemas.openxmlformats.org/presentationml/2006/main">
-  <p:cSld name="Slide 2">
+  <p:cSld name="Slide 4">
     <p:bg>
       <p:bgPr>
         <a:solidFill>
@@ -3596,7 +6920,7 @@
       </p:sp>
       <p:graphicFrame>
         <p:nvGraphicFramePr>
-          <p:cNvPr id="3" name="Table 0"/>
+          <p:cNvPr id="5" name="Table 0"/>
           <p:cNvGraphicFramePr>
             <a:graphicFrameLocks noGrp="1"/>
           </p:cNvGraphicFramePr>

--- a/docs/bottleneck-survey-plan.pptx
+++ b/docs/bottleneck-survey-plan.pptx
@@ -1228,12 +1228,12 @@
         </p:nvSpPr>
         <p:spPr>
           <a:xfrm>
-            <a:off x="274320" y="603504"/>
-            <a:ext cx="11640312" cy="1060704"/>
+            <a:off x="274320" y="566928"/>
+            <a:ext cx="11640312" cy="1207008"/>
           </a:xfrm>
           <a:prstGeom prst="roundRect">
             <a:avLst>
-              <a:gd name="adj" fmla="val 5172"/>
+              <a:gd name="adj" fmla="val 4545"/>
             </a:avLst>
           </a:prstGeom>
           <a:solidFill>
@@ -1255,7 +1255,7 @@
         </p:nvSpPr>
         <p:spPr>
           <a:xfrm>
-            <a:off x="411480" y="667512"/>
+            <a:off x="411480" y="630936"/>
             <a:ext cx="11365992" cy="237744"/>
           </a:xfrm>
           <a:prstGeom prst="rect">
@@ -1297,7 +1297,7 @@
                 <a:ea typeface="Meiryo UI" pitchFamily="34" charset="-122"/>
                 <a:cs typeface="Meiryo UI" pitchFamily="34" charset="-120"/>
               </a:rPr>
-              <a:t> なぜ「生産性・省人化」か — 全社戦略の要請</a:t>
+              <a:t> なぜ「生産性・省人化」か — マクロトレンドが要請(選択の余地がない)</a:t>
             </a:r>
             <a:endParaRPr lang="en-US" sz="1100" dirty="0"/>
           </a:p>
@@ -1311,8 +1311,8 @@
         </p:nvSpPr>
         <p:spPr>
           <a:xfrm>
-            <a:off x="438912" y="941832"/>
-            <a:ext cx="11311128" cy="658368"/>
+            <a:off x="438912" y="905256"/>
+            <a:ext cx="11311128" cy="804672"/>
           </a:xfrm>
           <a:prstGeom prst="rect">
             <a:avLst/>
@@ -1335,7 +1335,7 @@
               <a:buChar char="•"/>
             </a:pPr>
             <a:r>
-              <a:rPr lang="en-US" sz="820" dirty="0">
+              <a:rPr lang="en-US" sz="800" dirty="0">
                 <a:solidFill>
                   <a:srgbClr val="2B2B2B"/>
                 </a:solidFill>
@@ -1343,9 +1343,9 @@
                 <a:ea typeface="Meiryo UI" pitchFamily="34" charset="-122"/>
                 <a:cs typeface="Meiryo UI" pitchFamily="34" charset="-120"/>
               </a:rPr>
-              <a:t>中計Vision2030 2nd STAGE(25〜27年)は「収益力強靭化」: 27年EBITDAマージン13%超・ROIC8〜9%(公開情報)</a:t>
+              <a:t>労働供給: 生産年齢人口は2040年までに約1,300万人減少(社人研・令和5年推計)。2030年に644万人の労働力不足の推計も(パーソル総研×中央大) — 現行の要員体制は維持不能</a:t>
             </a:r>
-            <a:endParaRPr lang="en-US" sz="820" dirty="0"/>
+            <a:endParaRPr lang="en-US" sz="800" dirty="0"/>
           </a:p>
           <a:p>
             <a:pPr marL="101600" indent="-101600">
@@ -1359,7 +1359,7 @@
               <a:buChar char="•"/>
             </a:pPr>
             <a:r>
-              <a:rPr lang="en-US" sz="820" dirty="0">
+              <a:rPr lang="en-US" sz="800" dirty="0">
                 <a:solidFill>
                   <a:srgbClr val="2B2B2B"/>
                 </a:solidFill>
@@ -1367,9 +1367,9 @@
                 <a:ea typeface="Meiryo UI" pitchFamily="34" charset="-122"/>
                 <a:cs typeface="Meiryo UI" pitchFamily="34" charset="-120"/>
               </a:rPr>
-              <a:t>生産技術のKGI = 国内工場の一人当たり生産金額 2030年+20%(生産技術戦略会議で設定済み)</a:t>
+              <a:t>人件費: 33年ぶり高水準の賃上げが継続(春闘5%台)・最低賃金も継続上昇 — 同じ要員数でも人件費は毎年増え、PLを構造的に圧迫</a:t>
             </a:r>
-            <a:endParaRPr lang="en-US" sz="820" dirty="0"/>
+            <a:endParaRPr lang="en-US" sz="800" dirty="0"/>
           </a:p>
           <a:p>
             <a:pPr marL="101600" indent="-101600">
@@ -1383,7 +1383,7 @@
               <a:buChar char="•"/>
             </a:pPr>
             <a:r>
-              <a:rPr lang="en-US" sz="820" dirty="0">
+              <a:rPr lang="en-US" sz="800" dirty="0">
                 <a:solidFill>
                   <a:srgbClr val="2B2B2B"/>
                 </a:solidFill>
@@ -1391,9 +1391,33 @@
                 <a:ea typeface="Meiryo UI" pitchFamily="34" charset="-122"/>
                 <a:cs typeface="Meiryo UI" pitchFamily="34" charset="-120"/>
               </a:rPr>
-              <a:t>労働力人口の減少で製造要員の確保は年々困難に — 省人化はコスト削減ではなく「事業継続の条件」</a:t>
+              <a:t>競合対比: 競合(花王・P&amp;G)工場は一人当たり生産金額が当社主力工場比 約20%高く、人件費比率・固定費比率も低い(社内ベンチマーク分析) — 生産性格差は利益率格差に直結</a:t>
             </a:r>
-            <a:endParaRPr lang="en-US" sz="820" dirty="0"/>
+            <a:endParaRPr lang="en-US" sz="800" dirty="0"/>
+          </a:p>
+          <a:p>
+            <a:pPr marL="101600" indent="-101600">
+              <a:lnSpc>
+                <a:spcPct val="105000"/>
+              </a:lnSpc>
+              <a:spcAft>
+                <a:spcPts val="200"/>
+              </a:spcAft>
+              <a:buSzPct val="100000"/>
+              <a:buChar char="•"/>
+            </a:pPr>
+            <a:r>
+              <a:rPr lang="en-US" sz="800" dirty="0">
+                <a:solidFill>
+                  <a:srgbClr val="2B2B2B"/>
+                </a:solidFill>
+                <a:latin typeface="Meiryo UI" pitchFamily="34" charset="0"/>
+                <a:ea typeface="Meiryo UI" pitchFamily="34" charset="-122"/>
+                <a:cs typeface="Meiryo UI" pitchFamily="34" charset="-120"/>
+              </a:rPr>
+              <a:t>需要側: 国内オーラルケア市場は人口減で数量成長が見込めない — コスト競争力と付加価値が利益の源泉</a:t>
+            </a:r>
+            <a:endParaRPr lang="en-US" sz="800" dirty="0"/>
           </a:p>
         </p:txBody>
       </p:sp>
@@ -1405,8 +1429,8 @@
         </p:nvSpPr>
         <p:spPr>
           <a:xfrm>
-            <a:off x="822960" y="1664208"/>
-            <a:ext cx="365760" cy="164592"/>
+            <a:off x="822960" y="1792224"/>
+            <a:ext cx="365760" cy="146304"/>
           </a:xfrm>
           <a:prstGeom prst="rect">
             <a:avLst/>
@@ -1444,12 +1468,12 @@
         </p:nvSpPr>
         <p:spPr>
           <a:xfrm>
-            <a:off x="1005840" y="1828800"/>
-            <a:ext cx="10908792" cy="1060704"/>
+            <a:off x="1005840" y="1956816"/>
+            <a:ext cx="10908792" cy="1188720"/>
           </a:xfrm>
           <a:prstGeom prst="roundRect">
             <a:avLst>
-              <a:gd name="adj" fmla="val 5172"/>
+              <a:gd name="adj" fmla="val 4615"/>
             </a:avLst>
           </a:prstGeom>
           <a:solidFill>
@@ -1471,7 +1495,7 @@
         </p:nvSpPr>
         <p:spPr>
           <a:xfrm>
-            <a:off x="1143000" y="1892808"/>
+            <a:off x="1143000" y="2020824"/>
             <a:ext cx="10634472" cy="237744"/>
           </a:xfrm>
           <a:prstGeom prst="rect">
@@ -1513,7 +1537,7 @@
                 <a:ea typeface="Meiryo UI" pitchFamily="34" charset="-122"/>
                 <a:cs typeface="Meiryo UI" pitchFamily="34" charset="-120"/>
               </a:rPr>
-              <a:t> なぜ「明石工場」か — 最重点事業の特化拠点</a:t>
+              <a:t> なぜ「明石工場(ハブラシ)」か — 労働集約が最も残る領域</a:t>
             </a:r>
             <a:endParaRPr lang="en-US" sz="1100" dirty="0"/>
           </a:p>
@@ -1527,8 +1551,8 @@
         </p:nvSpPr>
         <p:spPr>
           <a:xfrm>
-            <a:off x="1170432" y="2167128"/>
-            <a:ext cx="10579608" cy="658368"/>
+            <a:off x="1170432" y="2295144"/>
+            <a:ext cx="10579608" cy="786384"/>
           </a:xfrm>
           <a:prstGeom prst="rect">
             <a:avLst/>
@@ -1551,7 +1575,7 @@
               <a:buChar char="•"/>
             </a:pPr>
             <a:r>
-              <a:rPr lang="en-US" sz="820" dirty="0">
+              <a:rPr lang="en-US" sz="800" dirty="0">
                 <a:solidFill>
                   <a:srgbClr val="2B2B2B"/>
                 </a:solidFill>
@@ -1559,9 +1583,9 @@
                 <a:ea typeface="Meiryo UI" pitchFamily="34" charset="-122"/>
                 <a:cs typeface="Meiryo UI" pitchFamily="34" charset="-120"/>
               </a:rPr>
-              <a:t>オーラルヘルスケアは2nd STAGEの最重点事業(成長ドライバー)。明石はハブラシの特化拠点 = OHC生産性の主戦場</a:t>
+              <a:t>ハブラシは構造・形状が生活者価値を直接生む=生産技術の寄与度が最も高いカテゴリー(戦略会議分析)。明石はその特化拠点</a:t>
             </a:r>
-            <a:endParaRPr lang="en-US" sz="820" dirty="0"/>
+            <a:endParaRPr lang="en-US" sz="800" dirty="0"/>
           </a:p>
           <a:p>
             <a:pPr marL="101600" indent="-101600">
@@ -1575,7 +1599,7 @@
               <a:buChar char="•"/>
             </a:pPr>
             <a:r>
-              <a:rPr lang="en-US" sz="820" dirty="0">
+              <a:rPr lang="en-US" sz="800" dirty="0">
                 <a:solidFill>
                   <a:srgbClr val="2B2B2B"/>
                 </a:solidFill>
@@ -1583,9 +1607,9 @@
                 <a:ea typeface="Meiryo UI" pitchFamily="34" charset="-122"/>
                 <a:cs typeface="Meiryo UI" pitchFamily="34" charset="-120"/>
               </a:rPr>
-              <a:t>「明石・オーラル注力」はデジ戦とも合意済み(6/10打合せ) — 関係部門のベクトルが既に揃っている</a:t>
+              <a:t>工程特性: ハブラシ工程は非定型・レイアウト制約が高く、従来の汎用設備自動化が及ばず人手が残存 — 国内工場で最も労働集約的な領域</a:t>
             </a:r>
-            <a:endParaRPr lang="en-US" sz="820" dirty="0"/>
+            <a:endParaRPr lang="en-US" sz="800" dirty="0"/>
           </a:p>
           <a:p>
             <a:pPr marL="101600" indent="-101600">
@@ -1599,7 +1623,7 @@
               <a:buChar char="•"/>
             </a:pPr>
             <a:r>
-              <a:rPr lang="en-US" sz="820" dirty="0">
+              <a:rPr lang="en-US" sz="800" dirty="0">
                 <a:solidFill>
                   <a:srgbClr val="2B2B2B"/>
                 </a:solidFill>
@@ -1607,9 +1631,33 @@
                 <a:ea typeface="Meiryo UI" pitchFamily="34" charset="-122"/>
                 <a:cs typeface="Meiryo UI" pitchFamily="34" charset="-120"/>
               </a:rPr>
-              <a:t>フィジカルAI効果見積もり(31〜52機・省人化目標53名・工場317→264名)の対象拠点</a:t>
+              <a:t>生産体制の国別類型では日本はⅢ型(人口減・超高齢化)=自動化・自律化が定石(戦略会議分析)。労働集約のまま残るハブラシ生産は最も矛盾が大きい</a:t>
             </a:r>
-            <a:endParaRPr lang="en-US" sz="820" dirty="0"/>
+            <a:endParaRPr lang="en-US" sz="800" dirty="0"/>
+          </a:p>
+          <a:p>
+            <a:pPr marL="101600" indent="-101600">
+              <a:lnSpc>
+                <a:spcPct val="105000"/>
+              </a:lnSpc>
+              <a:spcAft>
+                <a:spcPts val="200"/>
+              </a:spcAft>
+              <a:buSzPct val="100000"/>
+              <a:buChar char="•"/>
+            </a:pPr>
+            <a:r>
+              <a:rPr lang="en-US" sz="800" dirty="0">
+                <a:solidFill>
+                  <a:srgbClr val="2B2B2B"/>
+                </a:solidFill>
+                <a:latin typeface="Meiryo UI" pitchFamily="34" charset="0"/>
+                <a:ea typeface="Meiryo UI" pitchFamily="34" charset="-122"/>
+                <a:cs typeface="Meiryo UI" pitchFamily="34" charset="-120"/>
+              </a:rPr>
+              <a:t>規模: フィジカルAI見積もり対象(省人化目標53名・工場317→264名)であり、投資対効果の母数が最大</a:t>
+            </a:r>
+            <a:endParaRPr lang="en-US" sz="800" dirty="0"/>
           </a:p>
         </p:txBody>
       </p:sp>
@@ -1621,8 +1669,8 @@
         </p:nvSpPr>
         <p:spPr>
           <a:xfrm>
-            <a:off x="1554480" y="2889504"/>
-            <a:ext cx="365760" cy="164592"/>
+            <a:off x="1554480" y="3163824"/>
+            <a:ext cx="365760" cy="146304"/>
           </a:xfrm>
           <a:prstGeom prst="rect">
             <a:avLst/>
@@ -1660,12 +1708,12 @@
         </p:nvSpPr>
         <p:spPr>
           <a:xfrm>
-            <a:off x="1737360" y="3054096"/>
-            <a:ext cx="10177272" cy="1389888"/>
+            <a:off x="1737360" y="3328416"/>
+            <a:ext cx="10177272" cy="1371600"/>
           </a:xfrm>
           <a:prstGeom prst="roundRect">
             <a:avLst>
-              <a:gd name="adj" fmla="val 3947"/>
+              <a:gd name="adj" fmla="val 4000"/>
             </a:avLst>
           </a:prstGeom>
           <a:solidFill>
@@ -1687,7 +1735,7 @@
         </p:nvSpPr>
         <p:spPr>
           <a:xfrm>
-            <a:off x="1874520" y="3118104"/>
+            <a:off x="1874520" y="3392424"/>
             <a:ext cx="9902952" cy="237744"/>
           </a:xfrm>
           <a:prstGeom prst="rect">
@@ -1729,7 +1777,7 @@
                 <a:ea typeface="Meiryo UI" pitchFamily="34" charset="-122"/>
                 <a:cs typeface="Meiryo UI" pitchFamily="34" charset="-120"/>
               </a:rPr>
-              <a:t> なぜ「植毛ライン」か — ギャップと改善余地の集中点</a:t>
+              <a:t> なぜ「植毛ライン」か — データが示す集中点</a:t>
             </a:r>
             <a:endParaRPr lang="en-US" sz="1100" dirty="0"/>
           </a:p>
@@ -1743,8 +1791,8 @@
         </p:nvSpPr>
         <p:spPr>
           <a:xfrm>
-            <a:off x="1901952" y="3392424"/>
-            <a:ext cx="9848088" cy="987552"/>
+            <a:off x="1901952" y="3666744"/>
+            <a:ext cx="9848088" cy="969264"/>
           </a:xfrm>
           <a:prstGeom prst="rect">
             <a:avLst/>
@@ -1767,7 +1815,7 @@
               <a:buChar char="•"/>
             </a:pPr>
             <a:r>
-              <a:rPr lang="en-US" sz="820" dirty="0">
+              <a:rPr lang="en-US" sz="800" dirty="0">
                 <a:solidFill>
                   <a:srgbClr val="2B2B2B"/>
                 </a:solidFill>
@@ -1775,9 +1823,9 @@
                 <a:ea typeface="Meiryo UI" pitchFamily="34" charset="-122"/>
                 <a:cs typeface="Meiryo UI" pitchFamily="34" charset="-120"/>
               </a:rPr>
-              <a:t>工場最大の要員集中点: 植毛115名 = 工場317名の約36%</a:t>
+              <a:t>国内4工場の製造/包装係の比較で、ハブラシ植毛は「要員数が最多 × 一人当たり生産金額が最低」の象限(戦略会議・散布図分析) — 改善余地が定量的に最大</a:t>
             </a:r>
-            <a:endParaRPr lang="en-US" sz="820" dirty="0"/>
+            <a:endParaRPr lang="en-US" sz="800" dirty="0"/>
           </a:p>
           <a:p>
             <a:pPr marL="101600" indent="-101600">
@@ -1791,7 +1839,7 @@
               <a:buChar char="•"/>
             </a:pPr>
             <a:r>
-              <a:rPr lang="en-US" sz="820" dirty="0">
+              <a:rPr lang="en-US" sz="800" dirty="0">
                 <a:solidFill>
                   <a:srgbClr val="2B2B2B"/>
                 </a:solidFill>
@@ -1799,9 +1847,9 @@
                 <a:ea typeface="Meiryo UI" pitchFamily="34" charset="-122"/>
                 <a:cs typeface="Meiryo UI" pitchFamily="34" charset="-120"/>
               </a:rPr>
-              <a:t>国内工場の工程比較で「要員が多い × 一人当たり生産金額が低い」象限に位置(改善余地が最大)</a:t>
+              <a:t>工場最大の要員集中点: 植毛115名 = 工場317名の約36%</a:t>
             </a:r>
-            <a:endParaRPr lang="en-US" sz="820" dirty="0"/>
+            <a:endParaRPr lang="en-US" sz="800" dirty="0"/>
           </a:p>
           <a:p>
             <a:pPr marL="101600" indent="-101600">
@@ -1815,7 +1863,7 @@
               <a:buChar char="•"/>
             </a:pPr>
             <a:r>
-              <a:rPr lang="en-US" sz="820" dirty="0">
+              <a:rPr lang="en-US" sz="800" dirty="0">
                 <a:solidFill>
                   <a:srgbClr val="2B2B2B"/>
                 </a:solidFill>
@@ -1823,9 +1871,9 @@
                 <a:ea typeface="Meiryo UI" pitchFamily="34" charset="-122"/>
                 <a:cs typeface="Meiryo UI" pitchFamily="34" charset="-120"/>
               </a:rPr>
-              <a:t>包装2ラインは38→9名/37→10名と構造転換の道筋が既にある。植毛だけが100名止まり — 工場のギャップのほぼ全てが植毛に集中</a:t>
+              <a:t>包装2ラインはフィジカルAIで38→9名/37→10名の道筋が既にある。植毛は非定型作業(検査・長毛処理等)が壁となり100名止まり — 工場のギャップのほぼ全てが植毛に集中</a:t>
             </a:r>
-            <a:endParaRPr lang="en-US" sz="820" dirty="0"/>
+            <a:endParaRPr lang="en-US" sz="800" dirty="0"/>
           </a:p>
           <a:p>
             <a:pPr marL="101600" indent="-101600">
@@ -1839,7 +1887,7 @@
               <a:buChar char="•"/>
             </a:pPr>
             <a:r>
-              <a:rPr lang="en-US" sz="820" dirty="0">
+              <a:rPr lang="en-US" sz="800" dirty="0">
                 <a:solidFill>
                   <a:srgbClr val="2B2B2B"/>
                 </a:solidFill>
@@ -1847,9 +1895,9 @@
                 <a:ea typeface="Meiryo UI" pitchFamily="34" charset="-122"/>
                 <a:cs typeface="Meiryo UI" pitchFamily="34" charset="-120"/>
               </a:rPr>
-              <a:t>役員の名指し期待: 「115→100人ではなく、半減レベルを」(7/23役員打合せ)</a:t>
+              <a:t>半減(57名)の達成 = 年約2.9億円の人件費構造改善。競合との生産性格差(約20%)の解消に直結</a:t>
             </a:r>
-            <a:endParaRPr lang="en-US" sz="820" dirty="0"/>
+            <a:endParaRPr lang="en-US" sz="800" dirty="0"/>
           </a:p>
         </p:txBody>
       </p:sp>
@@ -1861,12 +1909,12 @@
         </p:nvSpPr>
         <p:spPr>
           <a:xfrm>
-            <a:off x="274320" y="4681728"/>
-            <a:ext cx="5715000" cy="1417320"/>
+            <a:off x="274320" y="4846320"/>
+            <a:ext cx="5715000" cy="1298448"/>
           </a:xfrm>
           <a:prstGeom prst="roundRect">
             <a:avLst>
-              <a:gd name="adj" fmla="val 3871"/>
+              <a:gd name="adj" fmla="val 4225"/>
             </a:avLst>
           </a:prstGeom>
           <a:solidFill>
@@ -1888,7 +1936,7 @@
         </p:nvSpPr>
         <p:spPr>
           <a:xfrm>
-            <a:off x="411480" y="4754880"/>
+            <a:off x="411480" y="4919472"/>
             <a:ext cx="5440680" cy="219456"/>
           </a:xfrm>
           <a:prstGeom prst="rect">
@@ -1927,8 +1975,8 @@
         </p:nvSpPr>
         <p:spPr>
           <a:xfrm>
-            <a:off x="411480" y="5010912"/>
-            <a:ext cx="5440680" cy="1005840"/>
+            <a:off x="411480" y="5175504"/>
+            <a:ext cx="5440680" cy="914400"/>
           </a:xfrm>
           <a:prstGeom prst="rect">
             <a:avLst/>
@@ -1980,7 +2028,7 @@
                 <a:ea typeface="Meiryo UI" pitchFamily="34" charset="-122"/>
                 <a:cs typeface="Meiryo UI" pitchFamily="34" charset="-120"/>
               </a:rPr>
-              <a:t>基準見直し(効果の約4割)は投資ゼロで27年から効果発現 — 2nd STAGE最終年(27年)の成果報告に間に合う</a:t>
+              <a:t>賃上げと採用難は待ってくれない — 効果発現が1年遅れるごとに約3億円/年の機会損失。計画なき自然減が先行すれば品質・稼働リスクに転化する</a:t>
             </a:r>
             <a:endParaRPr lang="en-US" sz="820" dirty="0"/>
           </a:p>
@@ -1994,12 +2042,12 @@
         </p:nvSpPr>
         <p:spPr>
           <a:xfrm>
-            <a:off x="6199632" y="4681728"/>
-            <a:ext cx="5715000" cy="1417320"/>
+            <a:off x="6199632" y="4846320"/>
+            <a:ext cx="5715000" cy="1298448"/>
           </a:xfrm>
           <a:prstGeom prst="roundRect">
             <a:avLst>
-              <a:gd name="adj" fmla="val 3871"/>
+              <a:gd name="adj" fmla="val 4225"/>
             </a:avLst>
           </a:prstGeom>
           <a:solidFill>
@@ -2021,7 +2069,7 @@
         </p:nvSpPr>
         <p:spPr>
           <a:xfrm>
-            <a:off x="6336792" y="4754880"/>
+            <a:off x="6336792" y="4919472"/>
             <a:ext cx="5440680" cy="219456"/>
           </a:xfrm>
           <a:prstGeom prst="rect">
@@ -2060,8 +2108,8 @@
         </p:nvSpPr>
         <p:spPr>
           <a:xfrm>
-            <a:off x="6336792" y="5029200"/>
-            <a:ext cx="5440680" cy="1005840"/>
+            <a:off x="6336792" y="5175504"/>
+            <a:ext cx="5440680" cy="914400"/>
           </a:xfrm>
           <a:prstGeom prst="rect">
             <a:avLst/>
@@ -2120,7 +2168,7 @@
         </p:nvSpPr>
         <p:spPr>
           <a:xfrm>
-            <a:off x="274320" y="6263640"/>
+            <a:off x="274320" y="6291072"/>
             <a:ext cx="11640312" cy="228600"/>
           </a:xfrm>
           <a:prstGeom prst="rect">
@@ -2145,7 +2193,7 @@
                 <a:ea typeface="Meiryo UI" pitchFamily="34" charset="-122"/>
                 <a:cs typeface="Meiryo UI" pitchFamily="34" charset="-120"/>
               </a:rPr>
-              <a:t>出典: 生産技術戦略会議骨子案(2026/7)・フィジカルAI導入効果見積もり・7/23役員打合せメモ・6/10デジ戦打合せ議事録・Vision2030 2nd STAGE(公開情報)</a:t>
+              <a:t>出典: 生産技術戦略会議骨子案(2026/7: 競合比較・要員×生産金額分析・生産体制類型)・フィジカルAI導入効果見積もり・国立社会保障・人口問題研究所 将来推計(令和5年)・パーソル総研×中央大「労働市場の未来推計2030」・Vision2030 2nd STAGE(公開情報)</a:t>
             </a:r>
             <a:endParaRPr lang="en-US" sz="650" dirty="0"/>
           </a:p>

--- a/docs/bottleneck-survey-plan.pptx
+++ b/docs/bottleneck-survey-plan.pptx
@@ -9,9 +9,10 @@
     <p:sldId id="257" r:id="rId3"/>
     <p:sldId id="258" r:id="rId4"/>
     <p:sldId id="259" r:id="rId5"/>
+    <p:sldId id="260" r:id="rId6"/>
   </p:sldIdLst>
   <p:notesMasterIdLst>
-    <p:notesMasterId r:id="rId6"/>
+    <p:notesMasterId r:id="rId7"/>
   </p:notesMasterIdLst>
   <p:sldSz cx="12192000" cy="6858000"/>
   <p:notesSz cx="6858000" cy="12192000"/>
@@ -793,6 +794,94 @@
             <a:fld id="{F7021451-1387-4CA6-816F-3879F97B5CBC}" type="slidenum">
               <a:rPr lang="en-US"/>
               <a:t>4</a:t>
+            </a:fld>
+            <a:endParaRPr lang="en-US"/>
+          </a:p>
+        </p:txBody>
+      </p:sp>
+    </p:spTree>
+    <p:extLst>
+      <p:ext uri="{BB962C8B-B14F-4D97-AF65-F5344CB8AC3E}">
+        <p14:creationId xmlns:p14="http://schemas.microsoft.com/office/powerpoint/2010/main" val="1024086991"/>
+      </p:ext>
+    </p:extLst>
+  </p:cSld>
+  <p:clrMapOvr>
+    <a:masterClrMapping/>
+  </p:clrMapOvr>
+</p:notes>
+</file>
+
+<file path=ppt/notesSlides/notesSlide5.xml><?xml version="1.0" encoding="utf-8"?>
+<p:notes xmlns:a="http://schemas.openxmlformats.org/drawingml/2006/main" xmlns:r="http://schemas.openxmlformats.org/officeDocument/2006/relationships" xmlns:p="http://schemas.openxmlformats.org/presentationml/2006/main">
+  <p:cSld>
+    <p:spTree>
+      <p:nvGrpSpPr>
+        <p:cNvPr id="1" name=""/>
+        <p:cNvGrpSpPr/>
+        <p:nvPr/>
+      </p:nvGrpSpPr>
+      <p:grpSpPr>
+        <a:xfrm>
+          <a:off x="0" y="0"/>
+          <a:ext cx="0" cy="0"/>
+          <a:chOff x="0" y="0"/>
+          <a:chExt cx="0" cy="0"/>
+        </a:xfrm>
+      </p:grpSpPr>
+      <p:sp>
+        <p:nvSpPr>
+          <p:cNvPr id="2" name="Slide Image Placeholder 1"/>
+          <p:cNvSpPr>
+            <a:spLocks noGrp="1" noRot="1" noChangeAspect="1"/>
+          </p:cNvSpPr>
+          <p:nvPr>
+            <p:ph type="sldImg"/>
+          </p:nvPr>
+        </p:nvSpPr>
+        <p:spPr/>
+      </p:sp>
+      <p:sp>
+        <p:nvSpPr>
+          <p:cNvPr id="3" name="Notes Placeholder 2"/>
+          <p:cNvSpPr>
+            <a:spLocks noGrp="1"/>
+          </p:cNvSpPr>
+          <p:nvPr>
+            <p:ph type="body" idx="1"/>
+          </p:nvPr>
+        </p:nvSpPr>
+        <p:spPr/>
+        <p:txBody>
+          <a:bodyPr/>
+          <a:lstStyle/>
+          <a:p>
+            <a:r>
+              <a:rPr lang="en-US" dirty="0"/>
+              <a:t/>
+            </a:r>
+            <a:endParaRPr lang="en-US" dirty="0"/>
+          </a:p>
+        </p:txBody>
+      </p:sp>
+      <p:sp>
+        <p:nvSpPr>
+          <p:cNvPr id="4" name="Slide Number Placeholder 3"/>
+          <p:cNvSpPr>
+            <a:spLocks noGrp="1"/>
+          </p:cNvSpPr>
+          <p:nvPr>
+            <p:ph type="sldNum" sz="quarter" idx="10"/>
+          </p:nvPr>
+        </p:nvSpPr>
+        <p:spPr/>
+        <p:txBody>
+          <a:bodyPr/>
+          <a:lstStyle/>
+          <a:p>
+            <a:fld id="{F7021451-1387-4CA6-816F-3879F97B5CBC}" type="slidenum">
+              <a:rPr lang="en-US"/>
+              <a:t>5</a:t>
             </a:fld>
             <a:endParaRPr lang="en-US"/>
           </a:p>
@@ -6840,6 +6929,1779 @@
         </p:nvSpPr>
         <p:spPr>
           <a:xfrm>
+            <a:off x="274320" y="91440"/>
+            <a:ext cx="9692640" cy="411480"/>
+          </a:xfrm>
+          <a:prstGeom prst="rect">
+            <a:avLst/>
+          </a:prstGeom>
+          <a:noFill/>
+          <a:ln/>
+        </p:spPr>
+        <p:txBody>
+          <a:bodyPr wrap="square" lIns="0" tIns="0" rIns="0" bIns="0" rtlCol="0" anchor="ctr"/>
+          <a:lstStyle/>
+          <a:p>
+            <a:pPr indent="0" marL="0">
+              <a:buNone/>
+            </a:pPr>
+            <a:r>
+              <a:rPr lang="en-US" sz="1700" b="1" dirty="0">
+                <a:solidFill>
+                  <a:srgbClr val="1F3D20"/>
+                </a:solidFill>
+                <a:latin typeface="Meiryo UI" pitchFamily="34" charset="0"/>
+                <a:ea typeface="Meiryo UI" pitchFamily="34" charset="-122"/>
+                <a:cs typeface="Meiryo UI" pitchFamily="34" charset="-120"/>
+              </a:rPr>
+              <a:t>2040年構想との整合 — 「今の投資はムダにならないか」への回答</a:t>
+            </a:r>
+            <a:endParaRPr lang="en-US" sz="1700" dirty="0"/>
+          </a:p>
+        </p:txBody>
+      </p:sp>
+      <p:sp>
+        <p:nvSpPr>
+          <p:cNvPr id="3" name="Text 1"/>
+          <p:cNvSpPr/>
+          <p:nvPr/>
+        </p:nvSpPr>
+        <p:spPr>
+          <a:xfrm>
+            <a:off x="9601200" y="91440"/>
+            <a:ext cx="2313432" cy="411480"/>
+          </a:xfrm>
+          <a:prstGeom prst="rect">
+            <a:avLst/>
+          </a:prstGeom>
+          <a:noFill/>
+          <a:ln/>
+        </p:spPr>
+        <p:txBody>
+          <a:bodyPr wrap="square" lIns="0" tIns="0" rIns="0" bIns="0" rtlCol="0" anchor="ctr"/>
+          <a:lstStyle/>
+          <a:p>
+            <a:pPr algn="r" indent="0" marL="0">
+              <a:buNone/>
+            </a:pPr>
+            <a:r>
+              <a:rPr lang="en-US" sz="750" dirty="0">
+                <a:solidFill>
+                  <a:srgbClr val="595959"/>
+                </a:solidFill>
+                <a:latin typeface="Meiryo UI" pitchFamily="34" charset="0"/>
+                <a:ea typeface="Meiryo UI" pitchFamily="34" charset="-122"/>
+                <a:cs typeface="Meiryo UI" pitchFamily="34" charset="-120"/>
+              </a:rPr>
+              <a:t>OHC 2040年検討(モジュール型マザー工場)との連動</a:t>
+            </a:r>
+            <a:endParaRPr lang="en-US" sz="750" dirty="0"/>
+          </a:p>
+        </p:txBody>
+      </p:sp>
+      <p:sp>
+        <p:nvSpPr>
+          <p:cNvPr id="4" name="Shape 2"/>
+          <p:cNvSpPr/>
+          <p:nvPr/>
+        </p:nvSpPr>
+        <p:spPr>
+          <a:xfrm>
+            <a:off x="274320" y="603504"/>
+            <a:ext cx="11640312" cy="566928"/>
+          </a:xfrm>
+          <a:prstGeom prst="roundRect">
+            <a:avLst>
+              <a:gd name="adj" fmla="val 9677"/>
+            </a:avLst>
+          </a:prstGeom>
+          <a:solidFill>
+            <a:srgbClr val="FBEDEA"/>
+          </a:solidFill>
+          <a:ln w="12700">
+            <a:solidFill>
+              <a:srgbClr val="B85042"/>
+            </a:solidFill>
+            <a:prstDash val="solid"/>
+          </a:ln>
+        </p:spPr>
+      </p:sp>
+      <p:sp>
+        <p:nvSpPr>
+          <p:cNvPr id="5" name="Text 3"/>
+          <p:cNvSpPr/>
+          <p:nvPr/>
+        </p:nvSpPr>
+        <p:spPr>
+          <a:xfrm>
+            <a:off x="411480" y="603504"/>
+            <a:ext cx="11365992" cy="566928"/>
+          </a:xfrm>
+          <a:prstGeom prst="rect">
+            <a:avLst/>
+          </a:prstGeom>
+          <a:noFill/>
+          <a:ln/>
+        </p:spPr>
+        <p:txBody>
+          <a:bodyPr wrap="square" lIns="0" tIns="0" rIns="0" bIns="0" rtlCol="0" anchor="ctr"/>
+          <a:lstStyle/>
+          <a:p>
+            <a:pPr indent="0" marL="0">
+              <a:lnSpc>
+                <a:spcPct val="105000"/>
+              </a:lnSpc>
+              <a:buNone/>
+            </a:pPr>
+            <a:r>
+              <a:rPr lang="en-US" sz="1000" b="1" dirty="0">
+                <a:solidFill>
+                  <a:srgbClr val="B85042"/>
+                </a:solidFill>
+                <a:latin typeface="Meiryo UI" pitchFamily="34" charset="0"/>
+                <a:ea typeface="Meiryo UI" pitchFamily="34" charset="-122"/>
+                <a:cs typeface="Meiryo UI" pitchFamily="34" charset="-120"/>
+              </a:rPr>
+              <a:t>懸念: </a:t>
+            </a:r>
+            <a:pPr indent="0" marL="0">
+              <a:lnSpc>
+                <a:spcPct val="105000"/>
+              </a:lnSpc>
+              <a:buNone/>
+            </a:pPr>
+            <a:r>
+              <a:rPr lang="en-US" sz="900" dirty="0">
+                <a:solidFill>
+                  <a:srgbClr val="2B2B2B"/>
+                </a:solidFill>
+                <a:latin typeface="Meiryo UI" pitchFamily="34" charset="0"/>
+                <a:ea typeface="Meiryo UI" pitchFamily="34" charset="-122"/>
+                <a:cs typeface="Meiryo UI" pitchFamily="34" charset="-120"/>
+              </a:rPr>
+              <a:t>2040年に明石を「モジュール型マザー工場」(25百万本×4、国内73+輸出27百万本)へリニューアルする構想がある。現ラインへ投資する本プログラム(2.5〜3億円)は、10年少々で捨てることにならないか?</a:t>
+            </a:r>
+            <a:endParaRPr lang="en-US" sz="1000" dirty="0"/>
+          </a:p>
+        </p:txBody>
+      </p:sp>
+      <p:sp>
+        <p:nvSpPr>
+          <p:cNvPr id="6" name="Shape 4"/>
+          <p:cNvSpPr/>
+          <p:nvPr/>
+        </p:nvSpPr>
+        <p:spPr>
+          <a:xfrm>
+            <a:off x="274320" y="1316736"/>
+            <a:ext cx="3785616" cy="1920240"/>
+          </a:xfrm>
+          <a:prstGeom prst="roundRect">
+            <a:avLst>
+              <a:gd name="adj" fmla="val 2857"/>
+            </a:avLst>
+          </a:prstGeom>
+          <a:solidFill>
+            <a:srgbClr val="F3F8F1"/>
+          </a:solidFill>
+          <a:ln w="12700">
+            <a:solidFill>
+              <a:srgbClr val="C9DCC4"/>
+            </a:solidFill>
+            <a:prstDash val="solid"/>
+          </a:ln>
+        </p:spPr>
+      </p:sp>
+      <p:sp>
+        <p:nvSpPr>
+          <p:cNvPr id="7" name="Text 5"/>
+          <p:cNvSpPr/>
+          <p:nvPr/>
+        </p:nvSpPr>
+        <p:spPr>
+          <a:xfrm>
+            <a:off x="384048" y="1389888"/>
+            <a:ext cx="3566160" cy="237744"/>
+          </a:xfrm>
+          <a:prstGeom prst="rect">
+            <a:avLst/>
+          </a:prstGeom>
+          <a:noFill/>
+          <a:ln/>
+        </p:spPr>
+        <p:txBody>
+          <a:bodyPr wrap="square" lIns="0" tIns="0" rIns="0" bIns="0" rtlCol="0" anchor="ctr"/>
+          <a:lstStyle/>
+          <a:p>
+            <a:pPr indent="0" marL="0">
+              <a:buNone/>
+            </a:pPr>
+            <a:r>
+              <a:rPr lang="en-US" sz="1050" b="1" dirty="0">
+                <a:solidFill>
+                  <a:srgbClr val="1F3D20"/>
+                </a:solidFill>
+                <a:latin typeface="Meiryo UI" pitchFamily="34" charset="0"/>
+                <a:ea typeface="Meiryo UI" pitchFamily="34" charset="-122"/>
+                <a:cs typeface="Meiryo UI" pitchFamily="34" charset="-120"/>
+              </a:rPr>
+              <a:t>回答1: 投資規律で守る</a:t>
+            </a:r>
+            <a:endParaRPr lang="en-US" sz="1050" dirty="0"/>
+          </a:p>
+        </p:txBody>
+      </p:sp>
+      <p:sp>
+        <p:nvSpPr>
+          <p:cNvPr id="8" name="Text 6"/>
+          <p:cNvSpPr/>
+          <p:nvPr/>
+        </p:nvSpPr>
+        <p:spPr>
+          <a:xfrm>
+            <a:off x="384048" y="1664208"/>
+            <a:ext cx="3566160" cy="1499616"/>
+          </a:xfrm>
+          <a:prstGeom prst="rect">
+            <a:avLst/>
+          </a:prstGeom>
+          <a:noFill/>
+          <a:ln/>
+        </p:spPr>
+        <p:txBody>
+          <a:bodyPr wrap="square" lIns="0" tIns="0" rIns="0" bIns="0" rtlCol="0" anchor="t"/>
+          <a:lstStyle/>
+          <a:p>
+            <a:pPr indent="0" marL="0">
+              <a:lnSpc>
+                <a:spcPct val="110000"/>
+              </a:lnSpc>
+              <a:buNone/>
+            </a:pPr>
+            <a:r>
+              <a:rPr lang="en-US" sz="820" dirty="0">
+                <a:solidFill>
+                  <a:srgbClr val="2B2B2B"/>
+                </a:solidFill>
+                <a:latin typeface="Meiryo UI" pitchFamily="34" charset="0"/>
+                <a:ea typeface="Meiryo UI" pitchFamily="34" charset="-122"/>
+                <a:cs typeface="Meiryo UI" pitchFamily="34" charset="-120"/>
+              </a:rPr>
+              <a:t>2040年検討の原則をそのまま適用: </a:t>
+            </a:r>
+            <a:pPr indent="0" marL="0">
+              <a:lnSpc>
+                <a:spcPct val="110000"/>
+              </a:lnSpc>
+              <a:buNone/>
+            </a:pPr>
+            <a:r>
+              <a:rPr lang="en-US" sz="820" b="1" dirty="0">
+                <a:solidFill>
+                  <a:srgbClr val="2B2B2B"/>
+                </a:solidFill>
+                <a:latin typeface="Meiryo UI" pitchFamily="34" charset="0"/>
+                <a:ea typeface="Meiryo UI" pitchFamily="34" charset="-122"/>
+                <a:cs typeface="Meiryo UI" pitchFamily="34" charset="-120"/>
+              </a:rPr>
+              <a:t>「2030年代の投資は、2040年リニューアルまでに償却が終わる範囲に限定」
+</a:t>
+            </a:r>
+            <a:pPr indent="0" marL="0">
+              <a:lnSpc>
+                <a:spcPct val="110000"/>
+              </a:lnSpc>
+              <a:buNone/>
+            </a:pPr>
+            <a:r>
+              <a:rPr lang="en-US" sz="820" dirty="0">
+                <a:solidFill>
+                  <a:srgbClr val="2B2B2B"/>
+                </a:solidFill>
+                <a:latin typeface="Meiryo UI" pitchFamily="34" charset="0"/>
+                <a:ea typeface="Meiryo UI" pitchFamily="34" charset="-122"/>
+                <a:cs typeface="Meiryo UI" pitchFamily="34" charset="-120"/>
+              </a:rPr>
+              <a:t>本プログラムは投資2.5〜3億円・回収1年強。最も遅い28〜29年実装分も30〜31年に回収完了 — </a:t>
+            </a:r>
+            <a:pPr indent="0" marL="0">
+              <a:lnSpc>
+                <a:spcPct val="110000"/>
+              </a:lnSpc>
+              <a:buNone/>
+            </a:pPr>
+            <a:r>
+              <a:rPr lang="en-US" sz="820" b="1" dirty="0">
+                <a:solidFill>
+                  <a:srgbClr val="2C5F2D"/>
+                </a:solidFill>
+                <a:latin typeface="Meiryo UI" pitchFamily="34" charset="0"/>
+                <a:ea typeface="Meiryo UI" pitchFamily="34" charset="-122"/>
+                <a:cs typeface="Meiryo UI" pitchFamily="34" charset="-120"/>
+              </a:rPr>
+              <a:t>2040年まで約9年の利益貢献が残る。</a:t>
+            </a:r>
+            <a:pPr indent="0" marL="0">
+              <a:lnSpc>
+                <a:spcPct val="110000"/>
+              </a:lnSpc>
+              <a:buNone/>
+            </a:pPr>
+            <a:r>
+              <a:rPr lang="en-US" sz="820" dirty="0">
+                <a:solidFill>
+                  <a:srgbClr val="2B2B2B"/>
+                </a:solidFill>
+                <a:latin typeface="Meiryo UI" pitchFamily="34" charset="0"/>
+                <a:ea typeface="Meiryo UI" pitchFamily="34" charset="-122"/>
+                <a:cs typeface="Meiryo UI" pitchFamily="34" charset="-120"/>
+              </a:rPr>
+              <a:t>原則に適合(SCM戦略部がゲート審査)。</a:t>
+            </a:r>
+            <a:endParaRPr lang="en-US" sz="820" dirty="0"/>
+          </a:p>
+        </p:txBody>
+      </p:sp>
+      <p:sp>
+        <p:nvSpPr>
+          <p:cNvPr id="9" name="Shape 7"/>
+          <p:cNvSpPr/>
+          <p:nvPr/>
+        </p:nvSpPr>
+        <p:spPr>
+          <a:xfrm>
+            <a:off x="4201668" y="1316736"/>
+            <a:ext cx="3785616" cy="1920240"/>
+          </a:xfrm>
+          <a:prstGeom prst="roundRect">
+            <a:avLst>
+              <a:gd name="adj" fmla="val 2857"/>
+            </a:avLst>
+          </a:prstGeom>
+          <a:solidFill>
+            <a:srgbClr val="F3F8F1"/>
+          </a:solidFill>
+          <a:ln w="12700">
+            <a:solidFill>
+              <a:srgbClr val="C9DCC4"/>
+            </a:solidFill>
+            <a:prstDash val="solid"/>
+          </a:ln>
+        </p:spPr>
+      </p:sp>
+      <p:sp>
+        <p:nvSpPr>
+          <p:cNvPr id="10" name="Text 8"/>
+          <p:cNvSpPr/>
+          <p:nvPr/>
+        </p:nvSpPr>
+        <p:spPr>
+          <a:xfrm>
+            <a:off x="4311396" y="1389888"/>
+            <a:ext cx="3566160" cy="237744"/>
+          </a:xfrm>
+          <a:prstGeom prst="rect">
+            <a:avLst/>
+          </a:prstGeom>
+          <a:noFill/>
+          <a:ln/>
+        </p:spPr>
+        <p:txBody>
+          <a:bodyPr wrap="square" lIns="0" tIns="0" rIns="0" bIns="0" rtlCol="0" anchor="ctr"/>
+          <a:lstStyle/>
+          <a:p>
+            <a:pPr indent="0" marL="0">
+              <a:buNone/>
+            </a:pPr>
+            <a:r>
+              <a:rPr lang="en-US" sz="1050" b="1" dirty="0">
+                <a:solidFill>
+                  <a:srgbClr val="1F3D20"/>
+                </a:solidFill>
+                <a:latin typeface="Meiryo UI" pitchFamily="34" charset="0"/>
+                <a:ea typeface="Meiryo UI" pitchFamily="34" charset="-122"/>
+                <a:cs typeface="Meiryo UI" pitchFamily="34" charset="-120"/>
+              </a:rPr>
+              <a:t>回答2: 成果の中心は新工場へ持ち越される</a:t>
+            </a:r>
+            <a:endParaRPr lang="en-US" sz="1050" dirty="0"/>
+          </a:p>
+        </p:txBody>
+      </p:sp>
+      <p:sp>
+        <p:nvSpPr>
+          <p:cNvPr id="11" name="Text 9"/>
+          <p:cNvSpPr/>
+          <p:nvPr/>
+        </p:nvSpPr>
+        <p:spPr>
+          <a:xfrm>
+            <a:off x="4311396" y="1664208"/>
+            <a:ext cx="3566160" cy="1499616"/>
+          </a:xfrm>
+          <a:prstGeom prst="rect">
+            <a:avLst/>
+          </a:prstGeom>
+          <a:noFill/>
+          <a:ln/>
+        </p:spPr>
+        <p:txBody>
+          <a:bodyPr wrap="square" lIns="0" tIns="0" rIns="0" bIns="0" rtlCol="0" anchor="t"/>
+          <a:lstStyle/>
+          <a:p>
+            <a:pPr indent="0" marL="0">
+              <a:lnSpc>
+                <a:spcPct val="110000"/>
+              </a:lnSpc>
+              <a:buNone/>
+            </a:pPr>
+            <a:r>
+              <a:rPr lang="en-US" sz="820" dirty="0">
+                <a:solidFill>
+                  <a:srgbClr val="2B2B2B"/>
+                </a:solidFill>
+                <a:latin typeface="Meiryo UI" pitchFamily="34" charset="0"/>
+                <a:ea typeface="Meiryo UI" pitchFamily="34" charset="-122"/>
+                <a:cs typeface="Meiryo UI" pitchFamily="34" charset="-120"/>
+              </a:rPr>
+              <a:t>2040年検討の結論: 2050年代に自動化技術はコモディティ化し、恒久のコアは</a:t>
+            </a:r>
+            <a:pPr indent="0" marL="0">
+              <a:lnSpc>
+                <a:spcPct val="110000"/>
+              </a:lnSpc>
+              <a:buNone/>
+            </a:pPr>
+            <a:r>
+              <a:rPr lang="en-US" sz="820" b="1" dirty="0">
+                <a:solidFill>
+                  <a:srgbClr val="2B2B2B"/>
+                </a:solidFill>
+                <a:latin typeface="Meiryo UI" pitchFamily="34" charset="0"/>
+                <a:ea typeface="Meiryo UI" pitchFamily="34" charset="-122"/>
+                <a:cs typeface="Meiryo UI" pitchFamily="34" charset="-120"/>
+              </a:rPr>
+              <a:t>「量産成立の知見」と「どこで作ってもライオン品質を再現するロジック」</a:t>
+            </a:r>
+            <a:pPr indent="0" marL="0">
+              <a:lnSpc>
+                <a:spcPct val="110000"/>
+              </a:lnSpc>
+              <a:buNone/>
+            </a:pPr>
+            <a:r>
+              <a:rPr lang="en-US" sz="820" dirty="0">
+                <a:solidFill>
+                  <a:srgbClr val="2B2B2B"/>
+                </a:solidFill>
+                <a:latin typeface="Meiryo UI" pitchFamily="34" charset="0"/>
+                <a:ea typeface="Meiryo UI" pitchFamily="34" charset="-122"/>
+                <a:cs typeface="Meiryo UI" pitchFamily="34" charset="-120"/>
+              </a:rPr>
+              <a:t>に移る。</a:t>
+            </a:r>
+            <a:endParaRPr lang="en-US" sz="820" dirty="0"/>
+          </a:p>
+          <a:p>
+            <a:pPr indent="0" marL="0">
+              <a:lnSpc>
+                <a:spcPct val="110000"/>
+              </a:lnSpc>
+              <a:buNone/>
+            </a:pPr>
+            <a:r>
+              <a:rPr lang="en-US" sz="820" dirty="0">
+                <a:solidFill>
+                  <a:srgbClr val="2B2B2B"/>
+                </a:solidFill>
+                <a:latin typeface="Meiryo UI" pitchFamily="34" charset="0"/>
+                <a:ea typeface="Meiryo UI" pitchFamily="34" charset="-122"/>
+                <a:cs typeface="Meiryo UI" pitchFamily="34" charset="-120"/>
+              </a:rPr>
+              <a:t>本プログラムの中心成果物(基準台帳・検出力データ・品質再現ロジック)は</a:t>
+            </a:r>
+            <a:endParaRPr lang="en-US" sz="820" dirty="0"/>
+          </a:p>
+          <a:p>
+            <a:pPr indent="0" marL="0">
+              <a:lnSpc>
+                <a:spcPct val="110000"/>
+              </a:lnSpc>
+              <a:buNone/>
+            </a:pPr>
+            <a:r>
+              <a:rPr lang="en-US" sz="820" b="1" dirty="0">
+                <a:solidFill>
+                  <a:srgbClr val="2C5F2D"/>
+                </a:solidFill>
+                <a:latin typeface="Meiryo UI" pitchFamily="34" charset="0"/>
+                <a:ea typeface="Meiryo UI" pitchFamily="34" charset="-122"/>
+                <a:cs typeface="Meiryo UI" pitchFamily="34" charset="-120"/>
+              </a:rPr>
+              <a:t>まさにその無形資産</a:t>
+            </a:r>
+            <a:pPr indent="0" marL="0">
+              <a:lnSpc>
+                <a:spcPct val="110000"/>
+              </a:lnSpc>
+              <a:buNone/>
+            </a:pPr>
+            <a:r>
+              <a:rPr lang="en-US" sz="820" dirty="0">
+                <a:solidFill>
+                  <a:srgbClr val="2B2B2B"/>
+                </a:solidFill>
+                <a:latin typeface="Meiryo UI" pitchFamily="34" charset="0"/>
+                <a:ea typeface="Meiryo UI" pitchFamily="34" charset="-122"/>
+                <a:cs typeface="Meiryo UI" pitchFamily="34" charset="-120"/>
+              </a:rPr>
+              <a:t>であり、新工場・OEM認定・受託生産の共通基盤になる。設備は可搬型を優先し移設可能。</a:t>
+            </a:r>
+            <a:endParaRPr lang="en-US" sz="820" dirty="0"/>
+          </a:p>
+        </p:txBody>
+      </p:sp>
+      <p:sp>
+        <p:nvSpPr>
+          <p:cNvPr id="12" name="Shape 10"/>
+          <p:cNvSpPr/>
+          <p:nvPr/>
+        </p:nvSpPr>
+        <p:spPr>
+          <a:xfrm>
+            <a:off x="8129016" y="1316736"/>
+            <a:ext cx="3785616" cy="1920240"/>
+          </a:xfrm>
+          <a:prstGeom prst="roundRect">
+            <a:avLst>
+              <a:gd name="adj" fmla="val 2857"/>
+            </a:avLst>
+          </a:prstGeom>
+          <a:solidFill>
+            <a:srgbClr val="F3F8F1"/>
+          </a:solidFill>
+          <a:ln w="12700">
+            <a:solidFill>
+              <a:srgbClr val="C9DCC4"/>
+            </a:solidFill>
+            <a:prstDash val="solid"/>
+          </a:ln>
+        </p:spPr>
+      </p:sp>
+      <p:sp>
+        <p:nvSpPr>
+          <p:cNvPr id="13" name="Text 11"/>
+          <p:cNvSpPr/>
+          <p:nvPr/>
+        </p:nvSpPr>
+        <p:spPr>
+          <a:xfrm>
+            <a:off x="8238744" y="1389888"/>
+            <a:ext cx="3566160" cy="237744"/>
+          </a:xfrm>
+          <a:prstGeom prst="rect">
+            <a:avLst/>
+          </a:prstGeom>
+          <a:noFill/>
+          <a:ln/>
+        </p:spPr>
+        <p:txBody>
+          <a:bodyPr wrap="square" lIns="0" tIns="0" rIns="0" bIns="0" rtlCol="0" anchor="ctr"/>
+          <a:lstStyle/>
+          <a:p>
+            <a:pPr indent="0" marL="0">
+              <a:buNone/>
+            </a:pPr>
+            <a:r>
+              <a:rPr lang="en-US" sz="1050" b="1" dirty="0">
+                <a:solidFill>
+                  <a:srgbClr val="1F3D20"/>
+                </a:solidFill>
+                <a:latin typeface="Meiryo UI" pitchFamily="34" charset="0"/>
+                <a:ea typeface="Meiryo UI" pitchFamily="34" charset="-122"/>
+                <a:cs typeface="Meiryo UI" pitchFamily="34" charset="-120"/>
+              </a:rPr>
+              <a:t>回答3: PoCが2040年判断のトリガーを生む</a:t>
+            </a:r>
+            <a:endParaRPr lang="en-US" sz="1050" dirty="0"/>
+          </a:p>
+        </p:txBody>
+      </p:sp>
+      <p:sp>
+        <p:nvSpPr>
+          <p:cNvPr id="14" name="Text 12"/>
+          <p:cNvSpPr/>
+          <p:nvPr/>
+        </p:nvSpPr>
+        <p:spPr>
+          <a:xfrm>
+            <a:off x="8238744" y="1664208"/>
+            <a:ext cx="3566160" cy="1499616"/>
+          </a:xfrm>
+          <a:prstGeom prst="rect">
+            <a:avLst/>
+          </a:prstGeom>
+          <a:noFill/>
+          <a:ln/>
+        </p:spPr>
+        <p:txBody>
+          <a:bodyPr wrap="square" lIns="0" tIns="0" rIns="0" bIns="0" rtlCol="0" anchor="t"/>
+          <a:lstStyle/>
+          <a:p>
+            <a:pPr indent="0" marL="0">
+              <a:lnSpc>
+                <a:spcPct val="110000"/>
+              </a:lnSpc>
+              <a:buNone/>
+            </a:pPr>
+            <a:r>
+              <a:rPr lang="en-US" sz="820" dirty="0">
+                <a:solidFill>
+                  <a:srgbClr val="2B2B2B"/>
+                </a:solidFill>
+                <a:latin typeface="Meiryo UI" pitchFamily="34" charset="0"/>
+                <a:ea typeface="Meiryo UI" pitchFamily="34" charset="-122"/>
+                <a:cs typeface="Meiryo UI" pitchFamily="34" charset="-120"/>
+              </a:rPr>
+              <a:t>2040年検討の分岐条件: </a:t>
+            </a:r>
+            <a:pPr indent="0" marL="0">
+              <a:lnSpc>
+                <a:spcPct val="110000"/>
+              </a:lnSpc>
+              <a:buNone/>
+            </a:pPr>
+            <a:r>
+              <a:rPr lang="en-US" sz="820" b="1" dirty="0">
+                <a:solidFill>
+                  <a:srgbClr val="2B2B2B"/>
+                </a:solidFill>
+                <a:latin typeface="Meiryo UI" pitchFamily="34" charset="0"/>
+                <a:ea typeface="Meiryo UI" pitchFamily="34" charset="-122"/>
+                <a:cs typeface="Meiryo UI" pitchFamily="34" charset="-120"/>
+              </a:rPr>
+              <a:t>「PoC(27〜29年)で労務削減31%以上なら国内集約が経済的に優位」</a:t>
+            </a:r>
+            <a:pPr indent="0" marL="0">
+              <a:lnSpc>
+                <a:spcPct val="110000"/>
+              </a:lnSpc>
+              <a:buNone/>
+            </a:pPr>
+            <a:r>
+              <a:rPr lang="en-US" sz="820" dirty="0">
+                <a:solidFill>
+                  <a:srgbClr val="2B2B2B"/>
+                </a:solidFill>
+                <a:latin typeface="Meiryo UI" pitchFamily="34" charset="0"/>
+                <a:ea typeface="Meiryo UI" pitchFamily="34" charset="-122"/>
+                <a:cs typeface="Meiryo UI" pitchFamily="34" charset="-120"/>
+              </a:rPr>
+              <a:t>(自動化80%=20.6円/本 vs ベトナム輸出24.6円/本)。</a:t>
+            </a:r>
+            <a:endParaRPr lang="en-US" sz="820" dirty="0"/>
+          </a:p>
+          <a:p>
+            <a:pPr indent="0" marL="0">
+              <a:lnSpc>
+                <a:spcPct val="110000"/>
+              </a:lnSpc>
+              <a:buNone/>
+            </a:pPr>
+            <a:r>
+              <a:rPr lang="en-US" sz="820" dirty="0">
+                <a:solidFill>
+                  <a:srgbClr val="2B2B2B"/>
+                </a:solidFill>
+                <a:latin typeface="Meiryo UI" pitchFamily="34" charset="0"/>
+                <a:ea typeface="Meiryo UI" pitchFamily="34" charset="-122"/>
+                <a:cs typeface="Meiryo UI" pitchFamily="34" charset="-120"/>
+              </a:rPr>
+              <a:t>本プログラムの半減(115→57名)=</a:t>
+            </a:r>
+            <a:endParaRPr lang="en-US" sz="820" dirty="0"/>
+          </a:p>
+          <a:p>
+            <a:pPr indent="0" marL="0">
+              <a:lnSpc>
+                <a:spcPct val="110000"/>
+              </a:lnSpc>
+              <a:buNone/>
+            </a:pPr>
+            <a:r>
+              <a:rPr lang="en-US" sz="820" b="1" dirty="0">
+                <a:solidFill>
+                  <a:srgbClr val="2C5F2D"/>
+                </a:solidFill>
+                <a:latin typeface="Meiryo UI" pitchFamily="34" charset="0"/>
+                <a:ea typeface="Meiryo UI" pitchFamily="34" charset="-122"/>
+                <a:cs typeface="Meiryo UI" pitchFamily="34" charset="-120"/>
+              </a:rPr>
+              <a:t>労務削減50%はこの閾値を大きく超える実証</a:t>
+            </a:r>
+            <a:pPr indent="0" marL="0">
+              <a:lnSpc>
+                <a:spcPct val="110000"/>
+              </a:lnSpc>
+              <a:buNone/>
+            </a:pPr>
+            <a:r>
+              <a:rPr lang="en-US" sz="820" dirty="0">
+                <a:solidFill>
+                  <a:srgbClr val="2B2B2B"/>
+                </a:solidFill>
+                <a:latin typeface="Meiryo UI" pitchFamily="34" charset="0"/>
+                <a:ea typeface="Meiryo UI" pitchFamily="34" charset="-122"/>
+                <a:cs typeface="Meiryo UI" pitchFamily="34" charset="-120"/>
+              </a:rPr>
+              <a:t>になる。やらなければ、2040年の建替え判断に必要なエビデンス自体が存在しない。</a:t>
+            </a:r>
+            <a:endParaRPr lang="en-US" sz="820" dirty="0"/>
+          </a:p>
+        </p:txBody>
+      </p:sp>
+      <p:sp>
+        <p:nvSpPr>
+          <p:cNvPr id="15" name="Text 13"/>
+          <p:cNvSpPr/>
+          <p:nvPr/>
+        </p:nvSpPr>
+        <p:spPr>
+          <a:xfrm>
+            <a:off x="274320" y="3401568"/>
+            <a:ext cx="11640312" cy="219456"/>
+          </a:xfrm>
+          <a:prstGeom prst="rect">
+            <a:avLst/>
+          </a:prstGeom>
+          <a:noFill/>
+          <a:ln/>
+        </p:spPr>
+        <p:txBody>
+          <a:bodyPr wrap="square" lIns="0" tIns="0" rIns="0" bIns="0" rtlCol="0" anchor="ctr"/>
+          <a:lstStyle/>
+          <a:p>
+            <a:pPr indent="0" marL="0">
+              <a:buNone/>
+            </a:pPr>
+            <a:r>
+              <a:rPr lang="en-US" sz="1000" b="1" dirty="0">
+                <a:solidFill>
+                  <a:srgbClr val="1F3D20"/>
+                </a:solidFill>
+                <a:latin typeface="Meiryo UI" pitchFamily="34" charset="0"/>
+                <a:ea typeface="Meiryo UI" pitchFamily="34" charset="-122"/>
+                <a:cs typeface="Meiryo UI" pitchFamily="34" charset="-120"/>
+              </a:rPr>
+              <a:t>本プログラムの成果物を「3色+有効期限」で仕分ける(2040年検討のフレームに従う)</a:t>
+            </a:r>
+            <a:endParaRPr lang="en-US" sz="1000" dirty="0"/>
+          </a:p>
+        </p:txBody>
+      </p:sp>
+      <p:graphicFrame>
+        <p:nvGraphicFramePr>
+          <p:cNvPr id="5" name="Table 0"/>
+          <p:cNvGraphicFramePr>
+            <a:graphicFrameLocks noGrp="1"/>
+          </p:cNvGraphicFramePr>
+          <p:nvPr>
+            <p:extLst>
+              <p:ext uri="{D42A27DB-BD31-4B8C-83A1-F6EECF244321}">
+                <p14:modId xmlns:p14="http://schemas.microsoft.com/office/powerpoint/2010/main" val="1579011935"/>
+              </p:ext>
+            </p:extLst>
+          </p:nvPr>
+        </p:nvGraphicFramePr>
+        <p:xfrm>
+          <a:off x="274320" y="3657600"/>
+          <a:ext cx="11640312" cy="914400"/>
+        </p:xfrm>
+        <a:graphic>
+          <a:graphicData uri="http://schemas.openxmlformats.org/drawingml/2006/table">
+            <a:tbl>
+              <a:tblPr/>
+              <a:tblGrid>
+                <a:gridCol w="1737360"/>
+                <a:gridCol w="4937760"/>
+                <a:gridCol w="4965192"/>
+              </a:tblGrid>
+              <a:tr h="219456">
+                <a:tc>
+                  <a:txBody>
+                    <a:bodyPr/>
+                    <a:lstStyle/>
+                    <a:p>
+                      <a:pPr algn="ctr" indent="0" marL="0">
+                        <a:buNone/>
+                      </a:pPr>
+                      <a:r>
+                        <a:rPr lang="en-US" sz="800" b="1" dirty="0">
+                          <a:solidFill>
+                            <a:srgbClr val="FFFFFF"/>
+                          </a:solidFill>
+                          <a:latin typeface="Meiryo UI" pitchFamily="34" charset="0"/>
+                          <a:ea typeface="Meiryo UI" pitchFamily="34" charset="-122"/>
+                          <a:cs typeface="Meiryo UI" pitchFamily="34" charset="-120"/>
+                        </a:rPr>
+                        <a:t>仕分け</a:t>
+                      </a:r>
+                      <a:endParaRPr lang="en-US" sz="800" dirty="0">
+                        <a:latin typeface="Meiryo UI" charset="0"/>
+                        <a:ea typeface="Meiryo UI" charset="0"/>
+                        <a:cs typeface="Meiryo UI" charset="0"/>
+                      </a:endParaRPr>
+                    </a:p>
+                  </a:txBody>
+                  <a:tcPr marL="45720" marR="45720" marT="45720" marB="45720" anchor="ctr">
+                    <a:lnL w="6350" cap="flat" cmpd="sng" algn="ctr">
+                      <a:solidFill>
+                        <a:srgbClr val="D3DED0"/>
+                      </a:solidFill>
+                      <a:prstDash val="solid"/>
+                      <a:round/>
+                      <a:headEnd type="none" w="med" len="med"/>
+                      <a:tailEnd type="none" w="med" len="med"/>
+                    </a:lnL>
+                    <a:lnR w="6350" cap="flat" cmpd="sng" algn="ctr">
+                      <a:solidFill>
+                        <a:srgbClr val="D3DED0"/>
+                      </a:solidFill>
+                      <a:prstDash val="solid"/>
+                      <a:round/>
+                      <a:headEnd type="none" w="med" len="med"/>
+                      <a:tailEnd type="none" w="med" len="med"/>
+                    </a:lnR>
+                    <a:lnT w="6350" cap="flat" cmpd="sng" algn="ctr">
+                      <a:solidFill>
+                        <a:srgbClr val="D3DED0"/>
+                      </a:solidFill>
+                      <a:prstDash val="solid"/>
+                      <a:round/>
+                      <a:headEnd type="none" w="med" len="med"/>
+                      <a:tailEnd type="none" w="med" len="med"/>
+                    </a:lnT>
+                    <a:lnB w="6350" cap="flat" cmpd="sng" algn="ctr">
+                      <a:solidFill>
+                        <a:srgbClr val="D3DED0"/>
+                      </a:solidFill>
+                      <a:prstDash val="solid"/>
+                      <a:round/>
+                      <a:headEnd type="none" w="med" len="med"/>
+                      <a:tailEnd type="none" w="med" len="med"/>
+                    </a:lnB>
+                    <a:solidFill>
+                      <a:srgbClr val="2C5F2D"/>
+                    </a:solidFill>
+                  </a:tcPr>
+                </a:tc>
+                <a:tc>
+                  <a:txBody>
+                    <a:bodyPr/>
+                    <a:lstStyle/>
+                    <a:p>
+                      <a:pPr algn="ctr" indent="0" marL="0">
+                        <a:buNone/>
+                      </a:pPr>
+                      <a:r>
+                        <a:rPr lang="en-US" sz="800" b="1" dirty="0">
+                          <a:solidFill>
+                            <a:srgbClr val="FFFFFF"/>
+                          </a:solidFill>
+                          <a:latin typeface="Meiryo UI" pitchFamily="34" charset="0"/>
+                          <a:ea typeface="Meiryo UI" pitchFamily="34" charset="-122"/>
+                          <a:cs typeface="Meiryo UI" pitchFamily="34" charset="-120"/>
+                        </a:rPr>
+                        <a:t>本プログラムの成果物</a:t>
+                      </a:r>
+                      <a:endParaRPr lang="en-US" sz="800" dirty="0">
+                        <a:latin typeface="Meiryo UI" charset="0"/>
+                        <a:ea typeface="Meiryo UI" charset="0"/>
+                        <a:cs typeface="Meiryo UI" charset="0"/>
+                      </a:endParaRPr>
+                    </a:p>
+                  </a:txBody>
+                  <a:tcPr marL="45720" marR="45720" marT="45720" marB="45720" anchor="ctr">
+                    <a:lnL w="6350" cap="flat" cmpd="sng" algn="ctr">
+                      <a:solidFill>
+                        <a:srgbClr val="D3DED0"/>
+                      </a:solidFill>
+                      <a:prstDash val="solid"/>
+                      <a:round/>
+                      <a:headEnd type="none" w="med" len="med"/>
+                      <a:tailEnd type="none" w="med" len="med"/>
+                    </a:lnL>
+                    <a:lnR w="6350" cap="flat" cmpd="sng" algn="ctr">
+                      <a:solidFill>
+                        <a:srgbClr val="D3DED0"/>
+                      </a:solidFill>
+                      <a:prstDash val="solid"/>
+                      <a:round/>
+                      <a:headEnd type="none" w="med" len="med"/>
+                      <a:tailEnd type="none" w="med" len="med"/>
+                    </a:lnR>
+                    <a:lnT w="6350" cap="flat" cmpd="sng" algn="ctr">
+                      <a:solidFill>
+                        <a:srgbClr val="D3DED0"/>
+                      </a:solidFill>
+                      <a:prstDash val="solid"/>
+                      <a:round/>
+                      <a:headEnd type="none" w="med" len="med"/>
+                      <a:tailEnd type="none" w="med" len="med"/>
+                    </a:lnT>
+                    <a:lnB w="6350" cap="flat" cmpd="sng" algn="ctr">
+                      <a:solidFill>
+                        <a:srgbClr val="D3DED0"/>
+                      </a:solidFill>
+                      <a:prstDash val="solid"/>
+                      <a:round/>
+                      <a:headEnd type="none" w="med" len="med"/>
+                      <a:tailEnd type="none" w="med" len="med"/>
+                    </a:lnB>
+                    <a:solidFill>
+                      <a:srgbClr val="2C5F2D"/>
+                    </a:solidFill>
+                  </a:tcPr>
+                </a:tc>
+                <a:tc>
+                  <a:txBody>
+                    <a:bodyPr/>
+                    <a:lstStyle/>
+                    <a:p>
+                      <a:pPr algn="ctr" indent="0" marL="0">
+                        <a:buNone/>
+                      </a:pPr>
+                      <a:r>
+                        <a:rPr lang="en-US" sz="800" b="1" dirty="0">
+                          <a:solidFill>
+                            <a:srgbClr val="FFFFFF"/>
+                          </a:solidFill>
+                          <a:latin typeface="Meiryo UI" pitchFamily="34" charset="0"/>
+                          <a:ea typeface="Meiryo UI" pitchFamily="34" charset="-122"/>
+                          <a:cs typeface="Meiryo UI" pitchFamily="34" charset="-120"/>
+                        </a:rPr>
+                        <a:t>2040年以降の使い途</a:t>
+                      </a:r>
+                      <a:endParaRPr lang="en-US" sz="800" dirty="0">
+                        <a:latin typeface="Meiryo UI" charset="0"/>
+                        <a:ea typeface="Meiryo UI" charset="0"/>
+                        <a:cs typeface="Meiryo UI" charset="0"/>
+                      </a:endParaRPr>
+                    </a:p>
+                  </a:txBody>
+                  <a:tcPr marL="45720" marR="45720" marT="45720" marB="45720" anchor="ctr">
+                    <a:lnL w="6350" cap="flat" cmpd="sng" algn="ctr">
+                      <a:solidFill>
+                        <a:srgbClr val="D3DED0"/>
+                      </a:solidFill>
+                      <a:prstDash val="solid"/>
+                      <a:round/>
+                      <a:headEnd type="none" w="med" len="med"/>
+                      <a:tailEnd type="none" w="med" len="med"/>
+                    </a:lnL>
+                    <a:lnR w="6350" cap="flat" cmpd="sng" algn="ctr">
+                      <a:solidFill>
+                        <a:srgbClr val="D3DED0"/>
+                      </a:solidFill>
+                      <a:prstDash val="solid"/>
+                      <a:round/>
+                      <a:headEnd type="none" w="med" len="med"/>
+                      <a:tailEnd type="none" w="med" len="med"/>
+                    </a:lnR>
+                    <a:lnT w="6350" cap="flat" cmpd="sng" algn="ctr">
+                      <a:solidFill>
+                        <a:srgbClr val="D3DED0"/>
+                      </a:solidFill>
+                      <a:prstDash val="solid"/>
+                      <a:round/>
+                      <a:headEnd type="none" w="med" len="med"/>
+                      <a:tailEnd type="none" w="med" len="med"/>
+                    </a:lnT>
+                    <a:lnB w="6350" cap="flat" cmpd="sng" algn="ctr">
+                      <a:solidFill>
+                        <a:srgbClr val="D3DED0"/>
+                      </a:solidFill>
+                      <a:prstDash val="solid"/>
+                      <a:round/>
+                      <a:headEnd type="none" w="med" len="med"/>
+                      <a:tailEnd type="none" w="med" len="med"/>
+                    </a:lnB>
+                    <a:solidFill>
+                      <a:srgbClr val="2C5F2D"/>
+                    </a:solidFill>
+                  </a:tcPr>
+                </a:tc>
+              </a:tr>
+              <a:tr h="475488">
+                <a:tc>
+                  <a:txBody>
+                    <a:bodyPr/>
+                    <a:lstStyle/>
+                    <a:p>
+                      <a:pPr indent="0" marL="0">
+                        <a:buNone/>
+                      </a:pPr>
+                      <a:r>
+                        <a:rPr lang="en-US" sz="780" b="1" dirty="0">
+                          <a:solidFill>
+                            <a:srgbClr val="2B2B2B"/>
+                          </a:solidFill>
+                          <a:latin typeface="Meiryo UI" pitchFamily="34" charset="0"/>
+                          <a:ea typeface="Meiryo UI" pitchFamily="34" charset="-122"/>
+                          <a:cs typeface="Meiryo UI" pitchFamily="34" charset="-120"/>
+                        </a:rPr>
+                        <a:t>① 恒久自社(無期限)</a:t>
+                      </a:r>
+                      <a:endParaRPr lang="en-US" sz="780" dirty="0">
+                        <a:latin typeface="Meiryo UI" charset="0"/>
+                        <a:ea typeface="Meiryo UI" charset="0"/>
+                        <a:cs typeface="Meiryo UI" charset="0"/>
+                      </a:endParaRPr>
+                    </a:p>
+                  </a:txBody>
+                  <a:tcPr marL="45720" marR="45720" marT="45720" marB="45720" anchor="ctr">
+                    <a:lnL w="6350" cap="flat" cmpd="sng" algn="ctr">
+                      <a:solidFill>
+                        <a:srgbClr val="D3DED0"/>
+                      </a:solidFill>
+                      <a:prstDash val="solid"/>
+                      <a:round/>
+                      <a:headEnd type="none" w="med" len="med"/>
+                      <a:tailEnd type="none" w="med" len="med"/>
+                    </a:lnL>
+                    <a:lnR w="6350" cap="flat" cmpd="sng" algn="ctr">
+                      <a:solidFill>
+                        <a:srgbClr val="D3DED0"/>
+                      </a:solidFill>
+                      <a:prstDash val="solid"/>
+                      <a:round/>
+                      <a:headEnd type="none" w="med" len="med"/>
+                      <a:tailEnd type="none" w="med" len="med"/>
+                    </a:lnR>
+                    <a:lnT w="6350" cap="flat" cmpd="sng" algn="ctr">
+                      <a:solidFill>
+                        <a:srgbClr val="D3DED0"/>
+                      </a:solidFill>
+                      <a:prstDash val="solid"/>
+                      <a:round/>
+                      <a:headEnd type="none" w="med" len="med"/>
+                      <a:tailEnd type="none" w="med" len="med"/>
+                    </a:lnT>
+                    <a:lnB w="6350" cap="flat" cmpd="sng" algn="ctr">
+                      <a:solidFill>
+                        <a:srgbClr val="D3DED0"/>
+                      </a:solidFill>
+                      <a:prstDash val="solid"/>
+                      <a:round/>
+                      <a:headEnd type="none" w="med" len="med"/>
+                      <a:tailEnd type="none" w="med" len="med"/>
+                    </a:lnB>
+                    <a:solidFill>
+                      <a:srgbClr val="DFEBDB"/>
+                    </a:solidFill>
+                  </a:tcPr>
+                </a:tc>
+                <a:tc>
+                  <a:txBody>
+                    <a:bodyPr/>
+                    <a:lstStyle/>
+                    <a:p>
+                      <a:pPr indent="0" marL="0">
+                        <a:buNone/>
+                      </a:pPr>
+                      <a:r>
+                        <a:rPr lang="en-US" sz="780" dirty="0">
+                          <a:solidFill>
+                            <a:srgbClr val="2B2B2B"/>
+                          </a:solidFill>
+                          <a:latin typeface="Meiryo UI" pitchFamily="34" charset="0"/>
+                          <a:ea typeface="Meiryo UI" pitchFamily="34" charset="-122"/>
+                          <a:cs typeface="Meiryo UI" pitchFamily="34" charset="-120"/>
+                        </a:rPr>
+                        <a:t>基準台帳(作業×基準の対応)・ゼロベース化した基準・検査の検出力データ・品質再現ロジック・人員動態/稼働データ基盤</a:t>
+                      </a:r>
+                      <a:endParaRPr lang="en-US" sz="780" dirty="0">
+                        <a:latin typeface="Meiryo UI" charset="0"/>
+                        <a:ea typeface="Meiryo UI" charset="0"/>
+                        <a:cs typeface="Meiryo UI" charset="0"/>
+                      </a:endParaRPr>
+                    </a:p>
+                  </a:txBody>
+                  <a:tcPr marL="45720" marR="45720" marT="45720" marB="45720" anchor="ctr">
+                    <a:lnL w="6350" cap="flat" cmpd="sng" algn="ctr">
+                      <a:solidFill>
+                        <a:srgbClr val="D3DED0"/>
+                      </a:solidFill>
+                      <a:prstDash val="solid"/>
+                      <a:round/>
+                      <a:headEnd type="none" w="med" len="med"/>
+                      <a:tailEnd type="none" w="med" len="med"/>
+                    </a:lnL>
+                    <a:lnR w="6350" cap="flat" cmpd="sng" algn="ctr">
+                      <a:solidFill>
+                        <a:srgbClr val="D3DED0"/>
+                      </a:solidFill>
+                      <a:prstDash val="solid"/>
+                      <a:round/>
+                      <a:headEnd type="none" w="med" len="med"/>
+                      <a:tailEnd type="none" w="med" len="med"/>
+                    </a:lnR>
+                    <a:lnT w="6350" cap="flat" cmpd="sng" algn="ctr">
+                      <a:solidFill>
+                        <a:srgbClr val="D3DED0"/>
+                      </a:solidFill>
+                      <a:prstDash val="solid"/>
+                      <a:round/>
+                      <a:headEnd type="none" w="med" len="med"/>
+                      <a:tailEnd type="none" w="med" len="med"/>
+                    </a:lnT>
+                    <a:lnB w="6350" cap="flat" cmpd="sng" algn="ctr">
+                      <a:solidFill>
+                        <a:srgbClr val="D3DED0"/>
+                      </a:solidFill>
+                      <a:prstDash val="solid"/>
+                      <a:round/>
+                      <a:headEnd type="none" w="med" len="med"/>
+                      <a:tailEnd type="none" w="med" len="med"/>
+                    </a:lnB>
+                  </a:tcPr>
+                </a:tc>
+                <a:tc>
+                  <a:txBody>
+                    <a:bodyPr/>
+                    <a:lstStyle/>
+                    <a:p>
+                      <a:pPr indent="0" marL="0">
+                        <a:buNone/>
+                      </a:pPr>
+                      <a:r>
+                        <a:rPr lang="en-US" sz="780" b="1" dirty="0">
+                          <a:solidFill>
+                            <a:srgbClr val="2B2B2B"/>
+                          </a:solidFill>
+                          <a:latin typeface="Meiryo UI" pitchFamily="34" charset="0"/>
+                          <a:ea typeface="Meiryo UI" pitchFamily="34" charset="-122"/>
+                          <a:cs typeface="Meiryo UI" pitchFamily="34" charset="-120"/>
+                        </a:rPr>
+                        <a:t>新工場の要求仕様の土台。OEM品質同等性判断・認定工場網・製造OS(2045年〜のKPI)の基盤</a:t>
+                      </a:r>
+                      <a:endParaRPr lang="en-US" sz="780" dirty="0">
+                        <a:latin typeface="Meiryo UI" charset="0"/>
+                        <a:ea typeface="Meiryo UI" charset="0"/>
+                        <a:cs typeface="Meiryo UI" charset="0"/>
+                      </a:endParaRPr>
+                    </a:p>
+                  </a:txBody>
+                  <a:tcPr marL="45720" marR="45720" marT="45720" marB="45720" anchor="ctr">
+                    <a:lnL w="6350" cap="flat" cmpd="sng" algn="ctr">
+                      <a:solidFill>
+                        <a:srgbClr val="D3DED0"/>
+                      </a:solidFill>
+                      <a:prstDash val="solid"/>
+                      <a:round/>
+                      <a:headEnd type="none" w="med" len="med"/>
+                      <a:tailEnd type="none" w="med" len="med"/>
+                    </a:lnL>
+                    <a:lnR w="6350" cap="flat" cmpd="sng" algn="ctr">
+                      <a:solidFill>
+                        <a:srgbClr val="D3DED0"/>
+                      </a:solidFill>
+                      <a:prstDash val="solid"/>
+                      <a:round/>
+                      <a:headEnd type="none" w="med" len="med"/>
+                      <a:tailEnd type="none" w="med" len="med"/>
+                    </a:lnR>
+                    <a:lnT w="6350" cap="flat" cmpd="sng" algn="ctr">
+                      <a:solidFill>
+                        <a:srgbClr val="D3DED0"/>
+                      </a:solidFill>
+                      <a:prstDash val="solid"/>
+                      <a:round/>
+                      <a:headEnd type="none" w="med" len="med"/>
+                      <a:tailEnd type="none" w="med" len="med"/>
+                    </a:lnT>
+                    <a:lnB w="6350" cap="flat" cmpd="sng" algn="ctr">
+                      <a:solidFill>
+                        <a:srgbClr val="D3DED0"/>
+                      </a:solidFill>
+                      <a:prstDash val="solid"/>
+                      <a:round/>
+                      <a:headEnd type="none" w="med" len="med"/>
+                      <a:tailEnd type="none" w="med" len="med"/>
+                    </a:lnB>
+                  </a:tcPr>
+                </a:tc>
+              </a:tr>
+              <a:tr h="384048">
+                <a:tc>
+                  <a:txBody>
+                    <a:bodyPr/>
+                    <a:lstStyle/>
+                    <a:p>
+                      <a:pPr indent="0" marL="0">
+                        <a:buNone/>
+                      </a:pPr>
+                      <a:r>
+                        <a:rPr lang="en-US" sz="780" b="1" dirty="0">
+                          <a:solidFill>
+                            <a:srgbClr val="2B2B2B"/>
+                          </a:solidFill>
+                          <a:latin typeface="Meiryo UI" pitchFamily="34" charset="0"/>
+                          <a:ea typeface="Meiryo UI" pitchFamily="34" charset="-122"/>
+                          <a:cs typeface="Meiryo UI" pitchFamily="34" charset="-120"/>
+                        </a:rPr>
+                        <a:t>② 時限自社(〜2040)</a:t>
+                      </a:r>
+                      <a:endParaRPr lang="en-US" sz="780" dirty="0">
+                        <a:latin typeface="Meiryo UI" charset="0"/>
+                        <a:ea typeface="Meiryo UI" charset="0"/>
+                        <a:cs typeface="Meiryo UI" charset="0"/>
+                      </a:endParaRPr>
+                    </a:p>
+                  </a:txBody>
+                  <a:tcPr marL="45720" marR="45720" marT="45720" marB="45720" anchor="ctr">
+                    <a:lnL w="6350" cap="flat" cmpd="sng" algn="ctr">
+                      <a:solidFill>
+                        <a:srgbClr val="D3DED0"/>
+                      </a:solidFill>
+                      <a:prstDash val="solid"/>
+                      <a:round/>
+                      <a:headEnd type="none" w="med" len="med"/>
+                      <a:tailEnd type="none" w="med" len="med"/>
+                    </a:lnL>
+                    <a:lnR w="6350" cap="flat" cmpd="sng" algn="ctr">
+                      <a:solidFill>
+                        <a:srgbClr val="D3DED0"/>
+                      </a:solidFill>
+                      <a:prstDash val="solid"/>
+                      <a:round/>
+                      <a:headEnd type="none" w="med" len="med"/>
+                      <a:tailEnd type="none" w="med" len="med"/>
+                    </a:lnR>
+                    <a:lnT w="6350" cap="flat" cmpd="sng" algn="ctr">
+                      <a:solidFill>
+                        <a:srgbClr val="D3DED0"/>
+                      </a:solidFill>
+                      <a:prstDash val="solid"/>
+                      <a:round/>
+                      <a:headEnd type="none" w="med" len="med"/>
+                      <a:tailEnd type="none" w="med" len="med"/>
+                    </a:lnT>
+                    <a:lnB w="6350" cap="flat" cmpd="sng" algn="ctr">
+                      <a:solidFill>
+                        <a:srgbClr val="D3DED0"/>
+                      </a:solidFill>
+                      <a:prstDash val="solid"/>
+                      <a:round/>
+                      <a:headEnd type="none" w="med" len="med"/>
+                      <a:tailEnd type="none" w="med" len="med"/>
+                    </a:lnB>
+                    <a:solidFill>
+                      <a:srgbClr val="DFEBDB"/>
+                    </a:solidFill>
+                  </a:tcPr>
+                </a:tc>
+                <a:tc>
+                  <a:txBody>
+                    <a:bodyPr/>
+                    <a:lstStyle/>
+                    <a:p>
+                      <a:pPr indent="0" marL="0">
+                        <a:buNone/>
+                      </a:pPr>
+                      <a:r>
+                        <a:rPr lang="en-US" sz="780" dirty="0">
+                          <a:solidFill>
+                            <a:srgbClr val="2B2B2B"/>
+                          </a:solidFill>
+                          <a:latin typeface="Meiryo UI" pitchFamily="34" charset="0"/>
+                          <a:ea typeface="Meiryo UI" pitchFamily="34" charset="-122"/>
+                          <a:cs typeface="Meiryo UI" pitchFamily="34" charset="-120"/>
+                        </a:rPr>
+                        <a:t>現ラインの設備改造・専用治具</a:t>
+                      </a:r>
+                      <a:endParaRPr lang="en-US" sz="780" dirty="0">
+                        <a:latin typeface="Meiryo UI" charset="0"/>
+                        <a:ea typeface="Meiryo UI" charset="0"/>
+                        <a:cs typeface="Meiryo UI" charset="0"/>
+                      </a:endParaRPr>
+                    </a:p>
+                  </a:txBody>
+                  <a:tcPr marL="45720" marR="45720" marT="45720" marB="45720" anchor="ctr">
+                    <a:lnL w="6350" cap="flat" cmpd="sng" algn="ctr">
+                      <a:solidFill>
+                        <a:srgbClr val="D3DED0"/>
+                      </a:solidFill>
+                      <a:prstDash val="solid"/>
+                      <a:round/>
+                      <a:headEnd type="none" w="med" len="med"/>
+                      <a:tailEnd type="none" w="med" len="med"/>
+                    </a:lnL>
+                    <a:lnR w="6350" cap="flat" cmpd="sng" algn="ctr">
+                      <a:solidFill>
+                        <a:srgbClr val="D3DED0"/>
+                      </a:solidFill>
+                      <a:prstDash val="solid"/>
+                      <a:round/>
+                      <a:headEnd type="none" w="med" len="med"/>
+                      <a:tailEnd type="none" w="med" len="med"/>
+                    </a:lnR>
+                    <a:lnT w="6350" cap="flat" cmpd="sng" algn="ctr">
+                      <a:solidFill>
+                        <a:srgbClr val="D3DED0"/>
+                      </a:solidFill>
+                      <a:prstDash val="solid"/>
+                      <a:round/>
+                      <a:headEnd type="none" w="med" len="med"/>
+                      <a:tailEnd type="none" w="med" len="med"/>
+                    </a:lnT>
+                    <a:lnB w="6350" cap="flat" cmpd="sng" algn="ctr">
+                      <a:solidFill>
+                        <a:srgbClr val="D3DED0"/>
+                      </a:solidFill>
+                      <a:prstDash val="solid"/>
+                      <a:round/>
+                      <a:headEnd type="none" w="med" len="med"/>
+                      <a:tailEnd type="none" w="med" len="med"/>
+                    </a:lnB>
+                  </a:tcPr>
+                </a:tc>
+                <a:tc>
+                  <a:txBody>
+                    <a:bodyPr/>
+                    <a:lstStyle/>
+                    <a:p>
+                      <a:pPr indent="0" marL="0">
+                        <a:buNone/>
+                      </a:pPr>
+                      <a:r>
+                        <a:rPr lang="en-US" sz="780" dirty="0">
+                          <a:solidFill>
+                            <a:srgbClr val="2B2B2B"/>
+                          </a:solidFill>
+                          <a:latin typeface="Meiryo UI" pitchFamily="34" charset="0"/>
+                          <a:ea typeface="Meiryo UI" pitchFamily="34" charset="-122"/>
+                          <a:cs typeface="Meiryo UI" pitchFamily="34" charset="-120"/>
+                        </a:rPr>
+                        <a:t>「2040年までに償却完了」をゲート条件としてSCM戦略部が審査 — 10年で捨てる物に大金を入れない</a:t>
+                      </a:r>
+                      <a:endParaRPr lang="en-US" sz="780" dirty="0">
+                        <a:latin typeface="Meiryo UI" charset="0"/>
+                        <a:ea typeface="Meiryo UI" charset="0"/>
+                        <a:cs typeface="Meiryo UI" charset="0"/>
+                      </a:endParaRPr>
+                    </a:p>
+                  </a:txBody>
+                  <a:tcPr marL="45720" marR="45720" marT="45720" marB="45720" anchor="ctr">
+                    <a:lnL w="6350" cap="flat" cmpd="sng" algn="ctr">
+                      <a:solidFill>
+                        <a:srgbClr val="D3DED0"/>
+                      </a:solidFill>
+                      <a:prstDash val="solid"/>
+                      <a:round/>
+                      <a:headEnd type="none" w="med" len="med"/>
+                      <a:tailEnd type="none" w="med" len="med"/>
+                    </a:lnL>
+                    <a:lnR w="6350" cap="flat" cmpd="sng" algn="ctr">
+                      <a:solidFill>
+                        <a:srgbClr val="D3DED0"/>
+                      </a:solidFill>
+                      <a:prstDash val="solid"/>
+                      <a:round/>
+                      <a:headEnd type="none" w="med" len="med"/>
+                      <a:tailEnd type="none" w="med" len="med"/>
+                    </a:lnR>
+                    <a:lnT w="6350" cap="flat" cmpd="sng" algn="ctr">
+                      <a:solidFill>
+                        <a:srgbClr val="D3DED0"/>
+                      </a:solidFill>
+                      <a:prstDash val="solid"/>
+                      <a:round/>
+                      <a:headEnd type="none" w="med" len="med"/>
+                      <a:tailEnd type="none" w="med" len="med"/>
+                    </a:lnT>
+                    <a:lnB w="6350" cap="flat" cmpd="sng" algn="ctr">
+                      <a:solidFill>
+                        <a:srgbClr val="D3DED0"/>
+                      </a:solidFill>
+                      <a:prstDash val="solid"/>
+                      <a:round/>
+                      <a:headEnd type="none" w="med" len="med"/>
+                      <a:tailEnd type="none" w="med" len="med"/>
+                    </a:lnB>
+                  </a:tcPr>
+                </a:tc>
+              </a:tr>
+              <a:tr h="384048">
+                <a:tc>
+                  <a:txBody>
+                    <a:bodyPr/>
+                    <a:lstStyle/>
+                    <a:p>
+                      <a:pPr indent="0" marL="0">
+                        <a:buNone/>
+                      </a:pPr>
+                      <a:r>
+                        <a:rPr lang="en-US" sz="780" b="1" dirty="0">
+                          <a:solidFill>
+                            <a:srgbClr val="2B2B2B"/>
+                          </a:solidFill>
+                          <a:latin typeface="Meiryo UI" pitchFamily="34" charset="0"/>
+                          <a:ea typeface="Meiryo UI" pitchFamily="34" charset="-122"/>
+                          <a:cs typeface="Meiryo UI" pitchFamily="34" charset="-120"/>
+                        </a:rPr>
+                        <a:t>③ 移設・転用可能</a:t>
+                      </a:r>
+                      <a:endParaRPr lang="en-US" sz="780" dirty="0">
+                        <a:latin typeface="Meiryo UI" charset="0"/>
+                        <a:ea typeface="Meiryo UI" charset="0"/>
+                        <a:cs typeface="Meiryo UI" charset="0"/>
+                      </a:endParaRPr>
+                    </a:p>
+                  </a:txBody>
+                  <a:tcPr marL="45720" marR="45720" marT="45720" marB="45720" anchor="ctr">
+                    <a:lnL w="6350" cap="flat" cmpd="sng" algn="ctr">
+                      <a:solidFill>
+                        <a:srgbClr val="D3DED0"/>
+                      </a:solidFill>
+                      <a:prstDash val="solid"/>
+                      <a:round/>
+                      <a:headEnd type="none" w="med" len="med"/>
+                      <a:tailEnd type="none" w="med" len="med"/>
+                    </a:lnL>
+                    <a:lnR w="6350" cap="flat" cmpd="sng" algn="ctr">
+                      <a:solidFill>
+                        <a:srgbClr val="D3DED0"/>
+                      </a:solidFill>
+                      <a:prstDash val="solid"/>
+                      <a:round/>
+                      <a:headEnd type="none" w="med" len="med"/>
+                      <a:tailEnd type="none" w="med" len="med"/>
+                    </a:lnR>
+                    <a:lnT w="6350" cap="flat" cmpd="sng" algn="ctr">
+                      <a:solidFill>
+                        <a:srgbClr val="D3DED0"/>
+                      </a:solidFill>
+                      <a:prstDash val="solid"/>
+                      <a:round/>
+                      <a:headEnd type="none" w="med" len="med"/>
+                      <a:tailEnd type="none" w="med" len="med"/>
+                    </a:lnT>
+                    <a:lnB w="6350" cap="flat" cmpd="sng" algn="ctr">
+                      <a:solidFill>
+                        <a:srgbClr val="D3DED0"/>
+                      </a:solidFill>
+                      <a:prstDash val="solid"/>
+                      <a:round/>
+                      <a:headEnd type="none" w="med" len="med"/>
+                      <a:tailEnd type="none" w="med" len="med"/>
+                    </a:lnB>
+                    <a:solidFill>
+                      <a:srgbClr val="DFEBDB"/>
+                    </a:solidFill>
+                  </a:tcPr>
+                </a:tc>
+                <a:tc>
+                  <a:txBody>
+                    <a:bodyPr/>
+                    <a:lstStyle/>
+                    <a:p>
+                      <a:pPr indent="0" marL="0">
+                        <a:buNone/>
+                      </a:pPr>
+                      <a:r>
+                        <a:rPr lang="en-US" sz="780" dirty="0">
+                          <a:solidFill>
+                            <a:srgbClr val="2B2B2B"/>
+                          </a:solidFill>
+                          <a:latin typeface="Meiryo UI" pitchFamily="34" charset="0"/>
+                          <a:ea typeface="Meiryo UI" pitchFamily="34" charset="-122"/>
+                          <a:cs typeface="Meiryo UI" pitchFamily="34" charset="-120"/>
+                        </a:rPr>
+                        <a:t>フィジカルAI・AMR・自動検査機(レイアウト非依存の可搬型を優先調達)</a:t>
+                      </a:r>
+                      <a:endParaRPr lang="en-US" sz="780" dirty="0">
+                        <a:latin typeface="Meiryo UI" charset="0"/>
+                        <a:ea typeface="Meiryo UI" charset="0"/>
+                        <a:cs typeface="Meiryo UI" charset="0"/>
+                      </a:endParaRPr>
+                    </a:p>
+                  </a:txBody>
+                  <a:tcPr marL="45720" marR="45720" marT="45720" marB="45720" anchor="ctr">
+                    <a:lnL w="6350" cap="flat" cmpd="sng" algn="ctr">
+                      <a:solidFill>
+                        <a:srgbClr val="D3DED0"/>
+                      </a:solidFill>
+                      <a:prstDash val="solid"/>
+                      <a:round/>
+                      <a:headEnd type="none" w="med" len="med"/>
+                      <a:tailEnd type="none" w="med" len="med"/>
+                    </a:lnL>
+                    <a:lnR w="6350" cap="flat" cmpd="sng" algn="ctr">
+                      <a:solidFill>
+                        <a:srgbClr val="D3DED0"/>
+                      </a:solidFill>
+                      <a:prstDash val="solid"/>
+                      <a:round/>
+                      <a:headEnd type="none" w="med" len="med"/>
+                      <a:tailEnd type="none" w="med" len="med"/>
+                    </a:lnR>
+                    <a:lnT w="6350" cap="flat" cmpd="sng" algn="ctr">
+                      <a:solidFill>
+                        <a:srgbClr val="D3DED0"/>
+                      </a:solidFill>
+                      <a:prstDash val="solid"/>
+                      <a:round/>
+                      <a:headEnd type="none" w="med" len="med"/>
+                      <a:tailEnd type="none" w="med" len="med"/>
+                    </a:lnT>
+                    <a:lnB w="6350" cap="flat" cmpd="sng" algn="ctr">
+                      <a:solidFill>
+                        <a:srgbClr val="D3DED0"/>
+                      </a:solidFill>
+                      <a:prstDash val="solid"/>
+                      <a:round/>
+                      <a:headEnd type="none" w="med" len="med"/>
+                      <a:tailEnd type="none" w="med" len="med"/>
+                    </a:lnB>
+                  </a:tcPr>
+                </a:tc>
+                <a:tc>
+                  <a:txBody>
+                    <a:bodyPr/>
+                    <a:lstStyle/>
+                    <a:p>
+                      <a:pPr indent="0" marL="0">
+                        <a:buNone/>
+                      </a:pPr>
+                      <a:r>
+                        <a:rPr lang="en-US" sz="780" dirty="0">
+                          <a:solidFill>
+                            <a:srgbClr val="2B2B2B"/>
+                          </a:solidFill>
+                          <a:latin typeface="Meiryo UI" pitchFamily="34" charset="0"/>
+                          <a:ea typeface="Meiryo UI" pitchFamily="34" charset="-122"/>
+                          <a:cs typeface="Meiryo UI" pitchFamily="34" charset="-120"/>
+                        </a:rPr>
+                        <a:t>2040年モジュール工場へ移設/他工場へ転用</a:t>
+                      </a:r>
+                      <a:endParaRPr lang="en-US" sz="780" dirty="0">
+                        <a:latin typeface="Meiryo UI" charset="0"/>
+                        <a:ea typeface="Meiryo UI" charset="0"/>
+                        <a:cs typeface="Meiryo UI" charset="0"/>
+                      </a:endParaRPr>
+                    </a:p>
+                  </a:txBody>
+                  <a:tcPr marL="45720" marR="45720" marT="45720" marB="45720" anchor="ctr">
+                    <a:lnL w="6350" cap="flat" cmpd="sng" algn="ctr">
+                      <a:solidFill>
+                        <a:srgbClr val="D3DED0"/>
+                      </a:solidFill>
+                      <a:prstDash val="solid"/>
+                      <a:round/>
+                      <a:headEnd type="none" w="med" len="med"/>
+                      <a:tailEnd type="none" w="med" len="med"/>
+                    </a:lnL>
+                    <a:lnR w="6350" cap="flat" cmpd="sng" algn="ctr">
+                      <a:solidFill>
+                        <a:srgbClr val="D3DED0"/>
+                      </a:solidFill>
+                      <a:prstDash val="solid"/>
+                      <a:round/>
+                      <a:headEnd type="none" w="med" len="med"/>
+                      <a:tailEnd type="none" w="med" len="med"/>
+                    </a:lnR>
+                    <a:lnT w="6350" cap="flat" cmpd="sng" algn="ctr">
+                      <a:solidFill>
+                        <a:srgbClr val="D3DED0"/>
+                      </a:solidFill>
+                      <a:prstDash val="solid"/>
+                      <a:round/>
+                      <a:headEnd type="none" w="med" len="med"/>
+                      <a:tailEnd type="none" w="med" len="med"/>
+                    </a:lnT>
+                    <a:lnB w="6350" cap="flat" cmpd="sng" algn="ctr">
+                      <a:solidFill>
+                        <a:srgbClr val="D3DED0"/>
+                      </a:solidFill>
+                      <a:prstDash val="solid"/>
+                      <a:round/>
+                      <a:headEnd type="none" w="med" len="med"/>
+                      <a:tailEnd type="none" w="med" len="med"/>
+                    </a:lnB>
+                  </a:tcPr>
+                </a:tc>
+              </a:tr>
+            </a:tbl>
+          </a:graphicData>
+        </a:graphic>
+      </p:graphicFrame>
+      <p:sp>
+        <p:nvSpPr>
+          <p:cNvPr id="17" name="Shape 14"/>
+          <p:cNvSpPr/>
+          <p:nvPr/>
+        </p:nvSpPr>
+        <p:spPr>
+          <a:xfrm>
+            <a:off x="274320" y="5349240"/>
+            <a:ext cx="11640312" cy="731520"/>
+          </a:xfrm>
+          <a:prstGeom prst="roundRect">
+            <a:avLst>
+              <a:gd name="adj" fmla="val 7500"/>
+            </a:avLst>
+          </a:prstGeom>
+          <a:solidFill>
+            <a:srgbClr val="2C5F2D"/>
+          </a:solidFill>
+          <a:ln w="12700">
+            <a:solidFill>
+              <a:srgbClr val="2C5F2D"/>
+            </a:solidFill>
+            <a:prstDash val="solid"/>
+          </a:ln>
+        </p:spPr>
+      </p:sp>
+      <p:sp>
+        <p:nvSpPr>
+          <p:cNvPr id="18" name="Text 15"/>
+          <p:cNvSpPr/>
+          <p:nvPr/>
+        </p:nvSpPr>
+        <p:spPr>
+          <a:xfrm>
+            <a:off x="438912" y="5422392"/>
+            <a:ext cx="11311128" cy="603504"/>
+          </a:xfrm>
+          <a:prstGeom prst="rect">
+            <a:avLst/>
+          </a:prstGeom>
+          <a:noFill/>
+          <a:ln/>
+        </p:spPr>
+        <p:txBody>
+          <a:bodyPr wrap="square" lIns="0" tIns="0" rIns="0" bIns="0" rtlCol="0" anchor="t"/>
+          <a:lstStyle/>
+          <a:p>
+            <a:pPr indent="0" marL="0">
+              <a:lnSpc>
+                <a:spcPct val="110000"/>
+              </a:lnSpc>
+              <a:buNone/>
+            </a:pPr>
+            <a:r>
+              <a:rPr lang="en-US" sz="1000" b="1" dirty="0">
+                <a:solidFill>
+                  <a:srgbClr val="FFFFFF"/>
+                </a:solidFill>
+                <a:latin typeface="Meiryo UI" pitchFamily="34" charset="0"/>
+                <a:ea typeface="Meiryo UI" pitchFamily="34" charset="-122"/>
+                <a:cs typeface="Meiryo UI" pitchFamily="34" charset="-120"/>
+              </a:rPr>
+              <a:t>結論: 本プログラムは2040年構想と競合する先行支出ではなく、新工場の「設計入力」(改定済み基準・再設計済みプロセス)と建替えの「意思決定材料」(31%トリガー判定)を生む前提工事である。
+</a:t>
+            </a:r>
+            <a:pPr indent="0" marL="0">
+              <a:lnSpc>
+                <a:spcPct val="110000"/>
+              </a:lnSpc>
+              <a:buNone/>
+            </a:pPr>
+            <a:r>
+              <a:rPr lang="en-US" sz="780" dirty="0">
+                <a:solidFill>
+                  <a:srgbClr val="FFFFFF"/>
+                </a:solidFill>
+                <a:latin typeface="Meiryo UI" pitchFamily="34" charset="0"/>
+                <a:ea typeface="Meiryo UI" pitchFamily="34" charset="-122"/>
+                <a:cs typeface="Meiryo UI" pitchFamily="34" charset="-120"/>
+              </a:rPr>
+              <a:t>やらない場合の逆リスク: 人手前提の基準がそのまま新工場仕様に持ち込まれる/量産知見の他社依存(現状課題)を自動化・品質再現の領域で繰り返す/31%判定の材料がなく建替え判断が勘に頼る。</a:t>
+            </a:r>
+            <a:endParaRPr lang="en-US" sz="1000" dirty="0"/>
+          </a:p>
+        </p:txBody>
+      </p:sp>
+      <p:sp>
+        <p:nvSpPr>
+          <p:cNvPr id="19" name="Text 16"/>
+          <p:cNvSpPr/>
+          <p:nvPr/>
+        </p:nvSpPr>
+        <p:spPr>
+          <a:xfrm>
+            <a:off x="274320" y="6263640"/>
+            <a:ext cx="11640312" cy="228600"/>
+          </a:xfrm>
+          <a:prstGeom prst="rect">
+            <a:avLst/>
+          </a:prstGeom>
+          <a:noFill/>
+          <a:ln/>
+        </p:spPr>
+        <p:txBody>
+          <a:bodyPr wrap="square" lIns="0" tIns="0" rIns="0" bIns="0" rtlCol="0" anchor="t"/>
+          <a:lstStyle/>
+          <a:p>
+            <a:pPr indent="0" marL="0">
+              <a:buNone/>
+            </a:pPr>
+            <a:r>
+              <a:rPr lang="en-US" sz="650" dirty="0">
+                <a:solidFill>
+                  <a:srgbClr val="595959"/>
+                </a:solidFill>
+                <a:latin typeface="Meiryo UI" pitchFamily="34" charset="0"/>
+                <a:ea typeface="Meiryo UI" pitchFamily="34" charset="-122"/>
+                <a:cs typeface="Meiryo UI" pitchFamily="34" charset="-120"/>
+              </a:rPr>
+              <a:t>出典: OHC 2040年検討資料(ステップ1〜3: モジュール型マザー工場・3色仕分け・稼働率ロジック・自動化PoC分岐)※数値は同資料の仮置き値を含む</a:t>
+            </a:r>
+            <a:endParaRPr lang="en-US" sz="650" dirty="0"/>
+          </a:p>
+        </p:txBody>
+      </p:sp>
+    </p:spTree>
+  </p:cSld>
+  <p:clrMapOvr>
+    <a:masterClrMapping/>
+  </p:clrMapOvr>
+</p:sld>
+</file>
+
+<file path=ppt/slides/slide5.xml><?xml version="1.0" encoding="utf-8"?>
+<p:sld xmlns:a="http://schemas.openxmlformats.org/drawingml/2006/main" xmlns:r="http://schemas.openxmlformats.org/officeDocument/2006/relationships" xmlns:p="http://schemas.openxmlformats.org/presentationml/2006/main">
+  <p:cSld name="Slide 5">
+    <p:bg>
+      <p:bgPr>
+        <a:solidFill>
+          <a:srgbClr val="FFFFFF"/>
+        </a:solidFill>
+      </p:bgPr>
+    </p:bg>
+    <p:spTree>
+      <p:nvGrpSpPr>
+        <p:cNvPr id="1" name=""/>
+        <p:cNvGrpSpPr/>
+        <p:nvPr/>
+      </p:nvGrpSpPr>
+      <p:grpSpPr>
+        <a:xfrm>
+          <a:off x="0" y="0"/>
+          <a:ext cx="0" cy="0"/>
+          <a:chOff x="0" y="0"/>
+          <a:chExt cx="0" cy="0"/>
+        </a:xfrm>
+      </p:grpSpPr>
+      <p:sp>
+        <p:nvSpPr>
+          <p:cNvPr id="2" name="Text 0"/>
+          <p:cNvSpPr/>
+          <p:nvPr/>
+        </p:nvSpPr>
+        <p:spPr>
+          <a:xfrm>
             <a:off x="228600" y="54864"/>
             <a:ext cx="7863840" cy="347472"/>
           </a:xfrm>
@@ -6968,7 +8830,7 @@
       </p:sp>
       <p:graphicFrame>
         <p:nvGraphicFramePr>
-          <p:cNvPr id="5" name="Table 0"/>
+          <p:cNvPr id="6" name="Table 0"/>
           <p:cNvGraphicFramePr>
             <a:graphicFrameLocks noGrp="1"/>
           </p:cNvGraphicFramePr>
@@ -25883,7 +27745,7 @@
                           <a:ea typeface="Meiryo UI" pitchFamily="34" charset="-122"/>
                           <a:cs typeface="Meiryo UI" pitchFamily="34" charset="-120"/>
                         </a:rPr>
-                        <a:t>PoC(検査AI・フィジカルAI)・投資評価(OEE正味ROI)</a:t>
+                        <a:t>PoC・投資評価(OEE正味ROI)+2040年国内集約トリガー(労務削減31%)判定</a:t>
                       </a:r>
                       <a:endParaRPr lang="en-US" sz="600" dirty="0">
                         <a:latin typeface="Meiryo UI" charset="0"/>
@@ -25948,7 +27810,7 @@
                           <a:ea typeface="Meiryo UI" pitchFamily="34" charset="-122"/>
                           <a:cs typeface="Meiryo UI" pitchFamily="34" charset="-120"/>
                         </a:rPr>
-                        <a:t>PoC報告・投資申請</a:t>
+                        <a:t>PoC報告・投資申請・トリガー判定書</a:t>
                       </a:r>
                       <a:endParaRPr lang="en-US" sz="600" dirty="0">
                         <a:latin typeface="Meiryo UI" charset="0"/>
@@ -26583,7 +28445,7 @@
                           <a:ea typeface="Meiryo UI" pitchFamily="34" charset="-122"/>
                           <a:cs typeface="Meiryo UI" pitchFamily="34" charset="-120"/>
                         </a:rPr>
-                        <a:t>実装・立ち上げ・効果刈り取り</a:t>
+                        <a:t>実装・立ち上げ・効果刈り取り(投資は2040年までに償却完了をゲート条件)</a:t>
                       </a:r>
                       <a:endParaRPr lang="en-US" sz="600" dirty="0">
                         <a:latin typeface="Meiryo UI" charset="0"/>
@@ -27894,6 +29756,706 @@
                       <a:headEnd type="none" w="med" len="med"/>
                       <a:tailEnd type="none" w="med" len="med"/>
                     </a:lnB>
+                  </a:tcPr>
+                </a:tc>
+              </a:tr>
+              <a:tr h="150876">
+                <a:tc>
+                  <a:txBody>
+                    <a:bodyPr/>
+                    <a:lstStyle/>
+                    <a:p>
+                      <a:pPr algn="ctr" indent="0" marL="0">
+                        <a:buNone/>
+                      </a:pPr>
+                      <a:r>
+                        <a:rPr lang="en-US" sz="600" b="1" dirty="0">
+                          <a:solidFill>
+                            <a:srgbClr val="2B2B2B"/>
+                          </a:solidFill>
+                          <a:latin typeface="Meiryo UI" pitchFamily="34" charset="0"/>
+                          <a:ea typeface="Meiryo UI" pitchFamily="34" charset="-122"/>
+                          <a:cs typeface="Meiryo UI" pitchFamily="34" charset="-120"/>
+                        </a:rPr>
+                        <a:t>3.7</a:t>
+                      </a:r>
+                      <a:endParaRPr lang="en-US" sz="600" dirty="0">
+                        <a:latin typeface="Meiryo UI" charset="0"/>
+                        <a:ea typeface="Meiryo UI" charset="0"/>
+                        <a:cs typeface="Meiryo UI" charset="0"/>
+                      </a:endParaRPr>
+                    </a:p>
+                  </a:txBody>
+                  <a:tcPr marL="18288" marR="18288" marT="18288" marB="18288" anchor="ctr">
+                    <a:lnL w="6350" cap="flat" cmpd="sng" algn="ctr">
+                      <a:solidFill>
+                        <a:srgbClr val="D3DED0"/>
+                      </a:solidFill>
+                      <a:prstDash val="solid"/>
+                      <a:round/>
+                      <a:headEnd type="none" w="med" len="med"/>
+                      <a:tailEnd type="none" w="med" len="med"/>
+                    </a:lnL>
+                    <a:lnR w="6350" cap="flat" cmpd="sng" algn="ctr">
+                      <a:solidFill>
+                        <a:srgbClr val="D3DED0"/>
+                      </a:solidFill>
+                      <a:prstDash val="solid"/>
+                      <a:round/>
+                      <a:headEnd type="none" w="med" len="med"/>
+                      <a:tailEnd type="none" w="med" len="med"/>
+                    </a:lnR>
+                    <a:lnT w="6350" cap="flat" cmpd="sng" algn="ctr">
+                      <a:solidFill>
+                        <a:srgbClr val="D3DED0"/>
+                      </a:solidFill>
+                      <a:prstDash val="solid"/>
+                      <a:round/>
+                      <a:headEnd type="none" w="med" len="med"/>
+                      <a:tailEnd type="none" w="med" len="med"/>
+                    </a:lnT>
+                    <a:lnB w="6350" cap="flat" cmpd="sng" algn="ctr">
+                      <a:solidFill>
+                        <a:srgbClr val="D3DED0"/>
+                      </a:solidFill>
+                      <a:prstDash val="solid"/>
+                      <a:round/>
+                      <a:headEnd type="none" w="med" len="med"/>
+                      <a:tailEnd type="none" w="med" len="med"/>
+                    </a:lnB>
+                  </a:tcPr>
+                </a:tc>
+                <a:tc>
+                  <a:txBody>
+                    <a:bodyPr/>
+                    <a:lstStyle/>
+                    <a:p>
+                      <a:pPr indent="0" marL="0">
+                        <a:buNone/>
+                      </a:pPr>
+                      <a:r>
+                        <a:rPr lang="en-US" sz="600" dirty="0">
+                          <a:solidFill>
+                            <a:srgbClr val="2B2B2B"/>
+                          </a:solidFill>
+                          <a:latin typeface="Meiryo UI" pitchFamily="34" charset="0"/>
+                          <a:ea typeface="Meiryo UI" pitchFamily="34" charset="-122"/>
+                          <a:cs typeface="Meiryo UI" pitchFamily="34" charset="-120"/>
+                        </a:rPr>
+                        <a:t>成果を2040年モジュール工場の要求仕様として文書化(基準・プロセス・設備・移設計画)</a:t>
+                      </a:r>
+                      <a:endParaRPr lang="en-US" sz="600" dirty="0">
+                        <a:latin typeface="Meiryo UI" charset="0"/>
+                        <a:ea typeface="Meiryo UI" charset="0"/>
+                        <a:cs typeface="Meiryo UI" charset="0"/>
+                      </a:endParaRPr>
+                    </a:p>
+                  </a:txBody>
+                  <a:tcPr marL="18288" marR="18288" marT="18288" marB="18288" anchor="ctr">
+                    <a:lnL w="6350" cap="flat" cmpd="sng" algn="ctr">
+                      <a:solidFill>
+                        <a:srgbClr val="D3DED0"/>
+                      </a:solidFill>
+                      <a:prstDash val="solid"/>
+                      <a:round/>
+                      <a:headEnd type="none" w="med" len="med"/>
+                      <a:tailEnd type="none" w="med" len="med"/>
+                    </a:lnL>
+                    <a:lnR w="6350" cap="flat" cmpd="sng" algn="ctr">
+                      <a:solidFill>
+                        <a:srgbClr val="D3DED0"/>
+                      </a:solidFill>
+                      <a:prstDash val="solid"/>
+                      <a:round/>
+                      <a:headEnd type="none" w="med" len="med"/>
+                      <a:tailEnd type="none" w="med" len="med"/>
+                    </a:lnR>
+                    <a:lnT w="6350" cap="flat" cmpd="sng" algn="ctr">
+                      <a:solidFill>
+                        <a:srgbClr val="D3DED0"/>
+                      </a:solidFill>
+                      <a:prstDash val="solid"/>
+                      <a:round/>
+                      <a:headEnd type="none" w="med" len="med"/>
+                      <a:tailEnd type="none" w="med" len="med"/>
+                    </a:lnT>
+                    <a:lnB w="6350" cap="flat" cmpd="sng" algn="ctr">
+                      <a:solidFill>
+                        <a:srgbClr val="D3DED0"/>
+                      </a:solidFill>
+                      <a:prstDash val="solid"/>
+                      <a:round/>
+                      <a:headEnd type="none" w="med" len="med"/>
+                      <a:tailEnd type="none" w="med" len="med"/>
+                    </a:lnB>
+                  </a:tcPr>
+                </a:tc>
+                <a:tc>
+                  <a:txBody>
+                    <a:bodyPr/>
+                    <a:lstStyle/>
+                    <a:p>
+                      <a:pPr indent="0" marL="0">
+                        <a:buNone/>
+                      </a:pPr>
+                      <a:r>
+                        <a:rPr lang="en-US" sz="600" dirty="0">
+                          <a:solidFill>
+                            <a:srgbClr val="595959"/>
+                          </a:solidFill>
+                          <a:latin typeface="Meiryo UI" pitchFamily="34" charset="0"/>
+                          <a:ea typeface="Meiryo UI" pitchFamily="34" charset="-122"/>
+                          <a:cs typeface="Meiryo UI" pitchFamily="34" charset="-120"/>
+                        </a:rPr>
+                        <a:t>新工場要求仕様書 v0</a:t>
+                      </a:r>
+                      <a:endParaRPr lang="en-US" sz="600" dirty="0">
+                        <a:latin typeface="Meiryo UI" charset="0"/>
+                        <a:ea typeface="Meiryo UI" charset="0"/>
+                        <a:cs typeface="Meiryo UI" charset="0"/>
+                      </a:endParaRPr>
+                    </a:p>
+                  </a:txBody>
+                  <a:tcPr marL="18288" marR="18288" marT="18288" marB="18288" anchor="ctr">
+                    <a:lnL w="6350" cap="flat" cmpd="sng" algn="ctr">
+                      <a:solidFill>
+                        <a:srgbClr val="D3DED0"/>
+                      </a:solidFill>
+                      <a:prstDash val="solid"/>
+                      <a:round/>
+                      <a:headEnd type="none" w="med" len="med"/>
+                      <a:tailEnd type="none" w="med" len="med"/>
+                    </a:lnL>
+                    <a:lnR w="6350" cap="flat" cmpd="sng" algn="ctr">
+                      <a:solidFill>
+                        <a:srgbClr val="D3DED0"/>
+                      </a:solidFill>
+                      <a:prstDash val="solid"/>
+                      <a:round/>
+                      <a:headEnd type="none" w="med" len="med"/>
+                      <a:tailEnd type="none" w="med" len="med"/>
+                    </a:lnR>
+                    <a:lnT w="6350" cap="flat" cmpd="sng" algn="ctr">
+                      <a:solidFill>
+                        <a:srgbClr val="D3DED0"/>
+                      </a:solidFill>
+                      <a:prstDash val="solid"/>
+                      <a:round/>
+                      <a:headEnd type="none" w="med" len="med"/>
+                      <a:tailEnd type="none" w="med" len="med"/>
+                    </a:lnT>
+                    <a:lnB w="6350" cap="flat" cmpd="sng" algn="ctr">
+                      <a:solidFill>
+                        <a:srgbClr val="D3DED0"/>
+                      </a:solidFill>
+                      <a:prstDash val="solid"/>
+                      <a:round/>
+                      <a:headEnd type="none" w="med" len="med"/>
+                      <a:tailEnd type="none" w="med" len="med"/>
+                    </a:lnB>
+                  </a:tcPr>
+                </a:tc>
+                <a:tc>
+                  <a:txBody>
+                    <a:bodyPr/>
+                    <a:lstStyle/>
+                    <a:p>
+                      <a:pPr indent="0" marL="0">
+                        <a:buNone/>
+                      </a:pPr>
+                      <a:r>
+                        <a:rPr lang="en-US" sz="600" dirty="0">
+                          <a:solidFill>
+                            <a:srgbClr val="2B2B2B"/>
+                          </a:solidFill>
+                          <a:latin typeface="Meiryo UI" pitchFamily="34" charset="0"/>
+                          <a:ea typeface="Meiryo UI" pitchFamily="34" charset="-122"/>
+                          <a:cs typeface="Meiryo UI" pitchFamily="34" charset="-120"/>
+                        </a:rPr>
+                        <a:t>生技セ+SCM戦略部</a:t>
+                      </a:r>
+                      <a:endParaRPr lang="en-US" sz="600" dirty="0">
+                        <a:latin typeface="Meiryo UI" charset="0"/>
+                        <a:ea typeface="Meiryo UI" charset="0"/>
+                        <a:cs typeface="Meiryo UI" charset="0"/>
+                      </a:endParaRPr>
+                    </a:p>
+                  </a:txBody>
+                  <a:tcPr marL="18288" marR="18288" marT="18288" marB="18288" anchor="ctr">
+                    <a:lnL w="6350" cap="flat" cmpd="sng" algn="ctr">
+                      <a:solidFill>
+                        <a:srgbClr val="D3DED0"/>
+                      </a:solidFill>
+                      <a:prstDash val="solid"/>
+                      <a:round/>
+                      <a:headEnd type="none" w="med" len="med"/>
+                      <a:tailEnd type="none" w="med" len="med"/>
+                    </a:lnL>
+                    <a:lnR w="6350" cap="flat" cmpd="sng" algn="ctr">
+                      <a:solidFill>
+                        <a:srgbClr val="D3DED0"/>
+                      </a:solidFill>
+                      <a:prstDash val="solid"/>
+                      <a:round/>
+                      <a:headEnd type="none" w="med" len="med"/>
+                      <a:tailEnd type="none" w="med" len="med"/>
+                    </a:lnR>
+                    <a:lnT w="6350" cap="flat" cmpd="sng" algn="ctr">
+                      <a:solidFill>
+                        <a:srgbClr val="D3DED0"/>
+                      </a:solidFill>
+                      <a:prstDash val="solid"/>
+                      <a:round/>
+                      <a:headEnd type="none" w="med" len="med"/>
+                      <a:tailEnd type="none" w="med" len="med"/>
+                    </a:lnT>
+                    <a:lnB w="6350" cap="flat" cmpd="sng" algn="ctr">
+                      <a:solidFill>
+                        <a:srgbClr val="D3DED0"/>
+                      </a:solidFill>
+                      <a:prstDash val="solid"/>
+                      <a:round/>
+                      <a:headEnd type="none" w="med" len="med"/>
+                      <a:tailEnd type="none" w="med" len="med"/>
+                    </a:lnB>
+                  </a:tcPr>
+                </a:tc>
+                <a:tc>
+                  <a:txBody>
+                    <a:bodyPr/>
+                    <a:lstStyle/>
+                    <a:p>
+                      <a:pPr indent="0" marL="0">
+                        <a:buNone/>
+                      </a:pPr>
+                      <a:endParaRPr lang="en-US" sz="600" dirty="0">
+                        <a:latin typeface="Meiryo UI" charset="0"/>
+                        <a:ea typeface="Meiryo UI" charset="0"/>
+                        <a:cs typeface="Meiryo UI" charset="0"/>
+                      </a:endParaRPr>
+                    </a:p>
+                  </a:txBody>
+                  <a:tcPr marL="18288" marR="18288" marT="18288" marB="18288" anchor="ctr">
+                    <a:lnL w="6350" cap="flat" cmpd="sng" algn="ctr">
+                      <a:solidFill>
+                        <a:srgbClr val="D3DED0"/>
+                      </a:solidFill>
+                      <a:prstDash val="solid"/>
+                      <a:round/>
+                      <a:headEnd type="none" w="med" len="med"/>
+                      <a:tailEnd type="none" w="med" len="med"/>
+                    </a:lnL>
+                    <a:lnR w="6350" cap="flat" cmpd="sng" algn="ctr">
+                      <a:solidFill>
+                        <a:srgbClr val="D3DED0"/>
+                      </a:solidFill>
+                      <a:prstDash val="solid"/>
+                      <a:round/>
+                      <a:headEnd type="none" w="med" len="med"/>
+                      <a:tailEnd type="none" w="med" len="med"/>
+                    </a:lnR>
+                    <a:lnT w="6350" cap="flat" cmpd="sng" algn="ctr">
+                      <a:solidFill>
+                        <a:srgbClr val="D3DED0"/>
+                      </a:solidFill>
+                      <a:prstDash val="solid"/>
+                      <a:round/>
+                      <a:headEnd type="none" w="med" len="med"/>
+                      <a:tailEnd type="none" w="med" len="med"/>
+                    </a:lnT>
+                    <a:lnB w="6350" cap="flat" cmpd="sng" algn="ctr">
+                      <a:solidFill>
+                        <a:srgbClr val="D3DED0"/>
+                      </a:solidFill>
+                      <a:prstDash val="solid"/>
+                      <a:round/>
+                      <a:headEnd type="none" w="med" len="med"/>
+                      <a:tailEnd type="none" w="med" len="med"/>
+                    </a:lnB>
+                  </a:tcPr>
+                </a:tc>
+                <a:tc>
+                  <a:txBody>
+                    <a:bodyPr/>
+                    <a:lstStyle/>
+                    <a:p>
+                      <a:pPr indent="0" marL="0">
+                        <a:buNone/>
+                      </a:pPr>
+                      <a:endParaRPr lang="en-US" sz="600" dirty="0">
+                        <a:latin typeface="Meiryo UI" charset="0"/>
+                        <a:ea typeface="Meiryo UI" charset="0"/>
+                        <a:cs typeface="Meiryo UI" charset="0"/>
+                      </a:endParaRPr>
+                    </a:p>
+                  </a:txBody>
+                  <a:tcPr marL="18288" marR="18288" marT="18288" marB="18288" anchor="ctr">
+                    <a:lnL w="6350" cap="flat" cmpd="sng" algn="ctr">
+                      <a:solidFill>
+                        <a:srgbClr val="D3DED0"/>
+                      </a:solidFill>
+                      <a:prstDash val="solid"/>
+                      <a:round/>
+                      <a:headEnd type="none" w="med" len="med"/>
+                      <a:tailEnd type="none" w="med" len="med"/>
+                    </a:lnL>
+                    <a:lnR w="6350" cap="flat" cmpd="sng" algn="ctr">
+                      <a:solidFill>
+                        <a:srgbClr val="D3DED0"/>
+                      </a:solidFill>
+                      <a:prstDash val="solid"/>
+                      <a:round/>
+                      <a:headEnd type="none" w="med" len="med"/>
+                      <a:tailEnd type="none" w="med" len="med"/>
+                    </a:lnR>
+                    <a:lnT w="6350" cap="flat" cmpd="sng" algn="ctr">
+                      <a:solidFill>
+                        <a:srgbClr val="D3DED0"/>
+                      </a:solidFill>
+                      <a:prstDash val="solid"/>
+                      <a:round/>
+                      <a:headEnd type="none" w="med" len="med"/>
+                      <a:tailEnd type="none" w="med" len="med"/>
+                    </a:lnT>
+                    <a:lnB w="6350" cap="flat" cmpd="sng" algn="ctr">
+                      <a:solidFill>
+                        <a:srgbClr val="D3DED0"/>
+                      </a:solidFill>
+                      <a:prstDash val="solid"/>
+                      <a:round/>
+                      <a:headEnd type="none" w="med" len="med"/>
+                      <a:tailEnd type="none" w="med" len="med"/>
+                    </a:lnB>
+                  </a:tcPr>
+                </a:tc>
+                <a:tc>
+                  <a:txBody>
+                    <a:bodyPr/>
+                    <a:lstStyle/>
+                    <a:p>
+                      <a:pPr indent="0" marL="0">
+                        <a:buNone/>
+                      </a:pPr>
+                      <a:endParaRPr lang="en-US" sz="600" dirty="0">
+                        <a:latin typeface="Meiryo UI" charset="0"/>
+                        <a:ea typeface="Meiryo UI" charset="0"/>
+                        <a:cs typeface="Meiryo UI" charset="0"/>
+                      </a:endParaRPr>
+                    </a:p>
+                  </a:txBody>
+                  <a:tcPr marL="18288" marR="18288" marT="18288" marB="18288" anchor="ctr">
+                    <a:lnL w="6350" cap="flat" cmpd="sng" algn="ctr">
+                      <a:solidFill>
+                        <a:srgbClr val="D3DED0"/>
+                      </a:solidFill>
+                      <a:prstDash val="solid"/>
+                      <a:round/>
+                      <a:headEnd type="none" w="med" len="med"/>
+                      <a:tailEnd type="none" w="med" len="med"/>
+                    </a:lnL>
+                    <a:lnR w="6350" cap="flat" cmpd="sng" algn="ctr">
+                      <a:solidFill>
+                        <a:srgbClr val="D3DED0"/>
+                      </a:solidFill>
+                      <a:prstDash val="solid"/>
+                      <a:round/>
+                      <a:headEnd type="none" w="med" len="med"/>
+                      <a:tailEnd type="none" w="med" len="med"/>
+                    </a:lnR>
+                    <a:lnT w="6350" cap="flat" cmpd="sng" algn="ctr">
+                      <a:solidFill>
+                        <a:srgbClr val="D3DED0"/>
+                      </a:solidFill>
+                      <a:prstDash val="solid"/>
+                      <a:round/>
+                      <a:headEnd type="none" w="med" len="med"/>
+                      <a:tailEnd type="none" w="med" len="med"/>
+                    </a:lnT>
+                    <a:lnB w="6350" cap="flat" cmpd="sng" algn="ctr">
+                      <a:solidFill>
+                        <a:srgbClr val="D3DED0"/>
+                      </a:solidFill>
+                      <a:prstDash val="solid"/>
+                      <a:round/>
+                      <a:headEnd type="none" w="med" len="med"/>
+                      <a:tailEnd type="none" w="med" len="med"/>
+                    </a:lnB>
+                  </a:tcPr>
+                </a:tc>
+                <a:tc>
+                  <a:txBody>
+                    <a:bodyPr/>
+                    <a:lstStyle/>
+                    <a:p>
+                      <a:pPr indent="0" marL="0">
+                        <a:buNone/>
+                      </a:pPr>
+                      <a:endParaRPr lang="en-US" sz="600" dirty="0">
+                        <a:latin typeface="Meiryo UI" charset="0"/>
+                        <a:ea typeface="Meiryo UI" charset="0"/>
+                        <a:cs typeface="Meiryo UI" charset="0"/>
+                      </a:endParaRPr>
+                    </a:p>
+                  </a:txBody>
+                  <a:tcPr marL="18288" marR="18288" marT="18288" marB="18288" anchor="ctr">
+                    <a:lnL w="6350" cap="flat" cmpd="sng" algn="ctr">
+                      <a:solidFill>
+                        <a:srgbClr val="D3DED0"/>
+                      </a:solidFill>
+                      <a:prstDash val="solid"/>
+                      <a:round/>
+                      <a:headEnd type="none" w="med" len="med"/>
+                      <a:tailEnd type="none" w="med" len="med"/>
+                    </a:lnL>
+                    <a:lnR w="6350" cap="flat" cmpd="sng" algn="ctr">
+                      <a:solidFill>
+                        <a:srgbClr val="D3DED0"/>
+                      </a:solidFill>
+                      <a:prstDash val="solid"/>
+                      <a:round/>
+                      <a:headEnd type="none" w="med" len="med"/>
+                      <a:tailEnd type="none" w="med" len="med"/>
+                    </a:lnR>
+                    <a:lnT w="6350" cap="flat" cmpd="sng" algn="ctr">
+                      <a:solidFill>
+                        <a:srgbClr val="D3DED0"/>
+                      </a:solidFill>
+                      <a:prstDash val="solid"/>
+                      <a:round/>
+                      <a:headEnd type="none" w="med" len="med"/>
+                      <a:tailEnd type="none" w="med" len="med"/>
+                    </a:lnT>
+                    <a:lnB w="6350" cap="flat" cmpd="sng" algn="ctr">
+                      <a:solidFill>
+                        <a:srgbClr val="D3DED0"/>
+                      </a:solidFill>
+                      <a:prstDash val="solid"/>
+                      <a:round/>
+                      <a:headEnd type="none" w="med" len="med"/>
+                      <a:tailEnd type="none" w="med" len="med"/>
+                    </a:lnB>
+                  </a:tcPr>
+                </a:tc>
+                <a:tc>
+                  <a:txBody>
+                    <a:bodyPr/>
+                    <a:lstStyle/>
+                    <a:p>
+                      <a:pPr indent="0" marL="0">
+                        <a:buNone/>
+                      </a:pPr>
+                      <a:endParaRPr lang="en-US" sz="600" dirty="0">
+                        <a:latin typeface="Meiryo UI" charset="0"/>
+                        <a:ea typeface="Meiryo UI" charset="0"/>
+                        <a:cs typeface="Meiryo UI" charset="0"/>
+                      </a:endParaRPr>
+                    </a:p>
+                  </a:txBody>
+                  <a:tcPr marL="18288" marR="18288" marT="18288" marB="18288" anchor="ctr">
+                    <a:lnL w="6350" cap="flat" cmpd="sng" algn="ctr">
+                      <a:solidFill>
+                        <a:srgbClr val="D3DED0"/>
+                      </a:solidFill>
+                      <a:prstDash val="solid"/>
+                      <a:round/>
+                      <a:headEnd type="none" w="med" len="med"/>
+                      <a:tailEnd type="none" w="med" len="med"/>
+                    </a:lnL>
+                    <a:lnR w="6350" cap="flat" cmpd="sng" algn="ctr">
+                      <a:solidFill>
+                        <a:srgbClr val="D3DED0"/>
+                      </a:solidFill>
+                      <a:prstDash val="solid"/>
+                      <a:round/>
+                      <a:headEnd type="none" w="med" len="med"/>
+                      <a:tailEnd type="none" w="med" len="med"/>
+                    </a:lnR>
+                    <a:lnT w="6350" cap="flat" cmpd="sng" algn="ctr">
+                      <a:solidFill>
+                        <a:srgbClr val="D3DED0"/>
+                      </a:solidFill>
+                      <a:prstDash val="solid"/>
+                      <a:round/>
+                      <a:headEnd type="none" w="med" len="med"/>
+                      <a:tailEnd type="none" w="med" len="med"/>
+                    </a:lnT>
+                    <a:lnB w="6350" cap="flat" cmpd="sng" algn="ctr">
+                      <a:solidFill>
+                        <a:srgbClr val="D3DED0"/>
+                      </a:solidFill>
+                      <a:prstDash val="solid"/>
+                      <a:round/>
+                      <a:headEnd type="none" w="med" len="med"/>
+                      <a:tailEnd type="none" w="med" len="med"/>
+                    </a:lnB>
+                  </a:tcPr>
+                </a:tc>
+                <a:tc>
+                  <a:txBody>
+                    <a:bodyPr/>
+                    <a:lstStyle/>
+                    <a:p>
+                      <a:pPr indent="0" marL="0">
+                        <a:buNone/>
+                      </a:pPr>
+                      <a:endParaRPr lang="en-US" sz="600" dirty="0">
+                        <a:latin typeface="Meiryo UI" charset="0"/>
+                        <a:ea typeface="Meiryo UI" charset="0"/>
+                        <a:cs typeface="Meiryo UI" charset="0"/>
+                      </a:endParaRPr>
+                    </a:p>
+                  </a:txBody>
+                  <a:tcPr marL="18288" marR="18288" marT="18288" marB="18288" anchor="ctr">
+                    <a:lnL w="6350" cap="flat" cmpd="sng" algn="ctr">
+                      <a:solidFill>
+                        <a:srgbClr val="D3DED0"/>
+                      </a:solidFill>
+                      <a:prstDash val="solid"/>
+                      <a:round/>
+                      <a:headEnd type="none" w="med" len="med"/>
+                      <a:tailEnd type="none" w="med" len="med"/>
+                    </a:lnL>
+                    <a:lnR w="6350" cap="flat" cmpd="sng" algn="ctr">
+                      <a:solidFill>
+                        <a:srgbClr val="D3DED0"/>
+                      </a:solidFill>
+                      <a:prstDash val="solid"/>
+                      <a:round/>
+                      <a:headEnd type="none" w="med" len="med"/>
+                      <a:tailEnd type="none" w="med" len="med"/>
+                    </a:lnR>
+                    <a:lnT w="6350" cap="flat" cmpd="sng" algn="ctr">
+                      <a:solidFill>
+                        <a:srgbClr val="D3DED0"/>
+                      </a:solidFill>
+                      <a:prstDash val="solid"/>
+                      <a:round/>
+                      <a:headEnd type="none" w="med" len="med"/>
+                      <a:tailEnd type="none" w="med" len="med"/>
+                    </a:lnT>
+                    <a:lnB w="6350" cap="flat" cmpd="sng" algn="ctr">
+                      <a:solidFill>
+                        <a:srgbClr val="D3DED0"/>
+                      </a:solidFill>
+                      <a:prstDash val="solid"/>
+                      <a:round/>
+                      <a:headEnd type="none" w="med" len="med"/>
+                      <a:tailEnd type="none" w="med" len="med"/>
+                    </a:lnB>
+                  </a:tcPr>
+                </a:tc>
+                <a:tc>
+                  <a:txBody>
+                    <a:bodyPr/>
+                    <a:lstStyle/>
+                    <a:p>
+                      <a:pPr indent="0" marL="0">
+                        <a:buNone/>
+                      </a:pPr>
+                      <a:endParaRPr lang="en-US" sz="600" dirty="0">
+                        <a:latin typeface="Meiryo UI" charset="0"/>
+                        <a:ea typeface="Meiryo UI" charset="0"/>
+                        <a:cs typeface="Meiryo UI" charset="0"/>
+                      </a:endParaRPr>
+                    </a:p>
+                  </a:txBody>
+                  <a:tcPr marL="18288" marR="18288" marT="18288" marB="18288" anchor="ctr">
+                    <a:lnL w="6350" cap="flat" cmpd="sng" algn="ctr">
+                      <a:solidFill>
+                        <a:srgbClr val="D3DED0"/>
+                      </a:solidFill>
+                      <a:prstDash val="solid"/>
+                      <a:round/>
+                      <a:headEnd type="none" w="med" len="med"/>
+                      <a:tailEnd type="none" w="med" len="med"/>
+                    </a:lnL>
+                    <a:lnR w="6350" cap="flat" cmpd="sng" algn="ctr">
+                      <a:solidFill>
+                        <a:srgbClr val="D3DED0"/>
+                      </a:solidFill>
+                      <a:prstDash val="solid"/>
+                      <a:round/>
+                      <a:headEnd type="none" w="med" len="med"/>
+                      <a:tailEnd type="none" w="med" len="med"/>
+                    </a:lnR>
+                    <a:lnT w="6350" cap="flat" cmpd="sng" algn="ctr">
+                      <a:solidFill>
+                        <a:srgbClr val="D3DED0"/>
+                      </a:solidFill>
+                      <a:prstDash val="solid"/>
+                      <a:round/>
+                      <a:headEnd type="none" w="med" len="med"/>
+                      <a:tailEnd type="none" w="med" len="med"/>
+                    </a:lnT>
+                    <a:lnB w="6350" cap="flat" cmpd="sng" algn="ctr">
+                      <a:solidFill>
+                        <a:srgbClr val="D3DED0"/>
+                      </a:solidFill>
+                      <a:prstDash val="solid"/>
+                      <a:round/>
+                      <a:headEnd type="none" w="med" len="med"/>
+                      <a:tailEnd type="none" w="med" len="med"/>
+                    </a:lnB>
+                    <a:solidFill>
+                      <a:srgbClr val="2C5F2D"/>
+                    </a:solidFill>
+                  </a:tcPr>
+                </a:tc>
+                <a:tc>
+                  <a:txBody>
+                    <a:bodyPr/>
+                    <a:lstStyle/>
+                    <a:p>
+                      <a:pPr indent="0" marL="0">
+                        <a:buNone/>
+                      </a:pPr>
+                      <a:endParaRPr lang="en-US" sz="600" dirty="0">
+                        <a:latin typeface="Meiryo UI" charset="0"/>
+                        <a:ea typeface="Meiryo UI" charset="0"/>
+                        <a:cs typeface="Meiryo UI" charset="0"/>
+                      </a:endParaRPr>
+                    </a:p>
+                  </a:txBody>
+                  <a:tcPr marL="18288" marR="18288" marT="18288" marB="18288" anchor="ctr">
+                    <a:lnL w="6350" cap="flat" cmpd="sng" algn="ctr">
+                      <a:solidFill>
+                        <a:srgbClr val="D3DED0"/>
+                      </a:solidFill>
+                      <a:prstDash val="solid"/>
+                      <a:round/>
+                      <a:headEnd type="none" w="med" len="med"/>
+                      <a:tailEnd type="none" w="med" len="med"/>
+                    </a:lnL>
+                    <a:lnR w="6350" cap="flat" cmpd="sng" algn="ctr">
+                      <a:solidFill>
+                        <a:srgbClr val="D3DED0"/>
+                      </a:solidFill>
+                      <a:prstDash val="solid"/>
+                      <a:round/>
+                      <a:headEnd type="none" w="med" len="med"/>
+                      <a:tailEnd type="none" w="med" len="med"/>
+                    </a:lnR>
+                    <a:lnT w="6350" cap="flat" cmpd="sng" algn="ctr">
+                      <a:solidFill>
+                        <a:srgbClr val="D3DED0"/>
+                      </a:solidFill>
+                      <a:prstDash val="solid"/>
+                      <a:round/>
+                      <a:headEnd type="none" w="med" len="med"/>
+                      <a:tailEnd type="none" w="med" len="med"/>
+                    </a:lnT>
+                    <a:lnB w="6350" cap="flat" cmpd="sng" algn="ctr">
+                      <a:solidFill>
+                        <a:srgbClr val="D3DED0"/>
+                      </a:solidFill>
+                      <a:prstDash val="solid"/>
+                      <a:round/>
+                      <a:headEnd type="none" w="med" len="med"/>
+                      <a:tailEnd type="none" w="med" len="med"/>
+                    </a:lnB>
+                    <a:solidFill>
+                      <a:srgbClr val="2C5F2D"/>
+                    </a:solidFill>
                   </a:tcPr>
                 </a:tc>
               </a:tr>

--- a/docs/bottleneck-survey-plan.pptx
+++ b/docs/bottleneck-survey-plan.pptx
@@ -9868,7 +9868,7 @@
                           <a:ea typeface="Meiryo UI" pitchFamily="34" charset="-122"/>
                           <a:cs typeface="Meiryo UI" pitchFamily="34" charset="-120"/>
                         </a:rPr>
-                        <a:t>プロジェクト憲章(スコープ・KGIツリー・会議体・ゲート定義)</a:t>
+                        <a:t>プロジェクト憲章(スコープ・KGIツリー・会議体・ゲート定義・報告計画)</a:t>
                       </a:r>
                       <a:endParaRPr lang="en-US" sz="600" dirty="0">
                         <a:latin typeface="Meiryo UI" charset="0"/>
@@ -11262,7 +11262,7 @@
                           <a:ea typeface="Meiryo UI" pitchFamily="34" charset="-122"/>
                           <a:cs typeface="Meiryo UI" pitchFamily="34" charset="-120"/>
                         </a:rPr>
-                        <a:t>ステークホルダー計画(役員・労組・現場・顧客/監査対応)</a:t>
+                        <a:t>役員中間報告(G1)+ゲート運営(G1→G2→G3)・効果トラッキング</a:t>
                       </a:r>
                       <a:endParaRPr lang="en-US" sz="600" dirty="0">
                         <a:latin typeface="Meiryo UI" charset="0"/>
@@ -11327,704 +11327,7 @@
                           <a:ea typeface="Meiryo UI" pitchFamily="34" charset="-122"/>
                           <a:cs typeface="Meiryo UI" pitchFamily="34" charset="-120"/>
                         </a:rPr>
-                        <a:t>コミュニケーション計画</a:t>
-                      </a:r>
-                      <a:endParaRPr lang="en-US" sz="600" dirty="0">
-                        <a:latin typeface="Meiryo UI" charset="0"/>
-                        <a:ea typeface="Meiryo UI" charset="0"/>
-                        <a:cs typeface="Meiryo UI" charset="0"/>
-                      </a:endParaRPr>
-                    </a:p>
-                  </a:txBody>
-                  <a:tcPr marL="18288" marR="18288" marT="18288" marB="18288" anchor="ctr">
-                    <a:lnL w="6350" cap="flat" cmpd="sng" algn="ctr">
-                      <a:solidFill>
-                        <a:srgbClr val="D3DED0"/>
-                      </a:solidFill>
-                      <a:prstDash val="solid"/>
-                      <a:round/>
-                      <a:headEnd type="none" w="med" len="med"/>
-                      <a:tailEnd type="none" w="med" len="med"/>
-                    </a:lnL>
-                    <a:lnR w="6350" cap="flat" cmpd="sng" algn="ctr">
-                      <a:solidFill>
-                        <a:srgbClr val="D3DED0"/>
-                      </a:solidFill>
-                      <a:prstDash val="solid"/>
-                      <a:round/>
-                      <a:headEnd type="none" w="med" len="med"/>
-                      <a:tailEnd type="none" w="med" len="med"/>
-                    </a:lnR>
-                    <a:lnT w="6350" cap="flat" cmpd="sng" algn="ctr">
-                      <a:solidFill>
-                        <a:srgbClr val="D3DED0"/>
-                      </a:solidFill>
-                      <a:prstDash val="solid"/>
-                      <a:round/>
-                      <a:headEnd type="none" w="med" len="med"/>
-                      <a:tailEnd type="none" w="med" len="med"/>
-                    </a:lnT>
-                    <a:lnB w="6350" cap="flat" cmpd="sng" algn="ctr">
-                      <a:solidFill>
-                        <a:srgbClr val="D3DED0"/>
-                      </a:solidFill>
-                      <a:prstDash val="solid"/>
-                      <a:round/>
-                      <a:headEnd type="none" w="med" len="med"/>
-                      <a:tailEnd type="none" w="med" len="med"/>
-                    </a:lnB>
-                  </a:tcPr>
-                </a:tc>
-                <a:tc>
-                  <a:txBody>
-                    <a:bodyPr/>
-                    <a:lstStyle/>
-                    <a:p>
-                      <a:pPr indent="0" marL="0">
-                        <a:buNone/>
-                      </a:pPr>
-                      <a:r>
-                        <a:rPr lang="en-US" sz="600" dirty="0">
-                          <a:solidFill>
-                            <a:srgbClr val="2B2B2B"/>
-                          </a:solidFill>
-                          <a:latin typeface="Meiryo UI" pitchFamily="34" charset="0"/>
-                          <a:ea typeface="Meiryo UI" pitchFamily="34" charset="-122"/>
-                          <a:cs typeface="Meiryo UI" pitchFamily="34" charset="-120"/>
-                        </a:rPr>
-                        <a:t>PMO</a:t>
-                      </a:r>
-                      <a:endParaRPr lang="en-US" sz="600" dirty="0">
-                        <a:latin typeface="Meiryo UI" charset="0"/>
-                        <a:ea typeface="Meiryo UI" charset="0"/>
-                        <a:cs typeface="Meiryo UI" charset="0"/>
-                      </a:endParaRPr>
-                    </a:p>
-                  </a:txBody>
-                  <a:tcPr marL="18288" marR="18288" marT="18288" marB="18288" anchor="ctr">
-                    <a:lnL w="6350" cap="flat" cmpd="sng" algn="ctr">
-                      <a:solidFill>
-                        <a:srgbClr val="D3DED0"/>
-                      </a:solidFill>
-                      <a:prstDash val="solid"/>
-                      <a:round/>
-                      <a:headEnd type="none" w="med" len="med"/>
-                      <a:tailEnd type="none" w="med" len="med"/>
-                    </a:lnL>
-                    <a:lnR w="6350" cap="flat" cmpd="sng" algn="ctr">
-                      <a:solidFill>
-                        <a:srgbClr val="D3DED0"/>
-                      </a:solidFill>
-                      <a:prstDash val="solid"/>
-                      <a:round/>
-                      <a:headEnd type="none" w="med" len="med"/>
-                      <a:tailEnd type="none" w="med" len="med"/>
-                    </a:lnR>
-                    <a:lnT w="6350" cap="flat" cmpd="sng" algn="ctr">
-                      <a:solidFill>
-                        <a:srgbClr val="D3DED0"/>
-                      </a:solidFill>
-                      <a:prstDash val="solid"/>
-                      <a:round/>
-                      <a:headEnd type="none" w="med" len="med"/>
-                      <a:tailEnd type="none" w="med" len="med"/>
-                    </a:lnT>
-                    <a:lnB w="6350" cap="flat" cmpd="sng" algn="ctr">
-                      <a:solidFill>
-                        <a:srgbClr val="D3DED0"/>
-                      </a:solidFill>
-                      <a:prstDash val="solid"/>
-                      <a:round/>
-                      <a:headEnd type="none" w="med" len="med"/>
-                      <a:tailEnd type="none" w="med" len="med"/>
-                    </a:lnB>
-                  </a:tcPr>
-                </a:tc>
-                <a:tc>
-                  <a:txBody>
-                    <a:bodyPr/>
-                    <a:lstStyle/>
-                    <a:p>
-                      <a:pPr indent="0" marL="0">
-                        <a:buNone/>
-                      </a:pPr>
-                      <a:endParaRPr lang="en-US" sz="600" dirty="0">
-                        <a:latin typeface="Meiryo UI" charset="0"/>
-                        <a:ea typeface="Meiryo UI" charset="0"/>
-                        <a:cs typeface="Meiryo UI" charset="0"/>
-                      </a:endParaRPr>
-                    </a:p>
-                  </a:txBody>
-                  <a:tcPr marL="18288" marR="18288" marT="18288" marB="18288" anchor="ctr">
-                    <a:lnL w="6350" cap="flat" cmpd="sng" algn="ctr">
-                      <a:solidFill>
-                        <a:srgbClr val="D3DED0"/>
-                      </a:solidFill>
-                      <a:prstDash val="solid"/>
-                      <a:round/>
-                      <a:headEnd type="none" w="med" len="med"/>
-                      <a:tailEnd type="none" w="med" len="med"/>
-                    </a:lnL>
-                    <a:lnR w="6350" cap="flat" cmpd="sng" algn="ctr">
-                      <a:solidFill>
-                        <a:srgbClr val="D3DED0"/>
-                      </a:solidFill>
-                      <a:prstDash val="solid"/>
-                      <a:round/>
-                      <a:headEnd type="none" w="med" len="med"/>
-                      <a:tailEnd type="none" w="med" len="med"/>
-                    </a:lnR>
-                    <a:lnT w="6350" cap="flat" cmpd="sng" algn="ctr">
-                      <a:solidFill>
-                        <a:srgbClr val="D3DED0"/>
-                      </a:solidFill>
-                      <a:prstDash val="solid"/>
-                      <a:round/>
-                      <a:headEnd type="none" w="med" len="med"/>
-                      <a:tailEnd type="none" w="med" len="med"/>
-                    </a:lnT>
-                    <a:lnB w="6350" cap="flat" cmpd="sng" algn="ctr">
-                      <a:solidFill>
-                        <a:srgbClr val="D3DED0"/>
-                      </a:solidFill>
-                      <a:prstDash val="solid"/>
-                      <a:round/>
-                      <a:headEnd type="none" w="med" len="med"/>
-                      <a:tailEnd type="none" w="med" len="med"/>
-                    </a:lnB>
-                    <a:solidFill>
-                      <a:srgbClr val="2C5F2D"/>
-                    </a:solidFill>
-                  </a:tcPr>
-                </a:tc>
-                <a:tc>
-                  <a:txBody>
-                    <a:bodyPr/>
-                    <a:lstStyle/>
-                    <a:p>
-                      <a:pPr indent="0" marL="0">
-                        <a:buNone/>
-                      </a:pPr>
-                      <a:endParaRPr lang="en-US" sz="600" dirty="0">
-                        <a:latin typeface="Meiryo UI" charset="0"/>
-                        <a:ea typeface="Meiryo UI" charset="0"/>
-                        <a:cs typeface="Meiryo UI" charset="0"/>
-                      </a:endParaRPr>
-                    </a:p>
-                  </a:txBody>
-                  <a:tcPr marL="18288" marR="18288" marT="18288" marB="18288" anchor="ctr">
-                    <a:lnL w="6350" cap="flat" cmpd="sng" algn="ctr">
-                      <a:solidFill>
-                        <a:srgbClr val="D3DED0"/>
-                      </a:solidFill>
-                      <a:prstDash val="solid"/>
-                      <a:round/>
-                      <a:headEnd type="none" w="med" len="med"/>
-                      <a:tailEnd type="none" w="med" len="med"/>
-                    </a:lnL>
-                    <a:lnR w="6350" cap="flat" cmpd="sng" algn="ctr">
-                      <a:solidFill>
-                        <a:srgbClr val="D3DED0"/>
-                      </a:solidFill>
-                      <a:prstDash val="solid"/>
-                      <a:round/>
-                      <a:headEnd type="none" w="med" len="med"/>
-                      <a:tailEnd type="none" w="med" len="med"/>
-                    </a:lnR>
-                    <a:lnT w="6350" cap="flat" cmpd="sng" algn="ctr">
-                      <a:solidFill>
-                        <a:srgbClr val="D3DED0"/>
-                      </a:solidFill>
-                      <a:prstDash val="solid"/>
-                      <a:round/>
-                      <a:headEnd type="none" w="med" len="med"/>
-                      <a:tailEnd type="none" w="med" len="med"/>
-                    </a:lnT>
-                    <a:lnB w="6350" cap="flat" cmpd="sng" algn="ctr">
-                      <a:solidFill>
-                        <a:srgbClr val="D3DED0"/>
-                      </a:solidFill>
-                      <a:prstDash val="solid"/>
-                      <a:round/>
-                      <a:headEnd type="none" w="med" len="med"/>
-                      <a:tailEnd type="none" w="med" len="med"/>
-                    </a:lnB>
-                  </a:tcPr>
-                </a:tc>
-                <a:tc>
-                  <a:txBody>
-                    <a:bodyPr/>
-                    <a:lstStyle/>
-                    <a:p>
-                      <a:pPr indent="0" marL="0">
-                        <a:buNone/>
-                      </a:pPr>
-                      <a:endParaRPr lang="en-US" sz="600" dirty="0">
-                        <a:latin typeface="Meiryo UI" charset="0"/>
-                        <a:ea typeface="Meiryo UI" charset="0"/>
-                        <a:cs typeface="Meiryo UI" charset="0"/>
-                      </a:endParaRPr>
-                    </a:p>
-                  </a:txBody>
-                  <a:tcPr marL="18288" marR="18288" marT="18288" marB="18288" anchor="ctr">
-                    <a:lnL w="6350" cap="flat" cmpd="sng" algn="ctr">
-                      <a:solidFill>
-                        <a:srgbClr val="D3DED0"/>
-                      </a:solidFill>
-                      <a:prstDash val="solid"/>
-                      <a:round/>
-                      <a:headEnd type="none" w="med" len="med"/>
-                      <a:tailEnd type="none" w="med" len="med"/>
-                    </a:lnL>
-                    <a:lnR w="6350" cap="flat" cmpd="sng" algn="ctr">
-                      <a:solidFill>
-                        <a:srgbClr val="D3DED0"/>
-                      </a:solidFill>
-                      <a:prstDash val="solid"/>
-                      <a:round/>
-                      <a:headEnd type="none" w="med" len="med"/>
-                      <a:tailEnd type="none" w="med" len="med"/>
-                    </a:lnR>
-                    <a:lnT w="6350" cap="flat" cmpd="sng" algn="ctr">
-                      <a:solidFill>
-                        <a:srgbClr val="D3DED0"/>
-                      </a:solidFill>
-                      <a:prstDash val="solid"/>
-                      <a:round/>
-                      <a:headEnd type="none" w="med" len="med"/>
-                      <a:tailEnd type="none" w="med" len="med"/>
-                    </a:lnT>
-                    <a:lnB w="6350" cap="flat" cmpd="sng" algn="ctr">
-                      <a:solidFill>
-                        <a:srgbClr val="D3DED0"/>
-                      </a:solidFill>
-                      <a:prstDash val="solid"/>
-                      <a:round/>
-                      <a:headEnd type="none" w="med" len="med"/>
-                      <a:tailEnd type="none" w="med" len="med"/>
-                    </a:lnB>
-                  </a:tcPr>
-                </a:tc>
-                <a:tc>
-                  <a:txBody>
-                    <a:bodyPr/>
-                    <a:lstStyle/>
-                    <a:p>
-                      <a:pPr indent="0" marL="0">
-                        <a:buNone/>
-                      </a:pPr>
-                      <a:endParaRPr lang="en-US" sz="600" dirty="0">
-                        <a:latin typeface="Meiryo UI" charset="0"/>
-                        <a:ea typeface="Meiryo UI" charset="0"/>
-                        <a:cs typeface="Meiryo UI" charset="0"/>
-                      </a:endParaRPr>
-                    </a:p>
-                  </a:txBody>
-                  <a:tcPr marL="18288" marR="18288" marT="18288" marB="18288" anchor="ctr">
-                    <a:lnL w="6350" cap="flat" cmpd="sng" algn="ctr">
-                      <a:solidFill>
-                        <a:srgbClr val="D3DED0"/>
-                      </a:solidFill>
-                      <a:prstDash val="solid"/>
-                      <a:round/>
-                      <a:headEnd type="none" w="med" len="med"/>
-                      <a:tailEnd type="none" w="med" len="med"/>
-                    </a:lnL>
-                    <a:lnR w="6350" cap="flat" cmpd="sng" algn="ctr">
-                      <a:solidFill>
-                        <a:srgbClr val="D3DED0"/>
-                      </a:solidFill>
-                      <a:prstDash val="solid"/>
-                      <a:round/>
-                      <a:headEnd type="none" w="med" len="med"/>
-                      <a:tailEnd type="none" w="med" len="med"/>
-                    </a:lnR>
-                    <a:lnT w="6350" cap="flat" cmpd="sng" algn="ctr">
-                      <a:solidFill>
-                        <a:srgbClr val="D3DED0"/>
-                      </a:solidFill>
-                      <a:prstDash val="solid"/>
-                      <a:round/>
-                      <a:headEnd type="none" w="med" len="med"/>
-                      <a:tailEnd type="none" w="med" len="med"/>
-                    </a:lnT>
-                    <a:lnB w="6350" cap="flat" cmpd="sng" algn="ctr">
-                      <a:solidFill>
-                        <a:srgbClr val="D3DED0"/>
-                      </a:solidFill>
-                      <a:prstDash val="solid"/>
-                      <a:round/>
-                      <a:headEnd type="none" w="med" len="med"/>
-                      <a:tailEnd type="none" w="med" len="med"/>
-                    </a:lnB>
-                  </a:tcPr>
-                </a:tc>
-                <a:tc>
-                  <a:txBody>
-                    <a:bodyPr/>
-                    <a:lstStyle/>
-                    <a:p>
-                      <a:pPr indent="0" marL="0">
-                        <a:buNone/>
-                      </a:pPr>
-                      <a:endParaRPr lang="en-US" sz="600" dirty="0">
-                        <a:latin typeface="Meiryo UI" charset="0"/>
-                        <a:ea typeface="Meiryo UI" charset="0"/>
-                        <a:cs typeface="Meiryo UI" charset="0"/>
-                      </a:endParaRPr>
-                    </a:p>
-                  </a:txBody>
-                  <a:tcPr marL="18288" marR="18288" marT="18288" marB="18288" anchor="ctr">
-                    <a:lnL w="6350" cap="flat" cmpd="sng" algn="ctr">
-                      <a:solidFill>
-                        <a:srgbClr val="D3DED0"/>
-                      </a:solidFill>
-                      <a:prstDash val="solid"/>
-                      <a:round/>
-                      <a:headEnd type="none" w="med" len="med"/>
-                      <a:tailEnd type="none" w="med" len="med"/>
-                    </a:lnL>
-                    <a:lnR w="6350" cap="flat" cmpd="sng" algn="ctr">
-                      <a:solidFill>
-                        <a:srgbClr val="D3DED0"/>
-                      </a:solidFill>
-                      <a:prstDash val="solid"/>
-                      <a:round/>
-                      <a:headEnd type="none" w="med" len="med"/>
-                      <a:tailEnd type="none" w="med" len="med"/>
-                    </a:lnR>
-                    <a:lnT w="6350" cap="flat" cmpd="sng" algn="ctr">
-                      <a:solidFill>
-                        <a:srgbClr val="D3DED0"/>
-                      </a:solidFill>
-                      <a:prstDash val="solid"/>
-                      <a:round/>
-                      <a:headEnd type="none" w="med" len="med"/>
-                      <a:tailEnd type="none" w="med" len="med"/>
-                    </a:lnT>
-                    <a:lnB w="6350" cap="flat" cmpd="sng" algn="ctr">
-                      <a:solidFill>
-                        <a:srgbClr val="D3DED0"/>
-                      </a:solidFill>
-                      <a:prstDash val="solid"/>
-                      <a:round/>
-                      <a:headEnd type="none" w="med" len="med"/>
-                      <a:tailEnd type="none" w="med" len="med"/>
-                    </a:lnB>
-                  </a:tcPr>
-                </a:tc>
-                <a:tc>
-                  <a:txBody>
-                    <a:bodyPr/>
-                    <a:lstStyle/>
-                    <a:p>
-                      <a:pPr indent="0" marL="0">
-                        <a:buNone/>
-                      </a:pPr>
-                      <a:endParaRPr lang="en-US" sz="600" dirty="0">
-                        <a:latin typeface="Meiryo UI" charset="0"/>
-                        <a:ea typeface="Meiryo UI" charset="0"/>
-                        <a:cs typeface="Meiryo UI" charset="0"/>
-                      </a:endParaRPr>
-                    </a:p>
-                  </a:txBody>
-                  <a:tcPr marL="18288" marR="18288" marT="18288" marB="18288" anchor="ctr">
-                    <a:lnL w="6350" cap="flat" cmpd="sng" algn="ctr">
-                      <a:solidFill>
-                        <a:srgbClr val="D3DED0"/>
-                      </a:solidFill>
-                      <a:prstDash val="solid"/>
-                      <a:round/>
-                      <a:headEnd type="none" w="med" len="med"/>
-                      <a:tailEnd type="none" w="med" len="med"/>
-                    </a:lnL>
-                    <a:lnR w="6350" cap="flat" cmpd="sng" algn="ctr">
-                      <a:solidFill>
-                        <a:srgbClr val="D3DED0"/>
-                      </a:solidFill>
-                      <a:prstDash val="solid"/>
-                      <a:round/>
-                      <a:headEnd type="none" w="med" len="med"/>
-                      <a:tailEnd type="none" w="med" len="med"/>
-                    </a:lnR>
-                    <a:lnT w="6350" cap="flat" cmpd="sng" algn="ctr">
-                      <a:solidFill>
-                        <a:srgbClr val="D3DED0"/>
-                      </a:solidFill>
-                      <a:prstDash val="solid"/>
-                      <a:round/>
-                      <a:headEnd type="none" w="med" len="med"/>
-                      <a:tailEnd type="none" w="med" len="med"/>
-                    </a:lnT>
-                    <a:lnB w="6350" cap="flat" cmpd="sng" algn="ctr">
-                      <a:solidFill>
-                        <a:srgbClr val="D3DED0"/>
-                      </a:solidFill>
-                      <a:prstDash val="solid"/>
-                      <a:round/>
-                      <a:headEnd type="none" w="med" len="med"/>
-                      <a:tailEnd type="none" w="med" len="med"/>
-                    </a:lnB>
-                  </a:tcPr>
-                </a:tc>
-                <a:tc>
-                  <a:txBody>
-                    <a:bodyPr/>
-                    <a:lstStyle/>
-                    <a:p>
-                      <a:pPr indent="0" marL="0">
-                        <a:buNone/>
-                      </a:pPr>
-                      <a:endParaRPr lang="en-US" sz="600" dirty="0">
-                        <a:latin typeface="Meiryo UI" charset="0"/>
-                        <a:ea typeface="Meiryo UI" charset="0"/>
-                        <a:cs typeface="Meiryo UI" charset="0"/>
-                      </a:endParaRPr>
-                    </a:p>
-                  </a:txBody>
-                  <a:tcPr marL="18288" marR="18288" marT="18288" marB="18288" anchor="ctr">
-                    <a:lnL w="6350" cap="flat" cmpd="sng" algn="ctr">
-                      <a:solidFill>
-                        <a:srgbClr val="D3DED0"/>
-                      </a:solidFill>
-                      <a:prstDash val="solid"/>
-                      <a:round/>
-                      <a:headEnd type="none" w="med" len="med"/>
-                      <a:tailEnd type="none" w="med" len="med"/>
-                    </a:lnL>
-                    <a:lnR w="6350" cap="flat" cmpd="sng" algn="ctr">
-                      <a:solidFill>
-                        <a:srgbClr val="D3DED0"/>
-                      </a:solidFill>
-                      <a:prstDash val="solid"/>
-                      <a:round/>
-                      <a:headEnd type="none" w="med" len="med"/>
-                      <a:tailEnd type="none" w="med" len="med"/>
-                    </a:lnR>
-                    <a:lnT w="6350" cap="flat" cmpd="sng" algn="ctr">
-                      <a:solidFill>
-                        <a:srgbClr val="D3DED0"/>
-                      </a:solidFill>
-                      <a:prstDash val="solid"/>
-                      <a:round/>
-                      <a:headEnd type="none" w="med" len="med"/>
-                      <a:tailEnd type="none" w="med" len="med"/>
-                    </a:lnT>
-                    <a:lnB w="6350" cap="flat" cmpd="sng" algn="ctr">
-                      <a:solidFill>
-                        <a:srgbClr val="D3DED0"/>
-                      </a:solidFill>
-                      <a:prstDash val="solid"/>
-                      <a:round/>
-                      <a:headEnd type="none" w="med" len="med"/>
-                      <a:tailEnd type="none" w="med" len="med"/>
-                    </a:lnB>
-                  </a:tcPr>
-                </a:tc>
-                <a:tc>
-                  <a:txBody>
-                    <a:bodyPr/>
-                    <a:lstStyle/>
-                    <a:p>
-                      <a:pPr indent="0" marL="0">
-                        <a:buNone/>
-                      </a:pPr>
-                      <a:endParaRPr lang="en-US" sz="600" dirty="0">
-                        <a:latin typeface="Meiryo UI" charset="0"/>
-                        <a:ea typeface="Meiryo UI" charset="0"/>
-                        <a:cs typeface="Meiryo UI" charset="0"/>
-                      </a:endParaRPr>
-                    </a:p>
-                  </a:txBody>
-                  <a:tcPr marL="18288" marR="18288" marT="18288" marB="18288" anchor="ctr">
-                    <a:lnL w="6350" cap="flat" cmpd="sng" algn="ctr">
-                      <a:solidFill>
-                        <a:srgbClr val="D3DED0"/>
-                      </a:solidFill>
-                      <a:prstDash val="solid"/>
-                      <a:round/>
-                      <a:headEnd type="none" w="med" len="med"/>
-                      <a:tailEnd type="none" w="med" len="med"/>
-                    </a:lnL>
-                    <a:lnR w="6350" cap="flat" cmpd="sng" algn="ctr">
-                      <a:solidFill>
-                        <a:srgbClr val="D3DED0"/>
-                      </a:solidFill>
-                      <a:prstDash val="solid"/>
-                      <a:round/>
-                      <a:headEnd type="none" w="med" len="med"/>
-                      <a:tailEnd type="none" w="med" len="med"/>
-                    </a:lnR>
-                    <a:lnT w="6350" cap="flat" cmpd="sng" algn="ctr">
-                      <a:solidFill>
-                        <a:srgbClr val="D3DED0"/>
-                      </a:solidFill>
-                      <a:prstDash val="solid"/>
-                      <a:round/>
-                      <a:headEnd type="none" w="med" len="med"/>
-                      <a:tailEnd type="none" w="med" len="med"/>
-                    </a:lnT>
-                    <a:lnB w="6350" cap="flat" cmpd="sng" algn="ctr">
-                      <a:solidFill>
-                        <a:srgbClr val="D3DED0"/>
-                      </a:solidFill>
-                      <a:prstDash val="solid"/>
-                      <a:round/>
-                      <a:headEnd type="none" w="med" len="med"/>
-                      <a:tailEnd type="none" w="med" len="med"/>
-                    </a:lnB>
-                  </a:tcPr>
-                </a:tc>
-              </a:tr>
-              <a:tr h="150876">
-                <a:tc>
-                  <a:txBody>
-                    <a:bodyPr/>
-                    <a:lstStyle/>
-                    <a:p>
-                      <a:pPr algn="ctr" indent="0" marL="0">
-                        <a:buNone/>
-                      </a:pPr>
-                      <a:r>
-                        <a:rPr lang="en-US" sz="600" b="1" dirty="0">
-                          <a:solidFill>
-                            <a:srgbClr val="2B2B2B"/>
-                          </a:solidFill>
-                          <a:latin typeface="Meiryo UI" pitchFamily="34" charset="0"/>
-                          <a:ea typeface="Meiryo UI" pitchFamily="34" charset="-122"/>
-                          <a:cs typeface="Meiryo UI" pitchFamily="34" charset="-120"/>
-                        </a:rPr>
-                        <a:t>0.4</a:t>
-                      </a:r>
-                      <a:endParaRPr lang="en-US" sz="600" dirty="0">
-                        <a:latin typeface="Meiryo UI" charset="0"/>
-                        <a:ea typeface="Meiryo UI" charset="0"/>
-                        <a:cs typeface="Meiryo UI" charset="0"/>
-                      </a:endParaRPr>
-                    </a:p>
-                  </a:txBody>
-                  <a:tcPr marL="18288" marR="18288" marT="18288" marB="18288" anchor="ctr">
-                    <a:lnL w="6350" cap="flat" cmpd="sng" algn="ctr">
-                      <a:solidFill>
-                        <a:srgbClr val="D3DED0"/>
-                      </a:solidFill>
-                      <a:prstDash val="solid"/>
-                      <a:round/>
-                      <a:headEnd type="none" w="med" len="med"/>
-                      <a:tailEnd type="none" w="med" len="med"/>
-                    </a:lnL>
-                    <a:lnR w="6350" cap="flat" cmpd="sng" algn="ctr">
-                      <a:solidFill>
-                        <a:srgbClr val="D3DED0"/>
-                      </a:solidFill>
-                      <a:prstDash val="solid"/>
-                      <a:round/>
-                      <a:headEnd type="none" w="med" len="med"/>
-                      <a:tailEnd type="none" w="med" len="med"/>
-                    </a:lnR>
-                    <a:lnT w="6350" cap="flat" cmpd="sng" algn="ctr">
-                      <a:solidFill>
-                        <a:srgbClr val="D3DED0"/>
-                      </a:solidFill>
-                      <a:prstDash val="solid"/>
-                      <a:round/>
-                      <a:headEnd type="none" w="med" len="med"/>
-                      <a:tailEnd type="none" w="med" len="med"/>
-                    </a:lnT>
-                    <a:lnB w="6350" cap="flat" cmpd="sng" algn="ctr">
-                      <a:solidFill>
-                        <a:srgbClr val="D3DED0"/>
-                      </a:solidFill>
-                      <a:prstDash val="solid"/>
-                      <a:round/>
-                      <a:headEnd type="none" w="med" len="med"/>
-                      <a:tailEnd type="none" w="med" len="med"/>
-                    </a:lnB>
-                  </a:tcPr>
-                </a:tc>
-                <a:tc>
-                  <a:txBody>
-                    <a:bodyPr/>
-                    <a:lstStyle/>
-                    <a:p>
-                      <a:pPr indent="0" marL="0">
-                        <a:buNone/>
-                      </a:pPr>
-                      <a:r>
-                        <a:rPr lang="en-US" sz="600" dirty="0">
-                          <a:solidFill>
-                            <a:srgbClr val="2B2B2B"/>
-                          </a:solidFill>
-                          <a:latin typeface="Meiryo UI" pitchFamily="34" charset="0"/>
-                          <a:ea typeface="Meiryo UI" pitchFamily="34" charset="-122"/>
-                          <a:cs typeface="Meiryo UI" pitchFamily="34" charset="-120"/>
-                        </a:rPr>
-                        <a:t>役員中間報告・踏み込みスコープ協議(G1)</a:t>
-                      </a:r>
-                      <a:endParaRPr lang="en-US" sz="600" dirty="0">
-                        <a:latin typeface="Meiryo UI" charset="0"/>
-                        <a:ea typeface="Meiryo UI" charset="0"/>
-                        <a:cs typeface="Meiryo UI" charset="0"/>
-                      </a:endParaRPr>
-                    </a:p>
-                  </a:txBody>
-                  <a:tcPr marL="18288" marR="18288" marT="18288" marB="18288" anchor="ctr">
-                    <a:lnL w="6350" cap="flat" cmpd="sng" algn="ctr">
-                      <a:solidFill>
-                        <a:srgbClr val="D3DED0"/>
-                      </a:solidFill>
-                      <a:prstDash val="solid"/>
-                      <a:round/>
-                      <a:headEnd type="none" w="med" len="med"/>
-                      <a:tailEnd type="none" w="med" len="med"/>
-                    </a:lnL>
-                    <a:lnR w="6350" cap="flat" cmpd="sng" algn="ctr">
-                      <a:solidFill>
-                        <a:srgbClr val="D3DED0"/>
-                      </a:solidFill>
-                      <a:prstDash val="solid"/>
-                      <a:round/>
-                      <a:headEnd type="none" w="med" len="med"/>
-                      <a:tailEnd type="none" w="med" len="med"/>
-                    </a:lnR>
-                    <a:lnT w="6350" cap="flat" cmpd="sng" algn="ctr">
-                      <a:solidFill>
-                        <a:srgbClr val="D3DED0"/>
-                      </a:solidFill>
-                      <a:prstDash val="solid"/>
-                      <a:round/>
-                      <a:headEnd type="none" w="med" len="med"/>
-                      <a:tailEnd type="none" w="med" len="med"/>
-                    </a:lnT>
-                    <a:lnB w="6350" cap="flat" cmpd="sng" algn="ctr">
-                      <a:solidFill>
-                        <a:srgbClr val="D3DED0"/>
-                      </a:solidFill>
-                      <a:prstDash val="solid"/>
-                      <a:round/>
-                      <a:headEnd type="none" w="med" len="med"/>
-                      <a:tailEnd type="none" w="med" len="med"/>
-                    </a:lnB>
-                  </a:tcPr>
-                </a:tc>
-                <a:tc>
-                  <a:txBody>
-                    <a:bodyPr/>
-                    <a:lstStyle/>
-                    <a:p>
-                      <a:pPr indent="0" marL="0">
-                        <a:buNone/>
-                      </a:pPr>
-                      <a:r>
-                        <a:rPr lang="en-US" sz="600" dirty="0">
-                          <a:solidFill>
-                            <a:srgbClr val="595959"/>
-                          </a:solidFill>
-                          <a:latin typeface="Meiryo UI" pitchFamily="34" charset="0"/>
-                          <a:ea typeface="Meiryo UI" pitchFamily="34" charset="-122"/>
-                          <a:cs typeface="Meiryo UI" pitchFamily="34" charset="-120"/>
-                        </a:rPr>
-                        <a:t>中間報告資料</a:t>
+                        <a:t>中間報告・ゲート判定記録・効果台帳</a:t>
                       </a:r>
                       <a:endParaRPr lang="en-US" sz="600" dirty="0">
                         <a:latin typeface="Meiryo UI" charset="0"/>
@@ -12365,703 +11668,6 @@
                       <a:headEnd type="none" w="med" len="med"/>
                       <a:tailEnd type="none" w="med" len="med"/>
                     </a:lnB>
-                  </a:tcPr>
-                </a:tc>
-                <a:tc>
-                  <a:txBody>
-                    <a:bodyPr/>
-                    <a:lstStyle/>
-                    <a:p>
-                      <a:pPr indent="0" marL="0">
-                        <a:buNone/>
-                      </a:pPr>
-                      <a:endParaRPr lang="en-US" sz="600" dirty="0">
-                        <a:latin typeface="Meiryo UI" charset="0"/>
-                        <a:ea typeface="Meiryo UI" charset="0"/>
-                        <a:cs typeface="Meiryo UI" charset="0"/>
-                      </a:endParaRPr>
-                    </a:p>
-                  </a:txBody>
-                  <a:tcPr marL="18288" marR="18288" marT="18288" marB="18288" anchor="ctr">
-                    <a:lnL w="6350" cap="flat" cmpd="sng" algn="ctr">
-                      <a:solidFill>
-                        <a:srgbClr val="D3DED0"/>
-                      </a:solidFill>
-                      <a:prstDash val="solid"/>
-                      <a:round/>
-                      <a:headEnd type="none" w="med" len="med"/>
-                      <a:tailEnd type="none" w="med" len="med"/>
-                    </a:lnL>
-                    <a:lnR w="6350" cap="flat" cmpd="sng" algn="ctr">
-                      <a:solidFill>
-                        <a:srgbClr val="D3DED0"/>
-                      </a:solidFill>
-                      <a:prstDash val="solid"/>
-                      <a:round/>
-                      <a:headEnd type="none" w="med" len="med"/>
-                      <a:tailEnd type="none" w="med" len="med"/>
-                    </a:lnR>
-                    <a:lnT w="6350" cap="flat" cmpd="sng" algn="ctr">
-                      <a:solidFill>
-                        <a:srgbClr val="D3DED0"/>
-                      </a:solidFill>
-                      <a:prstDash val="solid"/>
-                      <a:round/>
-                      <a:headEnd type="none" w="med" len="med"/>
-                      <a:tailEnd type="none" w="med" len="med"/>
-                    </a:lnT>
-                    <a:lnB w="6350" cap="flat" cmpd="sng" algn="ctr">
-                      <a:solidFill>
-                        <a:srgbClr val="D3DED0"/>
-                      </a:solidFill>
-                      <a:prstDash val="solid"/>
-                      <a:round/>
-                      <a:headEnd type="none" w="med" len="med"/>
-                      <a:tailEnd type="none" w="med" len="med"/>
-                    </a:lnB>
-                  </a:tcPr>
-                </a:tc>
-                <a:tc>
-                  <a:txBody>
-                    <a:bodyPr/>
-                    <a:lstStyle/>
-                    <a:p>
-                      <a:pPr indent="0" marL="0">
-                        <a:buNone/>
-                      </a:pPr>
-                      <a:endParaRPr lang="en-US" sz="600" dirty="0">
-                        <a:latin typeface="Meiryo UI" charset="0"/>
-                        <a:ea typeface="Meiryo UI" charset="0"/>
-                        <a:cs typeface="Meiryo UI" charset="0"/>
-                      </a:endParaRPr>
-                    </a:p>
-                  </a:txBody>
-                  <a:tcPr marL="18288" marR="18288" marT="18288" marB="18288" anchor="ctr">
-                    <a:lnL w="6350" cap="flat" cmpd="sng" algn="ctr">
-                      <a:solidFill>
-                        <a:srgbClr val="D3DED0"/>
-                      </a:solidFill>
-                      <a:prstDash val="solid"/>
-                      <a:round/>
-                      <a:headEnd type="none" w="med" len="med"/>
-                      <a:tailEnd type="none" w="med" len="med"/>
-                    </a:lnL>
-                    <a:lnR w="6350" cap="flat" cmpd="sng" algn="ctr">
-                      <a:solidFill>
-                        <a:srgbClr val="D3DED0"/>
-                      </a:solidFill>
-                      <a:prstDash val="solid"/>
-                      <a:round/>
-                      <a:headEnd type="none" w="med" len="med"/>
-                      <a:tailEnd type="none" w="med" len="med"/>
-                    </a:lnR>
-                    <a:lnT w="6350" cap="flat" cmpd="sng" algn="ctr">
-                      <a:solidFill>
-                        <a:srgbClr val="D3DED0"/>
-                      </a:solidFill>
-                      <a:prstDash val="solid"/>
-                      <a:round/>
-                      <a:headEnd type="none" w="med" len="med"/>
-                      <a:tailEnd type="none" w="med" len="med"/>
-                    </a:lnT>
-                    <a:lnB w="6350" cap="flat" cmpd="sng" algn="ctr">
-                      <a:solidFill>
-                        <a:srgbClr val="D3DED0"/>
-                      </a:solidFill>
-                      <a:prstDash val="solid"/>
-                      <a:round/>
-                      <a:headEnd type="none" w="med" len="med"/>
-                      <a:tailEnd type="none" w="med" len="med"/>
-                    </a:lnB>
-                  </a:tcPr>
-                </a:tc>
-                <a:tc>
-                  <a:txBody>
-                    <a:bodyPr/>
-                    <a:lstStyle/>
-                    <a:p>
-                      <a:pPr indent="0" marL="0">
-                        <a:buNone/>
-                      </a:pPr>
-                      <a:endParaRPr lang="en-US" sz="600" dirty="0">
-                        <a:latin typeface="Meiryo UI" charset="0"/>
-                        <a:ea typeface="Meiryo UI" charset="0"/>
-                        <a:cs typeface="Meiryo UI" charset="0"/>
-                      </a:endParaRPr>
-                    </a:p>
-                  </a:txBody>
-                  <a:tcPr marL="18288" marR="18288" marT="18288" marB="18288" anchor="ctr">
-                    <a:lnL w="6350" cap="flat" cmpd="sng" algn="ctr">
-                      <a:solidFill>
-                        <a:srgbClr val="D3DED0"/>
-                      </a:solidFill>
-                      <a:prstDash val="solid"/>
-                      <a:round/>
-                      <a:headEnd type="none" w="med" len="med"/>
-                      <a:tailEnd type="none" w="med" len="med"/>
-                    </a:lnL>
-                    <a:lnR w="6350" cap="flat" cmpd="sng" algn="ctr">
-                      <a:solidFill>
-                        <a:srgbClr val="D3DED0"/>
-                      </a:solidFill>
-                      <a:prstDash val="solid"/>
-                      <a:round/>
-                      <a:headEnd type="none" w="med" len="med"/>
-                      <a:tailEnd type="none" w="med" len="med"/>
-                    </a:lnR>
-                    <a:lnT w="6350" cap="flat" cmpd="sng" algn="ctr">
-                      <a:solidFill>
-                        <a:srgbClr val="D3DED0"/>
-                      </a:solidFill>
-                      <a:prstDash val="solid"/>
-                      <a:round/>
-                      <a:headEnd type="none" w="med" len="med"/>
-                      <a:tailEnd type="none" w="med" len="med"/>
-                    </a:lnT>
-                    <a:lnB w="6350" cap="flat" cmpd="sng" algn="ctr">
-                      <a:solidFill>
-                        <a:srgbClr val="D3DED0"/>
-                      </a:solidFill>
-                      <a:prstDash val="solid"/>
-                      <a:round/>
-                      <a:headEnd type="none" w="med" len="med"/>
-                      <a:tailEnd type="none" w="med" len="med"/>
-                    </a:lnB>
-                  </a:tcPr>
-                </a:tc>
-                <a:tc>
-                  <a:txBody>
-                    <a:bodyPr/>
-                    <a:lstStyle/>
-                    <a:p>
-                      <a:pPr indent="0" marL="0">
-                        <a:buNone/>
-                      </a:pPr>
-                      <a:endParaRPr lang="en-US" sz="600" dirty="0">
-                        <a:latin typeface="Meiryo UI" charset="0"/>
-                        <a:ea typeface="Meiryo UI" charset="0"/>
-                        <a:cs typeface="Meiryo UI" charset="0"/>
-                      </a:endParaRPr>
-                    </a:p>
-                  </a:txBody>
-                  <a:tcPr marL="18288" marR="18288" marT="18288" marB="18288" anchor="ctr">
-                    <a:lnL w="6350" cap="flat" cmpd="sng" algn="ctr">
-                      <a:solidFill>
-                        <a:srgbClr val="D3DED0"/>
-                      </a:solidFill>
-                      <a:prstDash val="solid"/>
-                      <a:round/>
-                      <a:headEnd type="none" w="med" len="med"/>
-                      <a:tailEnd type="none" w="med" len="med"/>
-                    </a:lnL>
-                    <a:lnR w="6350" cap="flat" cmpd="sng" algn="ctr">
-                      <a:solidFill>
-                        <a:srgbClr val="D3DED0"/>
-                      </a:solidFill>
-                      <a:prstDash val="solid"/>
-                      <a:round/>
-                      <a:headEnd type="none" w="med" len="med"/>
-                      <a:tailEnd type="none" w="med" len="med"/>
-                    </a:lnR>
-                    <a:lnT w="6350" cap="flat" cmpd="sng" algn="ctr">
-                      <a:solidFill>
-                        <a:srgbClr val="D3DED0"/>
-                      </a:solidFill>
-                      <a:prstDash val="solid"/>
-                      <a:round/>
-                      <a:headEnd type="none" w="med" len="med"/>
-                      <a:tailEnd type="none" w="med" len="med"/>
-                    </a:lnT>
-                    <a:lnB w="6350" cap="flat" cmpd="sng" algn="ctr">
-                      <a:solidFill>
-                        <a:srgbClr val="D3DED0"/>
-                      </a:solidFill>
-                      <a:prstDash val="solid"/>
-                      <a:round/>
-                      <a:headEnd type="none" w="med" len="med"/>
-                      <a:tailEnd type="none" w="med" len="med"/>
-                    </a:lnB>
-                  </a:tcPr>
-                </a:tc>
-              </a:tr>
-              <a:tr h="150876">
-                <a:tc>
-                  <a:txBody>
-                    <a:bodyPr/>
-                    <a:lstStyle/>
-                    <a:p>
-                      <a:pPr algn="ctr" indent="0" marL="0">
-                        <a:buNone/>
-                      </a:pPr>
-                      <a:r>
-                        <a:rPr lang="en-US" sz="600" b="1" dirty="0">
-                          <a:solidFill>
-                            <a:srgbClr val="2B2B2B"/>
-                          </a:solidFill>
-                          <a:latin typeface="Meiryo UI" pitchFamily="34" charset="0"/>
-                          <a:ea typeface="Meiryo UI" pitchFamily="34" charset="-122"/>
-                          <a:cs typeface="Meiryo UI" pitchFamily="34" charset="-120"/>
-                        </a:rPr>
-                        <a:t>0.5</a:t>
-                      </a:r>
-                      <a:endParaRPr lang="en-US" sz="600" dirty="0">
-                        <a:latin typeface="Meiryo UI" charset="0"/>
-                        <a:ea typeface="Meiryo UI" charset="0"/>
-                        <a:cs typeface="Meiryo UI" charset="0"/>
-                      </a:endParaRPr>
-                    </a:p>
-                  </a:txBody>
-                  <a:tcPr marL="18288" marR="18288" marT="18288" marB="18288" anchor="ctr">
-                    <a:lnL w="6350" cap="flat" cmpd="sng" algn="ctr">
-                      <a:solidFill>
-                        <a:srgbClr val="D3DED0"/>
-                      </a:solidFill>
-                      <a:prstDash val="solid"/>
-                      <a:round/>
-                      <a:headEnd type="none" w="med" len="med"/>
-                      <a:tailEnd type="none" w="med" len="med"/>
-                    </a:lnL>
-                    <a:lnR w="6350" cap="flat" cmpd="sng" algn="ctr">
-                      <a:solidFill>
-                        <a:srgbClr val="D3DED0"/>
-                      </a:solidFill>
-                      <a:prstDash val="solid"/>
-                      <a:round/>
-                      <a:headEnd type="none" w="med" len="med"/>
-                      <a:tailEnd type="none" w="med" len="med"/>
-                    </a:lnR>
-                    <a:lnT w="6350" cap="flat" cmpd="sng" algn="ctr">
-                      <a:solidFill>
-                        <a:srgbClr val="D3DED0"/>
-                      </a:solidFill>
-                      <a:prstDash val="solid"/>
-                      <a:round/>
-                      <a:headEnd type="none" w="med" len="med"/>
-                      <a:tailEnd type="none" w="med" len="med"/>
-                    </a:lnT>
-                    <a:lnB w="6350" cap="flat" cmpd="sng" algn="ctr">
-                      <a:solidFill>
-                        <a:srgbClr val="D3DED0"/>
-                      </a:solidFill>
-                      <a:prstDash val="solid"/>
-                      <a:round/>
-                      <a:headEnd type="none" w="med" len="med"/>
-                      <a:tailEnd type="none" w="med" len="med"/>
-                    </a:lnB>
-                  </a:tcPr>
-                </a:tc>
-                <a:tc>
-                  <a:txBody>
-                    <a:bodyPr/>
-                    <a:lstStyle/>
-                    <a:p>
-                      <a:pPr indent="0" marL="0">
-                        <a:buNone/>
-                      </a:pPr>
-                      <a:r>
-                        <a:rPr lang="en-US" sz="600" dirty="0">
-                          <a:solidFill>
-                            <a:srgbClr val="2B2B2B"/>
-                          </a:solidFill>
-                          <a:latin typeface="Meiryo UI" pitchFamily="34" charset="0"/>
-                          <a:ea typeface="Meiryo UI" pitchFamily="34" charset="-122"/>
-                          <a:cs typeface="Meiryo UI" pitchFamily="34" charset="-120"/>
-                        </a:rPr>
-                        <a:t>ゲート運営(G1→G2→G3)・効果トラッキング(OEE正味・省人化実績)</a:t>
-                      </a:r>
-                      <a:endParaRPr lang="en-US" sz="600" dirty="0">
-                        <a:latin typeface="Meiryo UI" charset="0"/>
-                        <a:ea typeface="Meiryo UI" charset="0"/>
-                        <a:cs typeface="Meiryo UI" charset="0"/>
-                      </a:endParaRPr>
-                    </a:p>
-                  </a:txBody>
-                  <a:tcPr marL="18288" marR="18288" marT="18288" marB="18288" anchor="ctr">
-                    <a:lnL w="6350" cap="flat" cmpd="sng" algn="ctr">
-                      <a:solidFill>
-                        <a:srgbClr val="D3DED0"/>
-                      </a:solidFill>
-                      <a:prstDash val="solid"/>
-                      <a:round/>
-                      <a:headEnd type="none" w="med" len="med"/>
-                      <a:tailEnd type="none" w="med" len="med"/>
-                    </a:lnL>
-                    <a:lnR w="6350" cap="flat" cmpd="sng" algn="ctr">
-                      <a:solidFill>
-                        <a:srgbClr val="D3DED0"/>
-                      </a:solidFill>
-                      <a:prstDash val="solid"/>
-                      <a:round/>
-                      <a:headEnd type="none" w="med" len="med"/>
-                      <a:tailEnd type="none" w="med" len="med"/>
-                    </a:lnR>
-                    <a:lnT w="6350" cap="flat" cmpd="sng" algn="ctr">
-                      <a:solidFill>
-                        <a:srgbClr val="D3DED0"/>
-                      </a:solidFill>
-                      <a:prstDash val="solid"/>
-                      <a:round/>
-                      <a:headEnd type="none" w="med" len="med"/>
-                      <a:tailEnd type="none" w="med" len="med"/>
-                    </a:lnT>
-                    <a:lnB w="6350" cap="flat" cmpd="sng" algn="ctr">
-                      <a:solidFill>
-                        <a:srgbClr val="D3DED0"/>
-                      </a:solidFill>
-                      <a:prstDash val="solid"/>
-                      <a:round/>
-                      <a:headEnd type="none" w="med" len="med"/>
-                      <a:tailEnd type="none" w="med" len="med"/>
-                    </a:lnB>
-                  </a:tcPr>
-                </a:tc>
-                <a:tc>
-                  <a:txBody>
-                    <a:bodyPr/>
-                    <a:lstStyle/>
-                    <a:p>
-                      <a:pPr indent="0" marL="0">
-                        <a:buNone/>
-                      </a:pPr>
-                      <a:r>
-                        <a:rPr lang="en-US" sz="600" dirty="0">
-                          <a:solidFill>
-                            <a:srgbClr val="595959"/>
-                          </a:solidFill>
-                          <a:latin typeface="Meiryo UI" pitchFamily="34" charset="0"/>
-                          <a:ea typeface="Meiryo UI" pitchFamily="34" charset="-122"/>
-                          <a:cs typeface="Meiryo UI" pitchFamily="34" charset="-120"/>
-                        </a:rPr>
-                        <a:t>ゲート判定記録・効果台帳</a:t>
-                      </a:r>
-                      <a:endParaRPr lang="en-US" sz="600" dirty="0">
-                        <a:latin typeface="Meiryo UI" charset="0"/>
-                        <a:ea typeface="Meiryo UI" charset="0"/>
-                        <a:cs typeface="Meiryo UI" charset="0"/>
-                      </a:endParaRPr>
-                    </a:p>
-                  </a:txBody>
-                  <a:tcPr marL="18288" marR="18288" marT="18288" marB="18288" anchor="ctr">
-                    <a:lnL w="6350" cap="flat" cmpd="sng" algn="ctr">
-                      <a:solidFill>
-                        <a:srgbClr val="D3DED0"/>
-                      </a:solidFill>
-                      <a:prstDash val="solid"/>
-                      <a:round/>
-                      <a:headEnd type="none" w="med" len="med"/>
-                      <a:tailEnd type="none" w="med" len="med"/>
-                    </a:lnL>
-                    <a:lnR w="6350" cap="flat" cmpd="sng" algn="ctr">
-                      <a:solidFill>
-                        <a:srgbClr val="D3DED0"/>
-                      </a:solidFill>
-                      <a:prstDash val="solid"/>
-                      <a:round/>
-                      <a:headEnd type="none" w="med" len="med"/>
-                      <a:tailEnd type="none" w="med" len="med"/>
-                    </a:lnR>
-                    <a:lnT w="6350" cap="flat" cmpd="sng" algn="ctr">
-                      <a:solidFill>
-                        <a:srgbClr val="D3DED0"/>
-                      </a:solidFill>
-                      <a:prstDash val="solid"/>
-                      <a:round/>
-                      <a:headEnd type="none" w="med" len="med"/>
-                      <a:tailEnd type="none" w="med" len="med"/>
-                    </a:lnT>
-                    <a:lnB w="6350" cap="flat" cmpd="sng" algn="ctr">
-                      <a:solidFill>
-                        <a:srgbClr val="D3DED0"/>
-                      </a:solidFill>
-                      <a:prstDash val="solid"/>
-                      <a:round/>
-                      <a:headEnd type="none" w="med" len="med"/>
-                      <a:tailEnd type="none" w="med" len="med"/>
-                    </a:lnB>
-                  </a:tcPr>
-                </a:tc>
-                <a:tc>
-                  <a:txBody>
-                    <a:bodyPr/>
-                    <a:lstStyle/>
-                    <a:p>
-                      <a:pPr indent="0" marL="0">
-                        <a:buNone/>
-                      </a:pPr>
-                      <a:r>
-                        <a:rPr lang="en-US" sz="600" dirty="0">
-                          <a:solidFill>
-                            <a:srgbClr val="2B2B2B"/>
-                          </a:solidFill>
-                          <a:latin typeface="Meiryo UI" pitchFamily="34" charset="0"/>
-                          <a:ea typeface="Meiryo UI" pitchFamily="34" charset="-122"/>
-                          <a:cs typeface="Meiryo UI" pitchFamily="34" charset="-120"/>
-                        </a:rPr>
-                        <a:t>PMO</a:t>
-                      </a:r>
-                      <a:endParaRPr lang="en-US" sz="600" dirty="0">
-                        <a:latin typeface="Meiryo UI" charset="0"/>
-                        <a:ea typeface="Meiryo UI" charset="0"/>
-                        <a:cs typeface="Meiryo UI" charset="0"/>
-                      </a:endParaRPr>
-                    </a:p>
-                  </a:txBody>
-                  <a:tcPr marL="18288" marR="18288" marT="18288" marB="18288" anchor="ctr">
-                    <a:lnL w="6350" cap="flat" cmpd="sng" algn="ctr">
-                      <a:solidFill>
-                        <a:srgbClr val="D3DED0"/>
-                      </a:solidFill>
-                      <a:prstDash val="solid"/>
-                      <a:round/>
-                      <a:headEnd type="none" w="med" len="med"/>
-                      <a:tailEnd type="none" w="med" len="med"/>
-                    </a:lnL>
-                    <a:lnR w="6350" cap="flat" cmpd="sng" algn="ctr">
-                      <a:solidFill>
-                        <a:srgbClr val="D3DED0"/>
-                      </a:solidFill>
-                      <a:prstDash val="solid"/>
-                      <a:round/>
-                      <a:headEnd type="none" w="med" len="med"/>
-                      <a:tailEnd type="none" w="med" len="med"/>
-                    </a:lnR>
-                    <a:lnT w="6350" cap="flat" cmpd="sng" algn="ctr">
-                      <a:solidFill>
-                        <a:srgbClr val="D3DED0"/>
-                      </a:solidFill>
-                      <a:prstDash val="solid"/>
-                      <a:round/>
-                      <a:headEnd type="none" w="med" len="med"/>
-                      <a:tailEnd type="none" w="med" len="med"/>
-                    </a:lnT>
-                    <a:lnB w="6350" cap="flat" cmpd="sng" algn="ctr">
-                      <a:solidFill>
-                        <a:srgbClr val="D3DED0"/>
-                      </a:solidFill>
-                      <a:prstDash val="solid"/>
-                      <a:round/>
-                      <a:headEnd type="none" w="med" len="med"/>
-                      <a:tailEnd type="none" w="med" len="med"/>
-                    </a:lnB>
-                  </a:tcPr>
-                </a:tc>
-                <a:tc>
-                  <a:txBody>
-                    <a:bodyPr/>
-                    <a:lstStyle/>
-                    <a:p>
-                      <a:pPr indent="0" marL="0">
-                        <a:buNone/>
-                      </a:pPr>
-                      <a:endParaRPr lang="en-US" sz="600" dirty="0">
-                        <a:latin typeface="Meiryo UI" charset="0"/>
-                        <a:ea typeface="Meiryo UI" charset="0"/>
-                        <a:cs typeface="Meiryo UI" charset="0"/>
-                      </a:endParaRPr>
-                    </a:p>
-                  </a:txBody>
-                  <a:tcPr marL="18288" marR="18288" marT="18288" marB="18288" anchor="ctr">
-                    <a:lnL w="6350" cap="flat" cmpd="sng" algn="ctr">
-                      <a:solidFill>
-                        <a:srgbClr val="D3DED0"/>
-                      </a:solidFill>
-                      <a:prstDash val="solid"/>
-                      <a:round/>
-                      <a:headEnd type="none" w="med" len="med"/>
-                      <a:tailEnd type="none" w="med" len="med"/>
-                    </a:lnL>
-                    <a:lnR w="6350" cap="flat" cmpd="sng" algn="ctr">
-                      <a:solidFill>
-                        <a:srgbClr val="D3DED0"/>
-                      </a:solidFill>
-                      <a:prstDash val="solid"/>
-                      <a:round/>
-                      <a:headEnd type="none" w="med" len="med"/>
-                      <a:tailEnd type="none" w="med" len="med"/>
-                    </a:lnR>
-                    <a:lnT w="6350" cap="flat" cmpd="sng" algn="ctr">
-                      <a:solidFill>
-                        <a:srgbClr val="D3DED0"/>
-                      </a:solidFill>
-                      <a:prstDash val="solid"/>
-                      <a:round/>
-                      <a:headEnd type="none" w="med" len="med"/>
-                      <a:tailEnd type="none" w="med" len="med"/>
-                    </a:lnT>
-                    <a:lnB w="6350" cap="flat" cmpd="sng" algn="ctr">
-                      <a:solidFill>
-                        <a:srgbClr val="D3DED0"/>
-                      </a:solidFill>
-                      <a:prstDash val="solid"/>
-                      <a:round/>
-                      <a:headEnd type="none" w="med" len="med"/>
-                      <a:tailEnd type="none" w="med" len="med"/>
-                    </a:lnB>
-                  </a:tcPr>
-                </a:tc>
-                <a:tc>
-                  <a:txBody>
-                    <a:bodyPr/>
-                    <a:lstStyle/>
-                    <a:p>
-                      <a:pPr indent="0" marL="0">
-                        <a:buNone/>
-                      </a:pPr>
-                      <a:endParaRPr lang="en-US" sz="600" dirty="0">
-                        <a:latin typeface="Meiryo UI" charset="0"/>
-                        <a:ea typeface="Meiryo UI" charset="0"/>
-                        <a:cs typeface="Meiryo UI" charset="0"/>
-                      </a:endParaRPr>
-                    </a:p>
-                  </a:txBody>
-                  <a:tcPr marL="18288" marR="18288" marT="18288" marB="18288" anchor="ctr">
-                    <a:lnL w="6350" cap="flat" cmpd="sng" algn="ctr">
-                      <a:solidFill>
-                        <a:srgbClr val="D3DED0"/>
-                      </a:solidFill>
-                      <a:prstDash val="solid"/>
-                      <a:round/>
-                      <a:headEnd type="none" w="med" len="med"/>
-                      <a:tailEnd type="none" w="med" len="med"/>
-                    </a:lnL>
-                    <a:lnR w="6350" cap="flat" cmpd="sng" algn="ctr">
-                      <a:solidFill>
-                        <a:srgbClr val="D3DED0"/>
-                      </a:solidFill>
-                      <a:prstDash val="solid"/>
-                      <a:round/>
-                      <a:headEnd type="none" w="med" len="med"/>
-                      <a:tailEnd type="none" w="med" len="med"/>
-                    </a:lnR>
-                    <a:lnT w="6350" cap="flat" cmpd="sng" algn="ctr">
-                      <a:solidFill>
-                        <a:srgbClr val="D3DED0"/>
-                      </a:solidFill>
-                      <a:prstDash val="solid"/>
-                      <a:round/>
-                      <a:headEnd type="none" w="med" len="med"/>
-                      <a:tailEnd type="none" w="med" len="med"/>
-                    </a:lnT>
-                    <a:lnB w="6350" cap="flat" cmpd="sng" algn="ctr">
-                      <a:solidFill>
-                        <a:srgbClr val="D3DED0"/>
-                      </a:solidFill>
-                      <a:prstDash val="solid"/>
-                      <a:round/>
-                      <a:headEnd type="none" w="med" len="med"/>
-                      <a:tailEnd type="none" w="med" len="med"/>
-                    </a:lnB>
-                  </a:tcPr>
-                </a:tc>
-                <a:tc>
-                  <a:txBody>
-                    <a:bodyPr/>
-                    <a:lstStyle/>
-                    <a:p>
-                      <a:pPr indent="0" marL="0">
-                        <a:buNone/>
-                      </a:pPr>
-                      <a:endParaRPr lang="en-US" sz="600" dirty="0">
-                        <a:latin typeface="Meiryo UI" charset="0"/>
-                        <a:ea typeface="Meiryo UI" charset="0"/>
-                        <a:cs typeface="Meiryo UI" charset="0"/>
-                      </a:endParaRPr>
-                    </a:p>
-                  </a:txBody>
-                  <a:tcPr marL="18288" marR="18288" marT="18288" marB="18288" anchor="ctr">
-                    <a:lnL w="6350" cap="flat" cmpd="sng" algn="ctr">
-                      <a:solidFill>
-                        <a:srgbClr val="D3DED0"/>
-                      </a:solidFill>
-                      <a:prstDash val="solid"/>
-                      <a:round/>
-                      <a:headEnd type="none" w="med" len="med"/>
-                      <a:tailEnd type="none" w="med" len="med"/>
-                    </a:lnL>
-                    <a:lnR w="6350" cap="flat" cmpd="sng" algn="ctr">
-                      <a:solidFill>
-                        <a:srgbClr val="D3DED0"/>
-                      </a:solidFill>
-                      <a:prstDash val="solid"/>
-                      <a:round/>
-                      <a:headEnd type="none" w="med" len="med"/>
-                      <a:tailEnd type="none" w="med" len="med"/>
-                    </a:lnR>
-                    <a:lnT w="6350" cap="flat" cmpd="sng" algn="ctr">
-                      <a:solidFill>
-                        <a:srgbClr val="D3DED0"/>
-                      </a:solidFill>
-                      <a:prstDash val="solid"/>
-                      <a:round/>
-                      <a:headEnd type="none" w="med" len="med"/>
-                      <a:tailEnd type="none" w="med" len="med"/>
-                    </a:lnT>
-                    <a:lnB w="6350" cap="flat" cmpd="sng" algn="ctr">
-                      <a:solidFill>
-                        <a:srgbClr val="D3DED0"/>
-                      </a:solidFill>
-                      <a:prstDash val="solid"/>
-                      <a:round/>
-                      <a:headEnd type="none" w="med" len="med"/>
-                      <a:tailEnd type="none" w="med" len="med"/>
-                    </a:lnB>
-                    <a:solidFill>
-                      <a:srgbClr val="2C5F2D"/>
-                    </a:solidFill>
-                  </a:tcPr>
-                </a:tc>
-                <a:tc>
-                  <a:txBody>
-                    <a:bodyPr/>
-                    <a:lstStyle/>
-                    <a:p>
-                      <a:pPr indent="0" marL="0">
-                        <a:buNone/>
-                      </a:pPr>
-                      <a:endParaRPr lang="en-US" sz="600" dirty="0">
-                        <a:latin typeface="Meiryo UI" charset="0"/>
-                        <a:ea typeface="Meiryo UI" charset="0"/>
-                        <a:cs typeface="Meiryo UI" charset="0"/>
-                      </a:endParaRPr>
-                    </a:p>
-                  </a:txBody>
-                  <a:tcPr marL="18288" marR="18288" marT="18288" marB="18288" anchor="ctr">
-                    <a:lnL w="6350" cap="flat" cmpd="sng" algn="ctr">
-                      <a:solidFill>
-                        <a:srgbClr val="D3DED0"/>
-                      </a:solidFill>
-                      <a:prstDash val="solid"/>
-                      <a:round/>
-                      <a:headEnd type="none" w="med" len="med"/>
-                      <a:tailEnd type="none" w="med" len="med"/>
-                    </a:lnL>
-                    <a:lnR w="6350" cap="flat" cmpd="sng" algn="ctr">
-                      <a:solidFill>
-                        <a:srgbClr val="D3DED0"/>
-                      </a:solidFill>
-                      <a:prstDash val="solid"/>
-                      <a:round/>
-                      <a:headEnd type="none" w="med" len="med"/>
-                      <a:tailEnd type="none" w="med" len="med"/>
-                    </a:lnR>
-                    <a:lnT w="6350" cap="flat" cmpd="sng" algn="ctr">
-                      <a:solidFill>
-                        <a:srgbClr val="D3DED0"/>
-                      </a:solidFill>
-                      <a:prstDash val="solid"/>
-                      <a:round/>
-                      <a:headEnd type="none" w="med" len="med"/>
-                      <a:tailEnd type="none" w="med" len="med"/>
-                    </a:lnT>
-                    <a:lnB w="6350" cap="flat" cmpd="sng" algn="ctr">
-                      <a:solidFill>
-                        <a:srgbClr val="D3DED0"/>
-                      </a:solidFill>
-                      <a:prstDash val="solid"/>
-                      <a:round/>
-                      <a:headEnd type="none" w="med" len="med"/>
-                      <a:tailEnd type="none" w="med" len="med"/>
-                    </a:lnB>
                     <a:solidFill>
                       <a:srgbClr val="2C5F2D"/>
                     </a:solidFill>
@@ -19905,7 +18511,7 @@
                           <a:ea typeface="Meiryo UI" pitchFamily="34" charset="-122"/>
                           <a:cs typeface="Meiryo UI" pitchFamily="34" charset="-120"/>
                         </a:rPr>
-                        <a:t>調査設計(ワークサンプリング計画・簡易カメラ設置・労組/現場説明)</a:t>
+                        <a:t>調査設計(ワークサンプリング計画・簡易カメラ設置・作業者への事前説明)</a:t>
                       </a:r>
                       <a:endParaRPr lang="en-US" sz="600" dirty="0">
                         <a:latin typeface="Meiryo UI" charset="0"/>
@@ -30477,7 +29083,7 @@
                           <a:ea typeface="Meiryo UI" pitchFamily="34" charset="-122"/>
                           <a:cs typeface="Meiryo UI" pitchFamily="34" charset="-120"/>
                         </a:rPr>
-                        <a:t>WS4 人材・チェンジマネジメント(リーダー: 生技セ+人事)</a:t>
+                        <a:t>WS4 要員移行(人事部門と連携)</a:t>
                       </a:r>
                       <a:endParaRPr lang="en-US" sz="650" dirty="0">
                         <a:latin typeface="Meiryo UI" charset="0"/>
@@ -30645,722 +29251,7 @@
                           <a:ea typeface="Meiryo UI" pitchFamily="34" charset="-122"/>
                           <a:cs typeface="Meiryo UI" pitchFamily="34" charset="-120"/>
                         </a:rPr>
-                        <a:t>ラインアーキテクト第1期生のWSアサイン(調査×育成のOJT一体化)</a:t>
-                      </a:r>
-                      <a:endParaRPr lang="en-US" sz="600" dirty="0">
-                        <a:latin typeface="Meiryo UI" charset="0"/>
-                        <a:ea typeface="Meiryo UI" charset="0"/>
-                        <a:cs typeface="Meiryo UI" charset="0"/>
-                      </a:endParaRPr>
-                    </a:p>
-                  </a:txBody>
-                  <a:tcPr marL="18288" marR="18288" marT="18288" marB="18288" anchor="ctr">
-                    <a:lnL w="6350" cap="flat" cmpd="sng" algn="ctr">
-                      <a:solidFill>
-                        <a:srgbClr val="D3DED0"/>
-                      </a:solidFill>
-                      <a:prstDash val="solid"/>
-                      <a:round/>
-                      <a:headEnd type="none" w="med" len="med"/>
-                      <a:tailEnd type="none" w="med" len="med"/>
-                    </a:lnL>
-                    <a:lnR w="6350" cap="flat" cmpd="sng" algn="ctr">
-                      <a:solidFill>
-                        <a:srgbClr val="D3DED0"/>
-                      </a:solidFill>
-                      <a:prstDash val="solid"/>
-                      <a:round/>
-                      <a:headEnd type="none" w="med" len="med"/>
-                      <a:tailEnd type="none" w="med" len="med"/>
-                    </a:lnR>
-                    <a:lnT w="6350" cap="flat" cmpd="sng" algn="ctr">
-                      <a:solidFill>
-                        <a:srgbClr val="D3DED0"/>
-                      </a:solidFill>
-                      <a:prstDash val="solid"/>
-                      <a:round/>
-                      <a:headEnd type="none" w="med" len="med"/>
-                      <a:tailEnd type="none" w="med" len="med"/>
-                    </a:lnT>
-                    <a:lnB w="6350" cap="flat" cmpd="sng" algn="ctr">
-                      <a:solidFill>
-                        <a:srgbClr val="D3DED0"/>
-                      </a:solidFill>
-                      <a:prstDash val="solid"/>
-                      <a:round/>
-                      <a:headEnd type="none" w="med" len="med"/>
-                      <a:tailEnd type="none" w="med" len="med"/>
-                    </a:lnB>
-                  </a:tcPr>
-                </a:tc>
-                <a:tc>
-                  <a:txBody>
-                    <a:bodyPr/>
-                    <a:lstStyle/>
-                    <a:p>
-                      <a:pPr indent="0" marL="0">
-                        <a:buNone/>
-                      </a:pPr>
-                      <a:r>
-                        <a:rPr lang="en-US" sz="600" dirty="0">
-                          <a:solidFill>
-                            <a:srgbClr val="595959"/>
-                          </a:solidFill>
-                          <a:latin typeface="Meiryo UI" pitchFamily="34" charset="0"/>
-                          <a:ea typeface="Meiryo UI" pitchFamily="34" charset="-122"/>
-                          <a:cs typeface="Meiryo UI" pitchFamily="34" charset="-120"/>
-                        </a:rPr>
-                        <a:t>アサイン計画</a:t>
-                      </a:r>
-                      <a:endParaRPr lang="en-US" sz="600" dirty="0">
-                        <a:latin typeface="Meiryo UI" charset="0"/>
-                        <a:ea typeface="Meiryo UI" charset="0"/>
-                        <a:cs typeface="Meiryo UI" charset="0"/>
-                      </a:endParaRPr>
-                    </a:p>
-                  </a:txBody>
-                  <a:tcPr marL="18288" marR="18288" marT="18288" marB="18288" anchor="ctr">
-                    <a:lnL w="6350" cap="flat" cmpd="sng" algn="ctr">
-                      <a:solidFill>
-                        <a:srgbClr val="D3DED0"/>
-                      </a:solidFill>
-                      <a:prstDash val="solid"/>
-                      <a:round/>
-                      <a:headEnd type="none" w="med" len="med"/>
-                      <a:tailEnd type="none" w="med" len="med"/>
-                    </a:lnL>
-                    <a:lnR w="6350" cap="flat" cmpd="sng" algn="ctr">
-                      <a:solidFill>
-                        <a:srgbClr val="D3DED0"/>
-                      </a:solidFill>
-                      <a:prstDash val="solid"/>
-                      <a:round/>
-                      <a:headEnd type="none" w="med" len="med"/>
-                      <a:tailEnd type="none" w="med" len="med"/>
-                    </a:lnR>
-                    <a:lnT w="6350" cap="flat" cmpd="sng" algn="ctr">
-                      <a:solidFill>
-                        <a:srgbClr val="D3DED0"/>
-                      </a:solidFill>
-                      <a:prstDash val="solid"/>
-                      <a:round/>
-                      <a:headEnd type="none" w="med" len="med"/>
-                      <a:tailEnd type="none" w="med" len="med"/>
-                    </a:lnT>
-                    <a:lnB w="6350" cap="flat" cmpd="sng" algn="ctr">
-                      <a:solidFill>
-                        <a:srgbClr val="D3DED0"/>
-                      </a:solidFill>
-                      <a:prstDash val="solid"/>
-                      <a:round/>
-                      <a:headEnd type="none" w="med" len="med"/>
-                      <a:tailEnd type="none" w="med" len="med"/>
-                    </a:lnB>
-                  </a:tcPr>
-                </a:tc>
-                <a:tc>
-                  <a:txBody>
-                    <a:bodyPr/>
-                    <a:lstStyle/>
-                    <a:p>
-                      <a:pPr indent="0" marL="0">
-                        <a:buNone/>
-                      </a:pPr>
-                      <a:r>
-                        <a:rPr lang="en-US" sz="600" dirty="0">
-                          <a:solidFill>
-                            <a:srgbClr val="2B2B2B"/>
-                          </a:solidFill>
-                          <a:latin typeface="Meiryo UI" pitchFamily="34" charset="0"/>
-                          <a:ea typeface="Meiryo UI" pitchFamily="34" charset="-122"/>
-                          <a:cs typeface="Meiryo UI" pitchFamily="34" charset="-120"/>
-                        </a:rPr>
-                        <a:t>生技セ</a:t>
-                      </a:r>
-                      <a:endParaRPr lang="en-US" sz="600" dirty="0">
-                        <a:latin typeface="Meiryo UI" charset="0"/>
-                        <a:ea typeface="Meiryo UI" charset="0"/>
-                        <a:cs typeface="Meiryo UI" charset="0"/>
-                      </a:endParaRPr>
-                    </a:p>
-                  </a:txBody>
-                  <a:tcPr marL="18288" marR="18288" marT="18288" marB="18288" anchor="ctr">
-                    <a:lnL w="6350" cap="flat" cmpd="sng" algn="ctr">
-                      <a:solidFill>
-                        <a:srgbClr val="D3DED0"/>
-                      </a:solidFill>
-                      <a:prstDash val="solid"/>
-                      <a:round/>
-                      <a:headEnd type="none" w="med" len="med"/>
-                      <a:tailEnd type="none" w="med" len="med"/>
-                    </a:lnL>
-                    <a:lnR w="6350" cap="flat" cmpd="sng" algn="ctr">
-                      <a:solidFill>
-                        <a:srgbClr val="D3DED0"/>
-                      </a:solidFill>
-                      <a:prstDash val="solid"/>
-                      <a:round/>
-                      <a:headEnd type="none" w="med" len="med"/>
-                      <a:tailEnd type="none" w="med" len="med"/>
-                    </a:lnR>
-                    <a:lnT w="6350" cap="flat" cmpd="sng" algn="ctr">
-                      <a:solidFill>
-                        <a:srgbClr val="D3DED0"/>
-                      </a:solidFill>
-                      <a:prstDash val="solid"/>
-                      <a:round/>
-                      <a:headEnd type="none" w="med" len="med"/>
-                      <a:tailEnd type="none" w="med" len="med"/>
-                    </a:lnT>
-                    <a:lnB w="6350" cap="flat" cmpd="sng" algn="ctr">
-                      <a:solidFill>
-                        <a:srgbClr val="D3DED0"/>
-                      </a:solidFill>
-                      <a:prstDash val="solid"/>
-                      <a:round/>
-                      <a:headEnd type="none" w="med" len="med"/>
-                      <a:tailEnd type="none" w="med" len="med"/>
-                    </a:lnB>
-                  </a:tcPr>
-                </a:tc>
-                <a:tc>
-                  <a:txBody>
-                    <a:bodyPr/>
-                    <a:lstStyle/>
-                    <a:p>
-                      <a:pPr indent="0" marL="0">
-                        <a:buNone/>
-                      </a:pPr>
-                      <a:endParaRPr lang="en-US" sz="600" dirty="0">
-                        <a:latin typeface="Meiryo UI" charset="0"/>
-                        <a:ea typeface="Meiryo UI" charset="0"/>
-                        <a:cs typeface="Meiryo UI" charset="0"/>
-                      </a:endParaRPr>
-                    </a:p>
-                  </a:txBody>
-                  <a:tcPr marL="18288" marR="18288" marT="18288" marB="18288" anchor="ctr">
-                    <a:lnL w="6350" cap="flat" cmpd="sng" algn="ctr">
-                      <a:solidFill>
-                        <a:srgbClr val="D3DED0"/>
-                      </a:solidFill>
-                      <a:prstDash val="solid"/>
-                      <a:round/>
-                      <a:headEnd type="none" w="med" len="med"/>
-                      <a:tailEnd type="none" w="med" len="med"/>
-                    </a:lnL>
-                    <a:lnR w="6350" cap="flat" cmpd="sng" algn="ctr">
-                      <a:solidFill>
-                        <a:srgbClr val="D3DED0"/>
-                      </a:solidFill>
-                      <a:prstDash val="solid"/>
-                      <a:round/>
-                      <a:headEnd type="none" w="med" len="med"/>
-                      <a:tailEnd type="none" w="med" len="med"/>
-                    </a:lnR>
-                    <a:lnT w="6350" cap="flat" cmpd="sng" algn="ctr">
-                      <a:solidFill>
-                        <a:srgbClr val="D3DED0"/>
-                      </a:solidFill>
-                      <a:prstDash val="solid"/>
-                      <a:round/>
-                      <a:headEnd type="none" w="med" len="med"/>
-                      <a:tailEnd type="none" w="med" len="med"/>
-                    </a:lnT>
-                    <a:lnB w="6350" cap="flat" cmpd="sng" algn="ctr">
-                      <a:solidFill>
-                        <a:srgbClr val="D3DED0"/>
-                      </a:solidFill>
-                      <a:prstDash val="solid"/>
-                      <a:round/>
-                      <a:headEnd type="none" w="med" len="med"/>
-                      <a:tailEnd type="none" w="med" len="med"/>
-                    </a:lnB>
-                  </a:tcPr>
-                </a:tc>
-                <a:tc>
-                  <a:txBody>
-                    <a:bodyPr/>
-                    <a:lstStyle/>
-                    <a:p>
-                      <a:pPr indent="0" marL="0">
-                        <a:buNone/>
-                      </a:pPr>
-                      <a:endParaRPr lang="en-US" sz="600" dirty="0">
-                        <a:latin typeface="Meiryo UI" charset="0"/>
-                        <a:ea typeface="Meiryo UI" charset="0"/>
-                        <a:cs typeface="Meiryo UI" charset="0"/>
-                      </a:endParaRPr>
-                    </a:p>
-                  </a:txBody>
-                  <a:tcPr marL="18288" marR="18288" marT="18288" marB="18288" anchor="ctr">
-                    <a:lnL w="6350" cap="flat" cmpd="sng" algn="ctr">
-                      <a:solidFill>
-                        <a:srgbClr val="D3DED0"/>
-                      </a:solidFill>
-                      <a:prstDash val="solid"/>
-                      <a:round/>
-                      <a:headEnd type="none" w="med" len="med"/>
-                      <a:tailEnd type="none" w="med" len="med"/>
-                    </a:lnL>
-                    <a:lnR w="6350" cap="flat" cmpd="sng" algn="ctr">
-                      <a:solidFill>
-                        <a:srgbClr val="D3DED0"/>
-                      </a:solidFill>
-                      <a:prstDash val="solid"/>
-                      <a:round/>
-                      <a:headEnd type="none" w="med" len="med"/>
-                      <a:tailEnd type="none" w="med" len="med"/>
-                    </a:lnR>
-                    <a:lnT w="6350" cap="flat" cmpd="sng" algn="ctr">
-                      <a:solidFill>
-                        <a:srgbClr val="D3DED0"/>
-                      </a:solidFill>
-                      <a:prstDash val="solid"/>
-                      <a:round/>
-                      <a:headEnd type="none" w="med" len="med"/>
-                      <a:tailEnd type="none" w="med" len="med"/>
-                    </a:lnT>
-                    <a:lnB w="6350" cap="flat" cmpd="sng" algn="ctr">
-                      <a:solidFill>
-                        <a:srgbClr val="D3DED0"/>
-                      </a:solidFill>
-                      <a:prstDash val="solid"/>
-                      <a:round/>
-                      <a:headEnd type="none" w="med" len="med"/>
-                      <a:tailEnd type="none" w="med" len="med"/>
-                    </a:lnB>
-                    <a:solidFill>
-                      <a:srgbClr val="2C5F2D"/>
-                    </a:solidFill>
-                  </a:tcPr>
-                </a:tc>
-                <a:tc>
-                  <a:txBody>
-                    <a:bodyPr/>
-                    <a:lstStyle/>
-                    <a:p>
-                      <a:pPr indent="0" marL="0">
-                        <a:buNone/>
-                      </a:pPr>
-                      <a:endParaRPr lang="en-US" sz="600" dirty="0">
-                        <a:latin typeface="Meiryo UI" charset="0"/>
-                        <a:ea typeface="Meiryo UI" charset="0"/>
-                        <a:cs typeface="Meiryo UI" charset="0"/>
-                      </a:endParaRPr>
-                    </a:p>
-                  </a:txBody>
-                  <a:tcPr marL="18288" marR="18288" marT="18288" marB="18288" anchor="ctr">
-                    <a:lnL w="6350" cap="flat" cmpd="sng" algn="ctr">
-                      <a:solidFill>
-                        <a:srgbClr val="D3DED0"/>
-                      </a:solidFill>
-                      <a:prstDash val="solid"/>
-                      <a:round/>
-                      <a:headEnd type="none" w="med" len="med"/>
-                      <a:tailEnd type="none" w="med" len="med"/>
-                    </a:lnL>
-                    <a:lnR w="6350" cap="flat" cmpd="sng" algn="ctr">
-                      <a:solidFill>
-                        <a:srgbClr val="D3DED0"/>
-                      </a:solidFill>
-                      <a:prstDash val="solid"/>
-                      <a:round/>
-                      <a:headEnd type="none" w="med" len="med"/>
-                      <a:tailEnd type="none" w="med" len="med"/>
-                    </a:lnR>
-                    <a:lnT w="6350" cap="flat" cmpd="sng" algn="ctr">
-                      <a:solidFill>
-                        <a:srgbClr val="D3DED0"/>
-                      </a:solidFill>
-                      <a:prstDash val="solid"/>
-                      <a:round/>
-                      <a:headEnd type="none" w="med" len="med"/>
-                      <a:tailEnd type="none" w="med" len="med"/>
-                    </a:lnT>
-                    <a:lnB w="6350" cap="flat" cmpd="sng" algn="ctr">
-                      <a:solidFill>
-                        <a:srgbClr val="D3DED0"/>
-                      </a:solidFill>
-                      <a:prstDash val="solid"/>
-                      <a:round/>
-                      <a:headEnd type="none" w="med" len="med"/>
-                      <a:tailEnd type="none" w="med" len="med"/>
-                    </a:lnB>
-                    <a:solidFill>
-                      <a:srgbClr val="2C5F2D"/>
-                    </a:solidFill>
-                  </a:tcPr>
-                </a:tc>
-                <a:tc>
-                  <a:txBody>
-                    <a:bodyPr/>
-                    <a:lstStyle/>
-                    <a:p>
-                      <a:pPr indent="0" marL="0">
-                        <a:buNone/>
-                      </a:pPr>
-                      <a:endParaRPr lang="en-US" sz="600" dirty="0">
-                        <a:latin typeface="Meiryo UI" charset="0"/>
-                        <a:ea typeface="Meiryo UI" charset="0"/>
-                        <a:cs typeface="Meiryo UI" charset="0"/>
-                      </a:endParaRPr>
-                    </a:p>
-                  </a:txBody>
-                  <a:tcPr marL="18288" marR="18288" marT="18288" marB="18288" anchor="ctr">
-                    <a:lnL w="6350" cap="flat" cmpd="sng" algn="ctr">
-                      <a:solidFill>
-                        <a:srgbClr val="D3DED0"/>
-                      </a:solidFill>
-                      <a:prstDash val="solid"/>
-                      <a:round/>
-                      <a:headEnd type="none" w="med" len="med"/>
-                      <a:tailEnd type="none" w="med" len="med"/>
-                    </a:lnL>
-                    <a:lnR w="6350" cap="flat" cmpd="sng" algn="ctr">
-                      <a:solidFill>
-                        <a:srgbClr val="D3DED0"/>
-                      </a:solidFill>
-                      <a:prstDash val="solid"/>
-                      <a:round/>
-                      <a:headEnd type="none" w="med" len="med"/>
-                      <a:tailEnd type="none" w="med" len="med"/>
-                    </a:lnR>
-                    <a:lnT w="6350" cap="flat" cmpd="sng" algn="ctr">
-                      <a:solidFill>
-                        <a:srgbClr val="D3DED0"/>
-                      </a:solidFill>
-                      <a:prstDash val="solid"/>
-                      <a:round/>
-                      <a:headEnd type="none" w="med" len="med"/>
-                      <a:tailEnd type="none" w="med" len="med"/>
-                    </a:lnT>
-                    <a:lnB w="6350" cap="flat" cmpd="sng" algn="ctr">
-                      <a:solidFill>
-                        <a:srgbClr val="D3DED0"/>
-                      </a:solidFill>
-                      <a:prstDash val="solid"/>
-                      <a:round/>
-                      <a:headEnd type="none" w="med" len="med"/>
-                      <a:tailEnd type="none" w="med" len="med"/>
-                    </a:lnB>
-                    <a:solidFill>
-                      <a:srgbClr val="2C5F2D"/>
-                    </a:solidFill>
-                  </a:tcPr>
-                </a:tc>
-                <a:tc>
-                  <a:txBody>
-                    <a:bodyPr/>
-                    <a:lstStyle/>
-                    <a:p>
-                      <a:pPr indent="0" marL="0">
-                        <a:buNone/>
-                      </a:pPr>
-                      <a:endParaRPr lang="en-US" sz="600" dirty="0">
-                        <a:latin typeface="Meiryo UI" charset="0"/>
-                        <a:ea typeface="Meiryo UI" charset="0"/>
-                        <a:cs typeface="Meiryo UI" charset="0"/>
-                      </a:endParaRPr>
-                    </a:p>
-                  </a:txBody>
-                  <a:tcPr marL="18288" marR="18288" marT="18288" marB="18288" anchor="ctr">
-                    <a:lnL w="6350" cap="flat" cmpd="sng" algn="ctr">
-                      <a:solidFill>
-                        <a:srgbClr val="D3DED0"/>
-                      </a:solidFill>
-                      <a:prstDash val="solid"/>
-                      <a:round/>
-                      <a:headEnd type="none" w="med" len="med"/>
-                      <a:tailEnd type="none" w="med" len="med"/>
-                    </a:lnL>
-                    <a:lnR w="6350" cap="flat" cmpd="sng" algn="ctr">
-                      <a:solidFill>
-                        <a:srgbClr val="D3DED0"/>
-                      </a:solidFill>
-                      <a:prstDash val="solid"/>
-                      <a:round/>
-                      <a:headEnd type="none" w="med" len="med"/>
-                      <a:tailEnd type="none" w="med" len="med"/>
-                    </a:lnR>
-                    <a:lnT w="6350" cap="flat" cmpd="sng" algn="ctr">
-                      <a:solidFill>
-                        <a:srgbClr val="D3DED0"/>
-                      </a:solidFill>
-                      <a:prstDash val="solid"/>
-                      <a:round/>
-                      <a:headEnd type="none" w="med" len="med"/>
-                      <a:tailEnd type="none" w="med" len="med"/>
-                    </a:lnT>
-                    <a:lnB w="6350" cap="flat" cmpd="sng" algn="ctr">
-                      <a:solidFill>
-                        <a:srgbClr val="D3DED0"/>
-                      </a:solidFill>
-                      <a:prstDash val="solid"/>
-                      <a:round/>
-                      <a:headEnd type="none" w="med" len="med"/>
-                      <a:tailEnd type="none" w="med" len="med"/>
-                    </a:lnB>
-                    <a:solidFill>
-                      <a:srgbClr val="2C5F2D"/>
-                    </a:solidFill>
-                  </a:tcPr>
-                </a:tc>
-                <a:tc>
-                  <a:txBody>
-                    <a:bodyPr/>
-                    <a:lstStyle/>
-                    <a:p>
-                      <a:pPr indent="0" marL="0">
-                        <a:buNone/>
-                      </a:pPr>
-                      <a:endParaRPr lang="en-US" sz="600" dirty="0">
-                        <a:latin typeface="Meiryo UI" charset="0"/>
-                        <a:ea typeface="Meiryo UI" charset="0"/>
-                        <a:cs typeface="Meiryo UI" charset="0"/>
-                      </a:endParaRPr>
-                    </a:p>
-                  </a:txBody>
-                  <a:tcPr marL="18288" marR="18288" marT="18288" marB="18288" anchor="ctr">
-                    <a:lnL w="6350" cap="flat" cmpd="sng" algn="ctr">
-                      <a:solidFill>
-                        <a:srgbClr val="D3DED0"/>
-                      </a:solidFill>
-                      <a:prstDash val="solid"/>
-                      <a:round/>
-                      <a:headEnd type="none" w="med" len="med"/>
-                      <a:tailEnd type="none" w="med" len="med"/>
-                    </a:lnL>
-                    <a:lnR w="6350" cap="flat" cmpd="sng" algn="ctr">
-                      <a:solidFill>
-                        <a:srgbClr val="D3DED0"/>
-                      </a:solidFill>
-                      <a:prstDash val="solid"/>
-                      <a:round/>
-                      <a:headEnd type="none" w="med" len="med"/>
-                      <a:tailEnd type="none" w="med" len="med"/>
-                    </a:lnR>
-                    <a:lnT w="6350" cap="flat" cmpd="sng" algn="ctr">
-                      <a:solidFill>
-                        <a:srgbClr val="D3DED0"/>
-                      </a:solidFill>
-                      <a:prstDash val="solid"/>
-                      <a:round/>
-                      <a:headEnd type="none" w="med" len="med"/>
-                      <a:tailEnd type="none" w="med" len="med"/>
-                    </a:lnT>
-                    <a:lnB w="6350" cap="flat" cmpd="sng" algn="ctr">
-                      <a:solidFill>
-                        <a:srgbClr val="D3DED0"/>
-                      </a:solidFill>
-                      <a:prstDash val="solid"/>
-                      <a:round/>
-                      <a:headEnd type="none" w="med" len="med"/>
-                      <a:tailEnd type="none" w="med" len="med"/>
-                    </a:lnB>
-                    <a:solidFill>
-                      <a:srgbClr val="2C5F2D"/>
-                    </a:solidFill>
-                  </a:tcPr>
-                </a:tc>
-                <a:tc>
-                  <a:txBody>
-                    <a:bodyPr/>
-                    <a:lstStyle/>
-                    <a:p>
-                      <a:pPr indent="0" marL="0">
-                        <a:buNone/>
-                      </a:pPr>
-                      <a:endParaRPr lang="en-US" sz="600" dirty="0">
-                        <a:latin typeface="Meiryo UI" charset="0"/>
-                        <a:ea typeface="Meiryo UI" charset="0"/>
-                        <a:cs typeface="Meiryo UI" charset="0"/>
-                      </a:endParaRPr>
-                    </a:p>
-                  </a:txBody>
-                  <a:tcPr marL="18288" marR="18288" marT="18288" marB="18288" anchor="ctr">
-                    <a:lnL w="6350" cap="flat" cmpd="sng" algn="ctr">
-                      <a:solidFill>
-                        <a:srgbClr val="D3DED0"/>
-                      </a:solidFill>
-                      <a:prstDash val="solid"/>
-                      <a:round/>
-                      <a:headEnd type="none" w="med" len="med"/>
-                      <a:tailEnd type="none" w="med" len="med"/>
-                    </a:lnL>
-                    <a:lnR w="6350" cap="flat" cmpd="sng" algn="ctr">
-                      <a:solidFill>
-                        <a:srgbClr val="D3DED0"/>
-                      </a:solidFill>
-                      <a:prstDash val="solid"/>
-                      <a:round/>
-                      <a:headEnd type="none" w="med" len="med"/>
-                      <a:tailEnd type="none" w="med" len="med"/>
-                    </a:lnR>
-                    <a:lnT w="6350" cap="flat" cmpd="sng" algn="ctr">
-                      <a:solidFill>
-                        <a:srgbClr val="D3DED0"/>
-                      </a:solidFill>
-                      <a:prstDash val="solid"/>
-                      <a:round/>
-                      <a:headEnd type="none" w="med" len="med"/>
-                      <a:tailEnd type="none" w="med" len="med"/>
-                    </a:lnT>
-                    <a:lnB w="6350" cap="flat" cmpd="sng" algn="ctr">
-                      <a:solidFill>
-                        <a:srgbClr val="D3DED0"/>
-                      </a:solidFill>
-                      <a:prstDash val="solid"/>
-                      <a:round/>
-                      <a:headEnd type="none" w="med" len="med"/>
-                      <a:tailEnd type="none" w="med" len="med"/>
-                    </a:lnB>
-                    <a:solidFill>
-                      <a:srgbClr val="2C5F2D"/>
-                    </a:solidFill>
-                  </a:tcPr>
-                </a:tc>
-                <a:tc>
-                  <a:txBody>
-                    <a:bodyPr/>
-                    <a:lstStyle/>
-                    <a:p>
-                      <a:pPr indent="0" marL="0">
-                        <a:buNone/>
-                      </a:pPr>
-                      <a:endParaRPr lang="en-US" sz="600" dirty="0">
-                        <a:latin typeface="Meiryo UI" charset="0"/>
-                        <a:ea typeface="Meiryo UI" charset="0"/>
-                        <a:cs typeface="Meiryo UI" charset="0"/>
-                      </a:endParaRPr>
-                    </a:p>
-                  </a:txBody>
-                  <a:tcPr marL="18288" marR="18288" marT="18288" marB="18288" anchor="ctr">
-                    <a:lnL w="6350" cap="flat" cmpd="sng" algn="ctr">
-                      <a:solidFill>
-                        <a:srgbClr val="D3DED0"/>
-                      </a:solidFill>
-                      <a:prstDash val="solid"/>
-                      <a:round/>
-                      <a:headEnd type="none" w="med" len="med"/>
-                      <a:tailEnd type="none" w="med" len="med"/>
-                    </a:lnL>
-                    <a:lnR w="6350" cap="flat" cmpd="sng" algn="ctr">
-                      <a:solidFill>
-                        <a:srgbClr val="D3DED0"/>
-                      </a:solidFill>
-                      <a:prstDash val="solid"/>
-                      <a:round/>
-                      <a:headEnd type="none" w="med" len="med"/>
-                      <a:tailEnd type="none" w="med" len="med"/>
-                    </a:lnR>
-                    <a:lnT w="6350" cap="flat" cmpd="sng" algn="ctr">
-                      <a:solidFill>
-                        <a:srgbClr val="D3DED0"/>
-                      </a:solidFill>
-                      <a:prstDash val="solid"/>
-                      <a:round/>
-                      <a:headEnd type="none" w="med" len="med"/>
-                      <a:tailEnd type="none" w="med" len="med"/>
-                    </a:lnT>
-                    <a:lnB w="6350" cap="flat" cmpd="sng" algn="ctr">
-                      <a:solidFill>
-                        <a:srgbClr val="D3DED0"/>
-                      </a:solidFill>
-                      <a:prstDash val="solid"/>
-                      <a:round/>
-                      <a:headEnd type="none" w="med" len="med"/>
-                      <a:tailEnd type="none" w="med" len="med"/>
-                    </a:lnB>
-                    <a:solidFill>
-                      <a:srgbClr val="2C5F2D"/>
-                    </a:solidFill>
-                  </a:tcPr>
-                </a:tc>
-              </a:tr>
-              <a:tr h="150876">
-                <a:tc>
-                  <a:txBody>
-                    <a:bodyPr/>
-                    <a:lstStyle/>
-                    <a:p>
-                      <a:pPr algn="ctr" indent="0" marL="0">
-                        <a:buNone/>
-                      </a:pPr>
-                      <a:r>
-                        <a:rPr lang="en-US" sz="600" b="1" dirty="0">
-                          <a:solidFill>
-                            <a:srgbClr val="2B2B2B"/>
-                          </a:solidFill>
-                          <a:latin typeface="Meiryo UI" pitchFamily="34" charset="0"/>
-                          <a:ea typeface="Meiryo UI" pitchFamily="34" charset="-122"/>
-                          <a:cs typeface="Meiryo UI" pitchFamily="34" charset="-120"/>
-                        </a:rPr>
-                        <a:t>4.2</a:t>
-                      </a:r>
-                      <a:endParaRPr lang="en-US" sz="600" dirty="0">
-                        <a:latin typeface="Meiryo UI" charset="0"/>
-                        <a:ea typeface="Meiryo UI" charset="0"/>
-                        <a:cs typeface="Meiryo UI" charset="0"/>
-                      </a:endParaRPr>
-                    </a:p>
-                  </a:txBody>
-                  <a:tcPr marL="18288" marR="18288" marT="18288" marB="18288" anchor="ctr">
-                    <a:lnL w="6350" cap="flat" cmpd="sng" algn="ctr">
-                      <a:solidFill>
-                        <a:srgbClr val="D3DED0"/>
-                      </a:solidFill>
-                      <a:prstDash val="solid"/>
-                      <a:round/>
-                      <a:headEnd type="none" w="med" len="med"/>
-                      <a:tailEnd type="none" w="med" len="med"/>
-                    </a:lnL>
-                    <a:lnR w="6350" cap="flat" cmpd="sng" algn="ctr">
-                      <a:solidFill>
-                        <a:srgbClr val="D3DED0"/>
-                      </a:solidFill>
-                      <a:prstDash val="solid"/>
-                      <a:round/>
-                      <a:headEnd type="none" w="med" len="med"/>
-                      <a:tailEnd type="none" w="med" len="med"/>
-                    </a:lnR>
-                    <a:lnT w="6350" cap="flat" cmpd="sng" algn="ctr">
-                      <a:solidFill>
-                        <a:srgbClr val="D3DED0"/>
-                      </a:solidFill>
-                      <a:prstDash val="solid"/>
-                      <a:round/>
-                      <a:headEnd type="none" w="med" len="med"/>
-                      <a:tailEnd type="none" w="med" len="med"/>
-                    </a:lnT>
-                    <a:lnB w="6350" cap="flat" cmpd="sng" algn="ctr">
-                      <a:solidFill>
-                        <a:srgbClr val="D3DED0"/>
-                      </a:solidFill>
-                      <a:prstDash val="solid"/>
-                      <a:round/>
-                      <a:headEnd type="none" w="med" len="med"/>
-                      <a:tailEnd type="none" w="med" len="med"/>
-                    </a:lnB>
-                  </a:tcPr>
-                </a:tc>
-                <a:tc>
-                  <a:txBody>
-                    <a:bodyPr/>
-                    <a:lstStyle/>
-                    <a:p>
-                      <a:pPr indent="0" marL="0">
-                        <a:buNone/>
-                      </a:pPr>
-                      <a:r>
-                        <a:rPr lang="en-US" sz="600" dirty="0">
-                          <a:solidFill>
-                            <a:srgbClr val="2B2B2B"/>
-                          </a:solidFill>
-                          <a:latin typeface="Meiryo UI" pitchFamily="34" charset="0"/>
-                          <a:ea typeface="Meiryo UI" pitchFamily="34" charset="-122"/>
-                          <a:cs typeface="Meiryo UI" pitchFamily="34" charset="-120"/>
-                        </a:rPr>
-                        <a:t>再配置・リスキル構想(53名分・労組協議準備)</a:t>
+                        <a:t>省人化53名分の再配置・リスキル構想(実装フェーズ開始までに受け皿を確定)</a:t>
                       </a:r>
                       <a:endParaRPr lang="en-US" sz="600" dirty="0">
                         <a:latin typeface="Meiryo UI" charset="0"/>
@@ -31752,718 +29643,6 @@
                       <a:headEnd type="none" w="med" len="med"/>
                       <a:tailEnd type="none" w="med" len="med"/>
                     </a:lnB>
-                  </a:tcPr>
-                </a:tc>
-                <a:tc>
-                  <a:txBody>
-                    <a:bodyPr/>
-                    <a:lstStyle/>
-                    <a:p>
-                      <a:pPr indent="0" marL="0">
-                        <a:buNone/>
-                      </a:pPr>
-                      <a:endParaRPr lang="en-US" sz="600" dirty="0">
-                        <a:latin typeface="Meiryo UI" charset="0"/>
-                        <a:ea typeface="Meiryo UI" charset="0"/>
-                        <a:cs typeface="Meiryo UI" charset="0"/>
-                      </a:endParaRPr>
-                    </a:p>
-                  </a:txBody>
-                  <a:tcPr marL="18288" marR="18288" marT="18288" marB="18288" anchor="ctr">
-                    <a:lnL w="6350" cap="flat" cmpd="sng" algn="ctr">
-                      <a:solidFill>
-                        <a:srgbClr val="D3DED0"/>
-                      </a:solidFill>
-                      <a:prstDash val="solid"/>
-                      <a:round/>
-                      <a:headEnd type="none" w="med" len="med"/>
-                      <a:tailEnd type="none" w="med" len="med"/>
-                    </a:lnL>
-                    <a:lnR w="6350" cap="flat" cmpd="sng" algn="ctr">
-                      <a:solidFill>
-                        <a:srgbClr val="D3DED0"/>
-                      </a:solidFill>
-                      <a:prstDash val="solid"/>
-                      <a:round/>
-                      <a:headEnd type="none" w="med" len="med"/>
-                      <a:tailEnd type="none" w="med" len="med"/>
-                    </a:lnR>
-                    <a:lnT w="6350" cap="flat" cmpd="sng" algn="ctr">
-                      <a:solidFill>
-                        <a:srgbClr val="D3DED0"/>
-                      </a:solidFill>
-                      <a:prstDash val="solid"/>
-                      <a:round/>
-                      <a:headEnd type="none" w="med" len="med"/>
-                      <a:tailEnd type="none" w="med" len="med"/>
-                    </a:lnT>
-                    <a:lnB w="6350" cap="flat" cmpd="sng" algn="ctr">
-                      <a:solidFill>
-                        <a:srgbClr val="D3DED0"/>
-                      </a:solidFill>
-                      <a:prstDash val="solid"/>
-                      <a:round/>
-                      <a:headEnd type="none" w="med" len="med"/>
-                      <a:tailEnd type="none" w="med" len="med"/>
-                    </a:lnB>
-                    <a:solidFill>
-                      <a:srgbClr val="2C5F2D"/>
-                    </a:solidFill>
-                  </a:tcPr>
-                </a:tc>
-                <a:tc>
-                  <a:txBody>
-                    <a:bodyPr/>
-                    <a:lstStyle/>
-                    <a:p>
-                      <a:pPr indent="0" marL="0">
-                        <a:buNone/>
-                      </a:pPr>
-                      <a:endParaRPr lang="en-US" sz="600" dirty="0">
-                        <a:latin typeface="Meiryo UI" charset="0"/>
-                        <a:ea typeface="Meiryo UI" charset="0"/>
-                        <a:cs typeface="Meiryo UI" charset="0"/>
-                      </a:endParaRPr>
-                    </a:p>
-                  </a:txBody>
-                  <a:tcPr marL="18288" marR="18288" marT="18288" marB="18288" anchor="ctr">
-                    <a:lnL w="6350" cap="flat" cmpd="sng" algn="ctr">
-                      <a:solidFill>
-                        <a:srgbClr val="D3DED0"/>
-                      </a:solidFill>
-                      <a:prstDash val="solid"/>
-                      <a:round/>
-                      <a:headEnd type="none" w="med" len="med"/>
-                      <a:tailEnd type="none" w="med" len="med"/>
-                    </a:lnL>
-                    <a:lnR w="6350" cap="flat" cmpd="sng" algn="ctr">
-                      <a:solidFill>
-                        <a:srgbClr val="D3DED0"/>
-                      </a:solidFill>
-                      <a:prstDash val="solid"/>
-                      <a:round/>
-                      <a:headEnd type="none" w="med" len="med"/>
-                      <a:tailEnd type="none" w="med" len="med"/>
-                    </a:lnR>
-                    <a:lnT w="6350" cap="flat" cmpd="sng" algn="ctr">
-                      <a:solidFill>
-                        <a:srgbClr val="D3DED0"/>
-                      </a:solidFill>
-                      <a:prstDash val="solid"/>
-                      <a:round/>
-                      <a:headEnd type="none" w="med" len="med"/>
-                      <a:tailEnd type="none" w="med" len="med"/>
-                    </a:lnT>
-                    <a:lnB w="6350" cap="flat" cmpd="sng" algn="ctr">
-                      <a:solidFill>
-                        <a:srgbClr val="D3DED0"/>
-                      </a:solidFill>
-                      <a:prstDash val="solid"/>
-                      <a:round/>
-                      <a:headEnd type="none" w="med" len="med"/>
-                      <a:tailEnd type="none" w="med" len="med"/>
-                    </a:lnB>
-                    <a:solidFill>
-                      <a:srgbClr val="2C5F2D"/>
-                    </a:solidFill>
-                  </a:tcPr>
-                </a:tc>
-                <a:tc>
-                  <a:txBody>
-                    <a:bodyPr/>
-                    <a:lstStyle/>
-                    <a:p>
-                      <a:pPr indent="0" marL="0">
-                        <a:buNone/>
-                      </a:pPr>
-                      <a:endParaRPr lang="en-US" sz="600" dirty="0">
-                        <a:latin typeface="Meiryo UI" charset="0"/>
-                        <a:ea typeface="Meiryo UI" charset="0"/>
-                        <a:cs typeface="Meiryo UI" charset="0"/>
-                      </a:endParaRPr>
-                    </a:p>
-                  </a:txBody>
-                  <a:tcPr marL="18288" marR="18288" marT="18288" marB="18288" anchor="ctr">
-                    <a:lnL w="6350" cap="flat" cmpd="sng" algn="ctr">
-                      <a:solidFill>
-                        <a:srgbClr val="D3DED0"/>
-                      </a:solidFill>
-                      <a:prstDash val="solid"/>
-                      <a:round/>
-                      <a:headEnd type="none" w="med" len="med"/>
-                      <a:tailEnd type="none" w="med" len="med"/>
-                    </a:lnL>
-                    <a:lnR w="6350" cap="flat" cmpd="sng" algn="ctr">
-                      <a:solidFill>
-                        <a:srgbClr val="D3DED0"/>
-                      </a:solidFill>
-                      <a:prstDash val="solid"/>
-                      <a:round/>
-                      <a:headEnd type="none" w="med" len="med"/>
-                      <a:tailEnd type="none" w="med" len="med"/>
-                    </a:lnR>
-                    <a:lnT w="6350" cap="flat" cmpd="sng" algn="ctr">
-                      <a:solidFill>
-                        <a:srgbClr val="D3DED0"/>
-                      </a:solidFill>
-                      <a:prstDash val="solid"/>
-                      <a:round/>
-                      <a:headEnd type="none" w="med" len="med"/>
-                      <a:tailEnd type="none" w="med" len="med"/>
-                    </a:lnT>
-                    <a:lnB w="6350" cap="flat" cmpd="sng" algn="ctr">
-                      <a:solidFill>
-                        <a:srgbClr val="D3DED0"/>
-                      </a:solidFill>
-                      <a:prstDash val="solid"/>
-                      <a:round/>
-                      <a:headEnd type="none" w="med" len="med"/>
-                      <a:tailEnd type="none" w="med" len="med"/>
-                    </a:lnB>
-                  </a:tcPr>
-                </a:tc>
-                <a:tc>
-                  <a:txBody>
-                    <a:bodyPr/>
-                    <a:lstStyle/>
-                    <a:p>
-                      <a:pPr indent="0" marL="0">
-                        <a:buNone/>
-                      </a:pPr>
-                      <a:endParaRPr lang="en-US" sz="600" dirty="0">
-                        <a:latin typeface="Meiryo UI" charset="0"/>
-                        <a:ea typeface="Meiryo UI" charset="0"/>
-                        <a:cs typeface="Meiryo UI" charset="0"/>
-                      </a:endParaRPr>
-                    </a:p>
-                  </a:txBody>
-                  <a:tcPr marL="18288" marR="18288" marT="18288" marB="18288" anchor="ctr">
-                    <a:lnL w="6350" cap="flat" cmpd="sng" algn="ctr">
-                      <a:solidFill>
-                        <a:srgbClr val="D3DED0"/>
-                      </a:solidFill>
-                      <a:prstDash val="solid"/>
-                      <a:round/>
-                      <a:headEnd type="none" w="med" len="med"/>
-                      <a:tailEnd type="none" w="med" len="med"/>
-                    </a:lnL>
-                    <a:lnR w="6350" cap="flat" cmpd="sng" algn="ctr">
-                      <a:solidFill>
-                        <a:srgbClr val="D3DED0"/>
-                      </a:solidFill>
-                      <a:prstDash val="solid"/>
-                      <a:round/>
-                      <a:headEnd type="none" w="med" len="med"/>
-                      <a:tailEnd type="none" w="med" len="med"/>
-                    </a:lnR>
-                    <a:lnT w="6350" cap="flat" cmpd="sng" algn="ctr">
-                      <a:solidFill>
-                        <a:srgbClr val="D3DED0"/>
-                      </a:solidFill>
-                      <a:prstDash val="solid"/>
-                      <a:round/>
-                      <a:headEnd type="none" w="med" len="med"/>
-                      <a:tailEnd type="none" w="med" len="med"/>
-                    </a:lnT>
-                    <a:lnB w="6350" cap="flat" cmpd="sng" algn="ctr">
-                      <a:solidFill>
-                        <a:srgbClr val="D3DED0"/>
-                      </a:solidFill>
-                      <a:prstDash val="solid"/>
-                      <a:round/>
-                      <a:headEnd type="none" w="med" len="med"/>
-                      <a:tailEnd type="none" w="med" len="med"/>
-                    </a:lnB>
-                  </a:tcPr>
-                </a:tc>
-              </a:tr>
-              <a:tr h="150876">
-                <a:tc>
-                  <a:txBody>
-                    <a:bodyPr/>
-                    <a:lstStyle/>
-                    <a:p>
-                      <a:pPr algn="ctr" indent="0" marL="0">
-                        <a:buNone/>
-                      </a:pPr>
-                      <a:r>
-                        <a:rPr lang="en-US" sz="600" b="1" dirty="0">
-                          <a:solidFill>
-                            <a:srgbClr val="2B2B2B"/>
-                          </a:solidFill>
-                          <a:latin typeface="Meiryo UI" pitchFamily="34" charset="0"/>
-                          <a:ea typeface="Meiryo UI" pitchFamily="34" charset="-122"/>
-                          <a:cs typeface="Meiryo UI" pitchFamily="34" charset="-120"/>
-                        </a:rPr>
-                        <a:t>4.3</a:t>
-                      </a:r>
-                      <a:endParaRPr lang="en-US" sz="600" dirty="0">
-                        <a:latin typeface="Meiryo UI" charset="0"/>
-                        <a:ea typeface="Meiryo UI" charset="0"/>
-                        <a:cs typeface="Meiryo UI" charset="0"/>
-                      </a:endParaRPr>
-                    </a:p>
-                  </a:txBody>
-                  <a:tcPr marL="18288" marR="18288" marT="18288" marB="18288" anchor="ctr">
-                    <a:lnL w="6350" cap="flat" cmpd="sng" algn="ctr">
-                      <a:solidFill>
-                        <a:srgbClr val="D3DED0"/>
-                      </a:solidFill>
-                      <a:prstDash val="solid"/>
-                      <a:round/>
-                      <a:headEnd type="none" w="med" len="med"/>
-                      <a:tailEnd type="none" w="med" len="med"/>
-                    </a:lnL>
-                    <a:lnR w="6350" cap="flat" cmpd="sng" algn="ctr">
-                      <a:solidFill>
-                        <a:srgbClr val="D3DED0"/>
-                      </a:solidFill>
-                      <a:prstDash val="solid"/>
-                      <a:round/>
-                      <a:headEnd type="none" w="med" len="med"/>
-                      <a:tailEnd type="none" w="med" len="med"/>
-                    </a:lnR>
-                    <a:lnT w="6350" cap="flat" cmpd="sng" algn="ctr">
-                      <a:solidFill>
-                        <a:srgbClr val="D3DED0"/>
-                      </a:solidFill>
-                      <a:prstDash val="solid"/>
-                      <a:round/>
-                      <a:headEnd type="none" w="med" len="med"/>
-                      <a:tailEnd type="none" w="med" len="med"/>
-                    </a:lnT>
-                    <a:lnB w="6350" cap="flat" cmpd="sng" algn="ctr">
-                      <a:solidFill>
-                        <a:srgbClr val="D3DED0"/>
-                      </a:solidFill>
-                      <a:prstDash val="solid"/>
-                      <a:round/>
-                      <a:headEnd type="none" w="med" len="med"/>
-                      <a:tailEnd type="none" w="med" len="med"/>
-                    </a:lnB>
-                  </a:tcPr>
-                </a:tc>
-                <a:tc>
-                  <a:txBody>
-                    <a:bodyPr/>
-                    <a:lstStyle/>
-                    <a:p>
-                      <a:pPr indent="0" marL="0">
-                        <a:buNone/>
-                      </a:pPr>
-                      <a:r>
-                        <a:rPr lang="en-US" sz="600" dirty="0">
-                          <a:solidFill>
-                            <a:srgbClr val="2B2B2B"/>
-                          </a:solidFill>
-                          <a:latin typeface="Meiryo UI" pitchFamily="34" charset="0"/>
-                          <a:ea typeface="Meiryo UI" pitchFamily="34" charset="-122"/>
-                          <a:cs typeface="Meiryo UI" pitchFamily="34" charset="-120"/>
-                        </a:rPr>
-                        <a:t>現場チェンジマネジメント(狙いの共有・改善提案の仕組み化)</a:t>
-                      </a:r>
-                      <a:endParaRPr lang="en-US" sz="600" dirty="0">
-                        <a:latin typeface="Meiryo UI" charset="0"/>
-                        <a:ea typeface="Meiryo UI" charset="0"/>
-                        <a:cs typeface="Meiryo UI" charset="0"/>
-                      </a:endParaRPr>
-                    </a:p>
-                  </a:txBody>
-                  <a:tcPr marL="18288" marR="18288" marT="18288" marB="18288" anchor="ctr">
-                    <a:lnL w="6350" cap="flat" cmpd="sng" algn="ctr">
-                      <a:solidFill>
-                        <a:srgbClr val="D3DED0"/>
-                      </a:solidFill>
-                      <a:prstDash val="solid"/>
-                      <a:round/>
-                      <a:headEnd type="none" w="med" len="med"/>
-                      <a:tailEnd type="none" w="med" len="med"/>
-                    </a:lnL>
-                    <a:lnR w="6350" cap="flat" cmpd="sng" algn="ctr">
-                      <a:solidFill>
-                        <a:srgbClr val="D3DED0"/>
-                      </a:solidFill>
-                      <a:prstDash val="solid"/>
-                      <a:round/>
-                      <a:headEnd type="none" w="med" len="med"/>
-                      <a:tailEnd type="none" w="med" len="med"/>
-                    </a:lnR>
-                    <a:lnT w="6350" cap="flat" cmpd="sng" algn="ctr">
-                      <a:solidFill>
-                        <a:srgbClr val="D3DED0"/>
-                      </a:solidFill>
-                      <a:prstDash val="solid"/>
-                      <a:round/>
-                      <a:headEnd type="none" w="med" len="med"/>
-                      <a:tailEnd type="none" w="med" len="med"/>
-                    </a:lnT>
-                    <a:lnB w="6350" cap="flat" cmpd="sng" algn="ctr">
-                      <a:solidFill>
-                        <a:srgbClr val="D3DED0"/>
-                      </a:solidFill>
-                      <a:prstDash val="solid"/>
-                      <a:round/>
-                      <a:headEnd type="none" w="med" len="med"/>
-                      <a:tailEnd type="none" w="med" len="med"/>
-                    </a:lnB>
-                  </a:tcPr>
-                </a:tc>
-                <a:tc>
-                  <a:txBody>
-                    <a:bodyPr/>
-                    <a:lstStyle/>
-                    <a:p>
-                      <a:pPr indent="0" marL="0">
-                        <a:buNone/>
-                      </a:pPr>
-                      <a:r>
-                        <a:rPr lang="en-US" sz="600" dirty="0">
-                          <a:solidFill>
-                            <a:srgbClr val="595959"/>
-                          </a:solidFill>
-                          <a:latin typeface="Meiryo UI" pitchFamily="34" charset="0"/>
-                          <a:ea typeface="Meiryo UI" pitchFamily="34" charset="-122"/>
-                          <a:cs typeface="Meiryo UI" pitchFamily="34" charset="-120"/>
-                        </a:rPr>
-                        <a:t>説明会・提案制度</a:t>
-                      </a:r>
-                      <a:endParaRPr lang="en-US" sz="600" dirty="0">
-                        <a:latin typeface="Meiryo UI" charset="0"/>
-                        <a:ea typeface="Meiryo UI" charset="0"/>
-                        <a:cs typeface="Meiryo UI" charset="0"/>
-                      </a:endParaRPr>
-                    </a:p>
-                  </a:txBody>
-                  <a:tcPr marL="18288" marR="18288" marT="18288" marB="18288" anchor="ctr">
-                    <a:lnL w="6350" cap="flat" cmpd="sng" algn="ctr">
-                      <a:solidFill>
-                        <a:srgbClr val="D3DED0"/>
-                      </a:solidFill>
-                      <a:prstDash val="solid"/>
-                      <a:round/>
-                      <a:headEnd type="none" w="med" len="med"/>
-                      <a:tailEnd type="none" w="med" len="med"/>
-                    </a:lnL>
-                    <a:lnR w="6350" cap="flat" cmpd="sng" algn="ctr">
-                      <a:solidFill>
-                        <a:srgbClr val="D3DED0"/>
-                      </a:solidFill>
-                      <a:prstDash val="solid"/>
-                      <a:round/>
-                      <a:headEnd type="none" w="med" len="med"/>
-                      <a:tailEnd type="none" w="med" len="med"/>
-                    </a:lnR>
-                    <a:lnT w="6350" cap="flat" cmpd="sng" algn="ctr">
-                      <a:solidFill>
-                        <a:srgbClr val="D3DED0"/>
-                      </a:solidFill>
-                      <a:prstDash val="solid"/>
-                      <a:round/>
-                      <a:headEnd type="none" w="med" len="med"/>
-                      <a:tailEnd type="none" w="med" len="med"/>
-                    </a:lnT>
-                    <a:lnB w="6350" cap="flat" cmpd="sng" algn="ctr">
-                      <a:solidFill>
-                        <a:srgbClr val="D3DED0"/>
-                      </a:solidFill>
-                      <a:prstDash val="solid"/>
-                      <a:round/>
-                      <a:headEnd type="none" w="med" len="med"/>
-                      <a:tailEnd type="none" w="med" len="med"/>
-                    </a:lnB>
-                  </a:tcPr>
-                </a:tc>
-                <a:tc>
-                  <a:txBody>
-                    <a:bodyPr/>
-                    <a:lstStyle/>
-                    <a:p>
-                      <a:pPr indent="0" marL="0">
-                        <a:buNone/>
-                      </a:pPr>
-                      <a:r>
-                        <a:rPr lang="en-US" sz="600" dirty="0">
-                          <a:solidFill>
-                            <a:srgbClr val="2B2B2B"/>
-                          </a:solidFill>
-                          <a:latin typeface="Meiryo UI" pitchFamily="34" charset="0"/>
-                          <a:ea typeface="Meiryo UI" pitchFamily="34" charset="-122"/>
-                          <a:cs typeface="Meiryo UI" pitchFamily="34" charset="-120"/>
-                        </a:rPr>
-                        <a:t>工場</a:t>
-                      </a:r>
-                      <a:endParaRPr lang="en-US" sz="600" dirty="0">
-                        <a:latin typeface="Meiryo UI" charset="0"/>
-                        <a:ea typeface="Meiryo UI" charset="0"/>
-                        <a:cs typeface="Meiryo UI" charset="0"/>
-                      </a:endParaRPr>
-                    </a:p>
-                  </a:txBody>
-                  <a:tcPr marL="18288" marR="18288" marT="18288" marB="18288" anchor="ctr">
-                    <a:lnL w="6350" cap="flat" cmpd="sng" algn="ctr">
-                      <a:solidFill>
-                        <a:srgbClr val="D3DED0"/>
-                      </a:solidFill>
-                      <a:prstDash val="solid"/>
-                      <a:round/>
-                      <a:headEnd type="none" w="med" len="med"/>
-                      <a:tailEnd type="none" w="med" len="med"/>
-                    </a:lnL>
-                    <a:lnR w="6350" cap="flat" cmpd="sng" algn="ctr">
-                      <a:solidFill>
-                        <a:srgbClr val="D3DED0"/>
-                      </a:solidFill>
-                      <a:prstDash val="solid"/>
-                      <a:round/>
-                      <a:headEnd type="none" w="med" len="med"/>
-                      <a:tailEnd type="none" w="med" len="med"/>
-                    </a:lnR>
-                    <a:lnT w="6350" cap="flat" cmpd="sng" algn="ctr">
-                      <a:solidFill>
-                        <a:srgbClr val="D3DED0"/>
-                      </a:solidFill>
-                      <a:prstDash val="solid"/>
-                      <a:round/>
-                      <a:headEnd type="none" w="med" len="med"/>
-                      <a:tailEnd type="none" w="med" len="med"/>
-                    </a:lnT>
-                    <a:lnB w="6350" cap="flat" cmpd="sng" algn="ctr">
-                      <a:solidFill>
-                        <a:srgbClr val="D3DED0"/>
-                      </a:solidFill>
-                      <a:prstDash val="solid"/>
-                      <a:round/>
-                      <a:headEnd type="none" w="med" len="med"/>
-                      <a:tailEnd type="none" w="med" len="med"/>
-                    </a:lnB>
-                  </a:tcPr>
-                </a:tc>
-                <a:tc>
-                  <a:txBody>
-                    <a:bodyPr/>
-                    <a:lstStyle/>
-                    <a:p>
-                      <a:pPr indent="0" marL="0">
-                        <a:buNone/>
-                      </a:pPr>
-                      <a:endParaRPr lang="en-US" sz="600" dirty="0">
-                        <a:latin typeface="Meiryo UI" charset="0"/>
-                        <a:ea typeface="Meiryo UI" charset="0"/>
-                        <a:cs typeface="Meiryo UI" charset="0"/>
-                      </a:endParaRPr>
-                    </a:p>
-                  </a:txBody>
-                  <a:tcPr marL="18288" marR="18288" marT="18288" marB="18288" anchor="ctr">
-                    <a:lnL w="6350" cap="flat" cmpd="sng" algn="ctr">
-                      <a:solidFill>
-                        <a:srgbClr val="D3DED0"/>
-                      </a:solidFill>
-                      <a:prstDash val="solid"/>
-                      <a:round/>
-                      <a:headEnd type="none" w="med" len="med"/>
-                      <a:tailEnd type="none" w="med" len="med"/>
-                    </a:lnL>
-                    <a:lnR w="6350" cap="flat" cmpd="sng" algn="ctr">
-                      <a:solidFill>
-                        <a:srgbClr val="D3DED0"/>
-                      </a:solidFill>
-                      <a:prstDash val="solid"/>
-                      <a:round/>
-                      <a:headEnd type="none" w="med" len="med"/>
-                      <a:tailEnd type="none" w="med" len="med"/>
-                    </a:lnR>
-                    <a:lnT w="6350" cap="flat" cmpd="sng" algn="ctr">
-                      <a:solidFill>
-                        <a:srgbClr val="D3DED0"/>
-                      </a:solidFill>
-                      <a:prstDash val="solid"/>
-                      <a:round/>
-                      <a:headEnd type="none" w="med" len="med"/>
-                      <a:tailEnd type="none" w="med" len="med"/>
-                    </a:lnT>
-                    <a:lnB w="6350" cap="flat" cmpd="sng" algn="ctr">
-                      <a:solidFill>
-                        <a:srgbClr val="D3DED0"/>
-                      </a:solidFill>
-                      <a:prstDash val="solid"/>
-                      <a:round/>
-                      <a:headEnd type="none" w="med" len="med"/>
-                      <a:tailEnd type="none" w="med" len="med"/>
-                    </a:lnB>
-                    <a:solidFill>
-                      <a:srgbClr val="2C5F2D"/>
-                    </a:solidFill>
-                  </a:tcPr>
-                </a:tc>
-                <a:tc>
-                  <a:txBody>
-                    <a:bodyPr/>
-                    <a:lstStyle/>
-                    <a:p>
-                      <a:pPr indent="0" marL="0">
-                        <a:buNone/>
-                      </a:pPr>
-                      <a:endParaRPr lang="en-US" sz="600" dirty="0">
-                        <a:latin typeface="Meiryo UI" charset="0"/>
-                        <a:ea typeface="Meiryo UI" charset="0"/>
-                        <a:cs typeface="Meiryo UI" charset="0"/>
-                      </a:endParaRPr>
-                    </a:p>
-                  </a:txBody>
-                  <a:tcPr marL="18288" marR="18288" marT="18288" marB="18288" anchor="ctr">
-                    <a:lnL w="6350" cap="flat" cmpd="sng" algn="ctr">
-                      <a:solidFill>
-                        <a:srgbClr val="D3DED0"/>
-                      </a:solidFill>
-                      <a:prstDash val="solid"/>
-                      <a:round/>
-                      <a:headEnd type="none" w="med" len="med"/>
-                      <a:tailEnd type="none" w="med" len="med"/>
-                    </a:lnL>
-                    <a:lnR w="6350" cap="flat" cmpd="sng" algn="ctr">
-                      <a:solidFill>
-                        <a:srgbClr val="D3DED0"/>
-                      </a:solidFill>
-                      <a:prstDash val="solid"/>
-                      <a:round/>
-                      <a:headEnd type="none" w="med" len="med"/>
-                      <a:tailEnd type="none" w="med" len="med"/>
-                    </a:lnR>
-                    <a:lnT w="6350" cap="flat" cmpd="sng" algn="ctr">
-                      <a:solidFill>
-                        <a:srgbClr val="D3DED0"/>
-                      </a:solidFill>
-                      <a:prstDash val="solid"/>
-                      <a:round/>
-                      <a:headEnd type="none" w="med" len="med"/>
-                      <a:tailEnd type="none" w="med" len="med"/>
-                    </a:lnT>
-                    <a:lnB w="6350" cap="flat" cmpd="sng" algn="ctr">
-                      <a:solidFill>
-                        <a:srgbClr val="D3DED0"/>
-                      </a:solidFill>
-                      <a:prstDash val="solid"/>
-                      <a:round/>
-                      <a:headEnd type="none" w="med" len="med"/>
-                      <a:tailEnd type="none" w="med" len="med"/>
-                    </a:lnB>
-                    <a:solidFill>
-                      <a:srgbClr val="2C5F2D"/>
-                    </a:solidFill>
-                  </a:tcPr>
-                </a:tc>
-                <a:tc>
-                  <a:txBody>
-                    <a:bodyPr/>
-                    <a:lstStyle/>
-                    <a:p>
-                      <a:pPr indent="0" marL="0">
-                        <a:buNone/>
-                      </a:pPr>
-                      <a:endParaRPr lang="en-US" sz="600" dirty="0">
-                        <a:latin typeface="Meiryo UI" charset="0"/>
-                        <a:ea typeface="Meiryo UI" charset="0"/>
-                        <a:cs typeface="Meiryo UI" charset="0"/>
-                      </a:endParaRPr>
-                    </a:p>
-                  </a:txBody>
-                  <a:tcPr marL="18288" marR="18288" marT="18288" marB="18288" anchor="ctr">
-                    <a:lnL w="6350" cap="flat" cmpd="sng" algn="ctr">
-                      <a:solidFill>
-                        <a:srgbClr val="D3DED0"/>
-                      </a:solidFill>
-                      <a:prstDash val="solid"/>
-                      <a:round/>
-                      <a:headEnd type="none" w="med" len="med"/>
-                      <a:tailEnd type="none" w="med" len="med"/>
-                    </a:lnL>
-                    <a:lnR w="6350" cap="flat" cmpd="sng" algn="ctr">
-                      <a:solidFill>
-                        <a:srgbClr val="D3DED0"/>
-                      </a:solidFill>
-                      <a:prstDash val="solid"/>
-                      <a:round/>
-                      <a:headEnd type="none" w="med" len="med"/>
-                      <a:tailEnd type="none" w="med" len="med"/>
-                    </a:lnR>
-                    <a:lnT w="6350" cap="flat" cmpd="sng" algn="ctr">
-                      <a:solidFill>
-                        <a:srgbClr val="D3DED0"/>
-                      </a:solidFill>
-                      <a:prstDash val="solid"/>
-                      <a:round/>
-                      <a:headEnd type="none" w="med" len="med"/>
-                      <a:tailEnd type="none" w="med" len="med"/>
-                    </a:lnT>
-                    <a:lnB w="6350" cap="flat" cmpd="sng" algn="ctr">
-                      <a:solidFill>
-                        <a:srgbClr val="D3DED0"/>
-                      </a:solidFill>
-                      <a:prstDash val="solid"/>
-                      <a:round/>
-                      <a:headEnd type="none" w="med" len="med"/>
-                      <a:tailEnd type="none" w="med" len="med"/>
-                    </a:lnB>
-                    <a:solidFill>
-                      <a:srgbClr val="2C5F2D"/>
-                    </a:solidFill>
-                  </a:tcPr>
-                </a:tc>
-                <a:tc>
-                  <a:txBody>
-                    <a:bodyPr/>
-                    <a:lstStyle/>
-                    <a:p>
-                      <a:pPr indent="0" marL="0">
-                        <a:buNone/>
-                      </a:pPr>
-                      <a:endParaRPr lang="en-US" sz="600" dirty="0">
-                        <a:latin typeface="Meiryo UI" charset="0"/>
-                        <a:ea typeface="Meiryo UI" charset="0"/>
-                        <a:cs typeface="Meiryo UI" charset="0"/>
-                      </a:endParaRPr>
-                    </a:p>
-                  </a:txBody>
-                  <a:tcPr marL="18288" marR="18288" marT="18288" marB="18288" anchor="ctr">
-                    <a:lnL w="6350" cap="flat" cmpd="sng" algn="ctr">
-                      <a:solidFill>
-                        <a:srgbClr val="D3DED0"/>
-                      </a:solidFill>
-                      <a:prstDash val="solid"/>
-                      <a:round/>
-                      <a:headEnd type="none" w="med" len="med"/>
-                      <a:tailEnd type="none" w="med" len="med"/>
-                    </a:lnL>
-                    <a:lnR w="6350" cap="flat" cmpd="sng" algn="ctr">
-                      <a:solidFill>
-                        <a:srgbClr val="D3DED0"/>
-                      </a:solidFill>
-                      <a:prstDash val="solid"/>
-                      <a:round/>
-                      <a:headEnd type="none" w="med" len="med"/>
-                      <a:tailEnd type="none" w="med" len="med"/>
-                    </a:lnR>
-                    <a:lnT w="6350" cap="flat" cmpd="sng" algn="ctr">
-                      <a:solidFill>
-                        <a:srgbClr val="D3DED0"/>
-                      </a:solidFill>
-                      <a:prstDash val="solid"/>
-                      <a:round/>
-                      <a:headEnd type="none" w="med" len="med"/>
-                      <a:tailEnd type="none" w="med" len="med"/>
-                    </a:lnT>
-                    <a:lnB w="6350" cap="flat" cmpd="sng" algn="ctr">
-                      <a:solidFill>
-                        <a:srgbClr val="D3DED0"/>
-                      </a:solidFill>
-                      <a:prstDash val="solid"/>
-                      <a:round/>
-                      <a:headEnd type="none" w="med" len="med"/>
-                      <a:tailEnd type="none" w="med" len="med"/>
-                    </a:lnB>
-                    <a:solidFill>
-                      <a:srgbClr val="2C5F2D"/>
-                    </a:solidFill>
                   </a:tcPr>
                 </a:tc>
                 <a:tc>
